--- a/drafts/saturday_submission.pptx
+++ b/drafts/saturday_submission.pptx
@@ -2,16 +2,687 @@
 <file path=ppt/presentation.xml><?xml version="1.0" encoding="utf-8"?>
 <p:presentation xmlns:p="http://schemas.openxmlformats.org/presentationml/2006/main">
   <p:sldMasterIdLst>
-    <p:sldMasterId xmlns:r="http://schemas.openxmlformats.org/officeDocument/2006/relationships" id="2147483648" r:id="R6b9fb958fe4d487f"/>
+    <p:sldMasterId xmlns:r="http://schemas.openxmlformats.org/officeDocument/2006/relationships" id="2147483648" r:id="R83e5211d570049a0"/>
   </p:sldMasterIdLst>
+  <p:notesMasterIdLst>
+    <p:notesMasterId xmlns:r="http://schemas.openxmlformats.org/officeDocument/2006/relationships" r:id="Rf249dc5b30fc488a"/>
+  </p:notesMasterIdLst>
   <p:sldIdLst>
-    <p:sldId xmlns:r="http://schemas.openxmlformats.org/officeDocument/2006/relationships" id="256" r:id="Rea515b4678574d05"/>
-    <p:sldId xmlns:r="http://schemas.openxmlformats.org/officeDocument/2006/relationships" id="257" r:id="Rslide2Draft2"/>
-    <p:sldId xmlns:r="http://schemas.openxmlformats.org/officeDocument/2006/relationships" id="258" r:id="Rslide3AnalyticalApproach"/>
+    <p:sldId xmlns:r="http://schemas.openxmlformats.org/officeDocument/2006/relationships" id="256" r:id="Rc3bbee5b9fa64587"/>
+    <p:sldId xmlns:r="http://schemas.openxmlformats.org/officeDocument/2006/relationships" id="257" r:id="R1b413e7099eb4cc8"/>
+    <p:sldId xmlns:r="http://schemas.openxmlformats.org/officeDocument/2006/relationships" id="258" r:id="R3b2884483b534da6"/>
+    <p:sldId xmlns:r="http://schemas.openxmlformats.org/officeDocument/2006/relationships" id="259" r:id="R8bd42fe633b84346"/>
   </p:sldIdLst>
   <p:sldSz cx="12192000" cy="6858000"/>
   <p:notesSz cx="6858000" cy="9144000"/>
 </p:presentation>
+</file>
+
+<file path=ppt/notesMasters/notesMaster1.xml><?xml version="1.0" encoding="utf-8"?>
+<p:notesMaster xmlns:p="http://schemas.openxmlformats.org/presentationml/2006/main">
+  <p:cSld>
+    <p:bg>
+      <p:bgRef idx="1001">
+        <a:schemeClr xmlns:a="http://schemas.openxmlformats.org/drawingml/2006/main" val="bg1"/>
+      </p:bgRef>
+    </p:bg>
+    <p:spTree>
+      <p:nvGrpSpPr>
+        <p:cNvPr id="1" name=""/>
+        <p:cNvGrpSpPr/>
+        <p:nvPr/>
+      </p:nvGrpSpPr>
+      <p:grpSpPr>
+        <a:xfrm xmlns:a="http://schemas.openxmlformats.org/drawingml/2006/main"/>
+      </p:grpSpPr>
+      <p:sp>
+        <p:nvSpPr>
+          <p:cNvPr id="2" name="Header Placeholder"/>
+          <p:cNvSpPr/>
+          <p:nvPr>
+            <p:ph type="hdr" sz="quarter"/>
+          </p:nvPr>
+        </p:nvSpPr>
+        <p:spPr>
+          <a:prstGeom xmlns:a="http://schemas.openxmlformats.org/drawingml/2006/main" prst="rect">
+            <a:avLst/>
+          </a:prstGeom>
+        </p:spPr>
+        <p:txBody>
+          <a:bodyPr xmlns:a="http://schemas.openxmlformats.org/drawingml/2006/main"/>
+          <a:lstStyle xmlns:a="http://schemas.openxmlformats.org/drawingml/2006/main"/>
+          <a:p xmlns:a="http://schemas.openxmlformats.org/drawingml/2006/main"/>
+        </p:txBody>
+      </p:sp>
+      <p:sp>
+        <p:nvSpPr>
+          <p:cNvPr id="3" name="Date Placeholder"/>
+          <p:cNvSpPr/>
+          <p:nvPr>
+            <p:ph type="dt" sz="quarter" idx="1"/>
+          </p:nvPr>
+        </p:nvSpPr>
+        <p:spPr>
+          <a:prstGeom xmlns:a="http://schemas.openxmlformats.org/drawingml/2006/main" prst="rect">
+            <a:avLst/>
+          </a:prstGeom>
+        </p:spPr>
+        <p:txBody>
+          <a:bodyPr xmlns:a="http://schemas.openxmlformats.org/drawingml/2006/main"/>
+          <a:lstStyle xmlns:a="http://schemas.openxmlformats.org/drawingml/2006/main"/>
+          <a:p xmlns:a="http://schemas.openxmlformats.org/drawingml/2006/main"/>
+        </p:txBody>
+      </p:sp>
+      <p:sp>
+        <p:nvSpPr>
+          <p:cNvPr id="4" name="Slide Image Placeholder"/>
+          <p:cNvSpPr/>
+          <p:nvPr>
+            <p:ph type="sldImg" idx="2"/>
+          </p:nvPr>
+        </p:nvSpPr>
+        <p:spPr>
+          <a:prstGeom xmlns:a="http://schemas.openxmlformats.org/drawingml/2006/main" prst="rect">
+            <a:avLst/>
+          </a:prstGeom>
+        </p:spPr>
+        <p:txBody>
+          <a:bodyPr xmlns:a="http://schemas.openxmlformats.org/drawingml/2006/main"/>
+          <a:lstStyle xmlns:a="http://schemas.openxmlformats.org/drawingml/2006/main"/>
+          <a:p xmlns:a="http://schemas.openxmlformats.org/drawingml/2006/main"/>
+        </p:txBody>
+      </p:sp>
+      <p:sp>
+        <p:nvSpPr>
+          <p:cNvPr id="5" name="Notes Placeholder"/>
+          <p:cNvSpPr/>
+          <p:nvPr>
+            <p:ph type="body" sz="quarter" idx="3"/>
+          </p:nvPr>
+        </p:nvSpPr>
+        <p:spPr>
+          <a:prstGeom xmlns:a="http://schemas.openxmlformats.org/drawingml/2006/main" prst="rect">
+            <a:avLst/>
+          </a:prstGeom>
+        </p:spPr>
+        <p:txBody>
+          <a:bodyPr xmlns:a="http://schemas.openxmlformats.org/drawingml/2006/main"/>
+          <a:lstStyle xmlns:a="http://schemas.openxmlformats.org/drawingml/2006/main"/>
+          <a:p xmlns:a="http://schemas.openxmlformats.org/drawingml/2006/main"/>
+        </p:txBody>
+      </p:sp>
+      <p:sp>
+        <p:nvSpPr>
+          <p:cNvPr id="6" name="Footer Placeholder"/>
+          <p:cNvSpPr/>
+          <p:nvPr>
+            <p:ph type="ftr" sz="quarter" idx="4"/>
+          </p:nvPr>
+        </p:nvSpPr>
+        <p:spPr>
+          <a:prstGeom xmlns:a="http://schemas.openxmlformats.org/drawingml/2006/main" prst="rect">
+            <a:avLst/>
+          </a:prstGeom>
+        </p:spPr>
+        <p:txBody>
+          <a:bodyPr xmlns:a="http://schemas.openxmlformats.org/drawingml/2006/main"/>
+          <a:lstStyle xmlns:a="http://schemas.openxmlformats.org/drawingml/2006/main"/>
+          <a:p xmlns:a="http://schemas.openxmlformats.org/drawingml/2006/main"/>
+        </p:txBody>
+      </p:sp>
+      <p:sp>
+        <p:nvSpPr>
+          <p:cNvPr id="7" name="Slide Number Placeholder"/>
+          <p:cNvSpPr/>
+          <p:nvPr>
+            <p:ph type="sldNum" sz="quarter" idx="5"/>
+          </p:nvPr>
+        </p:nvSpPr>
+        <p:spPr>
+          <a:prstGeom xmlns:a="http://schemas.openxmlformats.org/drawingml/2006/main" prst="rect">
+            <a:avLst/>
+          </a:prstGeom>
+        </p:spPr>
+        <p:txBody>
+          <a:bodyPr xmlns:a="http://schemas.openxmlformats.org/drawingml/2006/main"/>
+          <a:lstStyle xmlns:a="http://schemas.openxmlformats.org/drawingml/2006/main"/>
+          <a:p xmlns:a="http://schemas.openxmlformats.org/drawingml/2006/main"/>
+        </p:txBody>
+      </p:sp>
+    </p:spTree>
+  </p:cSld>
+  <p:clrMap bg1="lt1" tx1="dk1" bg2="lt2" tx2="dk2" accent1="accent1" accent2="accent2" accent3="accent3" accent4="accent4" accent5="accent5" accent6="accent6" hlink="hlink" folHlink="folHlink"/>
+  <p:notesStyle>
+    <a:lvl1pPr xmlns:a="http://schemas.openxmlformats.org/drawingml/2006/main" marL="0" algn="l" defTabSz="914400" rtl="0" eaLnBrk="1" latinLnBrk="0" hangingPunct="1">
+      <a:defRPr sz="1200" kern="1200"/>
+    </a:lvl1pPr>
+  </p:notesStyle>
+</p:notesMaster>
+</file>
+
+<file path=ppt/notesMasters/theme/theme3.xml><?xml version="1.0" encoding="utf-8"?>
+<a:theme xmlns:a="http://schemas.openxmlformats.org/drawingml/2006/main" name="ChatGPT">
+  <a:themeElements>
+    <a:clrScheme name="ChatGPT">
+      <a:dk1>
+        <a:srgbClr val="000000"/>
+      </a:dk1>
+      <a:lt1>
+        <a:srgbClr val="FFFFFF"/>
+      </a:lt1>
+      <a:dk2>
+        <a:srgbClr val="0E2841"/>
+      </a:dk2>
+      <a:lt2>
+        <a:srgbClr val="E8E8E8"/>
+      </a:lt2>
+      <a:accent1>
+        <a:srgbClr val="156082"/>
+      </a:accent1>
+      <a:accent2>
+        <a:srgbClr val="E97132"/>
+      </a:accent2>
+      <a:accent3>
+        <a:srgbClr val="196B24"/>
+      </a:accent3>
+      <a:accent4>
+        <a:srgbClr val="0F9ED5"/>
+      </a:accent4>
+      <a:accent5>
+        <a:srgbClr val="A02B93"/>
+      </a:accent5>
+      <a:accent6>
+        <a:srgbClr val="4EA72E"/>
+      </a:accent6>
+      <a:hlink>
+        <a:srgbClr val="467886"/>
+      </a:hlink>
+      <a:folHlink>
+        <a:srgbClr val="96607D"/>
+      </a:folHlink>
+    </a:clrScheme>
+    <a:fontScheme name="Office">
+      <a:majorFont>
+        <a:latin typeface="Calibri Light"/>
+        <a:ea typeface="Calibri Light"/>
+        <a:cs typeface="Calibri Light"/>
+      </a:majorFont>
+      <a:minorFont>
+        <a:latin typeface="Calibri"/>
+        <a:ea typeface="Calibri"/>
+        <a:cs typeface="Calibri"/>
+      </a:minorFont>
+    </a:fontScheme>
+    <a:fmtScheme name="ChatGPT">
+      <a:fillStyleLst>
+        <a:solidFill>
+          <a:schemeClr val="phClr"/>
+        </a:solidFill>
+        <a:gradFill>
+          <a:gsLst>
+            <a:gs pos="0">
+              <a:schemeClr val="phClr">
+                <a:tint val="67000"/>
+                <a:lumMod val="110000"/>
+                <a:satMod val="105000"/>
+              </a:schemeClr>
+            </a:gs>
+            <a:gs pos="50000">
+              <a:schemeClr val="phClr">
+                <a:tint val="73000"/>
+                <a:lumMod val="105000"/>
+                <a:satMod val="103000"/>
+              </a:schemeClr>
+            </a:gs>
+            <a:gs pos="100000">
+              <a:schemeClr val="phClr">
+                <a:tint val="81000"/>
+                <a:lumMod val="105000"/>
+                <a:satMod val="109000"/>
+              </a:schemeClr>
+            </a:gs>
+          </a:gsLst>
+          <a:lin ang="5400000" scaled="0"/>
+        </a:gradFill>
+        <a:gradFill>
+          <a:gsLst>
+            <a:gs pos="0">
+              <a:schemeClr val="phClr">
+                <a:tint val="94000"/>
+                <a:lumMod val="102000"/>
+                <a:satMod val="103000"/>
+              </a:schemeClr>
+            </a:gs>
+            <a:gs pos="50000">
+              <a:schemeClr val="phClr">
+                <a:shade val="100000"/>
+                <a:lumMod val="100000"/>
+                <a:satMod val="110000"/>
+              </a:schemeClr>
+            </a:gs>
+            <a:gs pos="100000">
+              <a:schemeClr val="phClr">
+                <a:shade val="78000"/>
+                <a:lumMod val="99000"/>
+                <a:satMod val="120000"/>
+              </a:schemeClr>
+            </a:gs>
+          </a:gsLst>
+          <a:lin ang="5400000" scaled="0"/>
+        </a:gradFill>
+      </a:fillStyleLst>
+      <a:lnStyleLst>
+        <a:ln w="12700">
+          <a:solidFill>
+            <a:schemeClr val="phClr"/>
+          </a:solidFill>
+          <a:prstDash val="solid"/>
+        </a:ln>
+        <a:ln w="19050">
+          <a:solidFill>
+            <a:schemeClr val="phClr"/>
+          </a:solidFill>
+          <a:prstDash val="solid"/>
+        </a:ln>
+        <a:ln w="25400">
+          <a:solidFill>
+            <a:schemeClr val="phClr"/>
+          </a:solidFill>
+          <a:prstDash val="solid"/>
+        </a:ln>
+      </a:lnStyleLst>
+      <a:effectStyleLst>
+        <a:effectStyle>
+          <a:effectLst/>
+        </a:effectStyle>
+        <a:effectStyle>
+          <a:effectLst/>
+        </a:effectStyle>
+        <a:effectStyle>
+          <a:effectLst>
+            <a:outerShdw blurRad="57150" dist="19050" dir="5400000">
+              <a:srgbClr val="000000">
+                <a:alpha val="16000"/>
+              </a:srgbClr>
+            </a:outerShdw>
+          </a:effectLst>
+        </a:effectStyle>
+        <a:effectStyle>
+          <a:effectLst>
+            <a:outerShdw blurRad="19050" dist="9525" dir="5400000">
+              <a:srgbClr val="000000">
+                <a:alpha val="6000"/>
+              </a:srgbClr>
+            </a:outerShdw>
+          </a:effectLst>
+        </a:effectStyle>
+        <a:effectStyle>
+          <a:effectLst>
+            <a:outerShdw blurRad="28575" dist="9525" dir="5400000">
+              <a:srgbClr val="000000">
+                <a:alpha val="8000"/>
+              </a:srgbClr>
+            </a:outerShdw>
+          </a:effectLst>
+        </a:effectStyle>
+        <a:effectStyle>
+          <a:effectLst>
+            <a:outerShdw blurRad="57150" dist="19050" dir="5400000">
+              <a:srgbClr val="000000">
+                <a:alpha val="10000"/>
+              </a:srgbClr>
+            </a:outerShdw>
+          </a:effectLst>
+        </a:effectStyle>
+        <a:effectStyle>
+          <a:effectLst>
+            <a:outerShdw blurRad="114300" dist="38100" dir="5400000">
+              <a:srgbClr val="000000">
+                <a:alpha val="12000"/>
+              </a:srgbClr>
+            </a:outerShdw>
+          </a:effectLst>
+        </a:effectStyle>
+        <a:effectStyle>
+          <a:effectLst>
+            <a:outerShdw blurRad="171450" dist="57150" dir="5400000">
+              <a:srgbClr val="000000">
+                <a:alpha val="16000"/>
+              </a:srgbClr>
+            </a:outerShdw>
+          </a:effectLst>
+        </a:effectStyle>
+        <a:effectStyle>
+          <a:effectLst>
+            <a:outerShdw blurRad="266700" dist="95250" dir="5400000">
+              <a:srgbClr val="000000">
+                <a:alpha val="24000"/>
+              </a:srgbClr>
+            </a:outerShdw>
+          </a:effectLst>
+        </a:effectStyle>
+      </a:effectStyleLst>
+      <a:bgFillStyleLst>
+        <a:solidFill>
+          <a:schemeClr val="phClr"/>
+        </a:solidFill>
+        <a:solidFill>
+          <a:schemeClr val="phClr">
+            <a:tint val="95000"/>
+            <a:satMod val="170000"/>
+          </a:schemeClr>
+        </a:solidFill>
+        <a:gradFill>
+          <a:gsLst>
+            <a:gs pos="0">
+              <a:schemeClr val="phClr">
+                <a:tint val="93000"/>
+                <a:shade val="98000"/>
+                <a:lumMod val="102000"/>
+                <a:satMod val="150000"/>
+              </a:schemeClr>
+            </a:gs>
+            <a:gs pos="50000">
+              <a:schemeClr val="phClr">
+                <a:tint val="98000"/>
+                <a:shade val="90000"/>
+                <a:lumMod val="103000"/>
+                <a:satMod val="130000"/>
+              </a:schemeClr>
+            </a:gs>
+            <a:gs pos="100000">
+              <a:schemeClr val="phClr">
+                <a:shade val="63000"/>
+                <a:satMod val="120000"/>
+              </a:schemeClr>
+            </a:gs>
+          </a:gsLst>
+          <a:lin ang="5400000" scaled="0"/>
+        </a:gradFill>
+      </a:bgFillStyleLst>
+    </a:fmtScheme>
+  </a:themeElements>
+</a:theme>
+</file>
+
+<file path=ppt/notesSlides/notesSlide1.xml><?xml version="1.0" encoding="utf-8"?>
+<p:notes xmlns:p="http://schemas.openxmlformats.org/presentationml/2006/main">
+  <p:cSld>
+    <p:spTree>
+      <p:nvGrpSpPr>
+        <p:cNvPr id="1" name=""/>
+        <p:cNvGrpSpPr/>
+        <p:nvPr/>
+      </p:nvGrpSpPr>
+      <p:grpSpPr>
+        <a:xfrm xmlns:a="http://schemas.openxmlformats.org/drawingml/2006/main"/>
+      </p:grpSpPr>
+      <p:sp>
+        <p:nvSpPr>
+          <p:cNvPr id="2" name="Slide Image Placeholder 1"/>
+          <p:cNvSpPr>
+            <a:spLocks xmlns:a="http://schemas.openxmlformats.org/drawingml/2006/main" noGrp="1"/>
+          </p:cNvSpPr>
+          <p:nvPr>
+            <p:ph type="sldImg" idx="0"/>
+          </p:nvPr>
+        </p:nvSpPr>
+        <p:spPr/>
+      </p:sp>
+      <p:sp>
+        <p:nvSpPr>
+          <p:cNvPr id="3" name="Notes Placeholder 2"/>
+          <p:cNvSpPr>
+            <a:spLocks xmlns:a="http://schemas.openxmlformats.org/drawingml/2006/main" noGrp="1"/>
+          </p:cNvSpPr>
+          <p:nvPr>
+            <p:ph type="body" idx="1"/>
+          </p:nvPr>
+        </p:nvSpPr>
+        <p:spPr/>
+        <p:txBody>
+          <a:bodyPr xmlns:a="http://schemas.openxmlformats.org/drawingml/2006/main"/>
+          <a:lstStyle xmlns:a="http://schemas.openxmlformats.org/drawingml/2006/main"/>
+          <a:p xmlns:a="http://schemas.openxmlformats.org/drawingml/2006/main">
+            <a:r>
+              <a:t>Introduce Meds Counsulting LLC and the NHN project charter. Explain NHN scale, the rising readmission problem, team workstreams, stakeholders, and the working hypothesis.</a:t>
+            </a:r>
+          </a:p>
+        </p:txBody>
+      </p:sp>
+      <p:sp>
+        <p:nvSpPr>
+          <p:cNvPr id="4" name="Slide Number Placeholder 3"/>
+          <p:cNvSpPr>
+            <a:spLocks xmlns:a="http://schemas.openxmlformats.org/drawingml/2006/main" noGrp="1"/>
+          </p:cNvSpPr>
+          <p:nvPr>
+            <p:ph type="sldNum" idx="5"/>
+          </p:nvPr>
+        </p:nvSpPr>
+        <p:spPr/>
+        <p:txBody>
+          <a:bodyPr xmlns:a="http://schemas.openxmlformats.org/drawingml/2006/main"/>
+          <a:lstStyle xmlns:a="http://schemas.openxmlformats.org/drawingml/2006/main"/>
+          <a:p xmlns:a="http://schemas.openxmlformats.org/drawingml/2006/main"/>
+        </p:txBody>
+      </p:sp>
+    </p:spTree>
+  </p:cSld>
+  <p:clrMapOvr>
+    <a:masterClrMapping xmlns:a="http://schemas.openxmlformats.org/drawingml/2006/main"/>
+  </p:clrMapOvr>
+</p:notes>
+</file>
+
+<file path=ppt/notesSlides/notesSlide2.xml><?xml version="1.0" encoding="utf-8"?>
+<p:notes xmlns:p="http://schemas.openxmlformats.org/presentationml/2006/main">
+  <p:cSld>
+    <p:spTree>
+      <p:nvGrpSpPr>
+        <p:cNvPr id="1" name=""/>
+        <p:cNvGrpSpPr/>
+        <p:nvPr/>
+      </p:nvGrpSpPr>
+      <p:grpSpPr>
+        <a:xfrm xmlns:a="http://schemas.openxmlformats.org/drawingml/2006/main"/>
+      </p:grpSpPr>
+      <p:sp>
+        <p:nvSpPr>
+          <p:cNvPr id="2" name="Slide Image Placeholder 1"/>
+          <p:cNvSpPr>
+            <a:spLocks xmlns:a="http://schemas.openxmlformats.org/drawingml/2006/main" noGrp="1"/>
+          </p:cNvSpPr>
+          <p:nvPr>
+            <p:ph type="sldImg" idx="0"/>
+          </p:nvPr>
+        </p:nvSpPr>
+        <p:spPr/>
+      </p:sp>
+      <p:sp>
+        <p:nvSpPr>
+          <p:cNvPr id="3" name="Notes Placeholder 2"/>
+          <p:cNvSpPr>
+            <a:spLocks xmlns:a="http://schemas.openxmlformats.org/drawingml/2006/main" noGrp="1"/>
+          </p:cNvSpPr>
+          <p:nvPr>
+            <p:ph type="body" idx="1"/>
+          </p:nvPr>
+        </p:nvSpPr>
+        <p:spPr/>
+        <p:txBody>
+          <a:bodyPr xmlns:a="http://schemas.openxmlformats.org/drawingml/2006/main"/>
+          <a:lstStyle xmlns:a="http://schemas.openxmlformats.org/drawingml/2006/main"/>
+          <a:p xmlns:a="http://schemas.openxmlformats.org/drawingml/2006/main">
+            <a:r>
+              <a:t>Walk through the initial data analysis. Start with the 12,000-patient dataset and 43.2 percent readmission rate. Explain that missing follow-up status is the largest data gap, outliers affect length of stay and financial fields, high-risk segments concentrate readmissions, and correlations point toward prior admissions and chronic conditions as early risk signals.</a:t>
+            </a:r>
+          </a:p>
+        </p:txBody>
+      </p:sp>
+      <p:sp>
+        <p:nvSpPr>
+          <p:cNvPr id="4" name="Slide Number Placeholder 3"/>
+          <p:cNvSpPr>
+            <a:spLocks xmlns:a="http://schemas.openxmlformats.org/drawingml/2006/main" noGrp="1"/>
+          </p:cNvSpPr>
+          <p:nvPr>
+            <p:ph type="sldNum" idx="5"/>
+          </p:nvPr>
+        </p:nvSpPr>
+        <p:spPr/>
+        <p:txBody>
+          <a:bodyPr xmlns:a="http://schemas.openxmlformats.org/drawingml/2006/main"/>
+          <a:lstStyle xmlns:a="http://schemas.openxmlformats.org/drawingml/2006/main"/>
+          <a:p xmlns:a="http://schemas.openxmlformats.org/drawingml/2006/main"/>
+        </p:txBody>
+      </p:sp>
+    </p:spTree>
+  </p:cSld>
+  <p:clrMapOvr>
+    <a:masterClrMapping xmlns:a="http://schemas.openxmlformats.org/drawingml/2006/main"/>
+  </p:clrMapOvr>
+</p:notes>
+</file>
+
+<file path=ppt/notesSlides/notesSlide3.xml><?xml version="1.0" encoding="utf-8"?>
+<p:notes xmlns:p="http://schemas.openxmlformats.org/presentationml/2006/main">
+  <p:cSld>
+    <p:spTree>
+      <p:nvGrpSpPr>
+        <p:cNvPr id="1" name=""/>
+        <p:cNvGrpSpPr/>
+        <p:nvPr/>
+      </p:nvGrpSpPr>
+      <p:grpSpPr>
+        <a:xfrm xmlns:a="http://schemas.openxmlformats.org/drawingml/2006/main"/>
+      </p:grpSpPr>
+      <p:sp>
+        <p:nvSpPr>
+          <p:cNvPr id="2" name="Slide Image Placeholder 1"/>
+          <p:cNvSpPr>
+            <a:spLocks xmlns:a="http://schemas.openxmlformats.org/drawingml/2006/main" noGrp="1"/>
+          </p:cNvSpPr>
+          <p:nvPr>
+            <p:ph type="sldImg" idx="0"/>
+          </p:nvPr>
+        </p:nvSpPr>
+        <p:spPr/>
+      </p:sp>
+      <p:sp>
+        <p:nvSpPr>
+          <p:cNvPr id="3" name="Notes Placeholder 2"/>
+          <p:cNvSpPr>
+            <a:spLocks xmlns:a="http://schemas.openxmlformats.org/drawingml/2006/main" noGrp="1"/>
+          </p:cNvSpPr>
+          <p:nvPr>
+            <p:ph type="body" idx="1"/>
+          </p:nvPr>
+        </p:nvSpPr>
+        <p:spPr/>
+        <p:txBody>
+          <a:bodyPr xmlns:a="http://schemas.openxmlformats.org/drawingml/2006/main"/>
+          <a:lstStyle xmlns:a="http://schemas.openxmlformats.org/drawingml/2006/main"/>
+          <a:p xmlns:a="http://schemas.openxmlformats.org/drawingml/2006/main">
+            <a:r>
+              <a:t>Explain why the approach uses three methods. Regression analysis quantifies risk drivers, customer segmentation turns the model into action groups, and market basic analysis adds operational and financial context. Point to the model evidence chart: the expanded clinical model improves ROC-AUC to about 0.74, so it is useful for risk-tier decisions, not just reporting.</a:t>
+            </a:r>
+          </a:p>
+        </p:txBody>
+      </p:sp>
+      <p:sp>
+        <p:nvSpPr>
+          <p:cNvPr id="4" name="Slide Number Placeholder 3"/>
+          <p:cNvSpPr>
+            <a:spLocks xmlns:a="http://schemas.openxmlformats.org/drawingml/2006/main" noGrp="1"/>
+          </p:cNvSpPr>
+          <p:nvPr>
+            <p:ph type="sldNum" idx="5"/>
+          </p:nvPr>
+        </p:nvSpPr>
+        <p:spPr/>
+        <p:txBody>
+          <a:bodyPr xmlns:a="http://schemas.openxmlformats.org/drawingml/2006/main"/>
+          <a:lstStyle xmlns:a="http://schemas.openxmlformats.org/drawingml/2006/main"/>
+          <a:p xmlns:a="http://schemas.openxmlformats.org/drawingml/2006/main"/>
+        </p:txBody>
+      </p:sp>
+    </p:spTree>
+  </p:cSld>
+  <p:clrMapOvr>
+    <a:masterClrMapping xmlns:a="http://schemas.openxmlformats.org/drawingml/2006/main"/>
+  </p:clrMapOvr>
+</p:notes>
+</file>
+
+<file path=ppt/notesSlides/notesSlide4.xml><?xml version="1.0" encoding="utf-8"?>
+<p:notes xmlns:p="http://schemas.openxmlformats.org/presentationml/2006/main">
+  <p:cSld>
+    <p:spTree>
+      <p:nvGrpSpPr>
+        <p:cNvPr id="1" name=""/>
+        <p:cNvGrpSpPr/>
+        <p:nvPr/>
+      </p:nvGrpSpPr>
+      <p:grpSpPr>
+        <a:xfrm xmlns:a="http://schemas.openxmlformats.org/drawingml/2006/main"/>
+      </p:grpSpPr>
+      <p:sp>
+        <p:nvSpPr>
+          <p:cNvPr id="2" name="Slide Image Placeholder 1"/>
+          <p:cNvSpPr>
+            <a:spLocks xmlns:a="http://schemas.openxmlformats.org/drawingml/2006/main" noGrp="1"/>
+          </p:cNvSpPr>
+          <p:nvPr>
+            <p:ph type="sldImg" idx="0"/>
+          </p:nvPr>
+        </p:nvSpPr>
+        <p:spPr/>
+      </p:sp>
+      <p:sp>
+        <p:nvSpPr>
+          <p:cNvPr id="3" name="Notes Placeholder 2"/>
+          <p:cNvSpPr>
+            <a:spLocks xmlns:a="http://schemas.openxmlformats.org/drawingml/2006/main" noGrp="1"/>
+          </p:cNvSpPr>
+          <p:nvPr>
+            <p:ph type="body" idx="1"/>
+          </p:nvPr>
+        </p:nvSpPr>
+        <p:spPr/>
+        <p:txBody>
+          <a:bodyPr xmlns:a="http://schemas.openxmlformats.org/drawingml/2006/main"/>
+          <a:lstStyle xmlns:a="http://schemas.openxmlformats.org/drawingml/2006/main"/>
+          <a:p xmlns:a="http://schemas.openxmlformats.org/drawingml/2006/main">
+            <a:r>
+              <a:t>Use this slide to explain the team's business insights. The major drivers are chronic burden, prior admissions, emergency admission, and skilled nursing discharge. Hidden opportunities come from risk-tier targeting. Risk factors include unknown follow-up status, high-acuity discharge, repeat utilization, and financial data quality. Distinguish statistical significance from practical significance and business significance. The risk-decile chart supports the statistical case, while the ROI scenario supports the business case.</a:t>
+            </a:r>
+          </a:p>
+        </p:txBody>
+      </p:sp>
+      <p:sp>
+        <p:nvSpPr>
+          <p:cNvPr id="4" name="Slide Number Placeholder 3"/>
+          <p:cNvSpPr>
+            <a:spLocks xmlns:a="http://schemas.openxmlformats.org/drawingml/2006/main" noGrp="1"/>
+          </p:cNvSpPr>
+          <p:nvPr>
+            <p:ph type="sldNum" idx="5"/>
+          </p:nvPr>
+        </p:nvSpPr>
+        <p:spPr/>
+        <p:txBody>
+          <a:bodyPr xmlns:a="http://schemas.openxmlformats.org/drawingml/2006/main"/>
+          <a:lstStyle xmlns:a="http://schemas.openxmlformats.org/drawingml/2006/main"/>
+          <a:p xmlns:a="http://schemas.openxmlformats.org/drawingml/2006/main"/>
+        </p:txBody>
+      </p:sp>
+    </p:spTree>
+  </p:cSld>
+  <p:clrMapOvr>
+    <a:masterClrMapping xmlns:a="http://schemas.openxmlformats.org/drawingml/2006/main"/>
+  </p:clrMapOvr>
+</p:notes>
 </file>
 
 <file path=ppt/slideLayouts/slideLayout1.xml><?xml version="1.0" encoding="utf-8"?>
@@ -52,7 +723,7 @@
   </p:cSld>
   <p:clrMap bg1="lt1" tx1="dk1" bg2="lt2" tx2="dk2" accent1="accent1" accent2="accent2" accent3="accent3" accent4="accent4" accent5="accent5" accent6="accent6" hlink="hlink" folHlink="folHlink"/>
   <p:sldLayoutIdLst>
-    <p:sldLayoutId xmlns:r="http://schemas.openxmlformats.org/officeDocument/2006/relationships" id="2147483649" r:id="Rf1f9d02e2b584e2c"/>
+    <p:sldLayoutId xmlns:r="http://schemas.openxmlformats.org/officeDocument/2006/relationships" id="2147483649" r:id="R95a32dffb6d54095"/>
   </p:sldLayoutIdLst>
   <p:txStyles>
     <p:titleStyle>
@@ -590,7 +1261,7 @@
           <c:idx val="0"/>
           <c:order val="0"/>
           <c:tx>
-            <c:v>30-day readmission rate</c:v>
+            <c:v>Readmission rate</c:v>
           </c:tx>
           <c:spPr>
             <a:ln xmlns:a="http://schemas.openxmlformats.org/drawingml/2006/main" w="38100">
@@ -609,34 +1280,6 @@
               </a:solidFill>
             </c:spPr>
           </c:marker>
-          <c:dPt>
-            <c:idx val="0"/>
-            <c:spPr>
-              <a:solidFill xmlns:a="http://schemas.openxmlformats.org/drawingml/2006/main">
-                <a:srgbClr val="0F6F73"/>
-              </a:solidFill>
-              <a:ln xmlns:a="http://schemas.openxmlformats.org/drawingml/2006/main" w="9525">
-                <a:solidFill>
-                  <a:srgbClr val="0F6F73"/>
-                </a:solidFill>
-                <a:prstDash val="solid"/>
-              </a:ln>
-            </c:spPr>
-          </c:dPt>
-          <c:dPt>
-            <c:idx val="1"/>
-            <c:spPr>
-              <a:solidFill xmlns:a="http://schemas.openxmlformats.org/drawingml/2006/main">
-                <a:srgbClr val="E9A93A"/>
-              </a:solidFill>
-              <a:ln xmlns:a="http://schemas.openxmlformats.org/drawingml/2006/main" w="9525">
-                <a:solidFill>
-                  <a:srgbClr val="B7791F"/>
-                </a:solidFill>
-                <a:prstDash val="solid"/>
-              </a:ln>
-            </c:spPr>
-          </c:dPt>
           <c:cat>
             <c:numRef>
               <c:f>'Chart Data'!$A$2:$A$3</c:f>
@@ -674,7 +1317,7 @@
             <a:lstStyle xmlns:a="http://schemas.openxmlformats.org/drawingml/2006/main"/>
             <a:p xmlns:a="http://schemas.openxmlformats.org/drawingml/2006/main">
               <a:pPr>
-                <a:defRPr sz="825" b="1">
+                <a:defRPr sz="660" b="1">
                   <a:solidFill>
                     <a:srgbClr val="102A34"/>
                   </a:solidFill>
@@ -719,9 +1362,9 @@
           <a:lstStyle xmlns:a="http://schemas.openxmlformats.org/drawingml/2006/main"/>
           <a:p xmlns:a="http://schemas.openxmlformats.org/drawingml/2006/main">
             <a:pPr>
-              <a:defRPr sz="825">
-                <a:solidFill>
-                  <a:srgbClr val="344B54"/>
+              <a:defRPr sz="660">
+                <a:solidFill>
+                  <a:srgbClr val="50636B"/>
                 </a:solidFill>
                 <a:latin typeface="Helvetica Neue"/>
                 <a:ea typeface="Helvetica Neue"/>
@@ -767,9 +1410,9 @@
           <a:lstStyle xmlns:a="http://schemas.openxmlformats.org/drawingml/2006/main"/>
           <a:p xmlns:a="http://schemas.openxmlformats.org/drawingml/2006/main">
             <a:pPr>
-              <a:defRPr sz="713">
-                <a:solidFill>
-                  <a:srgbClr val="6B7D84"/>
+              <a:defRPr sz="630">
+                <a:solidFill>
+                  <a:srgbClr val="50636B"/>
                 </a:solidFill>
                 <a:latin typeface="Helvetica Neue"/>
                 <a:ea typeface="Helvetica Neue"/>
@@ -814,8 +1457,10 @@
   <c:lang val="en-US"/>
   <c:chart>
     <c:plotArea>
-      <c:lineChart>
-        <c:grouping val="standard"/>
+      <c:barChart>
+        <c:barDir val="bar"/>
+        <c:grouping val="clustered"/>
+        <c:varyColors val="0"/>
         <c:ser>
           <c:idx val="0"/>
           <c:order val="0"/>
@@ -823,59 +1468,53 @@
             <c:v>Readmission rate</c:v>
           </c:tx>
           <c:spPr>
-            <a:ln xmlns:a="http://schemas.openxmlformats.org/drawingml/2006/main" w="38100">
-              <a:solidFill>
-                <a:srgbClr val="0F6F73"/>
-              </a:solidFill>
-              <a:prstDash val="solid"/>
-            </a:ln>
+            <a:solidFill xmlns:a="http://schemas.openxmlformats.org/drawingml/2006/main">
+              <a:srgbClr val="0F6F73"/>
+            </a:solidFill>
           </c:spPr>
-          <c:marker>
-            <c:symbol val="circle"/>
-            <c:size val="7"/>
-            <c:spPr>
-              <a:solidFill xmlns:a="http://schemas.openxmlformats.org/drawingml/2006/main">
-                <a:srgbClr val="0F6F73"/>
-              </a:solidFill>
-            </c:spPr>
-          </c:marker>
           <c:cat>
             <c:strRef>
-              <c:f>'Chart Data'!$A$2:$A$5</c:f>
+              <c:f>'Chart Data'!$A$2:$A$6</c:f>
               <c:strCache>
-                <c:ptCount val="4"/>
+                <c:ptCount val="5"/>
                 <c:pt idx="0">
-                  <c:v>50-64</c:v>
+                  <c:v>5+ chronic</c:v>
                 </c:pt>
                 <c:pt idx="1">
-                  <c:v>65-74</c:v>
+                  <c:v>Unknown follow-up</c:v>
                 </c:pt>
                 <c:pt idx="2">
-                  <c:v>75-84</c:v>
+                  <c:v>3+ prior admit</c:v>
                 </c:pt>
                 <c:pt idx="3">
-                  <c:v>85+</c:v>
+                  <c:v>Skilled nursing</c:v>
+                </c:pt>
+                <c:pt idx="4">
+                  <c:v>Emergency admit</c:v>
                 </c:pt>
               </c:strCache>
             </c:strRef>
           </c:cat>
           <c:val>
             <c:numRef>
-              <c:f>'Chart Data'!$B$2:$B$5</c:f>
+              <c:f>'Chart Data'!$B$2:$B$6</c:f>
               <c:numCache>
                 <c:formatCode>0.0%</c:formatCode>
-                <c:ptCount val="4"/>
+                <c:ptCount val="5"/>
                 <c:pt idx="0">
-                  <c:v>0.4202</c:v>
+                  <c:v>0.6233864844</c:v>
                 </c:pt>
                 <c:pt idx="1">
-                  <c:v>0.4797</c:v>
+                  <c:v>0.6030150754</c:v>
                 </c:pt>
                 <c:pt idx="2">
-                  <c:v>0.5111</c:v>
+                  <c:v>0.5702325581</c:v>
                 </c:pt>
                 <c:pt idx="3">
-                  <c:v>0.5427</c:v>
+                  <c:v>0.5435385469</c:v>
+                </c:pt>
+                <c:pt idx="4">
+                  <c:v>0.5088090204</c:v>
                 </c:pt>
               </c:numCache>
             </c:numRef>
@@ -887,7 +1526,7 @@
             <a:lstStyle xmlns:a="http://schemas.openxmlformats.org/drawingml/2006/main"/>
             <a:p xmlns:a="http://schemas.openxmlformats.org/drawingml/2006/main">
               <a:pPr>
-                <a:defRPr sz="645" b="1">
+                <a:defRPr sz="615" b="1">
                   <a:solidFill>
                     <a:srgbClr val="102A34"/>
                   </a:solidFill>
@@ -898,6 +1537,7 @@
               </a:pPr>
             </a:p>
           </c:txPr>
+          <c:dLblPos val="outEnd"/>
           <c:showLegendKey val="0"/>
           <c:showVal val="1"/>
           <c:showCatName val="0"/>
@@ -908,49 +1548,11 @@
         </c:dLbls>
         <c:axId val="48650112"/>
         <c:axId val="48672768"/>
-      </c:lineChart>
+      </c:barChart>
       <c:catAx>
         <c:axId val="48650112"/>
         <c:scaling>
           <c:orientation val="minMax"/>
-        </c:scaling>
-        <c:delete val="0"/>
-        <c:axPos val="b"/>
-        <c:numFmt formatCode="General"/>
-        <c:majorTickMark val="none"/>
-        <c:minorTickMark val="none"/>
-        <c:spPr>
-          <a:ln xmlns:a="http://schemas.openxmlformats.org/drawingml/2006/main" w="9525">
-            <a:solidFill>
-              <a:srgbClr val="B8CDD3"/>
-            </a:solidFill>
-            <a:prstDash val="solid"/>
-          </a:ln>
-        </c:spPr>
-        <c:txPr>
-          <a:bodyPr xmlns:a="http://schemas.openxmlformats.org/drawingml/2006/main" anchorCtr="1"/>
-          <a:lstStyle xmlns:a="http://schemas.openxmlformats.org/drawingml/2006/main"/>
-          <a:p xmlns:a="http://schemas.openxmlformats.org/drawingml/2006/main">
-            <a:pPr>
-              <a:defRPr sz="705">
-                <a:solidFill>
-                  <a:srgbClr val="344B54"/>
-                </a:solidFill>
-                <a:latin typeface="Helvetica Neue"/>
-                <a:ea typeface="Helvetica Neue"/>
-                <a:cs typeface="Helvetica Neue"/>
-              </a:defRPr>
-            </a:pPr>
-          </a:p>
-        </c:txPr>
-        <c:crossAx val="48672768"/>
-      </c:catAx>
-      <c:valAx>
-        <c:axId val="48672768"/>
-        <c:scaling>
-          <c:orientation val="minMax"/>
-          <c:max val="0.6"/>
-          <c:min val="0.35"/>
         </c:scaling>
         <c:delete val="0"/>
         <c:axPos val="l"/>
@@ -980,9 +1582,43 @@
           <a:lstStyle xmlns:a="http://schemas.openxmlformats.org/drawingml/2006/main"/>
           <a:p xmlns:a="http://schemas.openxmlformats.org/drawingml/2006/main">
             <a:pPr>
+              <a:defRPr sz="600">
+                <a:solidFill>
+                  <a:srgbClr val="50636B"/>
+                </a:solidFill>
+                <a:latin typeface="Helvetica Neue"/>
+                <a:ea typeface="Helvetica Neue"/>
+                <a:cs typeface="Helvetica Neue"/>
+              </a:defRPr>
+            </a:pPr>
+          </a:p>
+        </c:txPr>
+        <c:crossAx val="48672768"/>
+      </c:catAx>
+      <c:valAx>
+        <c:axId val="48672768"/>
+        <c:scaling>
+          <c:orientation val="minMax"/>
+        </c:scaling>
+        <c:delete val="0"/>
+        <c:axPos val="b"/>
+        <c:numFmt formatCode="General"/>
+        <c:majorTickMark val="none"/>
+        <c:minorTickMark val="none"/>
+        <c:spPr>
+          <a:ln xmlns:a="http://schemas.openxmlformats.org/drawingml/2006/main" w="0">
+            <a:noFill/>
+            <a:prstDash val="solid"/>
+          </a:ln>
+        </c:spPr>
+        <c:txPr>
+          <a:bodyPr xmlns:a="http://schemas.openxmlformats.org/drawingml/2006/main" anchorCtr="1"/>
+          <a:lstStyle xmlns:a="http://schemas.openxmlformats.org/drawingml/2006/main"/>
+          <a:p xmlns:a="http://schemas.openxmlformats.org/drawingml/2006/main">
+            <a:pPr>
               <a:defRPr sz="660">
                 <a:solidFill>
-                  <a:srgbClr val="6B7D84"/>
+                  <a:srgbClr val="344B54"/>
                 </a:solidFill>
                 <a:latin typeface="Helvetica Neue"/>
                 <a:ea typeface="Helvetica Neue"/>
@@ -993,7 +1629,6 @@
         </c:txPr>
         <c:crossAx val="48650112"/>
         <c:crossBetween val="between"/>
-        <c:majorUnit val="0.05"/>
       </c:valAx>
       <c:spPr>
         <a:solidFill xmlns:a="http://schemas.openxmlformats.org/drawingml/2006/main">
@@ -1035,7 +1670,7 @@
           <c:idx val="0"/>
           <c:order val="0"/>
           <c:tx>
-            <c:v>Correlation with readmission</c:v>
+            <c:v>Correlation</c:v>
           </c:tx>
           <c:spPr>
             <a:solidFill xmlns:a="http://schemas.openxmlformats.org/drawingml/2006/main">
@@ -1048,10 +1683,10 @@
               <c:strCache>
                 <c:ptCount val="4"/>
                 <c:pt idx="0">
-                  <c:v>Prior admissions</c:v>
+                  <c:v>Prior admits</c:v>
                 </c:pt>
                 <c:pt idx="1">
-                  <c:v>Chronic conditions</c:v>
+                  <c:v>Chronic cond.</c:v>
                 </c:pt>
                 <c:pt idx="2">
                   <c:v>Length of stay</c:v>
@@ -1090,7 +1725,7 @@
             <a:lstStyle xmlns:a="http://schemas.openxmlformats.org/drawingml/2006/main"/>
             <a:p xmlns:a="http://schemas.openxmlformats.org/drawingml/2006/main">
               <a:pPr>
-                <a:defRPr sz="615" b="1">
+                <a:defRPr sz="555" b="1">
                   <a:solidFill>
                     <a:srgbClr val="102A34"/>
                   </a:solidFill>
@@ -1146,9 +1781,9 @@
           <a:lstStyle xmlns:a="http://schemas.openxmlformats.org/drawingml/2006/main"/>
           <a:p xmlns:a="http://schemas.openxmlformats.org/drawingml/2006/main">
             <a:pPr>
-              <a:defRPr sz="570">
-                <a:solidFill>
-                  <a:srgbClr val="6B7D84"/>
+              <a:defRPr sz="540">
+                <a:solidFill>
+                  <a:srgbClr val="50636B"/>
                 </a:solidFill>
                 <a:latin typeface="Helvetica Neue"/>
                 <a:ea typeface="Helvetica Neue"/>
@@ -1180,7 +1815,7 @@
           <a:lstStyle xmlns:a="http://schemas.openxmlformats.org/drawingml/2006/main"/>
           <a:p xmlns:a="http://schemas.openxmlformats.org/drawingml/2006/main">
             <a:pPr>
-              <a:defRPr sz="638">
+              <a:defRPr sz="563">
                 <a:solidFill>
                   <a:srgbClr val="344B54"/>
                 </a:solidFill>
@@ -1193,6 +1828,516 @@
         </c:txPr>
         <c:crossAx val="48650112"/>
         <c:crossBetween val="between"/>
+      </c:valAx>
+      <c:spPr>
+        <a:solidFill xmlns:a="http://schemas.openxmlformats.org/drawingml/2006/main">
+          <a:srgbClr val="F8FBFC"/>
+        </a:solidFill>
+        <a:ln xmlns:a="http://schemas.openxmlformats.org/drawingml/2006/main" w="0">
+          <a:noFill/>
+          <a:prstDash val="solid"/>
+        </a:ln>
+      </c:spPr>
+    </c:plotArea>
+    <c:plotVisOnly val="1"/>
+  </c:chart>
+  <c:spPr>
+    <a:solidFill xmlns:a="http://schemas.openxmlformats.org/drawingml/2006/main">
+      <a:srgbClr val="F8FBFC"/>
+    </a:solidFill>
+    <a:ln xmlns:a="http://schemas.openxmlformats.org/drawingml/2006/main" w="0">
+      <a:noFill/>
+      <a:prstDash val="solid"/>
+    </a:ln>
+  </c:spPr>
+  <c:externalData r:id="rIdChartSnapshot1">
+    <c:autoUpdate val="0"/>
+  </c:externalData>
+</c:chartSpace>
+</file>
+
+<file path=ppt/slides/charts/chart4.xml><?xml version="1.0" encoding="utf-8"?>
+<c:chartSpace xmlns:c="http://schemas.openxmlformats.org/drawingml/2006/chart" xmlns:r="http://schemas.openxmlformats.org/officeDocument/2006/relationships">
+  <c:lang val="en-US"/>
+  <c:chart>
+    <c:plotArea>
+      <c:barChart>
+        <c:barDir val="col"/>
+        <c:grouping val="clustered"/>
+        <c:varyColors val="0"/>
+        <c:ser>
+          <c:idx val="0"/>
+          <c:order val="0"/>
+          <c:tx>
+            <c:v>Baseline</c:v>
+          </c:tx>
+          <c:spPr>
+            <a:solidFill xmlns:a="http://schemas.openxmlformats.org/drawingml/2006/main">
+              <a:srgbClr val="8AA6AD"/>
+            </a:solidFill>
+          </c:spPr>
+          <c:cat>
+            <c:strRef>
+              <c:f>'Chart Data'!$A$2:$A$5</c:f>
+              <c:strCache>
+                <c:ptCount val="4"/>
+                <c:pt idx="0">
+                  <c:v>Accuracy</c:v>
+                </c:pt>
+                <c:pt idx="1">
+                  <c:v>Recall</c:v>
+                </c:pt>
+                <c:pt idx="2">
+                  <c:v>F1 score</c:v>
+                </c:pt>
+                <c:pt idx="3">
+                  <c:v>ROC-AUC</c:v>
+                </c:pt>
+              </c:strCache>
+            </c:strRef>
+          </c:cat>
+          <c:val>
+            <c:numRef>
+              <c:f>'Chart Data'!$B$2:$B$5</c:f>
+              <c:numCache>
+                <c:formatCode>0.0%</c:formatCode>
+                <c:ptCount val="4"/>
+                <c:pt idx="0">
+                  <c:v>0.6572222222</c:v>
+                </c:pt>
+                <c:pt idx="1">
+                  <c:v>0.5012787724</c:v>
+                </c:pt>
+                <c:pt idx="2">
+                  <c:v>0.5596002855</c:v>
+                </c:pt>
+                <c:pt idx="3">
+                  <c:v>0.7071174737</c:v>
+                </c:pt>
+              </c:numCache>
+            </c:numRef>
+          </c:val>
+        </c:ser>
+        <c:ser>
+          <c:idx val="1"/>
+          <c:order val="1"/>
+          <c:tx>
+            <c:v>Expanded</c:v>
+          </c:tx>
+          <c:spPr>
+            <a:solidFill xmlns:a="http://schemas.openxmlformats.org/drawingml/2006/main">
+              <a:srgbClr val="0F6F73"/>
+            </a:solidFill>
+          </c:spPr>
+          <c:cat>
+            <c:strRef>
+              <c:f>'Chart Data'!$C$2:$C$5</c:f>
+              <c:strCache>
+                <c:ptCount val="4"/>
+                <c:pt idx="0">
+                  <c:v>Accuracy</c:v>
+                </c:pt>
+                <c:pt idx="1">
+                  <c:v>Recall</c:v>
+                </c:pt>
+                <c:pt idx="2">
+                  <c:v>F1 score</c:v>
+                </c:pt>
+                <c:pt idx="3">
+                  <c:v>ROC-AUC</c:v>
+                </c:pt>
+              </c:strCache>
+            </c:strRef>
+          </c:cat>
+          <c:val>
+            <c:numRef>
+              <c:f>'Chart Data'!$D$2:$D$5</c:f>
+              <c:numCache>
+                <c:formatCode>0.0%</c:formatCode>
+                <c:ptCount val="4"/>
+                <c:pt idx="0">
+                  <c:v>0.6830555556</c:v>
+                </c:pt>
+                <c:pt idx="1">
+                  <c:v>0.5530690537</c:v>
+                </c:pt>
+                <c:pt idx="2">
+                  <c:v>0.6025774991</c:v>
+                </c:pt>
+                <c:pt idx="3">
+                  <c:v>0.7396482873</c:v>
+                </c:pt>
+              </c:numCache>
+            </c:numRef>
+          </c:val>
+        </c:ser>
+        <c:dLbls>
+          <c:txPr>
+            <a:bodyPr xmlns:a="http://schemas.openxmlformats.org/drawingml/2006/main" anchorCtr="1"/>
+            <a:lstStyle xmlns:a="http://schemas.openxmlformats.org/drawingml/2006/main"/>
+            <a:p xmlns:a="http://schemas.openxmlformats.org/drawingml/2006/main">
+              <a:pPr>
+                <a:defRPr>
+                  <a:latin typeface="Helvetica Neue"/>
+                  <a:ea typeface="Helvetica Neue"/>
+                  <a:cs typeface="Helvetica Neue"/>
+                </a:defRPr>
+              </a:pPr>
+            </a:p>
+          </c:txPr>
+          <c:dLblPos val="outEnd"/>
+          <c:showLegendKey val="0"/>
+          <c:showVal val="0"/>
+          <c:showCatName val="0"/>
+          <c:showSerName val="0"/>
+          <c:showPercent val="0"/>
+          <c:showBubbleSize val="0"/>
+          <c:showLeaderLines val="0"/>
+        </c:dLbls>
+        <c:axId val="48650112"/>
+        <c:axId val="48672768"/>
+      </c:barChart>
+      <c:catAx>
+        <c:axId val="48650112"/>
+        <c:scaling>
+          <c:orientation val="minMax"/>
+        </c:scaling>
+        <c:delete val="0"/>
+        <c:axPos val="b"/>
+        <c:numFmt formatCode="General"/>
+        <c:majorTickMark val="none"/>
+        <c:minorTickMark val="none"/>
+        <c:spPr>
+          <a:ln xmlns:a="http://schemas.openxmlformats.org/drawingml/2006/main" w="9525">
+            <a:solidFill>
+              <a:srgbClr val="B8CDD3"/>
+            </a:solidFill>
+            <a:prstDash val="solid"/>
+          </a:ln>
+        </c:spPr>
+        <c:txPr>
+          <a:bodyPr xmlns:a="http://schemas.openxmlformats.org/drawingml/2006/main" anchorCtr="1"/>
+          <a:lstStyle xmlns:a="http://schemas.openxmlformats.org/drawingml/2006/main"/>
+          <a:p xmlns:a="http://schemas.openxmlformats.org/drawingml/2006/main">
+            <a:pPr>
+              <a:defRPr sz="615">
+                <a:solidFill>
+                  <a:srgbClr val="344B54"/>
+                </a:solidFill>
+                <a:latin typeface="Helvetica Neue"/>
+                <a:ea typeface="Helvetica Neue"/>
+                <a:cs typeface="Helvetica Neue"/>
+              </a:defRPr>
+            </a:pPr>
+          </a:p>
+        </c:txPr>
+        <c:crossAx val="48672768"/>
+      </c:catAx>
+      <c:valAx>
+        <c:axId val="48672768"/>
+        <c:scaling>
+          <c:orientation val="minMax"/>
+          <c:max val="0.8"/>
+          <c:min val="0.4"/>
+        </c:scaling>
+        <c:delete val="0"/>
+        <c:axPos val="l"/>
+        <c:majorGridlines>
+          <c:spPr>
+            <a:ln xmlns:a="http://schemas.openxmlformats.org/drawingml/2006/main" w="9525">
+              <a:solidFill>
+                <a:srgbClr val="D8E6EA"/>
+              </a:solidFill>
+              <a:prstDash val="solid"/>
+            </a:ln>
+          </c:spPr>
+        </c:majorGridlines>
+        <c:numFmt formatCode="0%"/>
+        <c:majorTickMark val="none"/>
+        <c:minorTickMark val="none"/>
+        <c:spPr>
+          <a:ln xmlns:a="http://schemas.openxmlformats.org/drawingml/2006/main" w="9525">
+            <a:solidFill>
+              <a:srgbClr val="B8CDD3"/>
+            </a:solidFill>
+            <a:prstDash val="solid"/>
+          </a:ln>
+        </c:spPr>
+        <c:txPr>
+          <a:bodyPr xmlns:a="http://schemas.openxmlformats.org/drawingml/2006/main" anchorCtr="1"/>
+          <a:lstStyle xmlns:a="http://schemas.openxmlformats.org/drawingml/2006/main"/>
+          <a:p xmlns:a="http://schemas.openxmlformats.org/drawingml/2006/main">
+            <a:pPr>
+              <a:defRPr sz="600">
+                <a:solidFill>
+                  <a:srgbClr val="50636B"/>
+                </a:solidFill>
+                <a:latin typeface="Helvetica Neue"/>
+                <a:ea typeface="Helvetica Neue"/>
+                <a:cs typeface="Helvetica Neue"/>
+              </a:defRPr>
+            </a:pPr>
+          </a:p>
+        </c:txPr>
+        <c:crossAx val="48650112"/>
+        <c:crossBetween val="between"/>
+        <c:majorUnit val="0.1"/>
+      </c:valAx>
+      <c:spPr>
+        <a:solidFill xmlns:a="http://schemas.openxmlformats.org/drawingml/2006/main">
+          <a:srgbClr val="F8FBFC"/>
+        </a:solidFill>
+        <a:ln xmlns:a="http://schemas.openxmlformats.org/drawingml/2006/main" w="0">
+          <a:noFill/>
+          <a:prstDash val="solid"/>
+        </a:ln>
+      </c:spPr>
+    </c:plotArea>
+    <c:legend>
+      <c:legendPos val="b"/>
+      <c:overlay val="0"/>
+      <c:txPr>
+        <a:bodyPr xmlns:a="http://schemas.openxmlformats.org/drawingml/2006/main" anchorCtr="1"/>
+        <a:lstStyle xmlns:a="http://schemas.openxmlformats.org/drawingml/2006/main"/>
+        <a:p xmlns:a="http://schemas.openxmlformats.org/drawingml/2006/main">
+          <a:pPr>
+            <a:defRPr sz="630">
+              <a:solidFill>
+                <a:srgbClr val="50636B"/>
+              </a:solidFill>
+              <a:latin typeface="Helvetica Neue"/>
+              <a:ea typeface="Helvetica Neue"/>
+              <a:cs typeface="Helvetica Neue"/>
+            </a:defRPr>
+          </a:pPr>
+        </a:p>
+      </c:txPr>
+    </c:legend>
+    <c:plotVisOnly val="1"/>
+  </c:chart>
+  <c:spPr>
+    <a:solidFill xmlns:a="http://schemas.openxmlformats.org/drawingml/2006/main">
+      <a:srgbClr val="F8FBFC"/>
+    </a:solidFill>
+    <a:ln xmlns:a="http://schemas.openxmlformats.org/drawingml/2006/main" w="0">
+      <a:noFill/>
+      <a:prstDash val="solid"/>
+    </a:ln>
+  </c:spPr>
+  <c:externalData r:id="rIdChartSnapshot1">
+    <c:autoUpdate val="0"/>
+  </c:externalData>
+</c:chartSpace>
+</file>
+
+<file path=ppt/slides/charts/chart5.xml><?xml version="1.0" encoding="utf-8"?>
+<c:chartSpace xmlns:c="http://schemas.openxmlformats.org/drawingml/2006/chart" xmlns:r="http://schemas.openxmlformats.org/officeDocument/2006/relationships">
+  <c:lang val="en-US"/>
+  <c:chart>
+    <c:plotArea>
+      <c:barChart>
+        <c:barDir val="col"/>
+        <c:grouping val="clustered"/>
+        <c:varyColors val="0"/>
+        <c:ser>
+          <c:idx val="0"/>
+          <c:order val="0"/>
+          <c:tx>
+            <c:v>Readmission rate</c:v>
+          </c:tx>
+          <c:spPr>
+            <a:solidFill xmlns:a="http://schemas.openxmlformats.org/drawingml/2006/main">
+              <a:srgbClr val="0F6F73"/>
+            </a:solidFill>
+          </c:spPr>
+          <c:cat>
+            <c:strRef>
+              <c:f>'Chart Data'!$A$2:$A$11</c:f>
+              <c:strCache>
+                <c:ptCount val="10"/>
+                <c:pt idx="0">
+                  <c:v>D1</c:v>
+                </c:pt>
+                <c:pt idx="1">
+                  <c:v>D2</c:v>
+                </c:pt>
+                <c:pt idx="2">
+                  <c:v>D3</c:v>
+                </c:pt>
+                <c:pt idx="3">
+                  <c:v>D4</c:v>
+                </c:pt>
+                <c:pt idx="4">
+                  <c:v>D5</c:v>
+                </c:pt>
+                <c:pt idx="5">
+                  <c:v>D6</c:v>
+                </c:pt>
+                <c:pt idx="6">
+                  <c:v>D7</c:v>
+                </c:pt>
+                <c:pt idx="7">
+                  <c:v>D8</c:v>
+                </c:pt>
+                <c:pt idx="8">
+                  <c:v>D9</c:v>
+                </c:pt>
+                <c:pt idx="9">
+                  <c:v>D10</c:v>
+                </c:pt>
+              </c:strCache>
+            </c:strRef>
+          </c:cat>
+          <c:val>
+            <c:numRef>
+              <c:f>'Chart Data'!$B$2:$B$11</c:f>
+              <c:numCache>
+                <c:formatCode>0.0%</c:formatCode>
+                <c:ptCount val="10"/>
+                <c:pt idx="0">
+                  <c:v>0.1183333333</c:v>
+                </c:pt>
+                <c:pt idx="1">
+                  <c:v>0.2083333333</c:v>
+                </c:pt>
+                <c:pt idx="2">
+                  <c:v>0.2575</c:v>
+                </c:pt>
+                <c:pt idx="3">
+                  <c:v>0.3033333333</c:v>
+                </c:pt>
+                <c:pt idx="4">
+                  <c:v>0.365</c:v>
+                </c:pt>
+                <c:pt idx="5">
+                  <c:v>0.4675</c:v>
+                </c:pt>
+                <c:pt idx="6">
+                  <c:v>0.5183333333</c:v>
+                </c:pt>
+                <c:pt idx="7">
+                  <c:v>0.5766666667</c:v>
+                </c:pt>
+                <c:pt idx="8">
+                  <c:v>0.6816666667</c:v>
+                </c:pt>
+                <c:pt idx="9">
+                  <c:v>0.8233333333</c:v>
+                </c:pt>
+              </c:numCache>
+            </c:numRef>
+          </c:val>
+        </c:ser>
+        <c:dLbls>
+          <c:txPr>
+            <a:bodyPr xmlns:a="http://schemas.openxmlformats.org/drawingml/2006/main" anchorCtr="1"/>
+            <a:lstStyle xmlns:a="http://schemas.openxmlformats.org/drawingml/2006/main"/>
+            <a:p xmlns:a="http://schemas.openxmlformats.org/drawingml/2006/main">
+              <a:pPr>
+                <a:defRPr>
+                  <a:latin typeface="Helvetica Neue"/>
+                  <a:ea typeface="Helvetica Neue"/>
+                  <a:cs typeface="Helvetica Neue"/>
+                </a:defRPr>
+              </a:pPr>
+            </a:p>
+          </c:txPr>
+          <c:showLegendKey val="0"/>
+          <c:showVal val="0"/>
+          <c:showCatName val="0"/>
+          <c:showSerName val="0"/>
+          <c:showPercent val="0"/>
+          <c:showBubbleSize val="0"/>
+          <c:showLeaderLines val="0"/>
+        </c:dLbls>
+        <c:axId val="48650112"/>
+        <c:axId val="48672768"/>
+      </c:barChart>
+      <c:catAx>
+        <c:axId val="48650112"/>
+        <c:scaling>
+          <c:orientation val="minMax"/>
+        </c:scaling>
+        <c:delete val="0"/>
+        <c:axPos val="b"/>
+        <c:numFmt formatCode="General"/>
+        <c:majorTickMark val="none"/>
+        <c:minorTickMark val="none"/>
+        <c:spPr>
+          <a:ln xmlns:a="http://schemas.openxmlformats.org/drawingml/2006/main" w="9525">
+            <a:solidFill>
+              <a:srgbClr val="B8CDD3"/>
+            </a:solidFill>
+            <a:prstDash val="solid"/>
+          </a:ln>
+        </c:spPr>
+        <c:txPr>
+          <a:bodyPr xmlns:a="http://schemas.openxmlformats.org/drawingml/2006/main" anchorCtr="1"/>
+          <a:lstStyle xmlns:a="http://schemas.openxmlformats.org/drawingml/2006/main"/>
+          <a:p xmlns:a="http://schemas.openxmlformats.org/drawingml/2006/main">
+            <a:pPr>
+              <a:defRPr sz="600">
+                <a:solidFill>
+                  <a:srgbClr val="344B54"/>
+                </a:solidFill>
+                <a:latin typeface="Helvetica Neue"/>
+                <a:ea typeface="Helvetica Neue"/>
+                <a:cs typeface="Helvetica Neue"/>
+              </a:defRPr>
+            </a:pPr>
+          </a:p>
+        </c:txPr>
+        <c:crossAx val="48672768"/>
+      </c:catAx>
+      <c:valAx>
+        <c:axId val="48672768"/>
+        <c:scaling>
+          <c:orientation val="minMax"/>
+          <c:max val="0.9"/>
+          <c:min val="0"/>
+        </c:scaling>
+        <c:delete val="0"/>
+        <c:axPos val="l"/>
+        <c:majorGridlines>
+          <c:spPr>
+            <a:ln xmlns:a="http://schemas.openxmlformats.org/drawingml/2006/main" w="9525">
+              <a:solidFill>
+                <a:srgbClr val="D8E6EA"/>
+              </a:solidFill>
+              <a:prstDash val="solid"/>
+            </a:ln>
+          </c:spPr>
+        </c:majorGridlines>
+        <c:numFmt formatCode="0%"/>
+        <c:majorTickMark val="none"/>
+        <c:minorTickMark val="none"/>
+        <c:spPr>
+          <a:ln xmlns:a="http://schemas.openxmlformats.org/drawingml/2006/main" w="9525">
+            <a:solidFill>
+              <a:srgbClr val="B8CDD3"/>
+            </a:solidFill>
+            <a:prstDash val="solid"/>
+          </a:ln>
+        </c:spPr>
+        <c:txPr>
+          <a:bodyPr xmlns:a="http://schemas.openxmlformats.org/drawingml/2006/main" anchorCtr="1"/>
+          <a:lstStyle xmlns:a="http://schemas.openxmlformats.org/drawingml/2006/main"/>
+          <a:p xmlns:a="http://schemas.openxmlformats.org/drawingml/2006/main">
+            <a:pPr>
+              <a:defRPr sz="585">
+                <a:solidFill>
+                  <a:srgbClr val="50636B"/>
+                </a:solidFill>
+                <a:latin typeface="Helvetica Neue"/>
+                <a:ea typeface="Helvetica Neue"/>
+                <a:cs typeface="Helvetica Neue"/>
+              </a:defRPr>
+            </a:pPr>
+          </a:p>
+        </c:txPr>
+        <c:crossAx val="48650112"/>
+        <c:crossBetween val="between"/>
+        <c:majorUnit val="0.2"/>
       </c:valAx>
       <c:spPr>
         <a:solidFill xmlns:a="http://schemas.openxmlformats.org/drawingml/2006/main">
@@ -1242,10 +2387,10 @@
       </p:grpSpPr>
       <p:sp>
         <p:nvSpPr>
-          <p:cNvPr id="20" name="">
+          <p:cNvPr id="22" name="">
             <a:extLst xmlns:a="http://schemas.openxmlformats.org/drawingml/2006/main">
               <a:ext uri="{FF2B5EF4-FFF2-40B4-BE49-F238E27FC236}">
-                <a16:creationId xmlns:a16="http://schemas.microsoft.com/office/drawing/2014/main" id="{C2E38A26-48F4-4942-95D7-B690797EAA88}"/>
+                <a16:creationId xmlns:a16="http://schemas.microsoft.com/office/drawing/2014/main" id="{365B45ED-A701-47C5-B832-D632D3853629}"/>
               </a:ext>
             </a:extLst>
           </p:cNvPr>
@@ -1276,7 +2421,7 @@
           <p:cNvPr id="2" name="">
             <a:extLst xmlns:a="http://schemas.openxmlformats.org/drawingml/2006/main">
               <a:ext uri="{FF2B5EF4-FFF2-40B4-BE49-F238E27FC236}">
-                <a16:creationId xmlns:a16="http://schemas.microsoft.com/office/drawing/2014/main" id="{36F15285-95D5-42DC-8CD9-F090F4A97892}"/>
+                <a16:creationId xmlns:a16="http://schemas.microsoft.com/office/drawing/2014/main" id="{277C59C3-6537-4388-8FA5-C7A2367C233D}"/>
               </a:ext>
             </a:extLst>
           </p:cNvPr>
@@ -1334,7 +2479,7 @@
           <p:cNvPr id="3" name="">
             <a:extLst xmlns:a="http://schemas.openxmlformats.org/drawingml/2006/main">
               <a:ext uri="{FF2B5EF4-FFF2-40B4-BE49-F238E27FC236}">
-                <a16:creationId xmlns:a16="http://schemas.microsoft.com/office/drawing/2014/main" id="{0362C435-88DA-4473-BCEC-DA3AA9D01670}"/>
+                <a16:creationId xmlns:a16="http://schemas.microsoft.com/office/drawing/2014/main" id="{8AE5956B-C133-4F5A-856C-B40043A3CEA0}"/>
               </a:ext>
             </a:extLst>
           </p:cNvPr>
@@ -1346,7 +2491,7 @@
         <p:spPr>
           <a:xfrm xmlns:a="http://schemas.openxmlformats.org/drawingml/2006/main">
             <a:off x="514350" y="723900"/>
-            <a:ext cx="8763000" cy="457200"/>
+            <a:ext cx="8191500" cy="457200"/>
           </a:xfrm>
           <a:prstGeom xmlns:a="http://schemas.openxmlformats.org/drawingml/2006/main" prst="rect">
             <a:avLst/>
@@ -1392,7 +2537,7 @@
           <p:cNvPr id="4" name="">
             <a:extLst xmlns:a="http://schemas.openxmlformats.org/drawingml/2006/main">
               <a:ext uri="{FF2B5EF4-FFF2-40B4-BE49-F238E27FC236}">
-                <a16:creationId xmlns:a16="http://schemas.microsoft.com/office/drawing/2014/main" id="{352DC56E-0180-4494-BCF9-6A888405D86D}"/>
+                <a16:creationId xmlns:a16="http://schemas.microsoft.com/office/drawing/2014/main" id="{D88FD964-39C7-46F3-A64F-9798F47773BA}"/>
               </a:ext>
             </a:extLst>
           </p:cNvPr>
@@ -1403,7 +2548,47 @@
         </p:nvSpPr>
         <p:spPr>
           <a:xfrm xmlns:a="http://schemas.openxmlformats.org/drawingml/2006/main">
-            <a:off x="514350" y="1409700"/>
+            <a:off x="514350" y="1162050"/>
+            <a:ext cx="8096250" cy="209550"/>
+          </a:xfrm>
+          <a:prstGeom xmlns:a="http://schemas.openxmlformats.org/drawingml/2006/main" prst="rect">
+            <a:avLst/>
+          </a:prstGeom>
+          <a:noFill xmlns:a="http://schemas.openxmlformats.org/drawingml/2006/main"/>
+          <a:ln xmlns:a="http://schemas.openxmlformats.org/drawingml/2006/main" w="0">
+            <a:noFill/>
+            <a:prstDash val="solid"/>
+          </a:ln>
+        </p:spPr>
+        <p:txBody>
+          <a:bodyPr xmlns:a="http://schemas.openxmlformats.org/drawingml/2006/main" lIns="0" tIns="0" rIns="0" bIns="0">
+            <a:noAutofit/>
+          </a:bodyPr>
+          <a:lstStyle xmlns:a="http://schemas.openxmlformats.org/drawingml/2006/main"/>
+          <a:p xmlns:a="http://schemas.openxmlformats.org/drawingml/2006/main">
+            <a:r>
+              <a:t/>
+            </a:r>
+          </a:p>
+        </p:txBody>
+      </p:sp>
+      <p:sp>
+        <p:nvSpPr>
+          <p:cNvPr id="5" name="">
+            <a:extLst xmlns:a="http://schemas.openxmlformats.org/drawingml/2006/main">
+              <a:ext uri="{FF2B5EF4-FFF2-40B4-BE49-F238E27FC236}">
+                <a16:creationId xmlns:a16="http://schemas.microsoft.com/office/drawing/2014/main" id="{1D0130E0-0465-4E4C-950D-D31A764EAA47}"/>
+              </a:ext>
+            </a:extLst>
+          </p:cNvPr>
+          <p:cNvSpPr>
+            <a:spLocks xmlns:a="http://schemas.openxmlformats.org/drawingml/2006/main" noGrp="1"/>
+          </p:cNvSpPr>
+          <p:nvPr/>
+        </p:nvSpPr>
+        <p:spPr>
+          <a:xfrm xmlns:a="http://schemas.openxmlformats.org/drawingml/2006/main">
+            <a:off x="514350" y="1466850"/>
             <a:ext cx="10287000" cy="28575"/>
           </a:xfrm>
           <a:prstGeom xmlns:a="http://schemas.openxmlformats.org/drawingml/2006/main" prst="rect">
@@ -1420,10 +2605,10 @@
       </p:sp>
       <p:sp>
         <p:nvSpPr>
-          <p:cNvPr id="5" name="">
+          <p:cNvPr id="6" name="">
             <a:extLst xmlns:a="http://schemas.openxmlformats.org/drawingml/2006/main">
               <a:ext uri="{FF2B5EF4-FFF2-40B4-BE49-F238E27FC236}">
-                <a16:creationId xmlns:a16="http://schemas.microsoft.com/office/drawing/2014/main" id="{C2D92F6B-E2C0-43DC-AA13-1DE9DE330219}"/>
+                <a16:creationId xmlns:a16="http://schemas.microsoft.com/office/drawing/2014/main" id="{C3F4FCE1-C681-4E4D-8B34-39752D24704F}"/>
               </a:ext>
             </a:extLst>
           </p:cNvPr>
@@ -1434,8 +2619,8 @@
         </p:nvSpPr>
         <p:spPr>
           <a:xfrm xmlns:a="http://schemas.openxmlformats.org/drawingml/2006/main">
-            <a:off x="514350" y="1676400"/>
-            <a:ext cx="4095750" cy="266700"/>
+            <a:off x="514350" y="1724025"/>
+            <a:ext cx="3429000" cy="266700"/>
           </a:xfrm>
           <a:prstGeom xmlns:a="http://schemas.openxmlformats.org/drawingml/2006/main" prst="rect">
             <a:avLst/>
@@ -1453,7 +2638,7 @@
           <a:lstStyle xmlns:a="http://schemas.openxmlformats.org/drawingml/2006/main"/>
           <a:p xmlns:a="http://schemas.openxmlformats.org/drawingml/2006/main">
             <a:pPr>
-              <a:defRPr sz="1575" b="1">
+              <a:defRPr sz="1650" b="1">
                 <a:solidFill>
                   <a:srgbClr val="102A34"/>
                 </a:solidFill>
@@ -1463,7 +2648,7 @@
               </a:defRPr>
             </a:pPr>
             <a:r>
-              <a:rPr sz="1575" b="1">
+              <a:rPr sz="1650" b="1">
                 <a:solidFill>
                   <a:srgbClr val="102A34"/>
                 </a:solidFill>
@@ -1478,10 +2663,10 @@
       </p:sp>
       <p:sp>
         <p:nvSpPr>
-          <p:cNvPr id="6" name="">
+          <p:cNvPr id="7" name="">
             <a:extLst xmlns:a="http://schemas.openxmlformats.org/drawingml/2006/main">
               <a:ext uri="{FF2B5EF4-FFF2-40B4-BE49-F238E27FC236}">
-                <a16:creationId xmlns:a16="http://schemas.microsoft.com/office/drawing/2014/main" id="{54E513E3-4149-43DF-BFDF-3F7A7C2060D7}"/>
+                <a16:creationId xmlns:a16="http://schemas.microsoft.com/office/drawing/2014/main" id="{72ADFD96-0C77-444F-87FB-A9265E155106}"/>
               </a:ext>
             </a:extLst>
           </p:cNvPr>
@@ -1492,8 +2677,8 @@
         </p:nvSpPr>
         <p:spPr>
           <a:xfrm xmlns:a="http://schemas.openxmlformats.org/drawingml/2006/main">
-            <a:off x="514350" y="2038350"/>
-            <a:ext cx="5124450" cy="457200"/>
+            <a:off x="514350" y="2076450"/>
+            <a:ext cx="5334000" cy="361950"/>
           </a:xfrm>
           <a:prstGeom xmlns:a="http://schemas.openxmlformats.org/drawingml/2006/main" prst="rect">
             <a:avLst/>
@@ -1512,10 +2697,10 @@
           <a:p xmlns:a="http://schemas.openxmlformats.org/drawingml/2006/main">
             <a:pPr>
               <a:lnSpc>
-                <a:spcPct val="102000"/>
+                <a:spcPct val="106000"/>
               </a:lnSpc>
               <a:buNone/>
-              <a:defRPr sz="1125">
+              <a:defRPr sz="1013">
                 <a:solidFill>
                   <a:srgbClr val="253B44"/>
                 </a:solidFill>
@@ -1525,7 +2710,7 @@
               </a:defRPr>
             </a:pPr>
             <a:r>
-              <a:rPr sz="1125">
+              <a:rPr sz="1013">
                 <a:solidFill>
                   <a:srgbClr val="253B44"/>
                 </a:solidFill>
@@ -1540,7 +2725,7 @@
       </p:sp>
       <p:graphicFrame>
         <p:nvGraphicFramePr>
-          <p:cNvPr id="26" name=""/>
+          <p:cNvPr id="29" name=""/>
           <p:cNvGraphicFramePr/>
           <p:nvPr/>
         </p:nvGraphicFramePr>
@@ -1561,14 +2746,14 @@
               <a:tr h="571500">
                 <a:tc>
                   <a:txBody>
-                    <a:bodyPr lIns="38100" tIns="19050" rIns="38100" bIns="19050">
+                    <a:bodyPr lIns="66675" tIns="28575" rIns="57150" bIns="28575">
                       <a:noAutofit/>
                     </a:bodyPr>
                     <a:lstStyle/>
                     <a:p>
                       <a:pPr algn="ctr"/>
                       <a:r>
-                        <a:rPr sz="1875" b="1">
+                        <a:rPr sz="1650" b="1">
                           <a:solidFill>
                             <a:srgbClr val="0F4C5C"/>
                           </a:solidFill>
@@ -1588,14 +2773,14 @@
                 </a:tc>
                 <a:tc>
                   <a:txBody>
-                    <a:bodyPr lIns="38100" tIns="19050" rIns="38100" bIns="19050">
+                    <a:bodyPr lIns="66675" tIns="28575" rIns="57150" bIns="28575">
                       <a:noAutofit/>
                     </a:bodyPr>
                     <a:lstStyle/>
                     <a:p>
                       <a:pPr algn="ctr"/>
                       <a:r>
-                        <a:rPr sz="1875" b="1">
+                        <a:rPr sz="1650" b="1">
                           <a:solidFill>
                             <a:srgbClr val="0F4C5C"/>
                           </a:solidFill>
@@ -1615,14 +2800,14 @@
                 </a:tc>
                 <a:tc>
                   <a:txBody>
-                    <a:bodyPr lIns="38100" tIns="19050" rIns="38100" bIns="19050">
+                    <a:bodyPr lIns="66675" tIns="28575" rIns="57150" bIns="28575">
                       <a:noAutofit/>
                     </a:bodyPr>
                     <a:lstStyle/>
                     <a:p>
                       <a:pPr algn="ctr"/>
                       <a:r>
-                        <a:rPr sz="1875" b="1">
+                        <a:rPr sz="1650" b="1">
                           <a:solidFill>
                             <a:srgbClr val="0F4C5C"/>
                           </a:solidFill>
@@ -1642,14 +2827,14 @@
                 </a:tc>
                 <a:tc>
                   <a:txBody>
-                    <a:bodyPr lIns="38100" tIns="19050" rIns="38100" bIns="19050">
+                    <a:bodyPr lIns="66675" tIns="28575" rIns="57150" bIns="28575">
                       <a:noAutofit/>
                     </a:bodyPr>
                     <a:lstStyle/>
                     <a:p>
                       <a:pPr algn="ctr"/>
                       <a:r>
-                        <a:rPr sz="1875" b="1">
+                        <a:rPr sz="1650" b="1">
                           <a:solidFill>
                             <a:srgbClr val="0F4C5C"/>
                           </a:solidFill>
@@ -1671,14 +2856,14 @@
               <a:tr h="571500">
                 <a:tc>
                   <a:txBody>
-                    <a:bodyPr lIns="38100" tIns="19050" rIns="38100" bIns="19050">
+                    <a:bodyPr lIns="66675" tIns="28575" rIns="57150" bIns="28575">
                       <a:noAutofit/>
                     </a:bodyPr>
                     <a:lstStyle/>
                     <a:p>
                       <a:pPr algn="ctr"/>
                       <a:r>
-                        <a:rPr sz="788" b="0">
+                        <a:rPr sz="705" b="0">
                           <a:solidFill>
                             <a:srgbClr val="50636B"/>
                           </a:solidFill>
@@ -1698,14 +2883,14 @@
                 </a:tc>
                 <a:tc>
                   <a:txBody>
-                    <a:bodyPr lIns="38100" tIns="19050" rIns="38100" bIns="19050">
+                    <a:bodyPr lIns="66675" tIns="28575" rIns="57150" bIns="28575">
                       <a:noAutofit/>
                     </a:bodyPr>
                     <a:lstStyle/>
                     <a:p>
                       <a:pPr algn="ctr"/>
                       <a:r>
-                        <a:rPr sz="788" b="0">
+                        <a:rPr sz="705" b="0">
                           <a:solidFill>
                             <a:srgbClr val="50636B"/>
                           </a:solidFill>
@@ -1725,14 +2910,14 @@
                 </a:tc>
                 <a:tc>
                   <a:txBody>
-                    <a:bodyPr lIns="38100" tIns="19050" rIns="38100" bIns="19050">
+                    <a:bodyPr lIns="66675" tIns="28575" rIns="57150" bIns="28575">
                       <a:noAutofit/>
                     </a:bodyPr>
                     <a:lstStyle/>
                     <a:p>
                       <a:pPr algn="ctr"/>
                       <a:r>
-                        <a:rPr sz="788" b="0">
+                        <a:rPr sz="705" b="0">
                           <a:solidFill>
                             <a:srgbClr val="50636B"/>
                           </a:solidFill>
@@ -1752,14 +2937,14 @@
                 </a:tc>
                 <a:tc>
                   <a:txBody>
-                    <a:bodyPr lIns="38100" tIns="19050" rIns="38100" bIns="19050">
+                    <a:bodyPr lIns="66675" tIns="28575" rIns="57150" bIns="28575">
                       <a:noAutofit/>
                     </a:bodyPr>
                     <a:lstStyle/>
                     <a:p>
                       <a:pPr algn="ctr"/>
                       <a:r>
-                        <a:rPr sz="788" b="0">
+                        <a:rPr sz="705" b="0">
                           <a:solidFill>
                             <a:srgbClr val="50636B"/>
                           </a:solidFill>
@@ -1784,10 +2969,10 @@
       </p:graphicFrame>
       <p:sp>
         <p:nvSpPr>
-          <p:cNvPr id="8" name="">
+          <p:cNvPr id="9" name="">
             <a:extLst xmlns:a="http://schemas.openxmlformats.org/drawingml/2006/main">
               <a:ext uri="{FF2B5EF4-FFF2-40B4-BE49-F238E27FC236}">
-                <a16:creationId xmlns:a16="http://schemas.microsoft.com/office/drawing/2014/main" id="{CD6FF1E3-4EE1-4CCB-ADC1-76C4421B17B1}"/>
+                <a16:creationId xmlns:a16="http://schemas.microsoft.com/office/drawing/2014/main" id="{B67EFAF9-E96F-44D4-A9BF-0218F6077D0D}"/>
               </a:ext>
             </a:extLst>
           </p:cNvPr>
@@ -1798,8 +2983,8 @@
         </p:nvSpPr>
         <p:spPr>
           <a:xfrm xmlns:a="http://schemas.openxmlformats.org/drawingml/2006/main">
-            <a:off x="6515100" y="1676400"/>
-            <a:ext cx="4476750" cy="266700"/>
+            <a:off x="6515100" y="1724025"/>
+            <a:ext cx="3714750" cy="266700"/>
           </a:xfrm>
           <a:prstGeom xmlns:a="http://schemas.openxmlformats.org/drawingml/2006/main" prst="rect">
             <a:avLst/>
@@ -1817,7 +3002,7 @@
           <a:lstStyle xmlns:a="http://schemas.openxmlformats.org/drawingml/2006/main"/>
           <a:p xmlns:a="http://schemas.openxmlformats.org/drawingml/2006/main">
             <a:pPr>
-              <a:defRPr sz="1575" b="1">
+              <a:defRPr sz="1650" b="1">
                 <a:solidFill>
                   <a:srgbClr val="102A34"/>
                 </a:solidFill>
@@ -1827,7 +3012,7 @@
               </a:defRPr>
             </a:pPr>
             <a:r>
-              <a:rPr sz="1575" b="1">
+              <a:rPr sz="1650" b="1">
                 <a:solidFill>
                   <a:srgbClr val="102A34"/>
                 </a:solidFill>
@@ -1842,10 +3027,10 @@
       </p:sp>
       <p:sp>
         <p:nvSpPr>
-          <p:cNvPr id="9" name="">
+          <p:cNvPr id="10" name="">
             <a:extLst xmlns:a="http://schemas.openxmlformats.org/drawingml/2006/main">
               <a:ext uri="{FF2B5EF4-FFF2-40B4-BE49-F238E27FC236}">
-                <a16:creationId xmlns:a16="http://schemas.microsoft.com/office/drawing/2014/main" id="{40211102-73BE-46DD-B26A-8AB83A6F503A}"/>
+                <a16:creationId xmlns:a16="http://schemas.microsoft.com/office/drawing/2014/main" id="{DDC49FA7-65DA-4129-8504-D1869E203AB5}"/>
               </a:ext>
             </a:extLst>
           </p:cNvPr>
@@ -1856,8 +3041,8 @@
         </p:nvSpPr>
         <p:spPr>
           <a:xfrm xmlns:a="http://schemas.openxmlformats.org/drawingml/2006/main">
-            <a:off x="6515100" y="2038350"/>
-            <a:ext cx="4286250" cy="457200"/>
+            <a:off x="6515100" y="2076450"/>
+            <a:ext cx="4476750" cy="400050"/>
           </a:xfrm>
           <a:prstGeom xmlns:a="http://schemas.openxmlformats.org/drawingml/2006/main" prst="rect">
             <a:avLst/>
@@ -1876,10 +3061,10 @@
           <a:p xmlns:a="http://schemas.openxmlformats.org/drawingml/2006/main">
             <a:pPr>
               <a:lnSpc>
-                <a:spcPct val="102000"/>
+                <a:spcPct val="105000"/>
               </a:lnSpc>
               <a:buNone/>
-              <a:defRPr sz="1125">
+              <a:defRPr sz="1005">
                 <a:solidFill>
                   <a:srgbClr val="253B44"/>
                 </a:solidFill>
@@ -1889,7 +3074,7 @@
               </a:defRPr>
             </a:pPr>
             <a:r>
-              <a:rPr sz="1125">
+              <a:rPr sz="1005">
                 <a:solidFill>
                   <a:srgbClr val="253B44"/>
                 </a:solidFill>
@@ -1904,26 +3089,26 @@
       </p:sp>
       <p:graphicFrame>
         <p:nvGraphicFramePr>
-          <p:cNvPr id="29" name="Chart"/>
+          <p:cNvPr id="32" name="Chart"/>
           <p:cNvGraphicFramePr/>
           <p:nvPr/>
         </p:nvGraphicFramePr>
         <p:xfrm>
-          <a:off xmlns:a="http://schemas.openxmlformats.org/drawingml/2006/main" x="6457950" y="2609850"/>
-          <a:ext xmlns:a="http://schemas.openxmlformats.org/drawingml/2006/main" cx="4343400" cy="1143000"/>
+          <a:off xmlns:a="http://schemas.openxmlformats.org/drawingml/2006/main" x="6667500" y="2657475"/>
+          <a:ext xmlns:a="http://schemas.openxmlformats.org/drawingml/2006/main" cx="4048125" cy="904875"/>
         </p:xfrm>
         <a:graphic xmlns:a="http://schemas.openxmlformats.org/drawingml/2006/main">
           <a:graphicData uri="http://schemas.openxmlformats.org/drawingml/2006/chart">
-            <c:chart xmlns:r="http://schemas.openxmlformats.org/officeDocument/2006/relationships" xmlns:c="http://schemas.openxmlformats.org/drawingml/2006/chart" r:id="R7556978d0ed44278"/>
+            <c:chart xmlns:r="http://schemas.openxmlformats.org/officeDocument/2006/relationships" xmlns:c="http://schemas.openxmlformats.org/drawingml/2006/chart" r:id="Rc7644f3738914494"/>
           </a:graphicData>
         </a:graphic>
       </p:graphicFrame>
       <p:sp>
         <p:nvSpPr>
-          <p:cNvPr id="11" name="">
+          <p:cNvPr id="12" name="">
             <a:extLst xmlns:a="http://schemas.openxmlformats.org/drawingml/2006/main">
               <a:ext uri="{FF2B5EF4-FFF2-40B4-BE49-F238E27FC236}">
-                <a16:creationId xmlns:a16="http://schemas.microsoft.com/office/drawing/2014/main" id="{3FDAF6D7-46BF-478C-8AC9-F25034F0AB4D}"/>
+                <a16:creationId xmlns:a16="http://schemas.microsoft.com/office/drawing/2014/main" id="{52F7C1C2-F62C-4C56-9BA7-94B35B053768}"/>
               </a:ext>
             </a:extLst>
           </p:cNvPr>
@@ -1934,8 +3119,8 @@
         </p:nvSpPr>
         <p:spPr>
           <a:xfrm xmlns:a="http://schemas.openxmlformats.org/drawingml/2006/main">
-            <a:off x="6515100" y="3800475"/>
-            <a:ext cx="4286250" cy="228600"/>
+            <a:off x="6515100" y="3838575"/>
+            <a:ext cx="4286250" cy="209550"/>
           </a:xfrm>
           <a:prstGeom xmlns:a="http://schemas.openxmlformats.org/drawingml/2006/main" prst="rect">
             <a:avLst/>
@@ -1953,7 +3138,7 @@
           <a:lstStyle xmlns:a="http://schemas.openxmlformats.org/drawingml/2006/main"/>
           <a:p xmlns:a="http://schemas.openxmlformats.org/drawingml/2006/main">
             <a:pPr>
-              <a:defRPr sz="1215" b="1">
+              <a:defRPr sz="1200" b="1">
                 <a:solidFill>
                   <a:srgbClr val="0F4C5C"/>
                 </a:solidFill>
@@ -1963,7 +3148,7 @@
               </a:defRPr>
             </a:pPr>
             <a:r>
-              <a:rPr sz="1215" b="1">
+              <a:rPr sz="1200" b="1">
                 <a:solidFill>
                   <a:srgbClr val="0F4C5C"/>
                 </a:solidFill>
@@ -1978,10 +3163,10 @@
       </p:sp>
       <p:sp>
         <p:nvSpPr>
-          <p:cNvPr id="12" name="">
+          <p:cNvPr id="13" name="">
             <a:extLst xmlns:a="http://schemas.openxmlformats.org/drawingml/2006/main">
               <a:ext uri="{FF2B5EF4-FFF2-40B4-BE49-F238E27FC236}">
-                <a16:creationId xmlns:a16="http://schemas.microsoft.com/office/drawing/2014/main" id="{9E47E763-3761-4A38-8DCF-54DBF8CF7A22}"/>
+                <a16:creationId xmlns:a16="http://schemas.microsoft.com/office/drawing/2014/main" id="{C809369D-D12E-47EA-B407-30339FA498E2}"/>
               </a:ext>
             </a:extLst>
           </p:cNvPr>
@@ -2009,10 +3194,10 @@
       </p:sp>
       <p:sp>
         <p:nvSpPr>
-          <p:cNvPr id="13" name="">
+          <p:cNvPr id="14" name="">
             <a:extLst xmlns:a="http://schemas.openxmlformats.org/drawingml/2006/main">
               <a:ext uri="{FF2B5EF4-FFF2-40B4-BE49-F238E27FC236}">
-                <a16:creationId xmlns:a16="http://schemas.microsoft.com/office/drawing/2014/main" id="{7C60FB9C-B666-4C1A-AB81-89D90F3F0D60}"/>
+                <a16:creationId xmlns:a16="http://schemas.microsoft.com/office/drawing/2014/main" id="{7FE9F527-0092-4FDC-A4E5-E3E3A84A9E6A}"/>
               </a:ext>
             </a:extLst>
           </p:cNvPr>
@@ -2023,8 +3208,8 @@
         </p:nvSpPr>
         <p:spPr>
           <a:xfrm xmlns:a="http://schemas.openxmlformats.org/drawingml/2006/main">
-            <a:off x="514350" y="4324350"/>
-            <a:ext cx="4095750" cy="247650"/>
+            <a:off x="514350" y="4371975"/>
+            <a:ext cx="3429000" cy="228600"/>
           </a:xfrm>
           <a:prstGeom xmlns:a="http://schemas.openxmlformats.org/drawingml/2006/main" prst="rect">
             <a:avLst/>
@@ -2067,13 +3252,13 @@
       </p:sp>
       <p:graphicFrame>
         <p:nvGraphicFramePr>
-          <p:cNvPr id="33" name=""/>
+          <p:cNvPr id="36" name=""/>
           <p:cNvGraphicFramePr/>
           <p:nvPr/>
         </p:nvGraphicFramePr>
         <p:xfrm>
           <a:off xmlns:a="http://schemas.openxmlformats.org/drawingml/2006/main" x="514350" y="4686300"/>
-          <a:ext xmlns:a="http://schemas.openxmlformats.org/drawingml/2006/main" cx="5543550" cy="1447800"/>
+          <a:ext xmlns:a="http://schemas.openxmlformats.org/drawingml/2006/main" cx="5543550" cy="1609725"/>
         </p:xfrm>
         <a:graphic xmlns:a="http://schemas.openxmlformats.org/drawingml/2006/main">
           <a:graphicData uri="http://schemas.openxmlformats.org/drawingml/2006/table">
@@ -2083,17 +3268,17 @@
                 <a:gridCol w="2114550"/>
                 <a:gridCol w="3429000"/>
               </a:tblGrid>
-              <a:tr h="180975">
+              <a:tr h="201216">
                 <a:tc>
                   <a:txBody>
-                    <a:bodyPr lIns="57150" tIns="19050" rIns="38100" bIns="19050">
+                    <a:bodyPr lIns="66675" tIns="28575" rIns="57150" bIns="28575">
                       <a:noAutofit/>
                     </a:bodyPr>
                     <a:lstStyle/>
                     <a:p>
                       <a:pPr algn="l"/>
                       <a:r>
-                        <a:rPr sz="788" b="1">
+                        <a:rPr sz="638" b="1">
                           <a:solidFill>
                             <a:srgbClr val="FFFFFF"/>
                           </a:solidFill>
@@ -2113,14 +3298,14 @@
                 </a:tc>
                 <a:tc>
                   <a:txBody>
-                    <a:bodyPr lIns="57150" tIns="19050" rIns="38100" bIns="19050">
+                    <a:bodyPr lIns="66675" tIns="28575" rIns="57150" bIns="28575">
                       <a:noAutofit/>
                     </a:bodyPr>
                     <a:lstStyle/>
                     <a:p>
                       <a:pPr algn="l"/>
                       <a:r>
-                        <a:rPr sz="788" b="1">
+                        <a:rPr sz="638" b="1">
                           <a:solidFill>
                             <a:srgbClr val="FFFFFF"/>
                           </a:solidFill>
@@ -2139,17 +3324,17 @@
                   </a:tcPr>
                 </a:tc>
               </a:tr>
-              <a:tr h="180975">
+              <a:tr h="201216">
                 <a:tc>
                   <a:txBody>
-                    <a:bodyPr lIns="57150" tIns="19050" rIns="38100" bIns="19050">
+                    <a:bodyPr lIns="66675" tIns="28575" rIns="57150" bIns="28575">
                       <a:noAutofit/>
                     </a:bodyPr>
                     <a:lstStyle/>
                     <a:p>
                       <a:pPr algn="l"/>
                       <a:r>
-                        <a:rPr sz="698" b="1">
+                        <a:rPr sz="585" b="1">
                           <a:solidFill>
                             <a:srgbClr val="253B44"/>
                           </a:solidFill>
@@ -2169,14 +3354,14 @@
                 </a:tc>
                 <a:tc>
                   <a:txBody>
-                    <a:bodyPr lIns="57150" tIns="19050" rIns="38100" bIns="19050">
+                    <a:bodyPr lIns="66675" tIns="28575" rIns="57150" bIns="28575">
                       <a:noAutofit/>
                     </a:bodyPr>
                     <a:lstStyle/>
                     <a:p>
                       <a:pPr algn="l"/>
                       <a:r>
-                        <a:rPr sz="698" b="0">
+                        <a:rPr sz="585" b="0">
                           <a:solidFill>
                             <a:srgbClr val="253B44"/>
                           </a:solidFill>
@@ -2195,17 +3380,17 @@
                   </a:tcPr>
                 </a:tc>
               </a:tr>
-              <a:tr h="180975">
+              <a:tr h="201216">
                 <a:tc>
                   <a:txBody>
-                    <a:bodyPr lIns="57150" tIns="19050" rIns="38100" bIns="19050">
+                    <a:bodyPr lIns="66675" tIns="28575" rIns="57150" bIns="28575">
                       <a:noAutofit/>
                     </a:bodyPr>
                     <a:lstStyle/>
                     <a:p>
                       <a:pPr algn="l"/>
                       <a:r>
-                        <a:rPr sz="698" b="1">
+                        <a:rPr sz="585" b="1">
                           <a:solidFill>
                             <a:srgbClr val="253B44"/>
                           </a:solidFill>
@@ -2225,14 +3410,14 @@
                 </a:tc>
                 <a:tc>
                   <a:txBody>
-                    <a:bodyPr lIns="57150" tIns="19050" rIns="38100" bIns="19050">
+                    <a:bodyPr lIns="66675" tIns="28575" rIns="57150" bIns="28575">
                       <a:noAutofit/>
                     </a:bodyPr>
                     <a:lstStyle/>
                     <a:p>
                       <a:pPr algn="l"/>
                       <a:r>
-                        <a:rPr sz="698" b="0">
+                        <a:rPr sz="585" b="0">
                           <a:solidFill>
                             <a:srgbClr val="253B44"/>
                           </a:solidFill>
@@ -2251,17 +3436,17 @@
                   </a:tcPr>
                 </a:tc>
               </a:tr>
-              <a:tr h="180975">
+              <a:tr h="201216">
                 <a:tc>
                   <a:txBody>
-                    <a:bodyPr lIns="57150" tIns="19050" rIns="38100" bIns="19050">
+                    <a:bodyPr lIns="66675" tIns="28575" rIns="57150" bIns="28575">
                       <a:noAutofit/>
                     </a:bodyPr>
                     <a:lstStyle/>
                     <a:p>
                       <a:pPr algn="l"/>
                       <a:r>
-                        <a:rPr sz="698" b="1">
+                        <a:rPr sz="585" b="1">
                           <a:solidFill>
                             <a:srgbClr val="253B44"/>
                           </a:solidFill>
@@ -2281,14 +3466,14 @@
                 </a:tc>
                 <a:tc>
                   <a:txBody>
-                    <a:bodyPr lIns="57150" tIns="19050" rIns="38100" bIns="19050">
+                    <a:bodyPr lIns="66675" tIns="28575" rIns="57150" bIns="28575">
                       <a:noAutofit/>
                     </a:bodyPr>
                     <a:lstStyle/>
                     <a:p>
                       <a:pPr algn="l"/>
                       <a:r>
-                        <a:rPr sz="698" b="0">
+                        <a:rPr sz="585" b="0">
                           <a:solidFill>
                             <a:srgbClr val="253B44"/>
                           </a:solidFill>
@@ -2307,17 +3492,17 @@
                   </a:tcPr>
                 </a:tc>
               </a:tr>
-              <a:tr h="180975">
+              <a:tr h="201216">
                 <a:tc>
                   <a:txBody>
-                    <a:bodyPr lIns="57150" tIns="19050" rIns="38100" bIns="19050">
+                    <a:bodyPr lIns="66675" tIns="28575" rIns="57150" bIns="28575">
                       <a:noAutofit/>
                     </a:bodyPr>
                     <a:lstStyle/>
                     <a:p>
                       <a:pPr algn="l"/>
                       <a:r>
-                        <a:rPr sz="698" b="1">
+                        <a:rPr sz="585" b="1">
                           <a:solidFill>
                             <a:srgbClr val="253B44"/>
                           </a:solidFill>
@@ -2337,14 +3522,14 @@
                 </a:tc>
                 <a:tc>
                   <a:txBody>
-                    <a:bodyPr lIns="57150" tIns="19050" rIns="38100" bIns="19050">
+                    <a:bodyPr lIns="66675" tIns="28575" rIns="57150" bIns="28575">
                       <a:noAutofit/>
                     </a:bodyPr>
                     <a:lstStyle/>
                     <a:p>
                       <a:pPr algn="l"/>
                       <a:r>
-                        <a:rPr sz="698" b="0">
+                        <a:rPr sz="585" b="0">
                           <a:solidFill>
                             <a:srgbClr val="253B44"/>
                           </a:solidFill>
@@ -2363,17 +3548,17 @@
                   </a:tcPr>
                 </a:tc>
               </a:tr>
-              <a:tr h="180975">
+              <a:tr h="201216">
                 <a:tc>
                   <a:txBody>
-                    <a:bodyPr lIns="57150" tIns="19050" rIns="38100" bIns="19050">
+                    <a:bodyPr lIns="66675" tIns="28575" rIns="57150" bIns="28575">
                       <a:noAutofit/>
                     </a:bodyPr>
                     <a:lstStyle/>
                     <a:p>
                       <a:pPr algn="l"/>
                       <a:r>
-                        <a:rPr sz="698" b="1">
+                        <a:rPr sz="585" b="1">
                           <a:solidFill>
                             <a:srgbClr val="253B44"/>
                           </a:solidFill>
@@ -2393,14 +3578,14 @@
                 </a:tc>
                 <a:tc>
                   <a:txBody>
-                    <a:bodyPr lIns="57150" tIns="19050" rIns="38100" bIns="19050">
+                    <a:bodyPr lIns="66675" tIns="28575" rIns="57150" bIns="28575">
                       <a:noAutofit/>
                     </a:bodyPr>
                     <a:lstStyle/>
                     <a:p>
                       <a:pPr algn="l"/>
                       <a:r>
-                        <a:rPr sz="698" b="0">
+                        <a:rPr sz="585" b="0">
                           <a:solidFill>
                             <a:srgbClr val="253B44"/>
                           </a:solidFill>
@@ -2419,17 +3604,17 @@
                   </a:tcPr>
                 </a:tc>
               </a:tr>
-              <a:tr h="180975">
+              <a:tr h="201216">
                 <a:tc>
                   <a:txBody>
-                    <a:bodyPr lIns="57150" tIns="19050" rIns="38100" bIns="19050">
+                    <a:bodyPr lIns="66675" tIns="28575" rIns="57150" bIns="28575">
                       <a:noAutofit/>
                     </a:bodyPr>
                     <a:lstStyle/>
                     <a:p>
                       <a:pPr algn="l"/>
                       <a:r>
-                        <a:rPr sz="698" b="1">
+                        <a:rPr sz="585" b="1">
                           <a:solidFill>
                             <a:srgbClr val="253B44"/>
                           </a:solidFill>
@@ -2449,14 +3634,14 @@
                 </a:tc>
                 <a:tc>
                   <a:txBody>
-                    <a:bodyPr lIns="57150" tIns="19050" rIns="38100" bIns="19050">
+                    <a:bodyPr lIns="66675" tIns="28575" rIns="57150" bIns="28575">
                       <a:noAutofit/>
                     </a:bodyPr>
                     <a:lstStyle/>
                     <a:p>
                       <a:pPr algn="l"/>
                       <a:r>
-                        <a:rPr sz="698" b="0">
+                        <a:rPr sz="585" b="0">
                           <a:solidFill>
                             <a:srgbClr val="253B44"/>
                           </a:solidFill>
@@ -2475,17 +3660,17 @@
                   </a:tcPr>
                 </a:tc>
               </a:tr>
-              <a:tr h="180975">
+              <a:tr h="201216">
                 <a:tc>
                   <a:txBody>
-                    <a:bodyPr lIns="57150" tIns="19050" rIns="38100" bIns="19050">
+                    <a:bodyPr lIns="66675" tIns="28575" rIns="57150" bIns="28575">
                       <a:noAutofit/>
                     </a:bodyPr>
                     <a:lstStyle/>
                     <a:p>
                       <a:pPr algn="l"/>
                       <a:r>
-                        <a:rPr sz="698" b="1">
+                        <a:rPr sz="585" b="1">
                           <a:solidFill>
                             <a:srgbClr val="253B44"/>
                           </a:solidFill>
@@ -2505,14 +3690,14 @@
                 </a:tc>
                 <a:tc>
                   <a:txBody>
-                    <a:bodyPr lIns="57150" tIns="19050" rIns="38100" bIns="19050">
+                    <a:bodyPr lIns="66675" tIns="28575" rIns="57150" bIns="28575">
                       <a:noAutofit/>
                     </a:bodyPr>
                     <a:lstStyle/>
                     <a:p>
                       <a:pPr algn="l"/>
                       <a:r>
-                        <a:rPr sz="698" b="0">
+                        <a:rPr sz="585" b="0">
                           <a:solidFill>
                             <a:srgbClr val="253B44"/>
                           </a:solidFill>
@@ -2537,10 +3722,10 @@
       </p:graphicFrame>
       <p:sp>
         <p:nvSpPr>
-          <p:cNvPr id="15" name="">
+          <p:cNvPr id="16" name="">
             <a:extLst xmlns:a="http://schemas.openxmlformats.org/drawingml/2006/main">
               <a:ext uri="{FF2B5EF4-FFF2-40B4-BE49-F238E27FC236}">
-                <a16:creationId xmlns:a16="http://schemas.microsoft.com/office/drawing/2014/main" id="{7C9E955E-F12B-47D0-B965-4E5697E52188}"/>
+                <a16:creationId xmlns:a16="http://schemas.microsoft.com/office/drawing/2014/main" id="{1C971B73-6FB5-4954-B9A7-32B613C996EB}"/>
               </a:ext>
             </a:extLst>
           </p:cNvPr>
@@ -2551,8 +3736,8 @@
         </p:nvSpPr>
         <p:spPr>
           <a:xfrm xmlns:a="http://schemas.openxmlformats.org/drawingml/2006/main">
-            <a:off x="6515100" y="4324350"/>
-            <a:ext cx="2095500" cy="247650"/>
+            <a:off x="6515100" y="4371975"/>
+            <a:ext cx="2095500" cy="228600"/>
           </a:xfrm>
           <a:prstGeom xmlns:a="http://schemas.openxmlformats.org/drawingml/2006/main" prst="rect">
             <a:avLst/>
@@ -2595,10 +3780,10 @@
       </p:sp>
       <p:sp>
         <p:nvSpPr>
-          <p:cNvPr id="16" name="">
+          <p:cNvPr id="17" name="">
             <a:extLst xmlns:a="http://schemas.openxmlformats.org/drawingml/2006/main">
               <a:ext uri="{FF2B5EF4-FFF2-40B4-BE49-F238E27FC236}">
-                <a16:creationId xmlns:a16="http://schemas.microsoft.com/office/drawing/2014/main" id="{192CF1E0-D23C-46F6-914E-9E10B147AE6F}"/>
+                <a16:creationId xmlns:a16="http://schemas.microsoft.com/office/drawing/2014/main" id="{A6FC7095-5901-4597-B999-E424D9348D51}"/>
               </a:ext>
             </a:extLst>
           </p:cNvPr>
@@ -2609,8 +3794,8 @@
         </p:nvSpPr>
         <p:spPr>
           <a:xfrm xmlns:a="http://schemas.openxmlformats.org/drawingml/2006/main">
-            <a:off x="6515100" y="4686300"/>
-            <a:ext cx="2190750" cy="1257300"/>
+            <a:off x="6591300" y="4733925"/>
+            <a:ext cx="2095500" cy="1000125"/>
           </a:xfrm>
           <a:prstGeom xmlns:a="http://schemas.openxmlformats.org/drawingml/2006/main" prst="rect">
             <a:avLst/>
@@ -2627,12 +3812,15 @@
           </a:bodyPr>
           <a:lstStyle xmlns:a="http://schemas.openxmlformats.org/drawingml/2006/main"/>
           <a:p xmlns:a="http://schemas.openxmlformats.org/drawingml/2006/main">
-            <a:pPr marL="165100" indent="-76200">
+            <a:pPr marL="139700" indent="-63500">
+              <a:lnSpc>
+                <a:spcPct val="104000"/>
+              </a:lnSpc>
               <a:spcAft>
                 <a:spcPts val="300"/>
               </a:spcAft>
-              <a:buChar char="•"/>
-              <a:defRPr sz="945">
+              <a:buNone/>
+              <a:defRPr sz="840">
                 <a:solidFill>
                   <a:srgbClr val="253B44"/>
                 </a:solidFill>
@@ -2642,7 +3830,7 @@
               </a:defRPr>
             </a:pPr>
             <a:r>
-              <a:rPr sz="945">
+              <a:rPr sz="840">
                 <a:solidFill>
                   <a:srgbClr val="253B44"/>
                 </a:solidFill>
@@ -2654,12 +3842,15 @@
             </a:r>
           </a:p>
           <a:p xmlns:a="http://schemas.openxmlformats.org/drawingml/2006/main">
-            <a:pPr marL="165100" indent="-76200">
+            <a:pPr marL="139700" indent="-63500">
+              <a:lnSpc>
+                <a:spcPct val="104000"/>
+              </a:lnSpc>
               <a:spcAft>
                 <a:spcPts val="300"/>
               </a:spcAft>
-              <a:buChar char="•"/>
-              <a:defRPr sz="945">
+              <a:buNone/>
+              <a:defRPr sz="840">
                 <a:solidFill>
                   <a:srgbClr val="253B44"/>
                 </a:solidFill>
@@ -2669,7 +3860,7 @@
               </a:defRPr>
             </a:pPr>
             <a:r>
-              <a:rPr sz="945">
+              <a:rPr sz="840">
                 <a:solidFill>
                   <a:srgbClr val="253B44"/>
                 </a:solidFill>
@@ -2681,12 +3872,15 @@
             </a:r>
           </a:p>
           <a:p xmlns:a="http://schemas.openxmlformats.org/drawingml/2006/main">
-            <a:pPr marL="165100" indent="-76200">
+            <a:pPr marL="139700" indent="-63500">
+              <a:lnSpc>
+                <a:spcPct val="104000"/>
+              </a:lnSpc>
               <a:spcAft>
                 <a:spcPts val="300"/>
               </a:spcAft>
-              <a:buChar char="•"/>
-              <a:defRPr sz="945">
+              <a:buNone/>
+              <a:defRPr sz="840">
                 <a:solidFill>
                   <a:srgbClr val="253B44"/>
                 </a:solidFill>
@@ -2696,7 +3890,7 @@
               </a:defRPr>
             </a:pPr>
             <a:r>
-              <a:rPr sz="945">
+              <a:rPr sz="840">
                 <a:solidFill>
                   <a:srgbClr val="253B44"/>
                 </a:solidFill>
@@ -2708,12 +3902,15 @@
             </a:r>
           </a:p>
           <a:p xmlns:a="http://schemas.openxmlformats.org/drawingml/2006/main">
-            <a:pPr marL="165100" indent="-76200">
+            <a:pPr marL="139700" indent="-63500">
+              <a:lnSpc>
+                <a:spcPct val="104000"/>
+              </a:lnSpc>
               <a:spcAft>
                 <a:spcPts val="300"/>
               </a:spcAft>
-              <a:buChar char="•"/>
-              <a:defRPr sz="945">
+              <a:buNone/>
+              <a:defRPr sz="840">
                 <a:solidFill>
                   <a:srgbClr val="253B44"/>
                 </a:solidFill>
@@ -2723,7 +3920,7 @@
               </a:defRPr>
             </a:pPr>
             <a:r>
-              <a:rPr sz="945">
+              <a:rPr sz="840">
                 <a:solidFill>
                   <a:srgbClr val="253B44"/>
                 </a:solidFill>
@@ -2738,10 +3935,10 @@
       </p:sp>
       <p:sp>
         <p:nvSpPr>
-          <p:cNvPr id="17" name="">
+          <p:cNvPr id="18" name="">
             <a:extLst xmlns:a="http://schemas.openxmlformats.org/drawingml/2006/main">
               <a:ext uri="{FF2B5EF4-FFF2-40B4-BE49-F238E27FC236}">
-                <a16:creationId xmlns:a16="http://schemas.microsoft.com/office/drawing/2014/main" id="{AFBFDAB8-613F-46AE-9001-1E6A3FA84060}"/>
+                <a16:creationId xmlns:a16="http://schemas.microsoft.com/office/drawing/2014/main" id="{B76DD0D2-2F9A-40B9-AFEA-C007E2BA51D2}"/>
               </a:ext>
             </a:extLst>
           </p:cNvPr>
@@ -2752,8 +3949,8 @@
         </p:nvSpPr>
         <p:spPr>
           <a:xfrm xmlns:a="http://schemas.openxmlformats.org/drawingml/2006/main">
-            <a:off x="8991600" y="4324350"/>
-            <a:ext cx="2286000" cy="247650"/>
+            <a:off x="8991600" y="4371975"/>
+            <a:ext cx="2190750" cy="228600"/>
           </a:xfrm>
           <a:prstGeom xmlns:a="http://schemas.openxmlformats.org/drawingml/2006/main" prst="rect">
             <a:avLst/>
@@ -2796,10 +3993,10 @@
       </p:sp>
       <p:sp>
         <p:nvSpPr>
-          <p:cNvPr id="18" name="">
+          <p:cNvPr id="19" name="">
             <a:extLst xmlns:a="http://schemas.openxmlformats.org/drawingml/2006/main">
               <a:ext uri="{FF2B5EF4-FFF2-40B4-BE49-F238E27FC236}">
-                <a16:creationId xmlns:a16="http://schemas.microsoft.com/office/drawing/2014/main" id="{30AFB3A7-7C11-4F4B-B3CD-319CF8421826}"/>
+                <a16:creationId xmlns:a16="http://schemas.microsoft.com/office/drawing/2014/main" id="{530E71B5-6BD1-4AFB-9C80-07D578AB51E1}"/>
               </a:ext>
             </a:extLst>
           </p:cNvPr>
@@ -2810,8 +4007,8 @@
         </p:nvSpPr>
         <p:spPr>
           <a:xfrm xmlns:a="http://schemas.openxmlformats.org/drawingml/2006/main">
-            <a:off x="8991600" y="4686300"/>
-            <a:ext cx="2381250" cy="1257300"/>
+            <a:off x="8991600" y="4733925"/>
+            <a:ext cx="2190750" cy="685800"/>
           </a:xfrm>
           <a:prstGeom xmlns:a="http://schemas.openxmlformats.org/drawingml/2006/main" prst="rect">
             <a:avLst/>
@@ -2830,10 +4027,10 @@
           <a:p xmlns:a="http://schemas.openxmlformats.org/drawingml/2006/main">
             <a:pPr>
               <a:lnSpc>
-                <a:spcPct val="102000"/>
+                <a:spcPct val="105000"/>
               </a:lnSpc>
               <a:buNone/>
-              <a:defRPr sz="960">
+              <a:defRPr sz="840">
                 <a:solidFill>
                   <a:srgbClr val="253B44"/>
                 </a:solidFill>
@@ -2843,7 +4040,7 @@
               </a:defRPr>
             </a:pPr>
             <a:r>
-              <a:rPr sz="960">
+              <a:rPr sz="840">
                 <a:solidFill>
                   <a:srgbClr val="253B44"/>
                 </a:solidFill>
@@ -2852,48 +4049,16 @@
                 <a:cs typeface="Helvetica Neue"/>
               </a:rPr>
               <a:t>Working belief: readmissions are rising because high-risk patients are not consistently matched to the right post-discharge support.</a:t>
-            </a:r>
-          </a:p>
-          <a:p xmlns:a="http://schemas.openxmlformats.org/drawingml/2006/main">
-            <a:r>
-              <a:t/>
-            </a:r>
-          </a:p>
-          <a:p xmlns:a="http://schemas.openxmlformats.org/drawingml/2006/main">
-            <a:pPr>
-              <a:lnSpc>
-                <a:spcPct val="102000"/>
-              </a:lnSpc>
-              <a:buNone/>
-              <a:defRPr sz="960">
-                <a:solidFill>
-                  <a:srgbClr val="253B44"/>
-                </a:solidFill>
-                <a:latin typeface="Helvetica Neue"/>
-                <a:ea typeface="Helvetica Neue"/>
-                <a:cs typeface="Helvetica Neue"/>
-              </a:defRPr>
-            </a:pPr>
-            <a:r>
-              <a:rPr sz="960">
-                <a:solidFill>
-                  <a:srgbClr val="253B44"/>
-                </a:solidFill>
-                <a:latin typeface="Helvetica Neue"/>
-                <a:ea typeface="Helvetica Neue"/>
-                <a:cs typeface="Helvetica Neue"/>
-              </a:rPr>
-              <a:t>Test focus: follow-up completion, chronic disease burden, and care coordination targeting.</a:t>
             </a:r>
           </a:p>
         </p:txBody>
       </p:sp>
       <p:sp>
         <p:nvSpPr>
-          <p:cNvPr id="19" name="">
+          <p:cNvPr id="20" name="">
             <a:extLst xmlns:a="http://schemas.openxmlformats.org/drawingml/2006/main">
               <a:ext uri="{FF2B5EF4-FFF2-40B4-BE49-F238E27FC236}">
-                <a16:creationId xmlns:a16="http://schemas.microsoft.com/office/drawing/2014/main" id="{0C384824-A424-40D6-9D23-D6B6C38D5C0C}"/>
+                <a16:creationId xmlns:a16="http://schemas.microsoft.com/office/drawing/2014/main" id="{BA5C1C28-4FAD-47D3-9DDD-96DB1B01908B}"/>
               </a:ext>
             </a:extLst>
           </p:cNvPr>
@@ -2904,8 +4069,8 @@
         </p:nvSpPr>
         <p:spPr>
           <a:xfrm xmlns:a="http://schemas.openxmlformats.org/drawingml/2006/main">
-            <a:off x="514350" y="6400800"/>
-            <a:ext cx="5905500" cy="190500"/>
+            <a:off x="8991600" y="5610225"/>
+            <a:ext cx="2190750" cy="514350"/>
           </a:xfrm>
           <a:prstGeom xmlns:a="http://schemas.openxmlformats.org/drawingml/2006/main" prst="rect">
             <a:avLst/>
@@ -2923,9 +4088,13 @@
           <a:lstStyle xmlns:a="http://schemas.openxmlformats.org/drawingml/2006/main"/>
           <a:p xmlns:a="http://schemas.openxmlformats.org/drawingml/2006/main">
             <a:pPr>
-              <a:defRPr sz="788">
-                <a:solidFill>
-                  <a:srgbClr val="667A82"/>
+              <a:lnSpc>
+                <a:spcPct val="105000"/>
+              </a:lnSpc>
+              <a:buNone/>
+              <a:defRPr sz="840">
+                <a:solidFill>
+                  <a:srgbClr val="253B44"/>
                 </a:solidFill>
                 <a:latin typeface="Helvetica Neue"/>
                 <a:ea typeface="Helvetica Neue"/>
@@ -2933,7 +4102,65 @@
               </a:defRPr>
             </a:pPr>
             <a:r>
-              <a:rPr sz="788">
+              <a:rPr sz="840">
+                <a:solidFill>
+                  <a:srgbClr val="253B44"/>
+                </a:solidFill>
+                <a:latin typeface="Helvetica Neue"/>
+                <a:ea typeface="Helvetica Neue"/>
+                <a:cs typeface="Helvetica Neue"/>
+              </a:rPr>
+              <a:t>Test focus: follow-up completion, chronic disease burden, and care coordination targeting.</a:t>
+            </a:r>
+          </a:p>
+        </p:txBody>
+      </p:sp>
+      <p:sp>
+        <p:nvSpPr>
+          <p:cNvPr id="21" name="">
+            <a:extLst xmlns:a="http://schemas.openxmlformats.org/drawingml/2006/main">
+              <a:ext uri="{FF2B5EF4-FFF2-40B4-BE49-F238E27FC236}">
+                <a16:creationId xmlns:a16="http://schemas.microsoft.com/office/drawing/2014/main" id="{87F0E997-DE30-4E1A-BC0A-A6428E44BC44}"/>
+              </a:ext>
+            </a:extLst>
+          </p:cNvPr>
+          <p:cNvSpPr>
+            <a:spLocks xmlns:a="http://schemas.openxmlformats.org/drawingml/2006/main" noGrp="1"/>
+          </p:cNvSpPr>
+          <p:nvPr/>
+        </p:nvSpPr>
+        <p:spPr>
+          <a:xfrm xmlns:a="http://schemas.openxmlformats.org/drawingml/2006/main">
+            <a:off x="514350" y="6572250"/>
+            <a:ext cx="8191500" cy="171450"/>
+          </a:xfrm>
+          <a:prstGeom xmlns:a="http://schemas.openxmlformats.org/drawingml/2006/main" prst="rect">
+            <a:avLst/>
+          </a:prstGeom>
+          <a:noFill xmlns:a="http://schemas.openxmlformats.org/drawingml/2006/main"/>
+          <a:ln xmlns:a="http://schemas.openxmlformats.org/drawingml/2006/main" w="0">
+            <a:noFill/>
+            <a:prstDash val="solid"/>
+          </a:ln>
+        </p:spPr>
+        <p:txBody>
+          <a:bodyPr xmlns:a="http://schemas.openxmlformats.org/drawingml/2006/main" lIns="0" tIns="0" rIns="0" bIns="0">
+            <a:noAutofit/>
+          </a:bodyPr>
+          <a:lstStyle xmlns:a="http://schemas.openxmlformats.org/drawingml/2006/main"/>
+          <a:p xmlns:a="http://schemas.openxmlformats.org/drawingml/2006/main">
+            <a:pPr>
+              <a:defRPr sz="750">
+                <a:solidFill>
+                  <a:srgbClr val="667A82"/>
+                </a:solidFill>
+                <a:latin typeface="Helvetica Neue"/>
+                <a:ea typeface="Helvetica Neue"/>
+                <a:cs typeface="Helvetica Neue"/>
+              </a:defRPr>
+            </a:pPr>
+            <a:r>
+              <a:rPr sz="750">
                 <a:solidFill>
                   <a:srgbClr val="667A82"/>
                 </a:solidFill>
@@ -2949,7 +4176,7 @@
     </p:spTree>
     <p:extLst>
       <p:ext uri="{BB962C8B-B14F-4D97-AF65-F5344CB8AC3E}">
-        <p14:creationId xmlns:p14="http://schemas.microsoft.com/office/powerpoint/2010/main" val="415701663"/>
+        <p14:creationId xmlns:p14="http://schemas.microsoft.com/office/powerpoint/2010/main" val="1287843829"/>
       </p:ext>
     </p:extLst>
   </p:cSld>
@@ -2977,10 +4204,10 @@
       </p:grpSpPr>
       <p:sp>
         <p:nvSpPr>
-          <p:cNvPr id="26" name="">
+          <p:cNvPr id="21" name="">
             <a:extLst xmlns:a="http://schemas.openxmlformats.org/drawingml/2006/main">
               <a:ext uri="{FF2B5EF4-FFF2-40B4-BE49-F238E27FC236}">
-                <a16:creationId xmlns:a16="http://schemas.microsoft.com/office/drawing/2014/main" id="{AE4F4E0A-EB9A-4783-A1E0-179DCB766A51}"/>
+                <a16:creationId xmlns:a16="http://schemas.microsoft.com/office/drawing/2014/main" id="{FD728F0A-0DFD-4640-808F-627B87580082}"/>
               </a:ext>
             </a:extLst>
           </p:cNvPr>
@@ -3011,7 +4238,7 @@
           <p:cNvPr id="2" name="">
             <a:extLst xmlns:a="http://schemas.openxmlformats.org/drawingml/2006/main">
               <a:ext uri="{FF2B5EF4-FFF2-40B4-BE49-F238E27FC236}">
-                <a16:creationId xmlns:a16="http://schemas.microsoft.com/office/drawing/2014/main" id="{97BFA0C2-39D3-4CFD-8F0A-D5B08C8007D9}"/>
+                <a16:creationId xmlns:a16="http://schemas.microsoft.com/office/drawing/2014/main" id="{D59A3C79-DED7-4CFC-BB3C-92E1A4777CFF}"/>
               </a:ext>
             </a:extLst>
           </p:cNvPr>
@@ -3069,7 +4296,7 @@
           <p:cNvPr id="3" name="">
             <a:extLst xmlns:a="http://schemas.openxmlformats.org/drawingml/2006/main">
               <a:ext uri="{FF2B5EF4-FFF2-40B4-BE49-F238E27FC236}">
-                <a16:creationId xmlns:a16="http://schemas.microsoft.com/office/drawing/2014/main" id="{3E5110D7-EFFA-461D-B3FA-FF7BB73DAACD}"/>
+                <a16:creationId xmlns:a16="http://schemas.microsoft.com/office/drawing/2014/main" id="{A9C27983-154F-49F2-BBCF-50E16DD6EC21}"/>
               </a:ext>
             </a:extLst>
           </p:cNvPr>
@@ -3081,7 +4308,7 @@
         <p:spPr>
           <a:xfrm xmlns:a="http://schemas.openxmlformats.org/drawingml/2006/main">
             <a:off x="514350" y="723900"/>
-            <a:ext cx="7239000" cy="457200"/>
+            <a:ext cx="8191500" cy="457200"/>
           </a:xfrm>
           <a:prstGeom xmlns:a="http://schemas.openxmlformats.org/drawingml/2006/main" prst="rect">
             <a:avLst/>
@@ -3127,7 +4354,7 @@
           <p:cNvPr id="4" name="">
             <a:extLst xmlns:a="http://schemas.openxmlformats.org/drawingml/2006/main">
               <a:ext uri="{FF2B5EF4-FFF2-40B4-BE49-F238E27FC236}">
-                <a16:creationId xmlns:a16="http://schemas.microsoft.com/office/drawing/2014/main" id="{3E0814E7-7877-43BD-BBD1-83BD65F0061A}"/>
+                <a16:creationId xmlns:a16="http://schemas.microsoft.com/office/drawing/2014/main" id="{B87313FB-319F-45CA-A9D4-9BEB4B14C317}"/>
               </a:ext>
             </a:extLst>
           </p:cNvPr>
@@ -3139,7 +4366,7 @@
         <p:spPr>
           <a:xfrm xmlns:a="http://schemas.openxmlformats.org/drawingml/2006/main">
             <a:off x="514350" y="1162050"/>
-            <a:ext cx="6286500" cy="209550"/>
+            <a:ext cx="8096250" cy="209550"/>
           </a:xfrm>
           <a:prstGeom xmlns:a="http://schemas.openxmlformats.org/drawingml/2006/main" prst="rect">
             <a:avLst/>
@@ -3185,7 +4412,7 @@
           <p:cNvPr id="5" name="">
             <a:extLst xmlns:a="http://schemas.openxmlformats.org/drawingml/2006/main">
               <a:ext uri="{FF2B5EF4-FFF2-40B4-BE49-F238E27FC236}">
-                <a16:creationId xmlns:a16="http://schemas.microsoft.com/office/drawing/2014/main" id="{06EE72E0-1828-40F2-8BF8-52D3C0D1F980}"/>
+                <a16:creationId xmlns:a16="http://schemas.microsoft.com/office/drawing/2014/main" id="{35D7F22C-0E03-491A-A73A-74FE8F0CC7FE}"/>
               </a:ext>
             </a:extLst>
           </p:cNvPr>
@@ -3213,35 +4440,35 @@
       </p:sp>
       <p:graphicFrame>
         <p:nvGraphicFramePr>
-          <p:cNvPr id="31" name=""/>
+          <p:cNvPr id="26" name=""/>
           <p:cNvGraphicFramePr/>
           <p:nvPr/>
         </p:nvGraphicFramePr>
         <p:xfrm>
           <a:off xmlns:a="http://schemas.openxmlformats.org/drawingml/2006/main" x="514350" y="1695450"/>
-          <a:ext xmlns:a="http://schemas.openxmlformats.org/drawingml/2006/main" cx="5543550" cy="819150"/>
+          <a:ext xmlns:a="http://schemas.openxmlformats.org/drawingml/2006/main" cx="10287000" cy="819150"/>
         </p:xfrm>
         <a:graphic xmlns:a="http://schemas.openxmlformats.org/drawingml/2006/main">
           <a:graphicData uri="http://schemas.openxmlformats.org/drawingml/2006/table">
             <a:tbl>
               <a:tblPr/>
               <a:tblGrid>
-                <a:gridCol w="1385888"/>
-                <a:gridCol w="1385888"/>
-                <a:gridCol w="1385888"/>
-                <a:gridCol w="1385888"/>
+                <a:gridCol w="2571750"/>
+                <a:gridCol w="2571750"/>
+                <a:gridCol w="2571750"/>
+                <a:gridCol w="2571750"/>
               </a:tblGrid>
               <a:tr h="409575">
                 <a:tc>
                   <a:txBody>
-                    <a:bodyPr lIns="57150" tIns="19050" rIns="47625" bIns="19050">
+                    <a:bodyPr lIns="66675" tIns="28575" rIns="57150" bIns="28575">
                       <a:noAutofit/>
                     </a:bodyPr>
                     <a:lstStyle/>
                     <a:p>
                       <a:pPr algn="ctr"/>
                       <a:r>
-                        <a:rPr sz="1575" b="1">
+                        <a:rPr sz="1650" b="1">
                           <a:solidFill>
                             <a:srgbClr val="0F4C5C"/>
                           </a:solidFill>
@@ -3261,41 +4488,14 @@
                 </a:tc>
                 <a:tc>
                   <a:txBody>
-                    <a:bodyPr lIns="57150" tIns="19050" rIns="47625" bIns="19050">
+                    <a:bodyPr lIns="66675" tIns="28575" rIns="57150" bIns="28575">
                       <a:noAutofit/>
                     </a:bodyPr>
                     <a:lstStyle/>
                     <a:p>
                       <a:pPr algn="ctr"/>
                       <a:r>
-                        <a:rPr sz="1575" b="1">
-                          <a:solidFill>
-                            <a:srgbClr val="0F4C5C"/>
-                          </a:solidFill>
-                          <a:latin typeface="Helvetica Neue"/>
-                          <a:ea typeface="Helvetica Neue"/>
-                          <a:cs typeface="Helvetica Neue"/>
-                        </a:rPr>
-                        <a:t>12,000</a:t>
-                      </a:r>
-                    </a:p>
-                  </a:txBody>
-                  <a:tcPr marL="91440" marR="91440" marT="45720" marB="45720" anchor="ctr">
-                    <a:solidFill>
-                      <a:srgbClr val="EEF6F7"/>
-                    </a:solidFill>
-                  </a:tcPr>
-                </a:tc>
-                <a:tc>
-                  <a:txBody>
-                    <a:bodyPr lIns="57150" tIns="19050" rIns="47625" bIns="19050">
-                      <a:noAutofit/>
-                    </a:bodyPr>
-                    <a:lstStyle/>
-                    <a:p>
-                      <a:pPr algn="ctr"/>
-                      <a:r>
-                        <a:rPr sz="1575" b="1">
+                        <a:rPr sz="1650" b="1">
                           <a:solidFill>
                             <a:srgbClr val="0F4C5C"/>
                           </a:solidFill>
@@ -3315,14 +4515,41 @@
                 </a:tc>
                 <a:tc>
                   <a:txBody>
-                    <a:bodyPr lIns="57150" tIns="19050" rIns="47625" bIns="19050">
+                    <a:bodyPr lIns="66675" tIns="28575" rIns="57150" bIns="28575">
                       <a:noAutofit/>
                     </a:bodyPr>
                     <a:lstStyle/>
                     <a:p>
                       <a:pPr algn="ctr"/>
                       <a:r>
-                        <a:rPr sz="1575" b="1">
+                        <a:rPr sz="1650" b="1">
+                          <a:solidFill>
+                            <a:srgbClr val="0F4C5C"/>
+                          </a:solidFill>
+                          <a:latin typeface="Helvetica Neue"/>
+                          <a:ea typeface="Helvetica Neue"/>
+                          <a:cs typeface="Helvetica Neue"/>
+                        </a:rPr>
+                        <a:t>21.6%</a:t>
+                      </a:r>
+                    </a:p>
+                  </a:txBody>
+                  <a:tcPr marL="91440" marR="91440" marT="45720" marB="45720" anchor="ctr">
+                    <a:solidFill>
+                      <a:srgbClr val="EEF6F7"/>
+                    </a:solidFill>
+                  </a:tcPr>
+                </a:tc>
+                <a:tc>
+                  <a:txBody>
+                    <a:bodyPr lIns="66675" tIns="28575" rIns="57150" bIns="28575">
+                      <a:noAutofit/>
+                    </a:bodyPr>
+                    <a:lstStyle/>
+                    <a:p>
+                      <a:pPr algn="ctr"/>
+                      <a:r>
+                        <a:rPr sz="1650" b="1">
                           <a:solidFill>
                             <a:srgbClr val="0F4C5C"/>
                           </a:solidFill>
@@ -3344,14 +4571,14 @@
               <a:tr h="409575">
                 <a:tc>
                   <a:txBody>
-                    <a:bodyPr lIns="57150" tIns="19050" rIns="47625" bIns="19050">
+                    <a:bodyPr lIns="66675" tIns="28575" rIns="57150" bIns="28575">
                       <a:noAutofit/>
                     </a:bodyPr>
                     <a:lstStyle/>
                     <a:p>
                       <a:pPr algn="ctr"/>
                       <a:r>
-                        <a:rPr sz="713" b="0">
+                        <a:rPr sz="705" b="0">
                           <a:solidFill>
                             <a:srgbClr val="50636B"/>
                           </a:solidFill>
@@ -3359,7 +4586,7 @@
                           <a:ea typeface="Helvetica Neue"/>
                           <a:cs typeface="Helvetica Neue"/>
                         </a:rPr>
-                        <a:t>Rows analyzed</a:t>
+                        <a:t>Patients analyzed</a:t>
                       </a:r>
                     </a:p>
                   </a:txBody>
@@ -3371,14 +4598,14 @@
                 </a:tc>
                 <a:tc>
                   <a:txBody>
-                    <a:bodyPr lIns="57150" tIns="19050" rIns="47625" bIns="19050">
+                    <a:bodyPr lIns="66675" tIns="28575" rIns="57150" bIns="28575">
                       <a:noAutofit/>
                     </a:bodyPr>
                     <a:lstStyle/>
                     <a:p>
                       <a:pPr algn="ctr"/>
                       <a:r>
-                        <a:rPr sz="713" b="0">
+                        <a:rPr sz="705" b="0">
                           <a:solidFill>
                             <a:srgbClr val="50636B"/>
                           </a:solidFill>
@@ -3386,7 +4613,7 @@
                           <a:ea typeface="Helvetica Neue"/>
                           <a:cs typeface="Helvetica Neue"/>
                         </a:rPr>
-                        <a:t>Unique patients</a:t>
+                        <a:t>Readmitted within 30 days</a:t>
                       </a:r>
                     </a:p>
                   </a:txBody>
@@ -3398,14 +4625,14 @@
                 </a:tc>
                 <a:tc>
                   <a:txBody>
-                    <a:bodyPr lIns="57150" tIns="19050" rIns="47625" bIns="19050">
+                    <a:bodyPr lIns="66675" tIns="28575" rIns="57150" bIns="28575">
                       <a:noAutofit/>
                     </a:bodyPr>
                     <a:lstStyle/>
                     <a:p>
                       <a:pPr algn="ctr"/>
                       <a:r>
-                        <a:rPr sz="713" b="0">
+                        <a:rPr sz="705" b="0">
                           <a:solidFill>
                             <a:srgbClr val="50636B"/>
                           </a:solidFill>
@@ -3413,7 +4640,7 @@
                           <a:ea typeface="Helvetica Neue"/>
                           <a:cs typeface="Helvetica Neue"/>
                         </a:rPr>
-                        <a:t>Readmitted</a:t>
+                        <a:t>Missing follow-up status</a:t>
                       </a:r>
                     </a:p>
                   </a:txBody>
@@ -3425,14 +4652,14 @@
                 </a:tc>
                 <a:tc>
                   <a:txBody>
-                    <a:bodyPr lIns="57150" tIns="19050" rIns="47625" bIns="19050">
+                    <a:bodyPr lIns="66675" tIns="28575" rIns="57150" bIns="28575">
                       <a:noAutofit/>
                     </a:bodyPr>
                     <a:lstStyle/>
                     <a:p>
                       <a:pPr algn="ctr"/>
                       <a:r>
-                        <a:rPr sz="713" b="0">
+                        <a:rPr sz="705" b="0">
                           <a:solidFill>
                             <a:srgbClr val="50636B"/>
                           </a:solidFill>
@@ -3460,181 +4687,7 @@
           <p:cNvPr id="7" name="">
             <a:extLst xmlns:a="http://schemas.openxmlformats.org/drawingml/2006/main">
               <a:ext uri="{FF2B5EF4-FFF2-40B4-BE49-F238E27FC236}">
-                <a16:creationId xmlns:a16="http://schemas.microsoft.com/office/drawing/2014/main" id="{B4AC48B2-DC41-4AEB-B0BF-074BD0D388DE}"/>
-              </a:ext>
-            </a:extLst>
-          </p:cNvPr>
-          <p:cNvSpPr>
-            <a:spLocks xmlns:a="http://schemas.openxmlformats.org/drawingml/2006/main" noGrp="1"/>
-          </p:cNvSpPr>
-          <p:nvPr/>
-        </p:nvSpPr>
-        <p:spPr>
-          <a:xfrm xmlns:a="http://schemas.openxmlformats.org/drawingml/2006/main">
-            <a:off x="6515100" y="1695450"/>
-            <a:ext cx="2857500" cy="228600"/>
-          </a:xfrm>
-          <a:prstGeom xmlns:a="http://schemas.openxmlformats.org/drawingml/2006/main" prst="rect">
-            <a:avLst/>
-          </a:prstGeom>
-          <a:noFill xmlns:a="http://schemas.openxmlformats.org/drawingml/2006/main"/>
-          <a:ln xmlns:a="http://schemas.openxmlformats.org/drawingml/2006/main" w="0">
-            <a:noFill/>
-            <a:prstDash val="solid"/>
-          </a:ln>
-        </p:spPr>
-        <p:txBody>
-          <a:bodyPr xmlns:a="http://schemas.openxmlformats.org/drawingml/2006/main" lIns="0" tIns="0" rIns="0" bIns="0">
-            <a:noAutofit/>
-          </a:bodyPr>
-          <a:lstStyle xmlns:a="http://schemas.openxmlformats.org/drawingml/2006/main"/>
-          <a:p xmlns:a="http://schemas.openxmlformats.org/drawingml/2006/main">
-            <a:pPr>
-              <a:defRPr sz="1425" b="1">
-                <a:solidFill>
-                  <a:srgbClr val="102A34"/>
-                </a:solidFill>
-                <a:latin typeface="Helvetica Neue"/>
-                <a:ea typeface="Helvetica Neue"/>
-                <a:cs typeface="Helvetica Neue"/>
-              </a:defRPr>
-            </a:pPr>
-            <a:r>
-              <a:rPr sz="1425" b="1">
-                <a:solidFill>
-                  <a:srgbClr val="102A34"/>
-                </a:solidFill>
-                <a:latin typeface="Helvetica Neue"/>
-                <a:ea typeface="Helvetica Neue"/>
-                <a:cs typeface="Helvetica Neue"/>
-              </a:rPr>
-              <a:t>Data foundation</a:t>
-            </a:r>
-          </a:p>
-        </p:txBody>
-      </p:sp>
-      <p:sp>
-        <p:nvSpPr>
-          <p:cNvPr id="8" name="">
-            <a:extLst xmlns:a="http://schemas.openxmlformats.org/drawingml/2006/main">
-              <a:ext uri="{FF2B5EF4-FFF2-40B4-BE49-F238E27FC236}">
-                <a16:creationId xmlns:a16="http://schemas.microsoft.com/office/drawing/2014/main" id="{1E57E370-B215-432D-B292-2A06B0DBA66F}"/>
-              </a:ext>
-            </a:extLst>
-          </p:cNvPr>
-          <p:cNvSpPr>
-            <a:spLocks xmlns:a="http://schemas.openxmlformats.org/drawingml/2006/main" noGrp="1"/>
-          </p:cNvSpPr>
-          <p:nvPr/>
-        </p:nvSpPr>
-        <p:spPr>
-          <a:xfrm xmlns:a="http://schemas.openxmlformats.org/drawingml/2006/main">
-            <a:off x="6515100" y="2028825"/>
-            <a:ext cx="4095750" cy="742950"/>
-          </a:xfrm>
-          <a:prstGeom xmlns:a="http://schemas.openxmlformats.org/drawingml/2006/main" prst="rect">
-            <a:avLst/>
-          </a:prstGeom>
-          <a:noFill xmlns:a="http://schemas.openxmlformats.org/drawingml/2006/main"/>
-          <a:ln xmlns:a="http://schemas.openxmlformats.org/drawingml/2006/main" w="0">
-            <a:noFill/>
-            <a:prstDash val="solid"/>
-          </a:ln>
-        </p:spPr>
-        <p:txBody>
-          <a:bodyPr xmlns:a="http://schemas.openxmlformats.org/drawingml/2006/main" lIns="0" tIns="0" rIns="0" bIns="0">
-            <a:noAutofit/>
-          </a:bodyPr>
-          <a:lstStyle xmlns:a="http://schemas.openxmlformats.org/drawingml/2006/main"/>
-          <a:p xmlns:a="http://schemas.openxmlformats.org/drawingml/2006/main">
-            <a:pPr marL="139700" indent="-63500">
-              <a:spcAft>
-                <a:spcPts val="300"/>
-              </a:spcAft>
-              <a:buChar char="•"/>
-              <a:defRPr sz="855">
-                <a:solidFill>
-                  <a:srgbClr val="253B44"/>
-                </a:solidFill>
-                <a:latin typeface="Helvetica Neue"/>
-                <a:ea typeface="Helvetica Neue"/>
-                <a:cs typeface="Helvetica Neue"/>
-              </a:defRPr>
-            </a:pPr>
-            <a:r>
-              <a:rPr sz="855">
-                <a:solidFill>
-                  <a:srgbClr val="253B44"/>
-                </a:solidFill>
-                <a:latin typeface="Helvetica Neue"/>
-                <a:ea typeface="Helvetica Neue"/>
-                <a:cs typeface="Helvetica Neue"/>
-              </a:rPr>
-              <a:t>Patient, financial, and care coordination datasets link through PatientID</a:t>
-            </a:r>
-          </a:p>
-          <a:p xmlns:a="http://schemas.openxmlformats.org/drawingml/2006/main">
-            <a:pPr marL="139700" indent="-63500">
-              <a:spcAft>
-                <a:spcPts val="300"/>
-              </a:spcAft>
-              <a:buChar char="•"/>
-              <a:defRPr sz="855">
-                <a:solidFill>
-                  <a:srgbClr val="253B44"/>
-                </a:solidFill>
-                <a:latin typeface="Helvetica Neue"/>
-                <a:ea typeface="Helvetica Neue"/>
-                <a:cs typeface="Helvetica Neue"/>
-              </a:defRPr>
-            </a:pPr>
-            <a:r>
-              <a:rPr sz="855">
-                <a:solidFill>
-                  <a:srgbClr val="253B44"/>
-                </a:solidFill>
-                <a:latin typeface="Helvetica Neue"/>
-                <a:ea typeface="Helvetica Neue"/>
-                <a:cs typeface="Helvetica Neue"/>
-              </a:rPr>
-              <a:t>Each source contains 12,000 records and 12,000 unique patient IDs</a:t>
-            </a:r>
-          </a:p>
-          <a:p xmlns:a="http://schemas.openxmlformats.org/drawingml/2006/main">
-            <a:pPr marL="139700" indent="-63500">
-              <a:spcAft>
-                <a:spcPts val="300"/>
-              </a:spcAft>
-              <a:buChar char="•"/>
-              <a:defRPr sz="855">
-                <a:solidFill>
-                  <a:srgbClr val="253B44"/>
-                </a:solidFill>
-                <a:latin typeface="Helvetica Neue"/>
-                <a:ea typeface="Helvetica Neue"/>
-                <a:cs typeface="Helvetica Neue"/>
-              </a:defRPr>
-            </a:pPr>
-            <a:r>
-              <a:rPr sz="855">
-                <a:solidFill>
-                  <a:srgbClr val="253B44"/>
-                </a:solidFill>
-                <a:latin typeface="Helvetica Neue"/>
-                <a:ea typeface="Helvetica Neue"/>
-                <a:cs typeface="Helvetica Neue"/>
-              </a:rPr>
-              <a:t>Analysis uses the cleaned patient-level file to keep metrics consistent</a:t>
-            </a:r>
-          </a:p>
-        </p:txBody>
-      </p:sp>
-      <p:sp>
-        <p:nvSpPr>
-          <p:cNvPr id="9" name="">
-            <a:extLst xmlns:a="http://schemas.openxmlformats.org/drawingml/2006/main">
-              <a:ext uri="{FF2B5EF4-FFF2-40B4-BE49-F238E27FC236}">
-                <a16:creationId xmlns:a16="http://schemas.microsoft.com/office/drawing/2014/main" id="{A2F1B62D-8BA2-404F-B00D-009A1BF63202}"/>
+                <a16:creationId xmlns:a16="http://schemas.microsoft.com/office/drawing/2014/main" id="{676755AE-4025-45A4-83D3-B0495D797966}"/>
               </a:ext>
             </a:extLst>
           </p:cNvPr>
@@ -3662,10 +4715,10 @@
       </p:sp>
       <p:sp>
         <p:nvSpPr>
-          <p:cNvPr id="10" name="">
+          <p:cNvPr id="8" name="">
             <a:extLst xmlns:a="http://schemas.openxmlformats.org/drawingml/2006/main">
               <a:ext uri="{FF2B5EF4-FFF2-40B4-BE49-F238E27FC236}">
-                <a16:creationId xmlns:a16="http://schemas.microsoft.com/office/drawing/2014/main" id="{4A400581-9578-4099-AC53-83D7D1F9164F}"/>
+                <a16:creationId xmlns:a16="http://schemas.microsoft.com/office/drawing/2014/main" id="{FFF0995D-8F0F-4AB8-AB62-8FB39A8F9A64}"/>
               </a:ext>
             </a:extLst>
           </p:cNvPr>
@@ -3676,8 +4729,8 @@
         </p:nvSpPr>
         <p:spPr>
           <a:xfrm xmlns:a="http://schemas.openxmlformats.org/drawingml/2006/main">
-            <a:off x="514350" y="3000375"/>
-            <a:ext cx="2476500" cy="228600"/>
+            <a:off x="514350" y="3009900"/>
+            <a:ext cx="2857500" cy="228600"/>
           </a:xfrm>
           <a:prstGeom xmlns:a="http://schemas.openxmlformats.org/drawingml/2006/main" prst="rect">
             <a:avLst/>
@@ -3695,7 +4748,7 @@
           <a:lstStyle xmlns:a="http://schemas.openxmlformats.org/drawingml/2006/main"/>
           <a:p xmlns:a="http://schemas.openxmlformats.org/drawingml/2006/main">
             <a:pPr>
-              <a:defRPr sz="1425" b="1">
+              <a:defRPr sz="1500" b="1">
                 <a:solidFill>
                   <a:srgbClr val="102A34"/>
                 </a:solidFill>
@@ -3705,7 +4758,7 @@
               </a:defRPr>
             </a:pPr>
             <a:r>
-              <a:rPr sz="1425" b="1">
+              <a:rPr sz="1500" b="1">
                 <a:solidFill>
                   <a:srgbClr val="102A34"/>
                 </a:solidFill>
@@ -3713,41 +4766,41 @@
                 <a:ea typeface="Helvetica Neue"/>
                 <a:cs typeface="Helvetica Neue"/>
               </a:rPr>
-              <a:t>Missing data</a:t>
+              <a:t>Data quality checks</a:t>
             </a:r>
           </a:p>
         </p:txBody>
       </p:sp>
       <p:graphicFrame>
         <p:nvGraphicFramePr>
-          <p:cNvPr id="36" name=""/>
+          <p:cNvPr id="29" name=""/>
           <p:cNvGraphicFramePr/>
           <p:nvPr/>
         </p:nvGraphicFramePr>
         <p:xfrm>
-          <a:off xmlns:a="http://schemas.openxmlformats.org/drawingml/2006/main" x="514350" y="3352800"/>
-          <a:ext xmlns:a="http://schemas.openxmlformats.org/drawingml/2006/main" cx="3314700" cy="1428750"/>
+          <a:off xmlns:a="http://schemas.openxmlformats.org/drawingml/2006/main" x="514350" y="3362325"/>
+          <a:ext xmlns:a="http://schemas.openxmlformats.org/drawingml/2006/main" cx="3714750" cy="1600200"/>
         </p:xfrm>
         <a:graphic xmlns:a="http://schemas.openxmlformats.org/drawingml/2006/main">
           <a:graphicData uri="http://schemas.openxmlformats.org/drawingml/2006/table">
             <a:tbl>
               <a:tblPr/>
               <a:tblGrid>
-                <a:gridCol w="1809750"/>
-                <a:gridCol w="742950"/>
-                <a:gridCol w="762000"/>
+                <a:gridCol w="1666875"/>
+                <a:gridCol w="885825"/>
+                <a:gridCol w="1162050"/>
               </a:tblGrid>
-              <a:tr h="238125">
+              <a:tr h="266700">
                 <a:tc>
                   <a:txBody>
-                    <a:bodyPr lIns="57150" tIns="19050" rIns="47625" bIns="19050">
+                    <a:bodyPr lIns="66675" tIns="28575" rIns="57150" bIns="28575">
                       <a:noAutofit/>
                     </a:bodyPr>
                     <a:lstStyle/>
                     <a:p>
                       <a:pPr algn="l"/>
                       <a:r>
-                        <a:rPr sz="720" b="1">
+                        <a:rPr sz="690" b="1">
                           <a:solidFill>
                             <a:srgbClr val="FFFFFF"/>
                           </a:solidFill>
@@ -3755,7 +4808,7 @@
                           <a:ea typeface="Helvetica Neue"/>
                           <a:cs typeface="Helvetica Neue"/>
                         </a:rPr>
-                        <a:t>Field</a:t>
+                        <a:t>Check</a:t>
                       </a:r>
                     </a:p>
                   </a:txBody>
@@ -3767,14 +4820,14 @@
                 </a:tc>
                 <a:tc>
                   <a:txBody>
-                    <a:bodyPr lIns="57150" tIns="19050" rIns="47625" bIns="19050">
+                    <a:bodyPr lIns="66675" tIns="28575" rIns="57150" bIns="28575">
                       <a:noAutofit/>
                     </a:bodyPr>
                     <a:lstStyle/>
                     <a:p>
-                      <a:pPr algn="ctr"/>
+                      <a:pPr algn="l"/>
                       <a:r>
-                        <a:rPr sz="720" b="1">
+                        <a:rPr sz="690" b="1">
                           <a:solidFill>
                             <a:srgbClr val="FFFFFF"/>
                           </a:solidFill>
@@ -3782,7 +4835,7 @@
                           <a:ea typeface="Helvetica Neue"/>
                           <a:cs typeface="Helvetica Neue"/>
                         </a:rPr>
-                        <a:t>Rows</a:t>
+                        <a:t>Scale</a:t>
                       </a:r>
                     </a:p>
                   </a:txBody>
@@ -3794,14 +4847,14 @@
                 </a:tc>
                 <a:tc>
                   <a:txBody>
-                    <a:bodyPr lIns="57150" tIns="19050" rIns="47625" bIns="19050">
+                    <a:bodyPr lIns="66675" tIns="28575" rIns="57150" bIns="28575">
                       <a:noAutofit/>
                     </a:bodyPr>
                     <a:lstStyle/>
                     <a:p>
-                      <a:pPr algn="ctr"/>
+                      <a:pPr algn="l"/>
                       <a:r>
-                        <a:rPr sz="720" b="1">
+                        <a:rPr sz="690" b="1">
                           <a:solidFill>
                             <a:srgbClr val="FFFFFF"/>
                           </a:solidFill>
@@ -3809,7 +4862,7 @@
                           <a:ea typeface="Helvetica Neue"/>
                           <a:cs typeface="Helvetica Neue"/>
                         </a:rPr>
-                        <a:t>Rate</a:t>
+                        <a:t>Meaning</a:t>
                       </a:r>
                     </a:p>
                   </a:txBody>
@@ -3820,17 +4873,17 @@
                   </a:tcPr>
                 </a:tc>
               </a:tr>
-              <a:tr h="238125">
+              <a:tr h="266700">
                 <a:tc>
                   <a:txBody>
-                    <a:bodyPr lIns="57150" tIns="19050" rIns="47625" bIns="19050">
+                    <a:bodyPr lIns="66675" tIns="28575" rIns="57150" bIns="28575">
                       <a:noAutofit/>
                     </a:bodyPr>
                     <a:lstStyle/>
                     <a:p>
                       <a:pPr algn="l"/>
                       <a:r>
-                        <a:rPr sz="653" b="1">
+                        <a:rPr sz="615" b="1">
                           <a:solidFill>
                             <a:srgbClr val="253B44"/>
                           </a:solidFill>
@@ -3838,7 +4891,7 @@
                           <a:ea typeface="Helvetica Neue"/>
                           <a:cs typeface="Helvetica Neue"/>
                         </a:rPr>
-                        <a:t>follow-up status</a:t>
+                        <a:t>Missing follow-up status</a:t>
                       </a:r>
                     </a:p>
                   </a:txBody>
@@ -3850,14 +4903,14 @@
                 </a:tc>
                 <a:tc>
                   <a:txBody>
-                    <a:bodyPr lIns="57150" tIns="19050" rIns="47625" bIns="19050">
+                    <a:bodyPr lIns="66675" tIns="28575" rIns="57150" bIns="28575">
                       <a:noAutofit/>
                     </a:bodyPr>
                     <a:lstStyle/>
                     <a:p>
-                      <a:pPr algn="ctr"/>
+                      <a:pPr algn="l"/>
                       <a:r>
-                        <a:rPr sz="653" b="0">
+                        <a:rPr sz="615" b="0">
                           <a:solidFill>
                             <a:srgbClr val="253B44"/>
                           </a:solidFill>
@@ -3865,7 +4918,7 @@
                           <a:ea typeface="Helvetica Neue"/>
                           <a:cs typeface="Helvetica Neue"/>
                         </a:rPr>
-                        <a:t>2,587</a:t>
+                        <a:t>2,587 rows</a:t>
                       </a:r>
                     </a:p>
                   </a:txBody>
@@ -3877,14 +4930,14 @@
                 </a:tc>
                 <a:tc>
                   <a:txBody>
-                    <a:bodyPr lIns="57150" tIns="19050" rIns="47625" bIns="19050">
+                    <a:bodyPr lIns="66675" tIns="28575" rIns="57150" bIns="28575">
                       <a:noAutofit/>
                     </a:bodyPr>
                     <a:lstStyle/>
                     <a:p>
-                      <a:pPr algn="ctr"/>
+                      <a:pPr algn="l"/>
                       <a:r>
-                        <a:rPr sz="653" b="0">
+                        <a:rPr sz="615" b="0">
                           <a:solidFill>
                             <a:srgbClr val="253B44"/>
                           </a:solidFill>
@@ -3892,7 +4945,7 @@
                           <a:ea typeface="Helvetica Neue"/>
                           <a:cs typeface="Helvetica Neue"/>
                         </a:rPr>
-                        <a:t>21.6%</a:t>
+                        <a:t>Care transition visibility gap</a:t>
                       </a:r>
                     </a:p>
                   </a:txBody>
@@ -3903,17 +4956,17 @@
                   </a:tcPr>
                 </a:tc>
               </a:tr>
-              <a:tr h="238125">
+              <a:tr h="266700">
                 <a:tc>
                   <a:txBody>
-                    <a:bodyPr lIns="57150" tIns="19050" rIns="47625" bIns="19050">
+                    <a:bodyPr lIns="66675" tIns="28575" rIns="57150" bIns="28575">
                       <a:noAutofit/>
                     </a:bodyPr>
                     <a:lstStyle/>
                     <a:p>
                       <a:pPr algn="l"/>
                       <a:r>
-                        <a:rPr sz="653" b="1">
+                        <a:rPr sz="615" b="1">
                           <a:solidFill>
                             <a:srgbClr val="253B44"/>
                           </a:solidFill>
@@ -3921,7 +4974,7 @@
                           <a:ea typeface="Helvetica Neue"/>
                           <a:cs typeface="Helvetica Neue"/>
                         </a:rPr>
-                        <a:t>insurance type</a:t>
+                        <a:t>Other missing fields</a:t>
                       </a:r>
                     </a:p>
                   </a:txBody>
@@ -3933,14 +4986,14 @@
                 </a:tc>
                 <a:tc>
                   <a:txBody>
-                    <a:bodyPr lIns="57150" tIns="19050" rIns="47625" bIns="19050">
+                    <a:bodyPr lIns="66675" tIns="28575" rIns="57150" bIns="28575">
                       <a:noAutofit/>
                     </a:bodyPr>
                     <a:lstStyle/>
                     <a:p>
-                      <a:pPr algn="ctr"/>
+                      <a:pPr algn="l"/>
                       <a:r>
-                        <a:rPr sz="653" b="0">
+                        <a:rPr sz="615" b="0">
                           <a:solidFill>
                             <a:srgbClr val="253B44"/>
                           </a:solidFill>
@@ -3948,7 +5001,7 @@
                           <a:ea typeface="Helvetica Neue"/>
                           <a:cs typeface="Helvetica Neue"/>
                         </a:rPr>
-                        <a:t>240</a:t>
+                        <a:t>1.5-2.0%</a:t>
                       </a:r>
                     </a:p>
                   </a:txBody>
@@ -3960,14 +5013,14 @@
                 </a:tc>
                 <a:tc>
                   <a:txBody>
-                    <a:bodyPr lIns="57150" tIns="19050" rIns="47625" bIns="19050">
+                    <a:bodyPr lIns="66675" tIns="28575" rIns="57150" bIns="28575">
                       <a:noAutofit/>
                     </a:bodyPr>
                     <a:lstStyle/>
                     <a:p>
-                      <a:pPr algn="ctr"/>
+                      <a:pPr algn="l"/>
                       <a:r>
-                        <a:rPr sz="653" b="0">
+                        <a:rPr sz="615" b="0">
                           <a:solidFill>
                             <a:srgbClr val="253B44"/>
                           </a:solidFill>
@@ -3975,7 +5028,7 @@
                           <a:ea typeface="Helvetica Neue"/>
                           <a:cs typeface="Helvetica Neue"/>
                         </a:rPr>
-                        <a:t>2.0%</a:t>
+                        <a:t>Use cleaned/imputed file</a:t>
                       </a:r>
                     </a:p>
                   </a:txBody>
@@ -3986,17 +5039,17 @@
                   </a:tcPr>
                 </a:tc>
               </a:tr>
-              <a:tr h="238125">
+              <a:tr h="266700">
                 <a:tc>
                   <a:txBody>
-                    <a:bodyPr lIns="57150" tIns="19050" rIns="47625" bIns="19050">
+                    <a:bodyPr lIns="66675" tIns="28575" rIns="57150" bIns="28575">
                       <a:noAutofit/>
                     </a:bodyPr>
                     <a:lstStyle/>
                     <a:p>
                       <a:pPr algn="l"/>
                       <a:r>
-                        <a:rPr sz="653" b="1">
+                        <a:rPr sz="615" b="1">
                           <a:solidFill>
                             <a:srgbClr val="253B44"/>
                           </a:solidFill>
@@ -4004,7 +5057,7 @@
                           <a:ea typeface="Helvetica Neue"/>
                           <a:cs typeface="Helvetica Neue"/>
                         </a:rPr>
-                        <a:t>length of stay</a:t>
+                        <a:t>Length-of-stay outliers</a:t>
                       </a:r>
                     </a:p>
                   </a:txBody>
@@ -4016,14 +5069,14 @@
                 </a:tc>
                 <a:tc>
                   <a:txBody>
-                    <a:bodyPr lIns="57150" tIns="19050" rIns="47625" bIns="19050">
+                    <a:bodyPr lIns="66675" tIns="28575" rIns="57150" bIns="28575">
                       <a:noAutofit/>
                     </a:bodyPr>
                     <a:lstStyle/>
                     <a:p>
-                      <a:pPr algn="ctr"/>
+                      <a:pPr algn="l"/>
                       <a:r>
-                        <a:rPr sz="653" b="0">
+                        <a:rPr sz="615" b="0">
                           <a:solidFill>
                             <a:srgbClr val="253B44"/>
                           </a:solidFill>
@@ -4031,7 +5084,7 @@
                           <a:ea typeface="Helvetica Neue"/>
                           <a:cs typeface="Helvetica Neue"/>
                         </a:rPr>
-                        <a:t>240</a:t>
+                        <a:t>191 rows</a:t>
                       </a:r>
                     </a:p>
                   </a:txBody>
@@ -4043,14 +5096,14 @@
                 </a:tc>
                 <a:tc>
                   <a:txBody>
-                    <a:bodyPr lIns="57150" tIns="19050" rIns="47625" bIns="19050">
+                    <a:bodyPr lIns="66675" tIns="28575" rIns="57150" bIns="28575">
                       <a:noAutofit/>
                     </a:bodyPr>
                     <a:lstStyle/>
                     <a:p>
-                      <a:pPr algn="ctr"/>
+                      <a:pPr algn="l"/>
                       <a:r>
-                        <a:rPr sz="653" b="0">
+                        <a:rPr sz="615" b="0">
                           <a:solidFill>
                             <a:srgbClr val="253B44"/>
                           </a:solidFill>
@@ -4058,7 +5111,7 @@
                           <a:ea typeface="Helvetica Neue"/>
                           <a:cs typeface="Helvetica Neue"/>
                         </a:rPr>
-                        <a:t>2.0%</a:t>
+                        <a:t>Review extended stays</a:t>
                       </a:r>
                     </a:p>
                   </a:txBody>
@@ -4069,17 +5122,17 @@
                   </a:tcPr>
                 </a:tc>
               </a:tr>
-              <a:tr h="238125">
+              <a:tr h="266700">
                 <a:tc>
                   <a:txBody>
-                    <a:bodyPr lIns="57150" tIns="19050" rIns="47625" bIns="19050">
+                    <a:bodyPr lIns="66675" tIns="28575" rIns="57150" bIns="28575">
                       <a:noAutofit/>
                     </a:bodyPr>
                     <a:lstStyle/>
                     <a:p>
                       <a:pPr algn="l"/>
                       <a:r>
-                        <a:rPr sz="653" b="1">
+                        <a:rPr sz="615" b="1">
                           <a:solidFill>
                             <a:srgbClr val="253B44"/>
                           </a:solidFill>
@@ -4087,7 +5140,7 @@
                           <a:ea typeface="Helvetica Neue"/>
                           <a:cs typeface="Helvetica Neue"/>
                         </a:rPr>
-                        <a:t>penalty cost</a:t>
+                        <a:t>Total care cost outliers</a:t>
                       </a:r>
                     </a:p>
                   </a:txBody>
@@ -4099,14 +5152,14 @@
                 </a:tc>
                 <a:tc>
                   <a:txBody>
-                    <a:bodyPr lIns="57150" tIns="19050" rIns="47625" bIns="19050">
+                    <a:bodyPr lIns="66675" tIns="28575" rIns="57150" bIns="28575">
                       <a:noAutofit/>
                     </a:bodyPr>
                     <a:lstStyle/>
                     <a:p>
-                      <a:pPr algn="ctr"/>
+                      <a:pPr algn="l"/>
                       <a:r>
-                        <a:rPr sz="653" b="0">
+                        <a:rPr sz="615" b="0">
                           <a:solidFill>
                             <a:srgbClr val="253B44"/>
                           </a:solidFill>
@@ -4114,7 +5167,7 @@
                           <a:ea typeface="Helvetica Neue"/>
                           <a:cs typeface="Helvetica Neue"/>
                         </a:rPr>
-                        <a:t>240</a:t>
+                        <a:t>72 rows</a:t>
                       </a:r>
                     </a:p>
                   </a:txBody>
@@ -4126,14 +5179,14 @@
                 </a:tc>
                 <a:tc>
                   <a:txBody>
-                    <a:bodyPr lIns="57150" tIns="19050" rIns="47625" bIns="19050">
+                    <a:bodyPr lIns="66675" tIns="28575" rIns="57150" bIns="28575">
                       <a:noAutofit/>
                     </a:bodyPr>
                     <a:lstStyle/>
                     <a:p>
-                      <a:pPr algn="ctr"/>
+                      <a:pPr algn="l"/>
                       <a:r>
-                        <a:rPr sz="653" b="0">
+                        <a:rPr sz="615" b="0">
                           <a:solidFill>
                             <a:srgbClr val="253B44"/>
                           </a:solidFill>
@@ -4141,7 +5194,7 @@
                           <a:ea typeface="Helvetica Neue"/>
                           <a:cs typeface="Helvetica Neue"/>
                         </a:rPr>
-                        <a:t>2.0%</a:t>
+                        <a:t>Protect ROI estimates</a:t>
                       </a:r>
                     </a:p>
                   </a:txBody>
@@ -4152,17 +5205,17 @@
                   </a:tcPr>
                 </a:tc>
               </a:tr>
-              <a:tr h="238125">
+              <a:tr h="266700">
                 <a:tc>
                   <a:txBody>
-                    <a:bodyPr lIns="57150" tIns="19050" rIns="47625" bIns="19050">
+                    <a:bodyPr lIns="66675" tIns="28575" rIns="57150" bIns="28575">
                       <a:noAutofit/>
                     </a:bodyPr>
                     <a:lstStyle/>
                     <a:p>
                       <a:pPr algn="l"/>
                       <a:r>
-                        <a:rPr sz="653" b="1">
+                        <a:rPr sz="615" b="1">
                           <a:solidFill>
                             <a:srgbClr val="253B44"/>
                           </a:solidFill>
@@ -4170,7 +5223,7 @@
                           <a:ea typeface="Helvetica Neue"/>
                           <a:cs typeface="Helvetica Neue"/>
                         </a:rPr>
-                        <a:t>follow-up program cost</a:t>
+                        <a:t>Negative penalty cost</a:t>
                       </a:r>
                     </a:p>
                   </a:txBody>
@@ -4182,14 +5235,14 @@
                 </a:tc>
                 <a:tc>
                   <a:txBody>
-                    <a:bodyPr lIns="57150" tIns="19050" rIns="47625" bIns="19050">
+                    <a:bodyPr lIns="66675" tIns="28575" rIns="57150" bIns="28575">
                       <a:noAutofit/>
                     </a:bodyPr>
                     <a:lstStyle/>
                     <a:p>
-                      <a:pPr algn="ctr"/>
+                      <a:pPr algn="l"/>
                       <a:r>
-                        <a:rPr sz="653" b="0">
+                        <a:rPr sz="615" b="0">
                           <a:solidFill>
                             <a:srgbClr val="253B44"/>
                           </a:solidFill>
@@ -4197,7 +5250,7 @@
                           <a:ea typeface="Helvetica Neue"/>
                           <a:cs typeface="Helvetica Neue"/>
                         </a:rPr>
-                        <a:t>240</a:t>
+                        <a:t>49 rows</a:t>
                       </a:r>
                     </a:p>
                   </a:txBody>
@@ -4209,14 +5262,14 @@
                 </a:tc>
                 <a:tc>
                   <a:txBody>
-                    <a:bodyPr lIns="57150" tIns="19050" rIns="47625" bIns="19050">
+                    <a:bodyPr lIns="66675" tIns="28575" rIns="57150" bIns="28575">
                       <a:noAutofit/>
                     </a:bodyPr>
                     <a:lstStyle/>
                     <a:p>
-                      <a:pPr algn="ctr"/>
+                      <a:pPr algn="l"/>
                       <a:r>
-                        <a:rPr sz="653" b="0">
+                        <a:rPr sz="615" b="0">
                           <a:solidFill>
                             <a:srgbClr val="253B44"/>
                           </a:solidFill>
@@ -4224,7 +5277,7 @@
                           <a:ea typeface="Helvetica Neue"/>
                           <a:cs typeface="Helvetica Neue"/>
                         </a:rPr>
-                        <a:t>2.0%</a:t>
+                        <a:t>Validate financial extract</a:t>
                       </a:r>
                     </a:p>
                   </a:txBody>
@@ -4241,10 +5294,10 @@
       </p:graphicFrame>
       <p:sp>
         <p:nvSpPr>
-          <p:cNvPr id="12" name="">
+          <p:cNvPr id="10" name="">
             <a:extLst xmlns:a="http://schemas.openxmlformats.org/drawingml/2006/main">
               <a:ext uri="{FF2B5EF4-FFF2-40B4-BE49-F238E27FC236}">
-                <a16:creationId xmlns:a16="http://schemas.microsoft.com/office/drawing/2014/main" id="{D97EF027-8CF7-42F3-9EAF-BC732584ECA6}"/>
+                <a16:creationId xmlns:a16="http://schemas.microsoft.com/office/drawing/2014/main" id="{E5C190DA-4ADD-4172-8957-E52F3241D48D}"/>
               </a:ext>
             </a:extLst>
           </p:cNvPr>
@@ -4255,8 +5308,8 @@
         </p:nvSpPr>
         <p:spPr>
           <a:xfrm xmlns:a="http://schemas.openxmlformats.org/drawingml/2006/main">
-            <a:off x="514350" y="4886325"/>
-            <a:ext cx="3333750" cy="428625"/>
+            <a:off x="514350" y="5095875"/>
+            <a:ext cx="3714750" cy="419100"/>
           </a:xfrm>
           <a:prstGeom xmlns:a="http://schemas.openxmlformats.org/drawingml/2006/main" prst="rect">
             <a:avLst/>
@@ -4275,10 +5328,10 @@
           <a:p xmlns:a="http://schemas.openxmlformats.org/drawingml/2006/main">
             <a:pPr>
               <a:lnSpc>
-                <a:spcPct val="104000"/>
+                <a:spcPct val="105000"/>
               </a:lnSpc>
               <a:buNone/>
-              <a:defRPr sz="788">
+              <a:defRPr sz="803">
                 <a:solidFill>
                   <a:srgbClr val="50636B"/>
                 </a:solidFill>
@@ -4288,7 +5341,7 @@
               </a:defRPr>
             </a:pPr>
             <a:r>
-              <a:rPr sz="788">
+              <a:rPr sz="803">
                 <a:solidFill>
                   <a:srgbClr val="50636B"/>
                 </a:solidFill>
@@ -4296,17 +5349,17 @@
                 <a:ea typeface="Helvetica Neue"/>
                 <a:cs typeface="Helvetica Neue"/>
               </a:rPr>
-              <a:t>Example: follow-up status is missing for 2,587 patients, creating a gap in care-transition analysis.</a:t>
+              <a:t>Interpretation: data is usable, but follow-up status and financial fields need validation before final recommendations.</a:t>
             </a:r>
           </a:p>
         </p:txBody>
       </p:sp>
       <p:sp>
         <p:nvSpPr>
-          <p:cNvPr id="13" name="">
+          <p:cNvPr id="11" name="">
             <a:extLst xmlns:a="http://schemas.openxmlformats.org/drawingml/2006/main">
               <a:ext uri="{FF2B5EF4-FFF2-40B4-BE49-F238E27FC236}">
-                <a16:creationId xmlns:a16="http://schemas.microsoft.com/office/drawing/2014/main" id="{2C428359-8F72-4BEC-B3E7-C3AD583BB78B}"/>
+                <a16:creationId xmlns:a16="http://schemas.microsoft.com/office/drawing/2014/main" id="{AD3D69AB-F38F-4F05-9E89-C225BE520CB7}"/>
               </a:ext>
             </a:extLst>
           </p:cNvPr>
@@ -4317,8 +5370,8 @@
         </p:nvSpPr>
         <p:spPr>
           <a:xfrm xmlns:a="http://schemas.openxmlformats.org/drawingml/2006/main">
-            <a:off x="4095750" y="3000375"/>
-            <a:ext cx="2381250" cy="228600"/>
+            <a:off x="4629150" y="3009900"/>
+            <a:ext cx="4095750" cy="228600"/>
           </a:xfrm>
           <a:prstGeom xmlns:a="http://schemas.openxmlformats.org/drawingml/2006/main" prst="rect">
             <a:avLst/>
@@ -4336,7 +5389,7 @@
           <a:lstStyle xmlns:a="http://schemas.openxmlformats.org/drawingml/2006/main"/>
           <a:p xmlns:a="http://schemas.openxmlformats.org/drawingml/2006/main">
             <a:pPr>
-              <a:defRPr sz="1425" b="1">
+              <a:defRPr sz="1500" b="1">
                 <a:solidFill>
                   <a:srgbClr val="102A34"/>
                 </a:solidFill>
@@ -4346,7 +5399,7 @@
               </a:defRPr>
             </a:pPr>
             <a:r>
-              <a:rPr sz="1425" b="1">
+              <a:rPr sz="1500" b="1">
                 <a:solidFill>
                   <a:srgbClr val="102A34"/>
                 </a:solidFill>
@@ -4354,455 +5407,33 @@
                 <a:ea typeface="Helvetica Neue"/>
                 <a:cs typeface="Helvetica Neue"/>
               </a:rPr>
-              <a:t>Outliers and quality flags</a:t>
+              <a:t>High-risk trend by segment</a:t>
             </a:r>
           </a:p>
         </p:txBody>
       </p:sp>
       <p:graphicFrame>
         <p:nvGraphicFramePr>
-          <p:cNvPr id="39" name=""/>
+          <p:cNvPr id="32" name="Chart"/>
           <p:cNvGraphicFramePr/>
           <p:nvPr/>
         </p:nvGraphicFramePr>
         <p:xfrm>
-          <a:off xmlns:a="http://schemas.openxmlformats.org/drawingml/2006/main" x="4095750" y="3352800"/>
-          <a:ext xmlns:a="http://schemas.openxmlformats.org/drawingml/2006/main" cx="3143250" cy="1257300"/>
+          <a:off xmlns:a="http://schemas.openxmlformats.org/drawingml/2006/main" x="4629150" y="3352800"/>
+          <a:ext xmlns:a="http://schemas.openxmlformats.org/drawingml/2006/main" cx="3905250" cy="1924050"/>
         </p:xfrm>
         <a:graphic xmlns:a="http://schemas.openxmlformats.org/drawingml/2006/main">
-          <a:graphicData uri="http://schemas.openxmlformats.org/drawingml/2006/table">
-            <a:tbl>
-              <a:tblPr/>
-              <a:tblGrid>
-                <a:gridCol w="1447800"/>
-                <a:gridCol w="742950"/>
-                <a:gridCol w="952500"/>
-              </a:tblGrid>
-              <a:tr h="251460">
-                <a:tc>
-                  <a:txBody>
-                    <a:bodyPr lIns="57150" tIns="19050" rIns="47625" bIns="19050">
-                      <a:noAutofit/>
-                    </a:bodyPr>
-                    <a:lstStyle/>
-                    <a:p>
-                      <a:pPr algn="l"/>
-                      <a:r>
-                        <a:rPr sz="720" b="1">
-                          <a:solidFill>
-                            <a:srgbClr val="FFFFFF"/>
-                          </a:solidFill>
-                          <a:latin typeface="Helvetica Neue"/>
-                          <a:ea typeface="Helvetica Neue"/>
-                          <a:cs typeface="Helvetica Neue"/>
-                        </a:rPr>
-                        <a:t>Measure</a:t>
-                      </a:r>
-                    </a:p>
-                  </a:txBody>
-                  <a:tcPr marL="91440" marR="91440" marT="45720" marB="45720" anchor="ctr">
-                    <a:solidFill>
-                      <a:srgbClr val="0F4C5C"/>
-                    </a:solidFill>
-                  </a:tcPr>
-                </a:tc>
-                <a:tc>
-                  <a:txBody>
-                    <a:bodyPr lIns="57150" tIns="19050" rIns="47625" bIns="19050">
-                      <a:noAutofit/>
-                    </a:bodyPr>
-                    <a:lstStyle/>
-                    <a:p>
-                      <a:pPr algn="ctr"/>
-                      <a:r>
-                        <a:rPr sz="720" b="1">
-                          <a:solidFill>
-                            <a:srgbClr val="FFFFFF"/>
-                          </a:solidFill>
-                          <a:latin typeface="Helvetica Neue"/>
-                          <a:ea typeface="Helvetica Neue"/>
-                          <a:cs typeface="Helvetica Neue"/>
-                        </a:rPr>
-                        <a:t>Outliers</a:t>
-                      </a:r>
-                    </a:p>
-                  </a:txBody>
-                  <a:tcPr marL="91440" marR="91440" marT="45720" marB="45720" anchor="ctr">
-                    <a:solidFill>
-                      <a:srgbClr val="0F4C5C"/>
-                    </a:solidFill>
-                  </a:tcPr>
-                </a:tc>
-                <a:tc>
-                  <a:txBody>
-                    <a:bodyPr lIns="57150" tIns="19050" rIns="47625" bIns="19050">
-                      <a:noAutofit/>
-                    </a:bodyPr>
-                    <a:lstStyle/>
-                    <a:p>
-                      <a:pPr algn="ctr"/>
-                      <a:r>
-                        <a:rPr sz="720" b="1">
-                          <a:solidFill>
-                            <a:srgbClr val="FFFFFF"/>
-                          </a:solidFill>
-                          <a:latin typeface="Helvetica Neue"/>
-                          <a:ea typeface="Helvetica Neue"/>
-                          <a:cs typeface="Helvetica Neue"/>
-                        </a:rPr>
-                        <a:t>Boundary</a:t>
-                      </a:r>
-                    </a:p>
-                  </a:txBody>
-                  <a:tcPr marL="91440" marR="91440" marT="45720" marB="45720" anchor="ctr">
-                    <a:solidFill>
-                      <a:srgbClr val="0F4C5C"/>
-                    </a:solidFill>
-                  </a:tcPr>
-                </a:tc>
-              </a:tr>
-              <a:tr h="251460">
-                <a:tc>
-                  <a:txBody>
-                    <a:bodyPr lIns="57150" tIns="19050" rIns="47625" bIns="19050">
-                      <a:noAutofit/>
-                    </a:bodyPr>
-                    <a:lstStyle/>
-                    <a:p>
-                      <a:pPr algn="l"/>
-                      <a:r>
-                        <a:rPr sz="645" b="1">
-                          <a:solidFill>
-                            <a:srgbClr val="253B44"/>
-                          </a:solidFill>
-                          <a:latin typeface="Helvetica Neue"/>
-                          <a:ea typeface="Helvetica Neue"/>
-                          <a:cs typeface="Helvetica Neue"/>
-                        </a:rPr>
-                        <a:t>Length of stay</a:t>
-                      </a:r>
-                    </a:p>
-                  </a:txBody>
-                  <a:tcPr marL="91440" marR="91440" marT="45720" marB="45720" anchor="ctr">
-                    <a:solidFill>
-                      <a:srgbClr val="EEF6F7"/>
-                    </a:solidFill>
-                  </a:tcPr>
-                </a:tc>
-                <a:tc>
-                  <a:txBody>
-                    <a:bodyPr lIns="57150" tIns="19050" rIns="47625" bIns="19050">
-                      <a:noAutofit/>
-                    </a:bodyPr>
-                    <a:lstStyle/>
-                    <a:p>
-                      <a:pPr algn="ctr"/>
-                      <a:r>
-                        <a:rPr sz="645" b="0">
-                          <a:solidFill>
-                            <a:srgbClr val="253B44"/>
-                          </a:solidFill>
-                          <a:latin typeface="Helvetica Neue"/>
-                          <a:ea typeface="Helvetica Neue"/>
-                          <a:cs typeface="Helvetica Neue"/>
-                        </a:rPr>
-                        <a:t>191</a:t>
-                      </a:r>
-                    </a:p>
-                  </a:txBody>
-                  <a:tcPr marL="91440" marR="91440" marT="45720" marB="45720" anchor="ctr">
-                    <a:solidFill>
-                      <a:srgbClr val="EEF6F7"/>
-                    </a:solidFill>
-                  </a:tcPr>
-                </a:tc>
-                <a:tc>
-                  <a:txBody>
-                    <a:bodyPr lIns="57150" tIns="19050" rIns="47625" bIns="19050">
-                      <a:noAutofit/>
-                    </a:bodyPr>
-                    <a:lstStyle/>
-                    <a:p>
-                      <a:pPr algn="ctr"/>
-                      <a:r>
-                        <a:rPr sz="645" b="0">
-                          <a:solidFill>
-                            <a:srgbClr val="253B44"/>
-                          </a:solidFill>
-                          <a:latin typeface="Helvetica Neue"/>
-                          <a:ea typeface="Helvetica Neue"/>
-                          <a:cs typeface="Helvetica Neue"/>
-                        </a:rPr>
-                        <a:t>&gt;11.5</a:t>
-                      </a:r>
-                    </a:p>
-                  </a:txBody>
-                  <a:tcPr marL="91440" marR="91440" marT="45720" marB="45720" anchor="ctr">
-                    <a:solidFill>
-                      <a:srgbClr val="EEF6F7"/>
-                    </a:solidFill>
-                  </a:tcPr>
-                </a:tc>
-              </a:tr>
-              <a:tr h="251460">
-                <a:tc>
-                  <a:txBody>
-                    <a:bodyPr lIns="57150" tIns="19050" rIns="47625" bIns="19050">
-                      <a:noAutofit/>
-                    </a:bodyPr>
-                    <a:lstStyle/>
-                    <a:p>
-                      <a:pPr algn="l"/>
-                      <a:r>
-                        <a:rPr sz="645" b="1">
-                          <a:solidFill>
-                            <a:srgbClr val="253B44"/>
-                          </a:solidFill>
-                          <a:latin typeface="Helvetica Neue"/>
-                          <a:ea typeface="Helvetica Neue"/>
-                          <a:cs typeface="Helvetica Neue"/>
-                        </a:rPr>
-                        <a:t>Total care cost</a:t>
-                      </a:r>
-                    </a:p>
-                  </a:txBody>
-                  <a:tcPr marL="91440" marR="91440" marT="45720" marB="45720" anchor="ctr">
-                    <a:solidFill>
-                      <a:srgbClr val="F8FBFC"/>
-                    </a:solidFill>
-                  </a:tcPr>
-                </a:tc>
-                <a:tc>
-                  <a:txBody>
-                    <a:bodyPr lIns="57150" tIns="19050" rIns="47625" bIns="19050">
-                      <a:noAutofit/>
-                    </a:bodyPr>
-                    <a:lstStyle/>
-                    <a:p>
-                      <a:pPr algn="ctr"/>
-                      <a:r>
-                        <a:rPr sz="645" b="0">
-                          <a:solidFill>
-                            <a:srgbClr val="253B44"/>
-                          </a:solidFill>
-                          <a:latin typeface="Helvetica Neue"/>
-                          <a:ea typeface="Helvetica Neue"/>
-                          <a:cs typeface="Helvetica Neue"/>
-                        </a:rPr>
-                        <a:t>72</a:t>
-                      </a:r>
-                    </a:p>
-                  </a:txBody>
-                  <a:tcPr marL="91440" marR="91440" marT="45720" marB="45720" anchor="ctr">
-                    <a:solidFill>
-                      <a:srgbClr val="F8FBFC"/>
-                    </a:solidFill>
-                  </a:tcPr>
-                </a:tc>
-                <a:tc>
-                  <a:txBody>
-                    <a:bodyPr lIns="57150" tIns="19050" rIns="47625" bIns="19050">
-                      <a:noAutofit/>
-                    </a:bodyPr>
-                    <a:lstStyle/>
-                    <a:p>
-                      <a:pPr algn="ctr"/>
-                      <a:r>
-                        <a:rPr sz="645" b="0">
-                          <a:solidFill>
-                            <a:srgbClr val="253B44"/>
-                          </a:solidFill>
-                          <a:latin typeface="Helvetica Neue"/>
-                          <a:ea typeface="Helvetica Neue"/>
-                          <a:cs typeface="Helvetica Neue"/>
-                        </a:rPr>
-                        <a:t>&gt;$41,217</a:t>
-                      </a:r>
-                    </a:p>
-                  </a:txBody>
-                  <a:tcPr marL="91440" marR="91440" marT="45720" marB="45720" anchor="ctr">
-                    <a:solidFill>
-                      <a:srgbClr val="F8FBFC"/>
-                    </a:solidFill>
-                  </a:tcPr>
-                </a:tc>
-              </a:tr>
-              <a:tr h="251460">
-                <a:tc>
-                  <a:txBody>
-                    <a:bodyPr lIns="57150" tIns="19050" rIns="47625" bIns="19050">
-                      <a:noAutofit/>
-                    </a:bodyPr>
-                    <a:lstStyle/>
-                    <a:p>
-                      <a:pPr algn="l"/>
-                      <a:r>
-                        <a:rPr sz="645" b="1">
-                          <a:solidFill>
-                            <a:srgbClr val="253B44"/>
-                          </a:solidFill>
-                          <a:latin typeface="Helvetica Neue"/>
-                          <a:ea typeface="Helvetica Neue"/>
-                          <a:cs typeface="Helvetica Neue"/>
-                        </a:rPr>
-                        <a:t>Net reimbursement gap</a:t>
-                      </a:r>
-                    </a:p>
-                  </a:txBody>
-                  <a:tcPr marL="91440" marR="91440" marT="45720" marB="45720" anchor="ctr">
-                    <a:solidFill>
-                      <a:srgbClr val="EEF6F7"/>
-                    </a:solidFill>
-                  </a:tcPr>
-                </a:tc>
-                <a:tc>
-                  <a:txBody>
-                    <a:bodyPr lIns="57150" tIns="19050" rIns="47625" bIns="19050">
-                      <a:noAutofit/>
-                    </a:bodyPr>
-                    <a:lstStyle/>
-                    <a:p>
-                      <a:pPr algn="ctr"/>
-                      <a:r>
-                        <a:rPr sz="645" b="0">
-                          <a:solidFill>
-                            <a:srgbClr val="253B44"/>
-                          </a:solidFill>
-                          <a:latin typeface="Helvetica Neue"/>
-                          <a:ea typeface="Helvetica Neue"/>
-                          <a:cs typeface="Helvetica Neue"/>
-                        </a:rPr>
-                        <a:t>64</a:t>
-                      </a:r>
-                    </a:p>
-                  </a:txBody>
-                  <a:tcPr marL="91440" marR="91440" marT="45720" marB="45720" anchor="ctr">
-                    <a:solidFill>
-                      <a:srgbClr val="EEF6F7"/>
-                    </a:solidFill>
-                  </a:tcPr>
-                </a:tc>
-                <a:tc>
-                  <a:txBody>
-                    <a:bodyPr lIns="57150" tIns="19050" rIns="47625" bIns="19050">
-                      <a:noAutofit/>
-                    </a:bodyPr>
-                    <a:lstStyle/>
-                    <a:p>
-                      <a:pPr algn="ctr"/>
-                      <a:r>
-                        <a:rPr sz="645" b="0">
-                          <a:solidFill>
-                            <a:srgbClr val="253B44"/>
-                          </a:solidFill>
-                          <a:latin typeface="Helvetica Neue"/>
-                          <a:ea typeface="Helvetica Neue"/>
-                          <a:cs typeface="Helvetica Neue"/>
-                        </a:rPr>
-                        <a:t>&gt;$30,691</a:t>
-                      </a:r>
-                    </a:p>
-                  </a:txBody>
-                  <a:tcPr marL="91440" marR="91440" marT="45720" marB="45720" anchor="ctr">
-                    <a:solidFill>
-                      <a:srgbClr val="EEF6F7"/>
-                    </a:solidFill>
-                  </a:tcPr>
-                </a:tc>
-              </a:tr>
-              <a:tr h="251460">
-                <a:tc>
-                  <a:txBody>
-                    <a:bodyPr lIns="57150" tIns="19050" rIns="47625" bIns="19050">
-                      <a:noAutofit/>
-                    </a:bodyPr>
-                    <a:lstStyle/>
-                    <a:p>
-                      <a:pPr algn="l"/>
-                      <a:r>
-                        <a:rPr sz="645" b="1">
-                          <a:solidFill>
-                            <a:srgbClr val="253B44"/>
-                          </a:solidFill>
-                          <a:latin typeface="Helvetica Neue"/>
-                          <a:ea typeface="Helvetica Neue"/>
-                          <a:cs typeface="Helvetica Neue"/>
-                        </a:rPr>
-                        <a:t>Negative penalty cost</a:t>
-                      </a:r>
-                    </a:p>
-                  </a:txBody>
-                  <a:tcPr marL="91440" marR="91440" marT="45720" marB="45720" anchor="ctr">
-                    <a:solidFill>
-                      <a:srgbClr val="F8FBFC"/>
-                    </a:solidFill>
-                  </a:tcPr>
-                </a:tc>
-                <a:tc>
-                  <a:txBody>
-                    <a:bodyPr lIns="57150" tIns="19050" rIns="47625" bIns="19050">
-                      <a:noAutofit/>
-                    </a:bodyPr>
-                    <a:lstStyle/>
-                    <a:p>
-                      <a:pPr algn="ctr"/>
-                      <a:r>
-                        <a:rPr sz="645" b="0">
-                          <a:solidFill>
-                            <a:srgbClr val="253B44"/>
-                          </a:solidFill>
-                          <a:latin typeface="Helvetica Neue"/>
-                          <a:ea typeface="Helvetica Neue"/>
-                          <a:cs typeface="Helvetica Neue"/>
-                        </a:rPr>
-                        <a:t>49</a:t>
-                      </a:r>
-                    </a:p>
-                  </a:txBody>
-                  <a:tcPr marL="91440" marR="91440" marT="45720" marB="45720" anchor="ctr">
-                    <a:solidFill>
-                      <a:srgbClr val="F8FBFC"/>
-                    </a:solidFill>
-                  </a:tcPr>
-                </a:tc>
-                <a:tc>
-                  <a:txBody>
-                    <a:bodyPr lIns="57150" tIns="19050" rIns="47625" bIns="19050">
-                      <a:noAutofit/>
-                    </a:bodyPr>
-                    <a:lstStyle/>
-                    <a:p>
-                      <a:pPr algn="ctr"/>
-                      <a:r>
-                        <a:rPr sz="645" b="0">
-                          <a:solidFill>
-                            <a:srgbClr val="253B44"/>
-                          </a:solidFill>
-                          <a:latin typeface="Helvetica Neue"/>
-                          <a:ea typeface="Helvetica Neue"/>
-                          <a:cs typeface="Helvetica Neue"/>
-                        </a:rPr>
-                        <a:t>0.4%</a:t>
-                      </a:r>
-                    </a:p>
-                  </a:txBody>
-                  <a:tcPr marL="91440" marR="91440" marT="45720" marB="45720" anchor="ctr">
-                    <a:solidFill>
-                      <a:srgbClr val="F8FBFC"/>
-                    </a:solidFill>
-                  </a:tcPr>
-                </a:tc>
-              </a:tr>
-            </a:tbl>
+          <a:graphicData uri="http://schemas.openxmlformats.org/drawingml/2006/chart">
+            <c:chart xmlns:r="http://schemas.openxmlformats.org/officeDocument/2006/relationships" xmlns:c="http://schemas.openxmlformats.org/drawingml/2006/chart" r:id="Ra97aadc4020b40ba"/>
           </a:graphicData>
         </a:graphic>
       </p:graphicFrame>
       <p:sp>
         <p:nvSpPr>
-          <p:cNvPr id="15" name="">
+          <p:cNvPr id="13" name="">
             <a:extLst xmlns:a="http://schemas.openxmlformats.org/drawingml/2006/main">
               <a:ext uri="{FF2B5EF4-FFF2-40B4-BE49-F238E27FC236}">
-                <a16:creationId xmlns:a16="http://schemas.microsoft.com/office/drawing/2014/main" id="{8CEE8B8B-DCF7-4590-BBA3-20E6ECAD4A86}"/>
+                <a16:creationId xmlns:a16="http://schemas.microsoft.com/office/drawing/2014/main" id="{A78F0C7A-6A5F-4BD1-A5E0-BDE73C852C8A}"/>
               </a:ext>
             </a:extLst>
           </p:cNvPr>
@@ -4813,8 +5444,140 @@
         </p:nvSpPr>
         <p:spPr>
           <a:xfrm xmlns:a="http://schemas.openxmlformats.org/drawingml/2006/main">
-            <a:off x="4095750" y="4724400"/>
-            <a:ext cx="3143250" cy="428625"/>
+            <a:off x="4629150" y="5391150"/>
+            <a:ext cx="3905250" cy="266700"/>
+          </a:xfrm>
+          <a:prstGeom xmlns:a="http://schemas.openxmlformats.org/drawingml/2006/main" prst="rect">
+            <a:avLst/>
+          </a:prstGeom>
+          <a:noFill xmlns:a="http://schemas.openxmlformats.org/drawingml/2006/main"/>
+          <a:ln xmlns:a="http://schemas.openxmlformats.org/drawingml/2006/main" w="0">
+            <a:noFill/>
+            <a:prstDash val="solid"/>
+          </a:ln>
+        </p:spPr>
+        <p:txBody>
+          <a:bodyPr xmlns:a="http://schemas.openxmlformats.org/drawingml/2006/main" lIns="0" tIns="0" rIns="0" bIns="0">
+            <a:noAutofit/>
+          </a:bodyPr>
+          <a:lstStyle xmlns:a="http://schemas.openxmlformats.org/drawingml/2006/main"/>
+          <a:p xmlns:a="http://schemas.openxmlformats.org/drawingml/2006/main">
+            <a:pPr>
+              <a:defRPr sz="803">
+                <a:solidFill>
+                  <a:srgbClr val="50636B"/>
+                </a:solidFill>
+                <a:latin typeface="Helvetica Neue"/>
+                <a:ea typeface="Helvetica Neue"/>
+                <a:cs typeface="Helvetica Neue"/>
+              </a:defRPr>
+            </a:pPr>
+            <a:r>
+              <a:rPr sz="803">
+                <a:solidFill>
+                  <a:srgbClr val="50636B"/>
+                </a:solidFill>
+                <a:latin typeface="Helvetica Neue"/>
+                <a:ea typeface="Helvetica Neue"/>
+                <a:cs typeface="Helvetica Neue"/>
+              </a:rPr>
+              <a:t>These segments show where readmission risk concentrates before modeling.</a:t>
+            </a:r>
+          </a:p>
+        </p:txBody>
+      </p:sp>
+      <p:sp>
+        <p:nvSpPr>
+          <p:cNvPr id="14" name="">
+            <a:extLst xmlns:a="http://schemas.openxmlformats.org/drawingml/2006/main">
+              <a:ext uri="{FF2B5EF4-FFF2-40B4-BE49-F238E27FC236}">
+                <a16:creationId xmlns:a16="http://schemas.microsoft.com/office/drawing/2014/main" id="{5C5ECDBE-3DE4-4274-86C3-FD674E59DDFD}"/>
+              </a:ext>
+            </a:extLst>
+          </p:cNvPr>
+          <p:cNvSpPr>
+            <a:spLocks xmlns:a="http://schemas.openxmlformats.org/drawingml/2006/main" noGrp="1"/>
+          </p:cNvSpPr>
+          <p:nvPr/>
+        </p:nvSpPr>
+        <p:spPr>
+          <a:xfrm xmlns:a="http://schemas.openxmlformats.org/drawingml/2006/main">
+            <a:off x="8915400" y="3009900"/>
+            <a:ext cx="2095500" cy="228600"/>
+          </a:xfrm>
+          <a:prstGeom xmlns:a="http://schemas.openxmlformats.org/drawingml/2006/main" prst="rect">
+            <a:avLst/>
+          </a:prstGeom>
+          <a:noFill xmlns:a="http://schemas.openxmlformats.org/drawingml/2006/main"/>
+          <a:ln xmlns:a="http://schemas.openxmlformats.org/drawingml/2006/main" w="0">
+            <a:noFill/>
+            <a:prstDash val="solid"/>
+          </a:ln>
+        </p:spPr>
+        <p:txBody>
+          <a:bodyPr xmlns:a="http://schemas.openxmlformats.org/drawingml/2006/main" lIns="0" tIns="0" rIns="0" bIns="0">
+            <a:noAutofit/>
+          </a:bodyPr>
+          <a:lstStyle xmlns:a="http://schemas.openxmlformats.org/drawingml/2006/main"/>
+          <a:p xmlns:a="http://schemas.openxmlformats.org/drawingml/2006/main">
+            <a:pPr>
+              <a:defRPr sz="1500" b="1">
+                <a:solidFill>
+                  <a:srgbClr val="102A34"/>
+                </a:solidFill>
+                <a:latin typeface="Helvetica Neue"/>
+                <a:ea typeface="Helvetica Neue"/>
+                <a:cs typeface="Helvetica Neue"/>
+              </a:defRPr>
+            </a:pPr>
+            <a:r>
+              <a:rPr sz="1500" b="1">
+                <a:solidFill>
+                  <a:srgbClr val="102A34"/>
+                </a:solidFill>
+                <a:latin typeface="Helvetica Neue"/>
+                <a:ea typeface="Helvetica Neue"/>
+                <a:cs typeface="Helvetica Neue"/>
+              </a:rPr>
+              <a:t>Correlation signals</a:t>
+            </a:r>
+          </a:p>
+        </p:txBody>
+      </p:sp>
+      <p:graphicFrame>
+        <p:nvGraphicFramePr>
+          <p:cNvPr id="35" name="Chart"/>
+          <p:cNvGraphicFramePr/>
+          <p:nvPr/>
+        </p:nvGraphicFramePr>
+        <p:xfrm>
+          <a:off xmlns:a="http://schemas.openxmlformats.org/drawingml/2006/main" x="8858250" y="3352800"/>
+          <a:ext xmlns:a="http://schemas.openxmlformats.org/drawingml/2006/main" cx="1943100" cy="1257300"/>
+        </p:xfrm>
+        <a:graphic xmlns:a="http://schemas.openxmlformats.org/drawingml/2006/main">
+          <a:graphicData uri="http://schemas.openxmlformats.org/drawingml/2006/chart">
+            <c:chart xmlns:r="http://schemas.openxmlformats.org/officeDocument/2006/relationships" xmlns:c="http://schemas.openxmlformats.org/drawingml/2006/chart" r:id="Rfdae77fb7fd84ef1"/>
+          </a:graphicData>
+        </a:graphic>
+      </p:graphicFrame>
+      <p:sp>
+        <p:nvSpPr>
+          <p:cNvPr id="16" name="">
+            <a:extLst xmlns:a="http://schemas.openxmlformats.org/drawingml/2006/main">
+              <a:ext uri="{FF2B5EF4-FFF2-40B4-BE49-F238E27FC236}">
+                <a16:creationId xmlns:a16="http://schemas.microsoft.com/office/drawing/2014/main" id="{CF0102D0-C346-440F-8CF3-F3323141E960}"/>
+              </a:ext>
+            </a:extLst>
+          </p:cNvPr>
+          <p:cNvSpPr>
+            <a:spLocks xmlns:a="http://schemas.openxmlformats.org/drawingml/2006/main" noGrp="1"/>
+          </p:cNvSpPr>
+          <p:nvPr/>
+        </p:nvSpPr>
+        <p:spPr>
+          <a:xfrm xmlns:a="http://schemas.openxmlformats.org/drawingml/2006/main">
+            <a:off x="8915400" y="4810125"/>
+            <a:ext cx="1952625" cy="514350"/>
           </a:xfrm>
           <a:prstGeom xmlns:a="http://schemas.openxmlformats.org/drawingml/2006/main" prst="rect">
             <a:avLst/>
@@ -4833,7 +5596,7 @@
           <a:p xmlns:a="http://schemas.openxmlformats.org/drawingml/2006/main">
             <a:pPr>
               <a:lnSpc>
-                <a:spcPct val="104000"/>
+                <a:spcPct val="105000"/>
               </a:lnSpc>
               <a:buNone/>
               <a:defRPr sz="788">
@@ -4854,17 +5617,17 @@
                 <a:ea typeface="Helvetica Neue"/>
                 <a:cs typeface="Helvetica Neue"/>
               </a:rPr>
-              <a:t>Example: length of stay above 11.5 days is flagged as an outlier under the IQR rule.</a:t>
+              <a:t>Prior admissions and chronic burden show the strongest early relationship with readmission.</a:t>
             </a:r>
           </a:p>
         </p:txBody>
       </p:sp>
       <p:sp>
         <p:nvSpPr>
-          <p:cNvPr id="16" name="">
+          <p:cNvPr id="17" name="">
             <a:extLst xmlns:a="http://schemas.openxmlformats.org/drawingml/2006/main">
               <a:ext uri="{FF2B5EF4-FFF2-40B4-BE49-F238E27FC236}">
-                <a16:creationId xmlns:a16="http://schemas.microsoft.com/office/drawing/2014/main" id="{FDA95A2C-8583-453E-8310-4E06A84C379D}"/>
+                <a16:creationId xmlns:a16="http://schemas.microsoft.com/office/drawing/2014/main" id="{6511E1A9-5016-49B8-A5A7-8708D1D19CDA}"/>
               </a:ext>
             </a:extLst>
           </p:cNvPr>
@@ -4875,8 +5638,39 @@
         </p:nvSpPr>
         <p:spPr>
           <a:xfrm xmlns:a="http://schemas.openxmlformats.org/drawingml/2006/main">
-            <a:off x="7562850" y="3000375"/>
-            <a:ext cx="2381250" cy="228600"/>
+            <a:off x="514350" y="5800725"/>
+            <a:ext cx="10287000" cy="14288"/>
+          </a:xfrm>
+          <a:prstGeom xmlns:a="http://schemas.openxmlformats.org/drawingml/2006/main" prst="rect">
+            <a:avLst/>
+          </a:prstGeom>
+          <a:solidFill xmlns:a="http://schemas.openxmlformats.org/drawingml/2006/main">
+            <a:srgbClr val="D1E1E5"/>
+          </a:solidFill>
+          <a:ln xmlns:a="http://schemas.openxmlformats.org/drawingml/2006/main" w="0">
+            <a:noFill/>
+            <a:prstDash val="solid"/>
+          </a:ln>
+        </p:spPr>
+      </p:sp>
+      <p:sp>
+        <p:nvSpPr>
+          <p:cNvPr id="18" name="">
+            <a:extLst xmlns:a="http://schemas.openxmlformats.org/drawingml/2006/main">
+              <a:ext uri="{FF2B5EF4-FFF2-40B4-BE49-F238E27FC236}">
+                <a16:creationId xmlns:a16="http://schemas.microsoft.com/office/drawing/2014/main" id="{DF609F2F-9AC3-44BC-92BE-17E5170BE2AD}"/>
+              </a:ext>
+            </a:extLst>
+          </p:cNvPr>
+          <p:cNvSpPr>
+            <a:spLocks xmlns:a="http://schemas.openxmlformats.org/drawingml/2006/main" noGrp="1"/>
+          </p:cNvSpPr>
+          <p:nvPr/>
+        </p:nvSpPr>
+        <p:spPr>
+          <a:xfrm xmlns:a="http://schemas.openxmlformats.org/drawingml/2006/main">
+            <a:off x="514350" y="6019800"/>
+            <a:ext cx="2000250" cy="209550"/>
           </a:xfrm>
           <a:prstGeom xmlns:a="http://schemas.openxmlformats.org/drawingml/2006/main" prst="rect">
             <a:avLst/>
@@ -4894,7 +5688,7 @@
           <a:lstStyle xmlns:a="http://schemas.openxmlformats.org/drawingml/2006/main"/>
           <a:p xmlns:a="http://schemas.openxmlformats.org/drawingml/2006/main">
             <a:pPr>
-              <a:defRPr sz="1425" b="1">
+              <a:defRPr sz="1200" b="1">
                 <a:solidFill>
                   <a:srgbClr val="102A34"/>
                 </a:solidFill>
@@ -4904,7 +5698,7 @@
               </a:defRPr>
             </a:pPr>
             <a:r>
-              <a:rPr sz="1425" b="1">
+              <a:rPr sz="1200" b="1">
                 <a:solidFill>
                   <a:srgbClr val="102A34"/>
                 </a:solidFill>
@@ -4912,33 +5706,17 @@
                 <a:ea typeface="Helvetica Neue"/>
                 <a:cs typeface="Helvetica Neue"/>
               </a:rPr>
-              <a:t>Trend pattern</a:t>
+              <a:t>Analytical implication</a:t>
             </a:r>
           </a:p>
         </p:txBody>
       </p:sp>
-      <p:graphicFrame>
-        <p:nvGraphicFramePr>
-          <p:cNvPr id="42" name="Chart"/>
-          <p:cNvGraphicFramePr/>
-          <p:nvPr/>
-        </p:nvGraphicFramePr>
-        <p:xfrm>
-          <a:off xmlns:a="http://schemas.openxmlformats.org/drawingml/2006/main" x="7505700" y="3352800"/>
-          <a:ext xmlns:a="http://schemas.openxmlformats.org/drawingml/2006/main" cx="3295650" cy="1295400"/>
-        </p:xfrm>
-        <a:graphic xmlns:a="http://schemas.openxmlformats.org/drawingml/2006/main">
-          <a:graphicData uri="http://schemas.openxmlformats.org/drawingml/2006/chart">
-            <c:chart xmlns:r="http://schemas.openxmlformats.org/officeDocument/2006/relationships" xmlns:c="http://schemas.openxmlformats.org/drawingml/2006/chart" r:id="Rb3b533c5ef404a3f"/>
-          </a:graphicData>
-        </a:graphic>
-      </p:graphicFrame>
       <p:sp>
         <p:nvSpPr>
-          <p:cNvPr id="18" name="">
+          <p:cNvPr id="19" name="">
             <a:extLst xmlns:a="http://schemas.openxmlformats.org/drawingml/2006/main">
               <a:ext uri="{FF2B5EF4-FFF2-40B4-BE49-F238E27FC236}">
-                <a16:creationId xmlns:a16="http://schemas.microsoft.com/office/drawing/2014/main" id="{95AD36C5-B05F-4E5A-ADFF-D6F1C6028124}"/>
+                <a16:creationId xmlns:a16="http://schemas.microsoft.com/office/drawing/2014/main" id="{609538A9-9542-48CA-BE1F-5E6D037ED41F}"/>
               </a:ext>
             </a:extLst>
           </p:cNvPr>
@@ -4949,8 +5727,8 @@
         </p:nvSpPr>
         <p:spPr>
           <a:xfrm xmlns:a="http://schemas.openxmlformats.org/drawingml/2006/main">
-            <a:off x="7562850" y="4724400"/>
-            <a:ext cx="3219450" cy="428625"/>
+            <a:off x="2533650" y="6038850"/>
+            <a:ext cx="7239000" cy="209550"/>
           </a:xfrm>
           <a:prstGeom xmlns:a="http://schemas.openxmlformats.org/drawingml/2006/main" prst="rect">
             <a:avLst/>
@@ -4968,13 +5746,9 @@
           <a:lstStyle xmlns:a="http://schemas.openxmlformats.org/drawingml/2006/main"/>
           <a:p xmlns:a="http://schemas.openxmlformats.org/drawingml/2006/main">
             <a:pPr>
-              <a:lnSpc>
-                <a:spcPct val="104000"/>
-              </a:lnSpc>
-              <a:buNone/>
-              <a:defRPr sz="788">
-                <a:solidFill>
-                  <a:srgbClr val="50636B"/>
+              <a:defRPr sz="915">
+                <a:solidFill>
+                  <a:srgbClr val="253B44"/>
                 </a:solidFill>
                 <a:latin typeface="Helvetica Neue"/>
                 <a:ea typeface="Helvetica Neue"/>
@@ -4982,25 +5756,25 @@
               </a:defRPr>
             </a:pPr>
             <a:r>
-              <a:rPr sz="788">
-                <a:solidFill>
-                  <a:srgbClr val="50636B"/>
+              <a:rPr sz="915">
+                <a:solidFill>
+                  <a:srgbClr val="253B44"/>
                 </a:solidFill>
                 <a:latin typeface="Helvetica Neue"/>
                 <a:ea typeface="Helvetica Neue"/>
                 <a:cs typeface="Helvetica Neue"/>
               </a:rPr>
-              <a:t>Example: readmission rises from 42.0% for ages 50-64 to 54.3% for ages 85+.</a:t>
+              <a:t>Focus the next analysis on patient risk profiles and care-transition gaps, while treating financial estimates as validation-sensitive.</a:t>
             </a:r>
           </a:p>
         </p:txBody>
       </p:sp>
       <p:sp>
         <p:nvSpPr>
-          <p:cNvPr id="19" name="">
+          <p:cNvPr id="20" name="">
             <a:extLst xmlns:a="http://schemas.openxmlformats.org/drawingml/2006/main">
               <a:ext uri="{FF2B5EF4-FFF2-40B4-BE49-F238E27FC236}">
-                <a16:creationId xmlns:a16="http://schemas.microsoft.com/office/drawing/2014/main" id="{78F3AA81-E720-43D3-A4DA-CA4D8E84996F}"/>
+                <a16:creationId xmlns:a16="http://schemas.microsoft.com/office/drawing/2014/main" id="{30D2F951-9DA6-42EE-9A07-C8E89756B077}"/>
               </a:ext>
             </a:extLst>
           </p:cNvPr>
@@ -5011,39 +5785,8 @@
         </p:nvSpPr>
         <p:spPr>
           <a:xfrm xmlns:a="http://schemas.openxmlformats.org/drawingml/2006/main">
-            <a:off x="514350" y="5381625"/>
-            <a:ext cx="10287000" cy="14288"/>
-          </a:xfrm>
-          <a:prstGeom xmlns:a="http://schemas.openxmlformats.org/drawingml/2006/main" prst="rect">
-            <a:avLst/>
-          </a:prstGeom>
-          <a:solidFill xmlns:a="http://schemas.openxmlformats.org/drawingml/2006/main">
-            <a:srgbClr val="D1E1E5"/>
-          </a:solidFill>
-          <a:ln xmlns:a="http://schemas.openxmlformats.org/drawingml/2006/main" w="0">
-            <a:noFill/>
-            <a:prstDash val="solid"/>
-          </a:ln>
-        </p:spPr>
-      </p:sp>
-      <p:sp>
-        <p:nvSpPr>
-          <p:cNvPr id="20" name="">
-            <a:extLst xmlns:a="http://schemas.openxmlformats.org/drawingml/2006/main">
-              <a:ext uri="{FF2B5EF4-FFF2-40B4-BE49-F238E27FC236}">
-                <a16:creationId xmlns:a16="http://schemas.microsoft.com/office/drawing/2014/main" id="{2DD9601F-68AC-423F-9CA7-CF602CE7EB44}"/>
-              </a:ext>
-            </a:extLst>
-          </p:cNvPr>
-          <p:cNvSpPr>
-            <a:spLocks xmlns:a="http://schemas.openxmlformats.org/drawingml/2006/main" noGrp="1"/>
-          </p:cNvSpPr>
-          <p:nvPr/>
-        </p:nvSpPr>
-        <p:spPr>
-          <a:xfrm xmlns:a="http://schemas.openxmlformats.org/drawingml/2006/main">
-            <a:off x="514350" y="5610225"/>
-            <a:ext cx="2381250" cy="228600"/>
+            <a:off x="514350" y="6572250"/>
+            <a:ext cx="8191500" cy="171450"/>
           </a:xfrm>
           <a:prstGeom xmlns:a="http://schemas.openxmlformats.org/drawingml/2006/main" prst="rect">
             <a:avLst/>
@@ -5061,9 +5804,9 @@
           <a:lstStyle xmlns:a="http://schemas.openxmlformats.org/drawingml/2006/main"/>
           <a:p xmlns:a="http://schemas.openxmlformats.org/drawingml/2006/main">
             <a:pPr>
-              <a:defRPr sz="1425" b="1">
-                <a:solidFill>
-                  <a:srgbClr val="102A34"/>
+              <a:defRPr sz="750">
+                <a:solidFill>
+                  <a:srgbClr val="667A82"/>
                 </a:solidFill>
                 <a:latin typeface="Helvetica Neue"/>
                 <a:ea typeface="Helvetica Neue"/>
@@ -5071,271 +5814,15 @@
               </a:defRPr>
             </a:pPr>
             <a:r>
-              <a:rPr sz="1425" b="1">
-                <a:solidFill>
-                  <a:srgbClr val="102A34"/>
+              <a:rPr sz="750">
+                <a:solidFill>
+                  <a:srgbClr val="667A82"/>
                 </a:solidFill>
                 <a:latin typeface="Helvetica Neue"/>
                 <a:ea typeface="Helvetica Neue"/>
                 <a:cs typeface="Helvetica Neue"/>
               </a:rPr>
-              <a:t>Correlation signals</a:t>
-            </a:r>
-          </a:p>
-        </p:txBody>
-      </p:sp>
-      <p:graphicFrame>
-        <p:nvGraphicFramePr>
-          <p:cNvPr id="46" name="Chart"/>
-          <p:cNvGraphicFramePr/>
-          <p:nvPr/>
-        </p:nvGraphicFramePr>
-        <p:xfrm>
-          <a:off xmlns:a="http://schemas.openxmlformats.org/drawingml/2006/main" x="2647950" y="5581650"/>
-          <a:ext xmlns:a="http://schemas.openxmlformats.org/drawingml/2006/main" cx="3390900" cy="876300"/>
-        </p:xfrm>
-        <a:graphic xmlns:a="http://schemas.openxmlformats.org/drawingml/2006/main">
-          <a:graphicData uri="http://schemas.openxmlformats.org/drawingml/2006/chart">
-            <c:chart xmlns:r="http://schemas.openxmlformats.org/officeDocument/2006/relationships" xmlns:c="http://schemas.openxmlformats.org/drawingml/2006/chart" r:id="Re0a64537d92949ec"/>
-          </a:graphicData>
-        </a:graphic>
-      </p:graphicFrame>
-      <p:sp>
-        <p:nvSpPr>
-          <p:cNvPr id="22" name="">
-            <a:extLst xmlns:a="http://schemas.openxmlformats.org/drawingml/2006/main">
-              <a:ext uri="{FF2B5EF4-FFF2-40B4-BE49-F238E27FC236}">
-                <a16:creationId xmlns:a16="http://schemas.microsoft.com/office/drawing/2014/main" id="{9E2AB643-C5F1-4F07-BD1A-627C0111576D}"/>
-              </a:ext>
-            </a:extLst>
-          </p:cNvPr>
-          <p:cNvSpPr>
-            <a:spLocks xmlns:a="http://schemas.openxmlformats.org/drawingml/2006/main" noGrp="1"/>
-          </p:cNvSpPr>
-          <p:nvPr/>
-        </p:nvSpPr>
-        <p:spPr>
-          <a:xfrm xmlns:a="http://schemas.openxmlformats.org/drawingml/2006/main">
-            <a:off x="514350" y="5934075"/>
-            <a:ext cx="1952625" cy="533400"/>
-          </a:xfrm>
-          <a:prstGeom xmlns:a="http://schemas.openxmlformats.org/drawingml/2006/main" prst="rect">
-            <a:avLst/>
-          </a:prstGeom>
-          <a:noFill xmlns:a="http://schemas.openxmlformats.org/drawingml/2006/main"/>
-          <a:ln xmlns:a="http://schemas.openxmlformats.org/drawingml/2006/main" w="0">
-            <a:noFill/>
-            <a:prstDash val="solid"/>
-          </a:ln>
-        </p:spPr>
-        <p:txBody>
-          <a:bodyPr xmlns:a="http://schemas.openxmlformats.org/drawingml/2006/main" lIns="0" tIns="0" rIns="0" bIns="0">
-            <a:noAutofit/>
-          </a:bodyPr>
-          <a:lstStyle xmlns:a="http://schemas.openxmlformats.org/drawingml/2006/main"/>
-          <a:p xmlns:a="http://schemas.openxmlformats.org/drawingml/2006/main">
-            <a:pPr>
-              <a:lnSpc>
-                <a:spcPct val="104000"/>
-              </a:lnSpc>
-              <a:buNone/>
-              <a:defRPr sz="788">
-                <a:solidFill>
-                  <a:srgbClr val="50636B"/>
-                </a:solidFill>
-                <a:latin typeface="Helvetica Neue"/>
-                <a:ea typeface="Helvetica Neue"/>
-                <a:cs typeface="Helvetica Neue"/>
-              </a:defRPr>
-            </a:pPr>
-            <a:r>
-              <a:rPr sz="788">
-                <a:solidFill>
-                  <a:srgbClr val="50636B"/>
-                </a:solidFill>
-                <a:latin typeface="Helvetica Neue"/>
-                <a:ea typeface="Helvetica Neue"/>
-                <a:cs typeface="Helvetica Neue"/>
-              </a:rPr>
-              <a:t>Example: prior admissions and chronic conditions show the strongest positive relationship with readmission.</a:t>
-            </a:r>
-          </a:p>
-        </p:txBody>
-      </p:sp>
-      <p:sp>
-        <p:nvSpPr>
-          <p:cNvPr id="23" name="">
-            <a:extLst xmlns:a="http://schemas.openxmlformats.org/drawingml/2006/main">
-              <a:ext uri="{FF2B5EF4-FFF2-40B4-BE49-F238E27FC236}">
-                <a16:creationId xmlns:a16="http://schemas.microsoft.com/office/drawing/2014/main" id="{43394676-3011-4374-858F-04C999498D06}"/>
-              </a:ext>
-            </a:extLst>
-          </p:cNvPr>
-          <p:cNvSpPr>
-            <a:spLocks xmlns:a="http://schemas.openxmlformats.org/drawingml/2006/main" noGrp="1"/>
-          </p:cNvSpPr>
-          <p:nvPr/>
-        </p:nvSpPr>
-        <p:spPr>
-          <a:xfrm xmlns:a="http://schemas.openxmlformats.org/drawingml/2006/main">
-            <a:off x="6515100" y="5610225"/>
-            <a:ext cx="2286000" cy="228600"/>
-          </a:xfrm>
-          <a:prstGeom xmlns:a="http://schemas.openxmlformats.org/drawingml/2006/main" prst="rect">
-            <a:avLst/>
-          </a:prstGeom>
-          <a:noFill xmlns:a="http://schemas.openxmlformats.org/drawingml/2006/main"/>
-          <a:ln xmlns:a="http://schemas.openxmlformats.org/drawingml/2006/main" w="0">
-            <a:noFill/>
-            <a:prstDash val="solid"/>
-          </a:ln>
-        </p:spPr>
-        <p:txBody>
-          <a:bodyPr xmlns:a="http://schemas.openxmlformats.org/drawingml/2006/main" lIns="0" tIns="0" rIns="0" bIns="0">
-            <a:noAutofit/>
-          </a:bodyPr>
-          <a:lstStyle xmlns:a="http://schemas.openxmlformats.org/drawingml/2006/main"/>
-          <a:p xmlns:a="http://schemas.openxmlformats.org/drawingml/2006/main">
-            <a:pPr>
-              <a:defRPr sz="1425" b="1">
-                <a:solidFill>
-                  <a:srgbClr val="102A34"/>
-                </a:solidFill>
-                <a:latin typeface="Helvetica Neue"/>
-                <a:ea typeface="Helvetica Neue"/>
-                <a:cs typeface="Helvetica Neue"/>
-              </a:defRPr>
-            </a:pPr>
-            <a:r>
-              <a:rPr sz="1425" b="1">
-                <a:solidFill>
-                  <a:srgbClr val="102A34"/>
-                </a:solidFill>
-                <a:latin typeface="Helvetica Neue"/>
-                <a:ea typeface="Helvetica Neue"/>
-                <a:cs typeface="Helvetica Neue"/>
-              </a:rPr>
-              <a:t>Analytical implication</a:t>
-            </a:r>
-          </a:p>
-        </p:txBody>
-      </p:sp>
-      <p:sp>
-        <p:nvSpPr>
-          <p:cNvPr id="24" name="">
-            <a:extLst xmlns:a="http://schemas.openxmlformats.org/drawingml/2006/main">
-              <a:ext uri="{FF2B5EF4-FFF2-40B4-BE49-F238E27FC236}">
-                <a16:creationId xmlns:a16="http://schemas.microsoft.com/office/drawing/2014/main" id="{ECFACEE7-CEC2-4F0A-B30B-B147F953F38A}"/>
-              </a:ext>
-            </a:extLst>
-          </p:cNvPr>
-          <p:cNvSpPr>
-            <a:spLocks xmlns:a="http://schemas.openxmlformats.org/drawingml/2006/main" noGrp="1"/>
-          </p:cNvSpPr>
-          <p:nvPr/>
-        </p:nvSpPr>
-        <p:spPr>
-          <a:xfrm xmlns:a="http://schemas.openxmlformats.org/drawingml/2006/main">
-            <a:off x="6515100" y="5943600"/>
-            <a:ext cx="4286250" cy="457200"/>
-          </a:xfrm>
-          <a:prstGeom xmlns:a="http://schemas.openxmlformats.org/drawingml/2006/main" prst="rect">
-            <a:avLst/>
-          </a:prstGeom>
-          <a:noFill xmlns:a="http://schemas.openxmlformats.org/drawingml/2006/main"/>
-          <a:ln xmlns:a="http://schemas.openxmlformats.org/drawingml/2006/main" w="0">
-            <a:noFill/>
-            <a:prstDash val="solid"/>
-          </a:ln>
-        </p:spPr>
-        <p:txBody>
-          <a:bodyPr xmlns:a="http://schemas.openxmlformats.org/drawingml/2006/main" lIns="0" tIns="0" rIns="0" bIns="0">
-            <a:noAutofit/>
-          </a:bodyPr>
-          <a:lstStyle xmlns:a="http://schemas.openxmlformats.org/drawingml/2006/main"/>
-          <a:p xmlns:a="http://schemas.openxmlformats.org/drawingml/2006/main">
-            <a:pPr>
-              <a:lnSpc>
-                <a:spcPct val="104000"/>
-              </a:lnSpc>
-              <a:buNone/>
-              <a:defRPr sz="923">
-                <a:solidFill>
-                  <a:srgbClr val="253B44"/>
-                </a:solidFill>
-                <a:latin typeface="Helvetica Neue"/>
-                <a:ea typeface="Helvetica Neue"/>
-                <a:cs typeface="Helvetica Neue"/>
-              </a:defRPr>
-            </a:pPr>
-            <a:r>
-              <a:rPr sz="923">
-                <a:solidFill>
-                  <a:srgbClr val="253B44"/>
-                </a:solidFill>
-                <a:latin typeface="Helvetica Neue"/>
-                <a:ea typeface="Helvetica Neue"/>
-                <a:cs typeface="Helvetica Neue"/>
-              </a:rPr>
-              <a:t>The next analysis should focus on high-risk patient profiles and care-transition gaps, especially where missing follow-up information limits visibility.</a:t>
-            </a:r>
-          </a:p>
-        </p:txBody>
-      </p:sp>
-      <p:sp>
-        <p:nvSpPr>
-          <p:cNvPr id="25" name="">
-            <a:extLst xmlns:a="http://schemas.openxmlformats.org/drawingml/2006/main">
-              <a:ext uri="{FF2B5EF4-FFF2-40B4-BE49-F238E27FC236}">
-                <a16:creationId xmlns:a16="http://schemas.microsoft.com/office/drawing/2014/main" id="{A42CC8B6-46B4-44BB-9447-AAAEE81F70B5}"/>
-              </a:ext>
-            </a:extLst>
-          </p:cNvPr>
-          <p:cNvSpPr>
-            <a:spLocks xmlns:a="http://schemas.openxmlformats.org/drawingml/2006/main" noGrp="1"/>
-          </p:cNvSpPr>
-          <p:nvPr/>
-        </p:nvSpPr>
-        <p:spPr>
-          <a:xfrm xmlns:a="http://schemas.openxmlformats.org/drawingml/2006/main">
-            <a:off x="514350" y="6572250"/>
-            <a:ext cx="6477000" cy="171450"/>
-          </a:xfrm>
-          <a:prstGeom xmlns:a="http://schemas.openxmlformats.org/drawingml/2006/main" prst="rect">
-            <a:avLst/>
-          </a:prstGeom>
-          <a:noFill xmlns:a="http://schemas.openxmlformats.org/drawingml/2006/main"/>
-          <a:ln xmlns:a="http://schemas.openxmlformats.org/drawingml/2006/main" w="0">
-            <a:noFill/>
-            <a:prstDash val="solid"/>
-          </a:ln>
-        </p:spPr>
-        <p:txBody>
-          <a:bodyPr xmlns:a="http://schemas.openxmlformats.org/drawingml/2006/main" lIns="0" tIns="0" rIns="0" bIns="0">
-            <a:noAutofit/>
-          </a:bodyPr>
-          <a:lstStyle xmlns:a="http://schemas.openxmlformats.org/drawingml/2006/main"/>
-          <a:p xmlns:a="http://schemas.openxmlformats.org/drawingml/2006/main">
-            <a:pPr>
-              <a:defRPr sz="788">
-                <a:solidFill>
-                  <a:srgbClr val="667A82"/>
-                </a:solidFill>
-                <a:latin typeface="Helvetica Neue"/>
-                <a:ea typeface="Helvetica Neue"/>
-                <a:cs typeface="Helvetica Neue"/>
-              </a:defRPr>
-            </a:pPr>
-            <a:r>
-              <a:rPr sz="788">
-                <a:solidFill>
-                  <a:srgbClr val="667A82"/>
-                </a:solidFill>
-                <a:latin typeface="Helvetica Neue"/>
-                <a:ea typeface="Helvetica Neue"/>
-                <a:cs typeface="Helvetica Neue"/>
-              </a:rPr>
-              <a:t>Source: cleaned NHN patient, financial, and care coordination datasets</a:t>
+              <a:t>Source: cleaned NHN patient, financial, and care coordination datasets; clinical segment analysis</a:t>
             </a:r>
           </a:p>
         </p:txBody>
@@ -5343,7 +5830,7 @@
     </p:spTree>
     <p:extLst>
       <p:ext uri="{BB962C8B-B14F-4D97-AF65-F5344CB8AC3E}">
-        <p14:creationId xmlns:p14="http://schemas.microsoft.com/office/powerpoint/2010/main" val="1457767796"/>
+        <p14:creationId xmlns:p14="http://schemas.microsoft.com/office/powerpoint/2010/main" val="1355499876"/>
       </p:ext>
     </p:extLst>
   </p:cSld>
@@ -5371,10 +5858,10 @@
       </p:grpSpPr>
       <p:sp>
         <p:nvSpPr>
-          <p:cNvPr id="26" name="">
+          <p:cNvPr id="28" name="">
             <a:extLst xmlns:a="http://schemas.openxmlformats.org/drawingml/2006/main">
               <a:ext uri="{FF2B5EF4-FFF2-40B4-BE49-F238E27FC236}">
-                <a16:creationId xmlns:a16="http://schemas.microsoft.com/office/drawing/2014/main" id="{E5326588-C2B3-4339-B131-512CAD5B3DC3}"/>
+                <a16:creationId xmlns:a16="http://schemas.microsoft.com/office/drawing/2014/main" id="{74A3C80E-BC4A-4578-99D4-127DA38AE02B}"/>
               </a:ext>
             </a:extLst>
           </p:cNvPr>
@@ -5405,7 +5892,7 @@
           <p:cNvPr id="2" name="">
             <a:extLst xmlns:a="http://schemas.openxmlformats.org/drawingml/2006/main">
               <a:ext uri="{FF2B5EF4-FFF2-40B4-BE49-F238E27FC236}">
-                <a16:creationId xmlns:a16="http://schemas.microsoft.com/office/drawing/2014/main" id="{033DEDB5-D471-4C97-9152-3DCE71E3B68B}"/>
+                <a16:creationId xmlns:a16="http://schemas.microsoft.com/office/drawing/2014/main" id="{8F930ABA-0719-497A-AD76-9775FFFFBEF2}"/>
               </a:ext>
             </a:extLst>
           </p:cNvPr>
@@ -5463,7 +5950,7 @@
           <p:cNvPr id="3" name="">
             <a:extLst xmlns:a="http://schemas.openxmlformats.org/drawingml/2006/main">
               <a:ext uri="{FF2B5EF4-FFF2-40B4-BE49-F238E27FC236}">
-                <a16:creationId xmlns:a16="http://schemas.microsoft.com/office/drawing/2014/main" id="{CB2953C6-C1F6-4FD3-8A9A-2311DB555182}"/>
+                <a16:creationId xmlns:a16="http://schemas.microsoft.com/office/drawing/2014/main" id="{9FEF2F63-ABD8-4A3B-BCA1-F262E819BF74}"/>
               </a:ext>
             </a:extLst>
           </p:cNvPr>
@@ -5475,7 +5962,7 @@
         <p:spPr>
           <a:xfrm xmlns:a="http://schemas.openxmlformats.org/drawingml/2006/main">
             <a:off x="514350" y="723900"/>
-            <a:ext cx="7239000" cy="457200"/>
+            <a:ext cx="8191500" cy="457200"/>
           </a:xfrm>
           <a:prstGeom xmlns:a="http://schemas.openxmlformats.org/drawingml/2006/main" prst="rect">
             <a:avLst/>
@@ -5521,7 +6008,7 @@
           <p:cNvPr id="4" name="">
             <a:extLst xmlns:a="http://schemas.openxmlformats.org/drawingml/2006/main">
               <a:ext uri="{FF2B5EF4-FFF2-40B4-BE49-F238E27FC236}">
-                <a16:creationId xmlns:a16="http://schemas.microsoft.com/office/drawing/2014/main" id="{848CA9D4-2EE7-4C8A-A6A8-2CDD210FAA26}"/>
+                <a16:creationId xmlns:a16="http://schemas.microsoft.com/office/drawing/2014/main" id="{2F651B96-E82A-47C6-A8DA-1DD18EBC52FE}"/>
               </a:ext>
             </a:extLst>
           </p:cNvPr>
@@ -5533,7 +6020,7 @@
         <p:spPr>
           <a:xfrm xmlns:a="http://schemas.openxmlformats.org/drawingml/2006/main">
             <a:off x="514350" y="1162050"/>
-            <a:ext cx="6477000" cy="209550"/>
+            <a:ext cx="8096250" cy="209550"/>
           </a:xfrm>
           <a:prstGeom xmlns:a="http://schemas.openxmlformats.org/drawingml/2006/main" prst="rect">
             <a:avLst/>
@@ -5569,7 +6056,7 @@
                 <a:ea typeface="Helvetica Neue"/>
                 <a:cs typeface="Helvetica Neue"/>
               </a:rPr>
-              <a:t>A structured path from data quality to patient-level action</a:t>
+              <a:t>Methods chosen to connect risk drivers with business decisions</a:t>
             </a:r>
           </a:p>
         </p:txBody>
@@ -5579,7 +6066,7 @@
           <p:cNvPr id="5" name="">
             <a:extLst xmlns:a="http://schemas.openxmlformats.org/drawingml/2006/main">
               <a:ext uri="{FF2B5EF4-FFF2-40B4-BE49-F238E27FC236}">
-                <a16:creationId xmlns:a16="http://schemas.microsoft.com/office/drawing/2014/main" id="{2E467A56-5FC1-4637-8340-5F6F9EEE5171}"/>
+                <a16:creationId xmlns:a16="http://schemas.microsoft.com/office/drawing/2014/main" id="{C2628BC5-E3E5-4AE4-9744-9802E18CFD78}"/>
               </a:ext>
             </a:extLst>
           </p:cNvPr>
@@ -5610,7 +6097,7 @@
           <p:cNvPr id="6" name="">
             <a:extLst xmlns:a="http://schemas.openxmlformats.org/drawingml/2006/main">
               <a:ext uri="{FF2B5EF4-FFF2-40B4-BE49-F238E27FC236}">
-                <a16:creationId xmlns:a16="http://schemas.microsoft.com/office/drawing/2014/main" id="{EAE1C308-E690-4B11-B62B-DB3B7F0D0726}"/>
+                <a16:creationId xmlns:a16="http://schemas.microsoft.com/office/drawing/2014/main" id="{D0B00843-9181-4F2F-B5F1-4E19E43E26E1}"/>
               </a:ext>
             </a:extLst>
           </p:cNvPr>
@@ -5622,7 +6109,7 @@
         <p:spPr>
           <a:xfrm xmlns:a="http://schemas.openxmlformats.org/drawingml/2006/main">
             <a:off x="514350" y="1743075"/>
-            <a:ext cx="5334000" cy="247650"/>
+            <a:ext cx="5048250" cy="247650"/>
           </a:xfrm>
           <a:prstGeom xmlns:a="http://schemas.openxmlformats.org/drawingml/2006/main" prst="rect">
             <a:avLst/>
@@ -5640,7 +6127,7 @@
           <a:lstStyle xmlns:a="http://schemas.openxmlformats.org/drawingml/2006/main"/>
           <a:p xmlns:a="http://schemas.openxmlformats.org/drawingml/2006/main">
             <a:pPr>
-              <a:defRPr sz="1575" b="1">
+              <a:defRPr sz="1500" b="1">
                 <a:solidFill>
                   <a:srgbClr val="102A34"/>
                 </a:solidFill>
@@ -5650,7 +6137,7 @@
               </a:defRPr>
             </a:pPr>
             <a:r>
-              <a:rPr sz="1575" b="1">
+              <a:rPr sz="1500" b="1">
                 <a:solidFill>
                   <a:srgbClr val="102A34"/>
                 </a:solidFill>
@@ -5668,7 +6155,7 @@
           <p:cNvPr id="7" name="">
             <a:extLst xmlns:a="http://schemas.openxmlformats.org/drawingml/2006/main">
               <a:ext uri="{FF2B5EF4-FFF2-40B4-BE49-F238E27FC236}">
-                <a16:creationId xmlns:a16="http://schemas.microsoft.com/office/drawing/2014/main" id="{7950BAE0-B508-4999-AC1D-21402EFE86C2}"/>
+                <a16:creationId xmlns:a16="http://schemas.microsoft.com/office/drawing/2014/main" id="{4537D5A4-549D-45F3-B96B-DDFE7F5183DB}"/>
               </a:ext>
             </a:extLst>
           </p:cNvPr>
@@ -5679,8 +6166,8 @@
         </p:nvSpPr>
         <p:spPr>
           <a:xfrm xmlns:a="http://schemas.openxmlformats.org/drawingml/2006/main">
-            <a:off x="514350" y="2105025"/>
-            <a:ext cx="5905500" cy="685800"/>
+            <a:off x="514350" y="2095500"/>
+            <a:ext cx="5381625" cy="704850"/>
           </a:xfrm>
           <a:prstGeom xmlns:a="http://schemas.openxmlformats.org/drawingml/2006/main" prst="rect">
             <a:avLst/>
@@ -5702,7 +6189,7 @@
                 <a:spcPct val="105000"/>
               </a:lnSpc>
               <a:buNone/>
-              <a:defRPr sz="1065">
+              <a:defRPr sz="953">
                 <a:solidFill>
                   <a:srgbClr val="253B44"/>
                 </a:solidFill>
@@ -5712,7 +6199,7 @@
               </a:defRPr>
             </a:pPr>
             <a:r>
-              <a:rPr sz="1065">
+              <a:rPr sz="953">
                 <a:solidFill>
                   <a:srgbClr val="253B44"/>
                 </a:solidFill>
@@ -5720,206 +6207,17 @@
                 <a:ea typeface="Helvetica Neue"/>
                 <a:cs typeface="Helvetica Neue"/>
               </a:rPr>
-              <a:t>Readmissions are driven by overlapping clinical risk, care-transition activity, and financial exposure. The analysis therefore needs to explain risk, group patients into usable segments, and compare performance patterns before recommending interventions.</a:t>
+              <a:t>Readmissions combine clinical risk, utilization history, discharge setting, care-transition activity, and financial exposure. The approach needs to explain drivers, group patients into action pools, and compare business value across scenarios.</a:t>
             </a:r>
           </a:p>
         </p:txBody>
       </p:sp>
-      <p:graphicFrame>
-        <p:nvGraphicFramePr>
-          <p:cNvPr id="33" name=""/>
-          <p:cNvGraphicFramePr/>
-          <p:nvPr/>
-        </p:nvGraphicFramePr>
-        <p:xfrm>
-          <a:off xmlns:a="http://schemas.openxmlformats.org/drawingml/2006/main" x="6705600" y="1695450"/>
-          <a:ext xmlns:a="http://schemas.openxmlformats.org/drawingml/2006/main" cx="4095750" cy="990600"/>
-        </p:xfrm>
-        <a:graphic xmlns:a="http://schemas.openxmlformats.org/drawingml/2006/main">
-          <a:graphicData uri="http://schemas.openxmlformats.org/drawingml/2006/table">
-            <a:tbl>
-              <a:tblPr/>
-              <a:tblGrid>
-                <a:gridCol w="1362075"/>
-                <a:gridCol w="1362075"/>
-                <a:gridCol w="1371600"/>
-              </a:tblGrid>
-              <a:tr h="495300">
-                <a:tc>
-                  <a:txBody>
-                    <a:bodyPr lIns="66675" tIns="28575" rIns="57150" bIns="28575">
-                      <a:noAutofit/>
-                    </a:bodyPr>
-                    <a:lstStyle/>
-                    <a:p>
-                      <a:pPr algn="ctr"/>
-                      <a:r>
-                        <a:rPr sz="1350" b="1">
-                          <a:solidFill>
-                            <a:srgbClr val="0F4C5C"/>
-                          </a:solidFill>
-                          <a:latin typeface="Helvetica Neue"/>
-                          <a:ea typeface="Helvetica Neue"/>
-                          <a:cs typeface="Helvetica Neue"/>
-                        </a:rPr>
-                        <a:t>Explain</a:t>
-                      </a:r>
-                    </a:p>
-                  </a:txBody>
-                  <a:tcPr marL="91440" marR="91440" marT="45720" marB="45720" anchor="ctr">
-                    <a:solidFill>
-                      <a:srgbClr val="EEF6F7"/>
-                    </a:solidFill>
-                  </a:tcPr>
-                </a:tc>
-                <a:tc>
-                  <a:txBody>
-                    <a:bodyPr lIns="66675" tIns="28575" rIns="57150" bIns="28575">
-                      <a:noAutofit/>
-                    </a:bodyPr>
-                    <a:lstStyle/>
-                    <a:p>
-                      <a:pPr algn="ctr"/>
-                      <a:r>
-                        <a:rPr sz="1350" b="1">
-                          <a:solidFill>
-                            <a:srgbClr val="0F4C5C"/>
-                          </a:solidFill>
-                          <a:latin typeface="Helvetica Neue"/>
-                          <a:ea typeface="Helvetica Neue"/>
-                          <a:cs typeface="Helvetica Neue"/>
-                        </a:rPr>
-                        <a:t>Prioritize</a:t>
-                      </a:r>
-                    </a:p>
-                  </a:txBody>
-                  <a:tcPr marL="91440" marR="91440" marT="45720" marB="45720" anchor="ctr">
-                    <a:solidFill>
-                      <a:srgbClr val="EEF6F7"/>
-                    </a:solidFill>
-                  </a:tcPr>
-                </a:tc>
-                <a:tc>
-                  <a:txBody>
-                    <a:bodyPr lIns="66675" tIns="28575" rIns="57150" bIns="28575">
-                      <a:noAutofit/>
-                    </a:bodyPr>
-                    <a:lstStyle/>
-                    <a:p>
-                      <a:pPr algn="ctr"/>
-                      <a:r>
-                        <a:rPr sz="1350" b="1">
-                          <a:solidFill>
-                            <a:srgbClr val="0F4C5C"/>
-                          </a:solidFill>
-                          <a:latin typeface="Helvetica Neue"/>
-                          <a:ea typeface="Helvetica Neue"/>
-                          <a:cs typeface="Helvetica Neue"/>
-                        </a:rPr>
-                        <a:t>Validate</a:t>
-                      </a:r>
-                    </a:p>
-                  </a:txBody>
-                  <a:tcPr marL="91440" marR="91440" marT="45720" marB="45720" anchor="ctr">
-                    <a:solidFill>
-                      <a:srgbClr val="EEF6F7"/>
-                    </a:solidFill>
-                  </a:tcPr>
-                </a:tc>
-              </a:tr>
-              <a:tr h="495300">
-                <a:tc>
-                  <a:txBody>
-                    <a:bodyPr lIns="66675" tIns="28575" rIns="57150" bIns="28575">
-                      <a:noAutofit/>
-                    </a:bodyPr>
-                    <a:lstStyle/>
-                    <a:p>
-                      <a:pPr algn="ctr"/>
-                      <a:r>
-                        <a:rPr sz="735" b="0">
-                          <a:solidFill>
-                            <a:srgbClr val="50636B"/>
-                          </a:solidFill>
-                          <a:latin typeface="Helvetica Neue"/>
-                          <a:ea typeface="Helvetica Neue"/>
-                          <a:cs typeface="Helvetica Neue"/>
-                        </a:rPr>
-                        <a:t>Which factors predict readmission</a:t>
-                      </a:r>
-                    </a:p>
-                  </a:txBody>
-                  <a:tcPr marL="91440" marR="91440" marT="45720" marB="45720" anchor="ctr">
-                    <a:solidFill>
-                      <a:srgbClr val="F8FBFC"/>
-                    </a:solidFill>
-                  </a:tcPr>
-                </a:tc>
-                <a:tc>
-                  <a:txBody>
-                    <a:bodyPr lIns="66675" tIns="28575" rIns="57150" bIns="28575">
-                      <a:noAutofit/>
-                    </a:bodyPr>
-                    <a:lstStyle/>
-                    <a:p>
-                      <a:pPr algn="ctr"/>
-                      <a:r>
-                        <a:rPr sz="735" b="0">
-                          <a:solidFill>
-                            <a:srgbClr val="50636B"/>
-                          </a:solidFill>
-                          <a:latin typeface="Helvetica Neue"/>
-                          <a:ea typeface="Helvetica Neue"/>
-                          <a:cs typeface="Helvetica Neue"/>
-                        </a:rPr>
-                        <a:t>Which patients need support first</a:t>
-                      </a:r>
-                    </a:p>
-                  </a:txBody>
-                  <a:tcPr marL="91440" marR="91440" marT="45720" marB="45720" anchor="ctr">
-                    <a:solidFill>
-                      <a:srgbClr val="F8FBFC"/>
-                    </a:solidFill>
-                  </a:tcPr>
-                </a:tc>
-                <a:tc>
-                  <a:txBody>
-                    <a:bodyPr lIns="66675" tIns="28575" rIns="57150" bIns="28575">
-                      <a:noAutofit/>
-                    </a:bodyPr>
-                    <a:lstStyle/>
-                    <a:p>
-                      <a:pPr algn="ctr"/>
-                      <a:r>
-                        <a:rPr sz="735" b="0">
-                          <a:solidFill>
-                            <a:srgbClr val="50636B"/>
-                          </a:solidFill>
-                          <a:latin typeface="Helvetica Neue"/>
-                          <a:ea typeface="Helvetica Neue"/>
-                          <a:cs typeface="Helvetica Neue"/>
-                        </a:rPr>
-                        <a:t>Which patterns hold across segments</a:t>
-                      </a:r>
-                    </a:p>
-                  </a:txBody>
-                  <a:tcPr marL="91440" marR="91440" marT="45720" marB="45720" anchor="ctr">
-                    <a:solidFill>
-                      <a:srgbClr val="F8FBFC"/>
-                    </a:solidFill>
-                  </a:tcPr>
-                </a:tc>
-              </a:tr>
-            </a:tbl>
-          </a:graphicData>
-        </a:graphic>
-      </p:graphicFrame>
       <p:sp>
         <p:nvSpPr>
-          <p:cNvPr id="9" name="">
+          <p:cNvPr id="8" name="">
             <a:extLst xmlns:a="http://schemas.openxmlformats.org/drawingml/2006/main">
               <a:ext uri="{FF2B5EF4-FFF2-40B4-BE49-F238E27FC236}">
-                <a16:creationId xmlns:a16="http://schemas.microsoft.com/office/drawing/2014/main" id="{363325A9-51AF-452D-96AA-CFAAFDEDECCA}"/>
+                <a16:creationId xmlns:a16="http://schemas.microsoft.com/office/drawing/2014/main" id="{8DACC257-0DD8-4A93-A591-DC8A4B6E6BE7}"/>
               </a:ext>
             </a:extLst>
           </p:cNvPr>
@@ -5930,7 +6228,143 @@
         </p:nvSpPr>
         <p:spPr>
           <a:xfrm xmlns:a="http://schemas.openxmlformats.org/drawingml/2006/main">
-            <a:off x="514350" y="3028950"/>
+            <a:off x="6534150" y="1743075"/>
+            <a:ext cx="4191000" cy="247650"/>
+          </a:xfrm>
+          <a:prstGeom xmlns:a="http://schemas.openxmlformats.org/drawingml/2006/main" prst="rect">
+            <a:avLst/>
+          </a:prstGeom>
+          <a:noFill xmlns:a="http://schemas.openxmlformats.org/drawingml/2006/main"/>
+          <a:ln xmlns:a="http://schemas.openxmlformats.org/drawingml/2006/main" w="0">
+            <a:noFill/>
+            <a:prstDash val="solid"/>
+          </a:ln>
+        </p:spPr>
+        <p:txBody>
+          <a:bodyPr xmlns:a="http://schemas.openxmlformats.org/drawingml/2006/main" lIns="0" tIns="0" rIns="0" bIns="0">
+            <a:noAutofit/>
+          </a:bodyPr>
+          <a:lstStyle xmlns:a="http://schemas.openxmlformats.org/drawingml/2006/main"/>
+          <a:p xmlns:a="http://schemas.openxmlformats.org/drawingml/2006/main">
+            <a:pPr>
+              <a:defRPr sz="1500" b="1">
+                <a:solidFill>
+                  <a:srgbClr val="102A34"/>
+                </a:solidFill>
+                <a:latin typeface="Helvetica Neue"/>
+                <a:ea typeface="Helvetica Neue"/>
+                <a:cs typeface="Helvetica Neue"/>
+              </a:defRPr>
+            </a:pPr>
+            <a:r>
+              <a:rPr sz="1500" b="1">
+                <a:solidFill>
+                  <a:srgbClr val="102A34"/>
+                </a:solidFill>
+                <a:latin typeface="Helvetica Neue"/>
+                <a:ea typeface="Helvetica Neue"/>
+                <a:cs typeface="Helvetica Neue"/>
+              </a:rPr>
+              <a:t>Model evidence from the 16-slide analysis</a:t>
+            </a:r>
+          </a:p>
+        </p:txBody>
+      </p:sp>
+      <p:graphicFrame>
+        <p:nvGraphicFramePr>
+          <p:cNvPr id="36" name="Chart"/>
+          <p:cNvGraphicFramePr/>
+          <p:nvPr/>
+        </p:nvGraphicFramePr>
+        <p:xfrm>
+          <a:off xmlns:a="http://schemas.openxmlformats.org/drawingml/2006/main" x="6515100" y="2095500"/>
+          <a:ext xmlns:a="http://schemas.openxmlformats.org/drawingml/2006/main" cx="4286250" cy="1352550"/>
+        </p:xfrm>
+        <a:graphic xmlns:a="http://schemas.openxmlformats.org/drawingml/2006/main">
+          <a:graphicData uri="http://schemas.openxmlformats.org/drawingml/2006/chart">
+            <c:chart xmlns:r="http://schemas.openxmlformats.org/officeDocument/2006/relationships" xmlns:c="http://schemas.openxmlformats.org/drawingml/2006/chart" r:id="R52eec6023ef64542"/>
+          </a:graphicData>
+        </a:graphic>
+      </p:graphicFrame>
+      <p:sp>
+        <p:nvSpPr>
+          <p:cNvPr id="10" name="">
+            <a:extLst xmlns:a="http://schemas.openxmlformats.org/drawingml/2006/main">
+              <a:ext uri="{FF2B5EF4-FFF2-40B4-BE49-F238E27FC236}">
+                <a16:creationId xmlns:a16="http://schemas.microsoft.com/office/drawing/2014/main" id="{5045F837-938D-4A59-AA69-8C1780E1A423}"/>
+              </a:ext>
+            </a:extLst>
+          </p:cNvPr>
+          <p:cNvSpPr>
+            <a:spLocks xmlns:a="http://schemas.openxmlformats.org/drawingml/2006/main" noGrp="1"/>
+          </p:cNvSpPr>
+          <p:nvPr/>
+        </p:nvSpPr>
+        <p:spPr>
+          <a:xfrm xmlns:a="http://schemas.openxmlformats.org/drawingml/2006/main">
+            <a:off x="6534150" y="3505200"/>
+            <a:ext cx="4143375" cy="304800"/>
+          </a:xfrm>
+          <a:prstGeom xmlns:a="http://schemas.openxmlformats.org/drawingml/2006/main" prst="rect">
+            <a:avLst/>
+          </a:prstGeom>
+          <a:noFill xmlns:a="http://schemas.openxmlformats.org/drawingml/2006/main"/>
+          <a:ln xmlns:a="http://schemas.openxmlformats.org/drawingml/2006/main" w="0">
+            <a:noFill/>
+            <a:prstDash val="solid"/>
+          </a:ln>
+        </p:spPr>
+        <p:txBody>
+          <a:bodyPr xmlns:a="http://schemas.openxmlformats.org/drawingml/2006/main" lIns="0" tIns="0" rIns="0" bIns="0">
+            <a:noAutofit/>
+          </a:bodyPr>
+          <a:lstStyle xmlns:a="http://schemas.openxmlformats.org/drawingml/2006/main"/>
+          <a:p xmlns:a="http://schemas.openxmlformats.org/drawingml/2006/main">
+            <a:pPr>
+              <a:lnSpc>
+                <a:spcPct val="105000"/>
+              </a:lnSpc>
+              <a:buNone/>
+              <a:defRPr sz="803">
+                <a:solidFill>
+                  <a:srgbClr val="50636B"/>
+                </a:solidFill>
+                <a:latin typeface="Helvetica Neue"/>
+                <a:ea typeface="Helvetica Neue"/>
+                <a:cs typeface="Helvetica Neue"/>
+              </a:defRPr>
+            </a:pPr>
+            <a:r>
+              <a:rPr sz="803">
+                <a:solidFill>
+                  <a:srgbClr val="50636B"/>
+                </a:solidFill>
+                <a:latin typeface="Helvetica Neue"/>
+                <a:ea typeface="Helvetica Neue"/>
+                <a:cs typeface="Helvetica Neue"/>
+              </a:rPr>
+              <a:t>Expanded model improves ROC-AUC to 0.74, giving a stronger basis for risk-tier decisions.</a:t>
+            </a:r>
+          </a:p>
+        </p:txBody>
+      </p:sp>
+      <p:sp>
+        <p:nvSpPr>
+          <p:cNvPr id="11" name="">
+            <a:extLst xmlns:a="http://schemas.openxmlformats.org/drawingml/2006/main">
+              <a:ext uri="{FF2B5EF4-FFF2-40B4-BE49-F238E27FC236}">
+                <a16:creationId xmlns:a16="http://schemas.microsoft.com/office/drawing/2014/main" id="{F5ACCF5F-1BE3-4996-99DE-DDE02BCFF3E4}"/>
+              </a:ext>
+            </a:extLst>
+          </p:cNvPr>
+          <p:cNvSpPr>
+            <a:spLocks xmlns:a="http://schemas.openxmlformats.org/drawingml/2006/main" noGrp="1"/>
+          </p:cNvSpPr>
+          <p:nvPr/>
+        </p:nvSpPr>
+        <p:spPr>
+          <a:xfrm xmlns:a="http://schemas.openxmlformats.org/drawingml/2006/main">
+            <a:off x="514350" y="3943350"/>
             <a:ext cx="10287000" cy="14288"/>
           </a:xfrm>
           <a:prstGeom xmlns:a="http://schemas.openxmlformats.org/drawingml/2006/main" prst="rect">
@@ -5947,10 +6381,10 @@
       </p:sp>
       <p:sp>
         <p:nvSpPr>
-          <p:cNvPr id="10" name="">
+          <p:cNvPr id="12" name="">
             <a:extLst xmlns:a="http://schemas.openxmlformats.org/drawingml/2006/main">
               <a:ext uri="{FF2B5EF4-FFF2-40B4-BE49-F238E27FC236}">
-                <a16:creationId xmlns:a16="http://schemas.microsoft.com/office/drawing/2014/main" id="{E4AF7FEE-41F9-4856-8E10-A5B9C189E426}"/>
+                <a16:creationId xmlns:a16="http://schemas.microsoft.com/office/drawing/2014/main" id="{514F34BB-21B4-4029-864F-8B17E94DFC6A}"/>
               </a:ext>
             </a:extLst>
           </p:cNvPr>
@@ -5961,7 +6395,7 @@
         </p:nvSpPr>
         <p:spPr>
           <a:xfrm xmlns:a="http://schemas.openxmlformats.org/drawingml/2006/main">
-            <a:off x="514350" y="3314700"/>
+            <a:off x="514350" y="4229100"/>
             <a:ext cx="2914650" cy="238125"/>
           </a:xfrm>
           <a:prstGeom xmlns:a="http://schemas.openxmlformats.org/drawingml/2006/main" prst="rect">
@@ -5980,7 +6414,7 @@
           <a:lstStyle xmlns:a="http://schemas.openxmlformats.org/drawingml/2006/main"/>
           <a:p xmlns:a="http://schemas.openxmlformats.org/drawingml/2006/main">
             <a:pPr>
-              <a:defRPr sz="1425" b="1">
+              <a:defRPr sz="1388" b="1">
                 <a:solidFill>
                   <a:srgbClr val="102A34"/>
                 </a:solidFill>
@@ -5990,7 +6424,7 @@
               </a:defRPr>
             </a:pPr>
             <a:r>
-              <a:rPr sz="1425" b="1">
+              <a:rPr sz="1388" b="1">
                 <a:solidFill>
                   <a:srgbClr val="102A34"/>
                 </a:solidFill>
@@ -6005,10 +6439,10 @@
       </p:sp>
       <p:sp>
         <p:nvSpPr>
-          <p:cNvPr id="11" name="">
+          <p:cNvPr id="13" name="">
             <a:extLst xmlns:a="http://schemas.openxmlformats.org/drawingml/2006/main">
               <a:ext uri="{FF2B5EF4-FFF2-40B4-BE49-F238E27FC236}">
-                <a16:creationId xmlns:a16="http://schemas.microsoft.com/office/drawing/2014/main" id="{BA6CD2D6-17FB-48BF-9BEF-5110A4A13847}"/>
+                <a16:creationId xmlns:a16="http://schemas.microsoft.com/office/drawing/2014/main" id="{A9DD6A3B-2469-4131-BEA4-FF4651485C1C}"/>
               </a:ext>
             </a:extLst>
           </p:cNvPr>
@@ -6019,7 +6453,7 @@
         </p:nvSpPr>
         <p:spPr>
           <a:xfrm xmlns:a="http://schemas.openxmlformats.org/drawingml/2006/main">
-            <a:off x="514350" y="3609975"/>
+            <a:off x="514350" y="4524375"/>
             <a:ext cx="2914650" cy="190500"/>
           </a:xfrm>
           <a:prstGeom xmlns:a="http://schemas.openxmlformats.org/drawingml/2006/main" prst="rect">
@@ -6038,7 +6472,7 @@
           <a:lstStyle xmlns:a="http://schemas.openxmlformats.org/drawingml/2006/main"/>
           <a:p xmlns:a="http://schemas.openxmlformats.org/drawingml/2006/main">
             <a:pPr>
-              <a:defRPr sz="938" b="1">
+              <a:defRPr sz="907" b="1">
                 <a:solidFill>
                   <a:srgbClr val="0F6F73"/>
                 </a:solidFill>
@@ -6048,7 +6482,7 @@
               </a:defRPr>
             </a:pPr>
             <a:r>
-              <a:rPr sz="938" b="1">
+              <a:rPr sz="907" b="1">
                 <a:solidFill>
                   <a:srgbClr val="0F6F73"/>
                 </a:solidFill>
@@ -6063,10 +6497,10 @@
       </p:sp>
       <p:sp>
         <p:nvSpPr>
-          <p:cNvPr id="12" name="">
+          <p:cNvPr id="14" name="">
             <a:extLst xmlns:a="http://schemas.openxmlformats.org/drawingml/2006/main">
               <a:ext uri="{FF2B5EF4-FFF2-40B4-BE49-F238E27FC236}">
-                <a16:creationId xmlns:a16="http://schemas.microsoft.com/office/drawing/2014/main" id="{4AE5608B-4414-4DF2-89BA-AE90C31426F4}"/>
+                <a16:creationId xmlns:a16="http://schemas.microsoft.com/office/drawing/2014/main" id="{51127571-0B4E-44C5-800D-4BE12026D290}"/>
               </a:ext>
             </a:extLst>
           </p:cNvPr>
@@ -6077,8 +6511,8 @@
         </p:nvSpPr>
         <p:spPr>
           <a:xfrm xmlns:a="http://schemas.openxmlformats.org/drawingml/2006/main">
-            <a:off x="514350" y="3943350"/>
-            <a:ext cx="2914650" cy="1257300"/>
+            <a:off x="514350" y="4838700"/>
+            <a:ext cx="2914650" cy="781050"/>
           </a:xfrm>
           <a:prstGeom xmlns:a="http://schemas.openxmlformats.org/drawingml/2006/main" prst="rect">
             <a:avLst/>
@@ -6095,15 +6529,15 @@
           </a:bodyPr>
           <a:lstStyle xmlns:a="http://schemas.openxmlformats.org/drawingml/2006/main"/>
           <a:p xmlns:a="http://schemas.openxmlformats.org/drawingml/2006/main">
-            <a:pPr marL="165100" indent="-76200">
+            <a:pPr marL="139700" indent="-63500">
               <a:lnSpc>
-                <a:spcPct val="102000"/>
+                <a:spcPct val="103000"/>
               </a:lnSpc>
               <a:spcAft>
-                <a:spcPts val="400"/>
+                <a:spcPts val="300"/>
               </a:spcAft>
               <a:buNone/>
-              <a:defRPr sz="848">
+              <a:defRPr sz="757">
                 <a:solidFill>
                   <a:srgbClr val="253B44"/>
                 </a:solidFill>
@@ -6113,7 +6547,7 @@
               </a:defRPr>
             </a:pPr>
             <a:r>
-              <a:rPr sz="848">
+              <a:rPr sz="757">
                 <a:solidFill>
                   <a:srgbClr val="253B44"/>
                 </a:solidFill>
@@ -6121,19 +6555,19 @@
                 <a:ea typeface="Helvetica Neue"/>
                 <a:cs typeface="Helvetica Neue"/>
               </a:rPr>
-              <a:t>Model readmission likelihood using patient, utilization, discharge, and care coordination variables</a:t>
+              <a:t>Model readmission likelihood using clinical, utilization, discharge, and follow-up variables</a:t>
             </a:r>
           </a:p>
           <a:p xmlns:a="http://schemas.openxmlformats.org/drawingml/2006/main">
-            <a:pPr marL="165100" indent="-76200">
+            <a:pPr marL="139700" indent="-63500">
               <a:lnSpc>
-                <a:spcPct val="102000"/>
+                <a:spcPct val="103000"/>
               </a:lnSpc>
               <a:spcAft>
-                <a:spcPts val="400"/>
+                <a:spcPts val="300"/>
               </a:spcAft>
               <a:buNone/>
-              <a:defRPr sz="848">
+              <a:defRPr sz="757">
                 <a:solidFill>
                   <a:srgbClr val="253B44"/>
                 </a:solidFill>
@@ -6143,7 +6577,7 @@
               </a:defRPr>
             </a:pPr>
             <a:r>
-              <a:rPr sz="848">
+              <a:rPr sz="757">
                 <a:solidFill>
                   <a:srgbClr val="253B44"/>
                 </a:solidFill>
@@ -6151,19 +6585,19 @@
                 <a:ea typeface="Helvetica Neue"/>
                 <a:cs typeface="Helvetica Neue"/>
               </a:rPr>
-              <a:t>Estimate direction and strength of each factor while controlling for overlap</a:t>
+              <a:t>Control for overlap across risk factors</a:t>
             </a:r>
           </a:p>
           <a:p xmlns:a="http://schemas.openxmlformats.org/drawingml/2006/main">
-            <a:pPr marL="165100" indent="-76200">
+            <a:pPr marL="139700" indent="-63500">
               <a:lnSpc>
-                <a:spcPct val="102000"/>
+                <a:spcPct val="103000"/>
               </a:lnSpc>
               <a:spcAft>
-                <a:spcPts val="400"/>
+                <a:spcPts val="300"/>
               </a:spcAft>
               <a:buNone/>
-              <a:defRPr sz="848">
+              <a:defRPr sz="757">
                 <a:solidFill>
                   <a:srgbClr val="253B44"/>
                 </a:solidFill>
@@ -6173,7 +6607,7 @@
               </a:defRPr>
             </a:pPr>
             <a:r>
-              <a:rPr sz="848">
+              <a:rPr sz="757">
                 <a:solidFill>
                   <a:srgbClr val="253B44"/>
                 </a:solidFill>
@@ -6181,17 +6615,17 @@
                 <a:ea typeface="Helvetica Neue"/>
                 <a:cs typeface="Helvetica Neue"/>
               </a:rPr>
-              <a:t>Translate model output into explainable risk indicators for leadership</a:t>
+              <a:t>Turn model output into explainable indicators</a:t>
             </a:r>
           </a:p>
         </p:txBody>
       </p:sp>
       <p:sp>
         <p:nvSpPr>
-          <p:cNvPr id="13" name="">
+          <p:cNvPr id="15" name="">
             <a:extLst xmlns:a="http://schemas.openxmlformats.org/drawingml/2006/main">
               <a:ext uri="{FF2B5EF4-FFF2-40B4-BE49-F238E27FC236}">
-                <a16:creationId xmlns:a16="http://schemas.microsoft.com/office/drawing/2014/main" id="{73D318B6-6FB2-4FC1-A148-9850C129C4EC}"/>
+                <a16:creationId xmlns:a16="http://schemas.microsoft.com/office/drawing/2014/main" id="{01A7AB22-C4EC-4CB4-9F5A-23E845F6F18A}"/>
               </a:ext>
             </a:extLst>
           </p:cNvPr>
@@ -6202,8 +6636,1220 @@
         </p:nvSpPr>
         <p:spPr>
           <a:xfrm xmlns:a="http://schemas.openxmlformats.org/drawingml/2006/main">
-            <a:off x="514350" y="5381625"/>
-            <a:ext cx="2914650" cy="514350"/>
+            <a:off x="514350" y="5772150"/>
+            <a:ext cx="2914650" cy="304800"/>
+          </a:xfrm>
+          <a:prstGeom xmlns:a="http://schemas.openxmlformats.org/drawingml/2006/main" prst="rect">
+            <a:avLst/>
+          </a:prstGeom>
+          <a:noFill xmlns:a="http://schemas.openxmlformats.org/drawingml/2006/main"/>
+          <a:ln xmlns:a="http://schemas.openxmlformats.org/drawingml/2006/main" w="0">
+            <a:noFill/>
+            <a:prstDash val="solid"/>
+          </a:ln>
+        </p:spPr>
+        <p:txBody>
+          <a:bodyPr xmlns:a="http://schemas.openxmlformats.org/drawingml/2006/main" lIns="0" tIns="0" rIns="0" bIns="0">
+            <a:noAutofit/>
+          </a:bodyPr>
+          <a:lstStyle xmlns:a="http://schemas.openxmlformats.org/drawingml/2006/main"/>
+          <a:p xmlns:a="http://schemas.openxmlformats.org/drawingml/2006/main">
+            <a:pPr>
+              <a:lnSpc>
+                <a:spcPct val="104000"/>
+              </a:lnSpc>
+              <a:buNone/>
+              <a:defRPr sz="757">
+                <a:solidFill>
+                  <a:srgbClr val="50636B"/>
+                </a:solidFill>
+                <a:latin typeface="Helvetica Neue"/>
+                <a:ea typeface="Helvetica Neue"/>
+                <a:cs typeface="Helvetica Neue"/>
+              </a:defRPr>
+            </a:pPr>
+            <a:r>
+              <a:rPr sz="757">
+                <a:solidFill>
+                  <a:srgbClr val="50636B"/>
+                </a:solidFill>
+                <a:latin typeface="Helvetica Neue"/>
+                <a:ea typeface="Helvetica Neue"/>
+                <a:cs typeface="Helvetica Neue"/>
+              </a:rPr>
+              <a:t>Example output: odds ratios, feature importance, predicted risk</a:t>
+            </a:r>
+          </a:p>
+        </p:txBody>
+      </p:sp>
+      <p:sp>
+        <p:nvSpPr>
+          <p:cNvPr id="16" name="">
+            <a:extLst xmlns:a="http://schemas.openxmlformats.org/drawingml/2006/main">
+              <a:ext uri="{FF2B5EF4-FFF2-40B4-BE49-F238E27FC236}">
+                <a16:creationId xmlns:a16="http://schemas.microsoft.com/office/drawing/2014/main" id="{82D750E2-C7FC-49E8-8EEB-715268026A15}"/>
+              </a:ext>
+            </a:extLst>
+          </p:cNvPr>
+          <p:cNvSpPr>
+            <a:spLocks xmlns:a="http://schemas.openxmlformats.org/drawingml/2006/main" noGrp="1"/>
+          </p:cNvSpPr>
+          <p:nvPr/>
+        </p:nvSpPr>
+        <p:spPr>
+          <a:xfrm xmlns:a="http://schemas.openxmlformats.org/drawingml/2006/main">
+            <a:off x="4286250" y="4229100"/>
+            <a:ext cx="2914650" cy="238125"/>
+          </a:xfrm>
+          <a:prstGeom xmlns:a="http://schemas.openxmlformats.org/drawingml/2006/main" prst="rect">
+            <a:avLst/>
+          </a:prstGeom>
+          <a:noFill xmlns:a="http://schemas.openxmlformats.org/drawingml/2006/main"/>
+          <a:ln xmlns:a="http://schemas.openxmlformats.org/drawingml/2006/main" w="0">
+            <a:noFill/>
+            <a:prstDash val="solid"/>
+          </a:ln>
+        </p:spPr>
+        <p:txBody>
+          <a:bodyPr xmlns:a="http://schemas.openxmlformats.org/drawingml/2006/main" lIns="0" tIns="0" rIns="0" bIns="0">
+            <a:noAutofit/>
+          </a:bodyPr>
+          <a:lstStyle xmlns:a="http://schemas.openxmlformats.org/drawingml/2006/main"/>
+          <a:p xmlns:a="http://schemas.openxmlformats.org/drawingml/2006/main">
+            <a:pPr>
+              <a:defRPr sz="1388" b="1">
+                <a:solidFill>
+                  <a:srgbClr val="102A34"/>
+                </a:solidFill>
+                <a:latin typeface="Helvetica Neue"/>
+                <a:ea typeface="Helvetica Neue"/>
+                <a:cs typeface="Helvetica Neue"/>
+              </a:defRPr>
+            </a:pPr>
+            <a:r>
+              <a:rPr sz="1388" b="1">
+                <a:solidFill>
+                  <a:srgbClr val="102A34"/>
+                </a:solidFill>
+                <a:latin typeface="Helvetica Neue"/>
+                <a:ea typeface="Helvetica Neue"/>
+                <a:cs typeface="Helvetica Neue"/>
+              </a:rPr>
+              <a:t>Customer segmentation</a:t>
+            </a:r>
+          </a:p>
+        </p:txBody>
+      </p:sp>
+      <p:sp>
+        <p:nvSpPr>
+          <p:cNvPr id="17" name="">
+            <a:extLst xmlns:a="http://schemas.openxmlformats.org/drawingml/2006/main">
+              <a:ext uri="{FF2B5EF4-FFF2-40B4-BE49-F238E27FC236}">
+                <a16:creationId xmlns:a16="http://schemas.microsoft.com/office/drawing/2014/main" id="{E694BABD-E120-40F5-B6F8-C9A4E0ED5C9B}"/>
+              </a:ext>
+            </a:extLst>
+          </p:cNvPr>
+          <p:cNvSpPr>
+            <a:spLocks xmlns:a="http://schemas.openxmlformats.org/drawingml/2006/main" noGrp="1"/>
+          </p:cNvSpPr>
+          <p:nvPr/>
+        </p:nvSpPr>
+        <p:spPr>
+          <a:xfrm xmlns:a="http://schemas.openxmlformats.org/drawingml/2006/main">
+            <a:off x="4286250" y="4524375"/>
+            <a:ext cx="2914650" cy="190500"/>
+          </a:xfrm>
+          <a:prstGeom xmlns:a="http://schemas.openxmlformats.org/drawingml/2006/main" prst="rect">
+            <a:avLst/>
+          </a:prstGeom>
+          <a:noFill xmlns:a="http://schemas.openxmlformats.org/drawingml/2006/main"/>
+          <a:ln xmlns:a="http://schemas.openxmlformats.org/drawingml/2006/main" w="0">
+            <a:noFill/>
+            <a:prstDash val="solid"/>
+          </a:ln>
+        </p:spPr>
+        <p:txBody>
+          <a:bodyPr xmlns:a="http://schemas.openxmlformats.org/drawingml/2006/main" lIns="0" tIns="0" rIns="0" bIns="0">
+            <a:noAutofit/>
+          </a:bodyPr>
+          <a:lstStyle xmlns:a="http://schemas.openxmlformats.org/drawingml/2006/main"/>
+          <a:p xmlns:a="http://schemas.openxmlformats.org/drawingml/2006/main">
+            <a:pPr>
+              <a:defRPr sz="907" b="1">
+                <a:solidFill>
+                  <a:srgbClr val="0F6F73"/>
+                </a:solidFill>
+                <a:latin typeface="Helvetica Neue"/>
+                <a:ea typeface="Helvetica Neue"/>
+                <a:cs typeface="Helvetica Neue"/>
+              </a:defRPr>
+            </a:pPr>
+            <a:r>
+              <a:rPr sz="907" b="1">
+                <a:solidFill>
+                  <a:srgbClr val="0F6F73"/>
+                </a:solidFill>
+                <a:latin typeface="Helvetica Neue"/>
+                <a:ea typeface="Helvetica Neue"/>
+                <a:cs typeface="Helvetica Neue"/>
+              </a:rPr>
+              <a:t>Group patients into action pools</a:t>
+            </a:r>
+          </a:p>
+        </p:txBody>
+      </p:sp>
+      <p:sp>
+        <p:nvSpPr>
+          <p:cNvPr id="18" name="">
+            <a:extLst xmlns:a="http://schemas.openxmlformats.org/drawingml/2006/main">
+              <a:ext uri="{FF2B5EF4-FFF2-40B4-BE49-F238E27FC236}">
+                <a16:creationId xmlns:a16="http://schemas.microsoft.com/office/drawing/2014/main" id="{D49DBDE9-963E-4BF5-BE82-6ECEF6D9D6A4}"/>
+              </a:ext>
+            </a:extLst>
+          </p:cNvPr>
+          <p:cNvSpPr>
+            <a:spLocks xmlns:a="http://schemas.openxmlformats.org/drawingml/2006/main" noGrp="1"/>
+          </p:cNvSpPr>
+          <p:nvPr/>
+        </p:nvSpPr>
+        <p:spPr>
+          <a:xfrm xmlns:a="http://schemas.openxmlformats.org/drawingml/2006/main">
+            <a:off x="4286250" y="4838700"/>
+            <a:ext cx="2914650" cy="781050"/>
+          </a:xfrm>
+          <a:prstGeom xmlns:a="http://schemas.openxmlformats.org/drawingml/2006/main" prst="rect">
+            <a:avLst/>
+          </a:prstGeom>
+          <a:noFill xmlns:a="http://schemas.openxmlformats.org/drawingml/2006/main"/>
+          <a:ln xmlns:a="http://schemas.openxmlformats.org/drawingml/2006/main" w="0">
+            <a:noFill/>
+            <a:prstDash val="solid"/>
+          </a:ln>
+        </p:spPr>
+        <p:txBody>
+          <a:bodyPr xmlns:a="http://schemas.openxmlformats.org/drawingml/2006/main" lIns="0" tIns="0" rIns="0" bIns="0">
+            <a:noAutofit/>
+          </a:bodyPr>
+          <a:lstStyle xmlns:a="http://schemas.openxmlformats.org/drawingml/2006/main"/>
+          <a:p xmlns:a="http://schemas.openxmlformats.org/drawingml/2006/main">
+            <a:pPr marL="139700" indent="-63500">
+              <a:lnSpc>
+                <a:spcPct val="103000"/>
+              </a:lnSpc>
+              <a:spcAft>
+                <a:spcPts val="300"/>
+              </a:spcAft>
+              <a:buNone/>
+              <a:defRPr sz="757">
+                <a:solidFill>
+                  <a:srgbClr val="253B44"/>
+                </a:solidFill>
+                <a:latin typeface="Helvetica Neue"/>
+                <a:ea typeface="Helvetica Neue"/>
+                <a:cs typeface="Helvetica Neue"/>
+              </a:defRPr>
+            </a:pPr>
+            <a:r>
+              <a:rPr sz="757">
+                <a:solidFill>
+                  <a:srgbClr val="253B44"/>
+                </a:solidFill>
+                <a:latin typeface="Helvetica Neue"/>
+                <a:ea typeface="Helvetica Neue"/>
+                <a:cs typeface="Helvetica Neue"/>
+              </a:rPr>
+              <a:t>Create segments by chronic burden, prior admissions, discharge setting, and follow-up status</a:t>
+            </a:r>
+          </a:p>
+          <a:p xmlns:a="http://schemas.openxmlformats.org/drawingml/2006/main">
+            <a:pPr marL="139700" indent="-63500">
+              <a:lnSpc>
+                <a:spcPct val="103000"/>
+              </a:lnSpc>
+              <a:spcAft>
+                <a:spcPts val="300"/>
+              </a:spcAft>
+              <a:buNone/>
+              <a:defRPr sz="757">
+                <a:solidFill>
+                  <a:srgbClr val="253B44"/>
+                </a:solidFill>
+                <a:latin typeface="Helvetica Neue"/>
+                <a:ea typeface="Helvetica Neue"/>
+                <a:cs typeface="Helvetica Neue"/>
+              </a:defRPr>
+            </a:pPr>
+            <a:r>
+              <a:rPr sz="757">
+                <a:solidFill>
+                  <a:srgbClr val="253B44"/>
+                </a:solidFill>
+                <a:latin typeface="Helvetica Neue"/>
+                <a:ea typeface="Helvetica Neue"/>
+                <a:cs typeface="Helvetica Neue"/>
+              </a:rPr>
+              <a:t>Compare readmission rates and cost exposure across segments</a:t>
+            </a:r>
+          </a:p>
+          <a:p xmlns:a="http://schemas.openxmlformats.org/drawingml/2006/main">
+            <a:pPr marL="139700" indent="-63500">
+              <a:lnSpc>
+                <a:spcPct val="103000"/>
+              </a:lnSpc>
+              <a:spcAft>
+                <a:spcPts val="300"/>
+              </a:spcAft>
+              <a:buNone/>
+              <a:defRPr sz="757">
+                <a:solidFill>
+                  <a:srgbClr val="253B44"/>
+                </a:solidFill>
+                <a:latin typeface="Helvetica Neue"/>
+                <a:ea typeface="Helvetica Neue"/>
+                <a:cs typeface="Helvetica Neue"/>
+              </a:defRPr>
+            </a:pPr>
+            <a:r>
+              <a:rPr sz="757">
+                <a:solidFill>
+                  <a:srgbClr val="253B44"/>
+                </a:solidFill>
+                <a:latin typeface="Helvetica Neue"/>
+                <a:ea typeface="Helvetica Neue"/>
+                <a:cs typeface="Helvetica Neue"/>
+              </a:rPr>
+              <a:t>Prioritize care coordination for the highest-risk groups</a:t>
+            </a:r>
+          </a:p>
+        </p:txBody>
+      </p:sp>
+      <p:sp>
+        <p:nvSpPr>
+          <p:cNvPr id="19" name="">
+            <a:extLst xmlns:a="http://schemas.openxmlformats.org/drawingml/2006/main">
+              <a:ext uri="{FF2B5EF4-FFF2-40B4-BE49-F238E27FC236}">
+                <a16:creationId xmlns:a16="http://schemas.microsoft.com/office/drawing/2014/main" id="{03F7641C-A3D1-48DB-B563-C835AC54E7DF}"/>
+              </a:ext>
+            </a:extLst>
+          </p:cNvPr>
+          <p:cNvSpPr>
+            <a:spLocks xmlns:a="http://schemas.openxmlformats.org/drawingml/2006/main" noGrp="1"/>
+          </p:cNvSpPr>
+          <p:nvPr/>
+        </p:nvSpPr>
+        <p:spPr>
+          <a:xfrm xmlns:a="http://schemas.openxmlformats.org/drawingml/2006/main">
+            <a:off x="4286250" y="5772150"/>
+            <a:ext cx="2914650" cy="304800"/>
+          </a:xfrm>
+          <a:prstGeom xmlns:a="http://schemas.openxmlformats.org/drawingml/2006/main" prst="rect">
+            <a:avLst/>
+          </a:prstGeom>
+          <a:noFill xmlns:a="http://schemas.openxmlformats.org/drawingml/2006/main"/>
+          <a:ln xmlns:a="http://schemas.openxmlformats.org/drawingml/2006/main" w="0">
+            <a:noFill/>
+            <a:prstDash val="solid"/>
+          </a:ln>
+        </p:spPr>
+        <p:txBody>
+          <a:bodyPr xmlns:a="http://schemas.openxmlformats.org/drawingml/2006/main" lIns="0" tIns="0" rIns="0" bIns="0">
+            <a:noAutofit/>
+          </a:bodyPr>
+          <a:lstStyle xmlns:a="http://schemas.openxmlformats.org/drawingml/2006/main"/>
+          <a:p xmlns:a="http://schemas.openxmlformats.org/drawingml/2006/main">
+            <a:pPr>
+              <a:lnSpc>
+                <a:spcPct val="104000"/>
+              </a:lnSpc>
+              <a:buNone/>
+              <a:defRPr sz="757">
+                <a:solidFill>
+                  <a:srgbClr val="50636B"/>
+                </a:solidFill>
+                <a:latin typeface="Helvetica Neue"/>
+                <a:ea typeface="Helvetica Neue"/>
+                <a:cs typeface="Helvetica Neue"/>
+              </a:defRPr>
+            </a:pPr>
+            <a:r>
+              <a:rPr sz="757">
+                <a:solidFill>
+                  <a:srgbClr val="50636B"/>
+                </a:solidFill>
+                <a:latin typeface="Helvetica Neue"/>
+                <a:ea typeface="Helvetica Neue"/>
+                <a:cs typeface="Helvetica Neue"/>
+              </a:rPr>
+              <a:t>Example output: risk tiers and intervention priority list</a:t>
+            </a:r>
+          </a:p>
+        </p:txBody>
+      </p:sp>
+      <p:sp>
+        <p:nvSpPr>
+          <p:cNvPr id="20" name="">
+            <a:extLst xmlns:a="http://schemas.openxmlformats.org/drawingml/2006/main">
+              <a:ext uri="{FF2B5EF4-FFF2-40B4-BE49-F238E27FC236}">
+                <a16:creationId xmlns:a16="http://schemas.microsoft.com/office/drawing/2014/main" id="{516C2A07-97A6-4C28-9A92-37F62355C4DA}"/>
+              </a:ext>
+            </a:extLst>
+          </p:cNvPr>
+          <p:cNvSpPr>
+            <a:spLocks xmlns:a="http://schemas.openxmlformats.org/drawingml/2006/main" noGrp="1"/>
+          </p:cNvSpPr>
+          <p:nvPr/>
+        </p:nvSpPr>
+        <p:spPr>
+          <a:xfrm xmlns:a="http://schemas.openxmlformats.org/drawingml/2006/main">
+            <a:off x="8058150" y="4229100"/>
+            <a:ext cx="2914650" cy="238125"/>
+          </a:xfrm>
+          <a:prstGeom xmlns:a="http://schemas.openxmlformats.org/drawingml/2006/main" prst="rect">
+            <a:avLst/>
+          </a:prstGeom>
+          <a:noFill xmlns:a="http://schemas.openxmlformats.org/drawingml/2006/main"/>
+          <a:ln xmlns:a="http://schemas.openxmlformats.org/drawingml/2006/main" w="0">
+            <a:noFill/>
+            <a:prstDash val="solid"/>
+          </a:ln>
+        </p:spPr>
+        <p:txBody>
+          <a:bodyPr xmlns:a="http://schemas.openxmlformats.org/drawingml/2006/main" lIns="0" tIns="0" rIns="0" bIns="0">
+            <a:noAutofit/>
+          </a:bodyPr>
+          <a:lstStyle xmlns:a="http://schemas.openxmlformats.org/drawingml/2006/main"/>
+          <a:p xmlns:a="http://schemas.openxmlformats.org/drawingml/2006/main">
+            <a:pPr>
+              <a:defRPr sz="1388" b="1">
+                <a:solidFill>
+                  <a:srgbClr val="102A34"/>
+                </a:solidFill>
+                <a:latin typeface="Helvetica Neue"/>
+                <a:ea typeface="Helvetica Neue"/>
+                <a:cs typeface="Helvetica Neue"/>
+              </a:defRPr>
+            </a:pPr>
+            <a:r>
+              <a:rPr sz="1388" b="1">
+                <a:solidFill>
+                  <a:srgbClr val="102A34"/>
+                </a:solidFill>
+                <a:latin typeface="Helvetica Neue"/>
+                <a:ea typeface="Helvetica Neue"/>
+                <a:cs typeface="Helvetica Neue"/>
+              </a:rPr>
+              <a:t>Market basic analysis</a:t>
+            </a:r>
+          </a:p>
+        </p:txBody>
+      </p:sp>
+      <p:sp>
+        <p:nvSpPr>
+          <p:cNvPr id="21" name="">
+            <a:extLst xmlns:a="http://schemas.openxmlformats.org/drawingml/2006/main">
+              <a:ext uri="{FF2B5EF4-FFF2-40B4-BE49-F238E27FC236}">
+                <a16:creationId xmlns:a16="http://schemas.microsoft.com/office/drawing/2014/main" id="{1CBD4E8E-CE6D-4EB6-B9FE-F7A4BE894756}"/>
+              </a:ext>
+            </a:extLst>
+          </p:cNvPr>
+          <p:cNvSpPr>
+            <a:spLocks xmlns:a="http://schemas.openxmlformats.org/drawingml/2006/main" noGrp="1"/>
+          </p:cNvSpPr>
+          <p:nvPr/>
+        </p:nvSpPr>
+        <p:spPr>
+          <a:xfrm xmlns:a="http://schemas.openxmlformats.org/drawingml/2006/main">
+            <a:off x="8058150" y="4524375"/>
+            <a:ext cx="2914650" cy="190500"/>
+          </a:xfrm>
+          <a:prstGeom xmlns:a="http://schemas.openxmlformats.org/drawingml/2006/main" prst="rect">
+            <a:avLst/>
+          </a:prstGeom>
+          <a:noFill xmlns:a="http://schemas.openxmlformats.org/drawingml/2006/main"/>
+          <a:ln xmlns:a="http://schemas.openxmlformats.org/drawingml/2006/main" w="0">
+            <a:noFill/>
+            <a:prstDash val="solid"/>
+          </a:ln>
+        </p:spPr>
+        <p:txBody>
+          <a:bodyPr xmlns:a="http://schemas.openxmlformats.org/drawingml/2006/main" lIns="0" tIns="0" rIns="0" bIns="0">
+            <a:noAutofit/>
+          </a:bodyPr>
+          <a:lstStyle xmlns:a="http://schemas.openxmlformats.org/drawingml/2006/main"/>
+          <a:p xmlns:a="http://schemas.openxmlformats.org/drawingml/2006/main">
+            <a:pPr>
+              <a:defRPr sz="907" b="1">
+                <a:solidFill>
+                  <a:srgbClr val="0F6F73"/>
+                </a:solidFill>
+                <a:latin typeface="Helvetica Neue"/>
+                <a:ea typeface="Helvetica Neue"/>
+                <a:cs typeface="Helvetica Neue"/>
+              </a:defRPr>
+            </a:pPr>
+            <a:r>
+              <a:rPr sz="907" b="1">
+                <a:solidFill>
+                  <a:srgbClr val="0F6F73"/>
+                </a:solidFill>
+                <a:latin typeface="Helvetica Neue"/>
+                <a:ea typeface="Helvetica Neue"/>
+                <a:cs typeface="Helvetica Neue"/>
+              </a:rPr>
+              <a:t>Place results in context</a:t>
+            </a:r>
+          </a:p>
+        </p:txBody>
+      </p:sp>
+      <p:sp>
+        <p:nvSpPr>
+          <p:cNvPr id="22" name="">
+            <a:extLst xmlns:a="http://schemas.openxmlformats.org/drawingml/2006/main">
+              <a:ext uri="{FF2B5EF4-FFF2-40B4-BE49-F238E27FC236}">
+                <a16:creationId xmlns:a16="http://schemas.microsoft.com/office/drawing/2014/main" id="{1EB7C7B9-FFA5-4E90-8163-ABD1E3CAEB45}"/>
+              </a:ext>
+            </a:extLst>
+          </p:cNvPr>
+          <p:cNvSpPr>
+            <a:spLocks xmlns:a="http://schemas.openxmlformats.org/drawingml/2006/main" noGrp="1"/>
+          </p:cNvSpPr>
+          <p:nvPr/>
+        </p:nvSpPr>
+        <p:spPr>
+          <a:xfrm xmlns:a="http://schemas.openxmlformats.org/drawingml/2006/main">
+            <a:off x="8058150" y="4838700"/>
+            <a:ext cx="2914650" cy="781050"/>
+          </a:xfrm>
+          <a:prstGeom xmlns:a="http://schemas.openxmlformats.org/drawingml/2006/main" prst="rect">
+            <a:avLst/>
+          </a:prstGeom>
+          <a:noFill xmlns:a="http://schemas.openxmlformats.org/drawingml/2006/main"/>
+          <a:ln xmlns:a="http://schemas.openxmlformats.org/drawingml/2006/main" w="0">
+            <a:noFill/>
+            <a:prstDash val="solid"/>
+          </a:ln>
+        </p:spPr>
+        <p:txBody>
+          <a:bodyPr xmlns:a="http://schemas.openxmlformats.org/drawingml/2006/main" lIns="0" tIns="0" rIns="0" bIns="0">
+            <a:noAutofit/>
+          </a:bodyPr>
+          <a:lstStyle xmlns:a="http://schemas.openxmlformats.org/drawingml/2006/main"/>
+          <a:p xmlns:a="http://schemas.openxmlformats.org/drawingml/2006/main">
+            <a:pPr marL="139700" indent="-63500">
+              <a:lnSpc>
+                <a:spcPct val="103000"/>
+              </a:lnSpc>
+              <a:spcAft>
+                <a:spcPts val="300"/>
+              </a:spcAft>
+              <a:buNone/>
+              <a:defRPr sz="757">
+                <a:solidFill>
+                  <a:srgbClr val="253B44"/>
+                </a:solidFill>
+                <a:latin typeface="Helvetica Neue"/>
+                <a:ea typeface="Helvetica Neue"/>
+                <a:cs typeface="Helvetica Neue"/>
+              </a:defRPr>
+            </a:pPr>
+            <a:r>
+              <a:rPr sz="757">
+                <a:solidFill>
+                  <a:srgbClr val="253B44"/>
+                </a:solidFill>
+                <a:latin typeface="Helvetica Neue"/>
+                <a:ea typeface="Helvetica Neue"/>
+                <a:cs typeface="Helvetica Neue"/>
+              </a:rPr>
+              <a:t>Compare NHN patterns across service lines and discharge types</a:t>
+            </a:r>
+          </a:p>
+          <a:p xmlns:a="http://schemas.openxmlformats.org/drawingml/2006/main">
+            <a:pPr marL="139700" indent="-63500">
+              <a:lnSpc>
+                <a:spcPct val="103000"/>
+              </a:lnSpc>
+              <a:spcAft>
+                <a:spcPts val="300"/>
+              </a:spcAft>
+              <a:buNone/>
+              <a:defRPr sz="757">
+                <a:solidFill>
+                  <a:srgbClr val="253B44"/>
+                </a:solidFill>
+                <a:latin typeface="Helvetica Neue"/>
+                <a:ea typeface="Helvetica Neue"/>
+                <a:cs typeface="Helvetica Neue"/>
+              </a:defRPr>
+            </a:pPr>
+            <a:r>
+              <a:rPr sz="757">
+                <a:solidFill>
+                  <a:srgbClr val="253B44"/>
+                </a:solidFill>
+                <a:latin typeface="Helvetica Neue"/>
+                <a:ea typeface="Helvetica Neue"/>
+                <a:cs typeface="Helvetica Neue"/>
+              </a:rPr>
+              <a:t>Separate broad readmission pressure from segment-specific gaps</a:t>
+            </a:r>
+          </a:p>
+          <a:p xmlns:a="http://schemas.openxmlformats.org/drawingml/2006/main">
+            <a:pPr marL="139700" indent="-63500">
+              <a:lnSpc>
+                <a:spcPct val="103000"/>
+              </a:lnSpc>
+              <a:spcAft>
+                <a:spcPts val="300"/>
+              </a:spcAft>
+              <a:buNone/>
+              <a:defRPr sz="757">
+                <a:solidFill>
+                  <a:srgbClr val="253B44"/>
+                </a:solidFill>
+                <a:latin typeface="Helvetica Neue"/>
+                <a:ea typeface="Helvetica Neue"/>
+                <a:cs typeface="Helvetica Neue"/>
+              </a:defRPr>
+            </a:pPr>
+            <a:r>
+              <a:rPr sz="757">
+                <a:solidFill>
+                  <a:srgbClr val="253B44"/>
+                </a:solidFill>
+                <a:latin typeface="Helvetica Neue"/>
+                <a:ea typeface="Helvetica Neue"/>
+                <a:cs typeface="Helvetica Neue"/>
+              </a:rPr>
+              <a:t>Connect trend patterns to financial scenarios</a:t>
+            </a:r>
+          </a:p>
+        </p:txBody>
+      </p:sp>
+      <p:sp>
+        <p:nvSpPr>
+          <p:cNvPr id="23" name="">
+            <a:extLst xmlns:a="http://schemas.openxmlformats.org/drawingml/2006/main">
+              <a:ext uri="{FF2B5EF4-FFF2-40B4-BE49-F238E27FC236}">
+                <a16:creationId xmlns:a16="http://schemas.microsoft.com/office/drawing/2014/main" id="{B953B072-4AE4-4853-9656-ED1096A3422F}"/>
+              </a:ext>
+            </a:extLst>
+          </p:cNvPr>
+          <p:cNvSpPr>
+            <a:spLocks xmlns:a="http://schemas.openxmlformats.org/drawingml/2006/main" noGrp="1"/>
+          </p:cNvSpPr>
+          <p:nvPr/>
+        </p:nvSpPr>
+        <p:spPr>
+          <a:xfrm xmlns:a="http://schemas.openxmlformats.org/drawingml/2006/main">
+            <a:off x="8058150" y="5772150"/>
+            <a:ext cx="2914650" cy="304800"/>
+          </a:xfrm>
+          <a:prstGeom xmlns:a="http://schemas.openxmlformats.org/drawingml/2006/main" prst="rect">
+            <a:avLst/>
+          </a:prstGeom>
+          <a:noFill xmlns:a="http://schemas.openxmlformats.org/drawingml/2006/main"/>
+          <a:ln xmlns:a="http://schemas.openxmlformats.org/drawingml/2006/main" w="0">
+            <a:noFill/>
+            <a:prstDash val="solid"/>
+          </a:ln>
+        </p:spPr>
+        <p:txBody>
+          <a:bodyPr xmlns:a="http://schemas.openxmlformats.org/drawingml/2006/main" lIns="0" tIns="0" rIns="0" bIns="0">
+            <a:noAutofit/>
+          </a:bodyPr>
+          <a:lstStyle xmlns:a="http://schemas.openxmlformats.org/drawingml/2006/main"/>
+          <a:p xmlns:a="http://schemas.openxmlformats.org/drawingml/2006/main">
+            <a:pPr>
+              <a:lnSpc>
+                <a:spcPct val="104000"/>
+              </a:lnSpc>
+              <a:buNone/>
+              <a:defRPr sz="757">
+                <a:solidFill>
+                  <a:srgbClr val="50636B"/>
+                </a:solidFill>
+                <a:latin typeface="Helvetica Neue"/>
+                <a:ea typeface="Helvetica Neue"/>
+                <a:cs typeface="Helvetica Neue"/>
+              </a:defRPr>
+            </a:pPr>
+            <a:r>
+              <a:rPr sz="757">
+                <a:solidFill>
+                  <a:srgbClr val="50636B"/>
+                </a:solidFill>
+                <a:latin typeface="Helvetica Neue"/>
+                <a:ea typeface="Helvetica Neue"/>
+                <a:cs typeface="Helvetica Neue"/>
+              </a:rPr>
+              <a:t>Example output: benchmark table, trend summary, ROI scenarios</a:t>
+            </a:r>
+          </a:p>
+        </p:txBody>
+      </p:sp>
+      <p:sp>
+        <p:nvSpPr>
+          <p:cNvPr id="24" name="">
+            <a:extLst xmlns:a="http://schemas.openxmlformats.org/drawingml/2006/main">
+              <a:ext uri="{FF2B5EF4-FFF2-40B4-BE49-F238E27FC236}">
+                <a16:creationId xmlns:a16="http://schemas.microsoft.com/office/drawing/2014/main" id="{E6E761BF-35F3-4102-AB48-7948614DD375}"/>
+              </a:ext>
+            </a:extLst>
+          </p:cNvPr>
+          <p:cNvSpPr>
+            <a:spLocks xmlns:a="http://schemas.openxmlformats.org/drawingml/2006/main" noGrp="1"/>
+          </p:cNvSpPr>
+          <p:nvPr/>
+        </p:nvSpPr>
+        <p:spPr>
+          <a:xfrm xmlns:a="http://schemas.openxmlformats.org/drawingml/2006/main">
+            <a:off x="514350" y="6153150"/>
+            <a:ext cx="10287000" cy="14288"/>
+          </a:xfrm>
+          <a:prstGeom xmlns:a="http://schemas.openxmlformats.org/drawingml/2006/main" prst="rect">
+            <a:avLst/>
+          </a:prstGeom>
+          <a:solidFill xmlns:a="http://schemas.openxmlformats.org/drawingml/2006/main">
+            <a:srgbClr val="D1E1E5"/>
+          </a:solidFill>
+          <a:ln xmlns:a="http://schemas.openxmlformats.org/drawingml/2006/main" w="0">
+            <a:noFill/>
+            <a:prstDash val="solid"/>
+          </a:ln>
+        </p:spPr>
+      </p:sp>
+      <p:sp>
+        <p:nvSpPr>
+          <p:cNvPr id="25" name="">
+            <a:extLst xmlns:a="http://schemas.openxmlformats.org/drawingml/2006/main">
+              <a:ext uri="{FF2B5EF4-FFF2-40B4-BE49-F238E27FC236}">
+                <a16:creationId xmlns:a16="http://schemas.microsoft.com/office/drawing/2014/main" id="{E2B34E6A-073F-433F-BA78-AE57047213B8}"/>
+              </a:ext>
+            </a:extLst>
+          </p:cNvPr>
+          <p:cNvSpPr>
+            <a:spLocks xmlns:a="http://schemas.openxmlformats.org/drawingml/2006/main" noGrp="1"/>
+          </p:cNvSpPr>
+          <p:nvPr/>
+        </p:nvSpPr>
+        <p:spPr>
+          <a:xfrm xmlns:a="http://schemas.openxmlformats.org/drawingml/2006/main">
+            <a:off x="514350" y="6343650"/>
+            <a:ext cx="1714500" cy="190500"/>
+          </a:xfrm>
+          <a:prstGeom xmlns:a="http://schemas.openxmlformats.org/drawingml/2006/main" prst="rect">
+            <a:avLst/>
+          </a:prstGeom>
+          <a:noFill xmlns:a="http://schemas.openxmlformats.org/drawingml/2006/main"/>
+          <a:ln xmlns:a="http://schemas.openxmlformats.org/drawingml/2006/main" w="0">
+            <a:noFill/>
+            <a:prstDash val="solid"/>
+          </a:ln>
+        </p:spPr>
+        <p:txBody>
+          <a:bodyPr xmlns:a="http://schemas.openxmlformats.org/drawingml/2006/main" lIns="0" tIns="0" rIns="0" bIns="0">
+            <a:noAutofit/>
+          </a:bodyPr>
+          <a:lstStyle xmlns:a="http://schemas.openxmlformats.org/drawingml/2006/main"/>
+          <a:p xmlns:a="http://schemas.openxmlformats.org/drawingml/2006/main">
+            <a:pPr>
+              <a:defRPr sz="1163" b="1">
+                <a:solidFill>
+                  <a:srgbClr val="102A34"/>
+                </a:solidFill>
+                <a:latin typeface="Helvetica Neue"/>
+                <a:ea typeface="Helvetica Neue"/>
+                <a:cs typeface="Helvetica Neue"/>
+              </a:defRPr>
+            </a:pPr>
+            <a:r>
+              <a:rPr sz="1163" b="1">
+                <a:solidFill>
+                  <a:srgbClr val="102A34"/>
+                </a:solidFill>
+                <a:latin typeface="Helvetica Neue"/>
+                <a:ea typeface="Helvetica Neue"/>
+                <a:cs typeface="Helvetica Neue"/>
+              </a:rPr>
+              <a:t>Decision standard</a:t>
+            </a:r>
+          </a:p>
+        </p:txBody>
+      </p:sp>
+      <p:sp>
+        <p:nvSpPr>
+          <p:cNvPr id="26" name="">
+            <a:extLst xmlns:a="http://schemas.openxmlformats.org/drawingml/2006/main">
+              <a:ext uri="{FF2B5EF4-FFF2-40B4-BE49-F238E27FC236}">
+                <a16:creationId xmlns:a16="http://schemas.microsoft.com/office/drawing/2014/main" id="{47A4FEB7-7BFB-437E-877F-42212070F8D5}"/>
+              </a:ext>
+            </a:extLst>
+          </p:cNvPr>
+          <p:cNvSpPr>
+            <a:spLocks xmlns:a="http://schemas.openxmlformats.org/drawingml/2006/main" noGrp="1"/>
+          </p:cNvSpPr>
+          <p:nvPr/>
+        </p:nvSpPr>
+        <p:spPr>
+          <a:xfrm xmlns:a="http://schemas.openxmlformats.org/drawingml/2006/main">
+            <a:off x="2228850" y="6362700"/>
+            <a:ext cx="7524750" cy="171450"/>
+          </a:xfrm>
+          <a:prstGeom xmlns:a="http://schemas.openxmlformats.org/drawingml/2006/main" prst="rect">
+            <a:avLst/>
+          </a:prstGeom>
+          <a:noFill xmlns:a="http://schemas.openxmlformats.org/drawingml/2006/main"/>
+          <a:ln xmlns:a="http://schemas.openxmlformats.org/drawingml/2006/main" w="0">
+            <a:noFill/>
+            <a:prstDash val="solid"/>
+          </a:ln>
+        </p:spPr>
+        <p:txBody>
+          <a:bodyPr xmlns:a="http://schemas.openxmlformats.org/drawingml/2006/main" lIns="0" tIns="0" rIns="0" bIns="0">
+            <a:noAutofit/>
+          </a:bodyPr>
+          <a:lstStyle xmlns:a="http://schemas.openxmlformats.org/drawingml/2006/main"/>
+          <a:p xmlns:a="http://schemas.openxmlformats.org/drawingml/2006/main">
+            <a:pPr>
+              <a:defRPr sz="900">
+                <a:solidFill>
+                  <a:srgbClr val="253B44"/>
+                </a:solidFill>
+                <a:latin typeface="Helvetica Neue"/>
+                <a:ea typeface="Helvetica Neue"/>
+                <a:cs typeface="Helvetica Neue"/>
+              </a:defRPr>
+            </a:pPr>
+            <a:r>
+              <a:rPr sz="900">
+                <a:solidFill>
+                  <a:srgbClr val="253B44"/>
+                </a:solidFill>
+                <a:latin typeface="Helvetica Neue"/>
+                <a:ea typeface="Helvetica Neue"/>
+                <a:cs typeface="Helvetica Neue"/>
+              </a:rPr>
+              <a:t>Prioritize actions that are statistically supported, clinically explainable, operationally feasible, and financially material.</a:t>
+            </a:r>
+          </a:p>
+        </p:txBody>
+      </p:sp>
+      <p:sp>
+        <p:nvSpPr>
+          <p:cNvPr id="27" name="">
+            <a:extLst xmlns:a="http://schemas.openxmlformats.org/drawingml/2006/main">
+              <a:ext uri="{FF2B5EF4-FFF2-40B4-BE49-F238E27FC236}">
+                <a16:creationId xmlns:a16="http://schemas.microsoft.com/office/drawing/2014/main" id="{F028615C-B5A9-4AC0-A927-D7C5AACE57EB}"/>
+              </a:ext>
+            </a:extLst>
+          </p:cNvPr>
+          <p:cNvSpPr>
+            <a:spLocks xmlns:a="http://schemas.openxmlformats.org/drawingml/2006/main" noGrp="1"/>
+          </p:cNvSpPr>
+          <p:nvPr/>
+        </p:nvSpPr>
+        <p:spPr>
+          <a:xfrm xmlns:a="http://schemas.openxmlformats.org/drawingml/2006/main">
+            <a:off x="514350" y="6572250"/>
+            <a:ext cx="8191500" cy="171450"/>
+          </a:xfrm>
+          <a:prstGeom xmlns:a="http://schemas.openxmlformats.org/drawingml/2006/main" prst="rect">
+            <a:avLst/>
+          </a:prstGeom>
+          <a:noFill xmlns:a="http://schemas.openxmlformats.org/drawingml/2006/main"/>
+          <a:ln xmlns:a="http://schemas.openxmlformats.org/drawingml/2006/main" w="0">
+            <a:noFill/>
+            <a:prstDash val="solid"/>
+          </a:ln>
+        </p:spPr>
+        <p:txBody>
+          <a:bodyPr xmlns:a="http://schemas.openxmlformats.org/drawingml/2006/main" lIns="0" tIns="0" rIns="0" bIns="0">
+            <a:noAutofit/>
+          </a:bodyPr>
+          <a:lstStyle xmlns:a="http://schemas.openxmlformats.org/drawingml/2006/main"/>
+          <a:p xmlns:a="http://schemas.openxmlformats.org/drawingml/2006/main">
+            <a:pPr>
+              <a:defRPr sz="750">
+                <a:solidFill>
+                  <a:srgbClr val="667A82"/>
+                </a:solidFill>
+                <a:latin typeface="Helvetica Neue"/>
+                <a:ea typeface="Helvetica Neue"/>
+                <a:cs typeface="Helvetica Neue"/>
+              </a:defRPr>
+            </a:pPr>
+            <a:r>
+              <a:rPr sz="750">
+                <a:solidFill>
+                  <a:srgbClr val="667A82"/>
+                </a:solidFill>
+                <a:latin typeface="Helvetica Neue"/>
+                <a:ea typeface="Helvetica Neue"/>
+                <a:cs typeface="Helvetica Neue"/>
+              </a:rPr>
+              <a:t>Source: NHN cleaned datasets, model metrics, and project charter analytical requirements</a:t>
+            </a:r>
+          </a:p>
+        </p:txBody>
+      </p:sp>
+    </p:spTree>
+    <p:extLst>
+      <p:ext uri="{BB962C8B-B14F-4D97-AF65-F5344CB8AC3E}">
+        <p14:creationId xmlns:p14="http://schemas.microsoft.com/office/powerpoint/2010/main" val="1442061715"/>
+      </p:ext>
+    </p:extLst>
+  </p:cSld>
+</p:sld>
+</file>
+
+<file path=ppt/slides/slide4.xml><?xml version="1.0" encoding="utf-8"?>
+<p:sld xmlns:p="http://schemas.openxmlformats.org/presentationml/2006/main">
+  <p:cSld>
+    <p:bg>
+      <p:bgPr>
+        <a:solidFill xmlns:a="http://schemas.openxmlformats.org/drawingml/2006/main">
+          <a:srgbClr val="F8FBFC"/>
+        </a:solidFill>
+      </p:bgPr>
+    </p:bg>
+    <p:spTree>
+      <p:nvGrpSpPr>
+        <p:cNvPr id="1" name=""/>
+        <p:cNvGrpSpPr/>
+        <p:nvPr/>
+      </p:nvGrpSpPr>
+      <p:grpSpPr>
+        <a:xfrm xmlns:a="http://schemas.openxmlformats.org/drawingml/2006/main"/>
+      </p:grpSpPr>
+      <p:sp>
+        <p:nvSpPr>
+          <p:cNvPr id="19" name="">
+            <a:extLst xmlns:a="http://schemas.openxmlformats.org/drawingml/2006/main">
+              <a:ext uri="{FF2B5EF4-FFF2-40B4-BE49-F238E27FC236}">
+                <a16:creationId xmlns:a16="http://schemas.microsoft.com/office/drawing/2014/main" id="{EE597846-FAB9-4352-82D4-219AD1D5DCB6}"/>
+              </a:ext>
+            </a:extLst>
+          </p:cNvPr>
+          <p:cNvSpPr>
+            <a:spLocks xmlns:a="http://schemas.openxmlformats.org/drawingml/2006/main" noGrp="1"/>
+          </p:cNvSpPr>
+          <p:nvPr/>
+        </p:nvSpPr>
+        <p:spPr>
+          <a:xfrm xmlns:a="http://schemas.openxmlformats.org/drawingml/2006/main">
+            <a:off x="0" y="0"/>
+            <a:ext cx="12192000" cy="152400"/>
+          </a:xfrm>
+          <a:prstGeom xmlns:a="http://schemas.openxmlformats.org/drawingml/2006/main" prst="rect">
+            <a:avLst/>
+          </a:prstGeom>
+          <a:solidFill xmlns:a="http://schemas.openxmlformats.org/drawingml/2006/main">
+            <a:srgbClr val="0F4C5C"/>
+          </a:solidFill>
+          <a:ln xmlns:a="http://schemas.openxmlformats.org/drawingml/2006/main" w="0">
+            <a:noFill/>
+            <a:prstDash val="solid"/>
+          </a:ln>
+        </p:spPr>
+      </p:sp>
+      <p:sp>
+        <p:nvSpPr>
+          <p:cNvPr id="2" name="">
+            <a:extLst xmlns:a="http://schemas.openxmlformats.org/drawingml/2006/main">
+              <a:ext uri="{FF2B5EF4-FFF2-40B4-BE49-F238E27FC236}">
+                <a16:creationId xmlns:a16="http://schemas.microsoft.com/office/drawing/2014/main" id="{2967FEE9-61A2-4B6B-B759-BF47ED555F52}"/>
+              </a:ext>
+            </a:extLst>
+          </p:cNvPr>
+          <p:cNvSpPr>
+            <a:spLocks xmlns:a="http://schemas.openxmlformats.org/drawingml/2006/main" noGrp="1"/>
+          </p:cNvSpPr>
+          <p:nvPr/>
+        </p:nvSpPr>
+        <p:spPr>
+          <a:xfrm xmlns:a="http://schemas.openxmlformats.org/drawingml/2006/main">
+            <a:off x="514350" y="361950"/>
+            <a:ext cx="3429000" cy="247650"/>
+          </a:xfrm>
+          <a:prstGeom xmlns:a="http://schemas.openxmlformats.org/drawingml/2006/main" prst="rect">
+            <a:avLst/>
+          </a:prstGeom>
+          <a:noFill xmlns:a="http://schemas.openxmlformats.org/drawingml/2006/main"/>
+          <a:ln xmlns:a="http://schemas.openxmlformats.org/drawingml/2006/main" w="0">
+            <a:noFill/>
+            <a:prstDash val="solid"/>
+          </a:ln>
+        </p:spPr>
+        <p:txBody>
+          <a:bodyPr xmlns:a="http://schemas.openxmlformats.org/drawingml/2006/main" lIns="0" tIns="0" rIns="0" bIns="0">
+            <a:noAutofit/>
+          </a:bodyPr>
+          <a:lstStyle xmlns:a="http://schemas.openxmlformats.org/drawingml/2006/main"/>
+          <a:p xmlns:a="http://schemas.openxmlformats.org/drawingml/2006/main">
+            <a:pPr>
+              <a:defRPr sz="1275" b="1">
+                <a:solidFill>
+                  <a:srgbClr val="0F6F73"/>
+                </a:solidFill>
+                <a:latin typeface="Helvetica Neue"/>
+                <a:ea typeface="Helvetica Neue"/>
+                <a:cs typeface="Helvetica Neue"/>
+              </a:defRPr>
+            </a:pPr>
+            <a:r>
+              <a:rPr sz="1275" b="1">
+                <a:solidFill>
+                  <a:srgbClr val="0F6F73"/>
+                </a:solidFill>
+                <a:latin typeface="Helvetica Neue"/>
+                <a:ea typeface="Helvetica Neue"/>
+                <a:cs typeface="Helvetica Neue"/>
+              </a:rPr>
+              <a:t>Meds Counsulting LLC</a:t>
+            </a:r>
+          </a:p>
+        </p:txBody>
+      </p:sp>
+      <p:sp>
+        <p:nvSpPr>
+          <p:cNvPr id="3" name="">
+            <a:extLst xmlns:a="http://schemas.openxmlformats.org/drawingml/2006/main">
+              <a:ext uri="{FF2B5EF4-FFF2-40B4-BE49-F238E27FC236}">
+                <a16:creationId xmlns:a16="http://schemas.microsoft.com/office/drawing/2014/main" id="{7B32CE82-01A3-472A-83F3-67994BD3F891}"/>
+              </a:ext>
+            </a:extLst>
+          </p:cNvPr>
+          <p:cNvSpPr>
+            <a:spLocks xmlns:a="http://schemas.openxmlformats.org/drawingml/2006/main" noGrp="1"/>
+          </p:cNvSpPr>
+          <p:nvPr/>
+        </p:nvSpPr>
+        <p:spPr>
+          <a:xfrm xmlns:a="http://schemas.openxmlformats.org/drawingml/2006/main">
+            <a:off x="514350" y="723900"/>
+            <a:ext cx="8191500" cy="457200"/>
+          </a:xfrm>
+          <a:prstGeom xmlns:a="http://schemas.openxmlformats.org/drawingml/2006/main" prst="rect">
+            <a:avLst/>
+          </a:prstGeom>
+          <a:noFill xmlns:a="http://schemas.openxmlformats.org/drawingml/2006/main"/>
+          <a:ln xmlns:a="http://schemas.openxmlformats.org/drawingml/2006/main" w="0">
+            <a:noFill/>
+            <a:prstDash val="solid"/>
+          </a:ln>
+        </p:spPr>
+        <p:txBody>
+          <a:bodyPr xmlns:a="http://schemas.openxmlformats.org/drawingml/2006/main" lIns="0" tIns="0" rIns="0" bIns="0">
+            <a:noAutofit/>
+          </a:bodyPr>
+          <a:lstStyle xmlns:a="http://schemas.openxmlformats.org/drawingml/2006/main"/>
+          <a:p xmlns:a="http://schemas.openxmlformats.org/drawingml/2006/main">
+            <a:pPr>
+              <a:defRPr sz="2700" b="1">
+                <a:solidFill>
+                  <a:srgbClr val="102A34"/>
+                </a:solidFill>
+                <a:latin typeface="Helvetica Neue"/>
+                <a:ea typeface="Helvetica Neue"/>
+                <a:cs typeface="Helvetica Neue"/>
+              </a:defRPr>
+            </a:pPr>
+            <a:r>
+              <a:rPr sz="2700" b="1">
+                <a:solidFill>
+                  <a:srgbClr val="102A34"/>
+                </a:solidFill>
+                <a:latin typeface="Helvetica Neue"/>
+                <a:ea typeface="Helvetica Neue"/>
+                <a:cs typeface="Helvetica Neue"/>
+              </a:rPr>
+              <a:t>Business insights</a:t>
+            </a:r>
+          </a:p>
+        </p:txBody>
+      </p:sp>
+      <p:sp>
+        <p:nvSpPr>
+          <p:cNvPr id="4" name="">
+            <a:extLst xmlns:a="http://schemas.openxmlformats.org/drawingml/2006/main">
+              <a:ext uri="{FF2B5EF4-FFF2-40B4-BE49-F238E27FC236}">
+                <a16:creationId xmlns:a16="http://schemas.microsoft.com/office/drawing/2014/main" id="{D0879696-CDEE-4A54-BEAD-E8B0A700A898}"/>
+              </a:ext>
+            </a:extLst>
+          </p:cNvPr>
+          <p:cNvSpPr>
+            <a:spLocks xmlns:a="http://schemas.openxmlformats.org/drawingml/2006/main" noGrp="1"/>
+          </p:cNvSpPr>
+          <p:nvPr/>
+        </p:nvSpPr>
+        <p:spPr>
+          <a:xfrm xmlns:a="http://schemas.openxmlformats.org/drawingml/2006/main">
+            <a:off x="514350" y="1162050"/>
+            <a:ext cx="8096250" cy="209550"/>
+          </a:xfrm>
+          <a:prstGeom xmlns:a="http://schemas.openxmlformats.org/drawingml/2006/main" prst="rect">
+            <a:avLst/>
+          </a:prstGeom>
+          <a:noFill xmlns:a="http://schemas.openxmlformats.org/drawingml/2006/main"/>
+          <a:ln xmlns:a="http://schemas.openxmlformats.org/drawingml/2006/main" w="0">
+            <a:noFill/>
+            <a:prstDash val="solid"/>
+          </a:ln>
+        </p:spPr>
+        <p:txBody>
+          <a:bodyPr xmlns:a="http://schemas.openxmlformats.org/drawingml/2006/main" lIns="0" tIns="0" rIns="0" bIns="0">
+            <a:noAutofit/>
+          </a:bodyPr>
+          <a:lstStyle xmlns:a="http://schemas.openxmlformats.org/drawingml/2006/main"/>
+          <a:p xmlns:a="http://schemas.openxmlformats.org/drawingml/2006/main">
+            <a:pPr>
+              <a:defRPr sz="1088">
+                <a:solidFill>
+                  <a:srgbClr val="50636B"/>
+                </a:solidFill>
+                <a:latin typeface="Helvetica Neue"/>
+                <a:ea typeface="Helvetica Neue"/>
+                <a:cs typeface="Helvetica Neue"/>
+              </a:defRPr>
+            </a:pPr>
+            <a:r>
+              <a:rPr sz="1088">
+                <a:solidFill>
+                  <a:srgbClr val="50636B"/>
+                </a:solidFill>
+                <a:latin typeface="Helvetica Neue"/>
+                <a:ea typeface="Helvetica Neue"/>
+                <a:cs typeface="Helvetica Neue"/>
+              </a:rPr>
+              <a:t>Team-identified evidence and significance for leadership decisions</a:t>
+            </a:r>
+          </a:p>
+        </p:txBody>
+      </p:sp>
+      <p:sp>
+        <p:nvSpPr>
+          <p:cNvPr id="5" name="">
+            <a:extLst xmlns:a="http://schemas.openxmlformats.org/drawingml/2006/main">
+              <a:ext uri="{FF2B5EF4-FFF2-40B4-BE49-F238E27FC236}">
+                <a16:creationId xmlns:a16="http://schemas.microsoft.com/office/drawing/2014/main" id="{A3C7C6EE-B245-4C4D-9BF0-5CBE9AA27209}"/>
+              </a:ext>
+            </a:extLst>
+          </p:cNvPr>
+          <p:cNvSpPr>
+            <a:spLocks xmlns:a="http://schemas.openxmlformats.org/drawingml/2006/main" noGrp="1"/>
+          </p:cNvSpPr>
+          <p:nvPr/>
+        </p:nvSpPr>
+        <p:spPr>
+          <a:xfrm xmlns:a="http://schemas.openxmlformats.org/drawingml/2006/main">
+            <a:off x="514350" y="1466850"/>
+            <a:ext cx="10287000" cy="28575"/>
+          </a:xfrm>
+          <a:prstGeom xmlns:a="http://schemas.openxmlformats.org/drawingml/2006/main" prst="rect">
+            <a:avLst/>
+          </a:prstGeom>
+          <a:solidFill xmlns:a="http://schemas.openxmlformats.org/drawingml/2006/main">
+            <a:srgbClr val="E9A93A"/>
+          </a:solidFill>
+          <a:ln xmlns:a="http://schemas.openxmlformats.org/drawingml/2006/main" w="0">
+            <a:noFill/>
+            <a:prstDash val="solid"/>
+          </a:ln>
+        </p:spPr>
+      </p:sp>
+      <p:sp>
+        <p:nvSpPr>
+          <p:cNvPr id="6" name="">
+            <a:extLst xmlns:a="http://schemas.openxmlformats.org/drawingml/2006/main">
+              <a:ext uri="{FF2B5EF4-FFF2-40B4-BE49-F238E27FC236}">
+                <a16:creationId xmlns:a16="http://schemas.microsoft.com/office/drawing/2014/main" id="{49F5C89C-8703-4045-AA06-4DF0E06553A1}"/>
+              </a:ext>
+            </a:extLst>
+          </p:cNvPr>
+          <p:cNvSpPr>
+            <a:spLocks xmlns:a="http://schemas.openxmlformats.org/drawingml/2006/main" noGrp="1"/>
+          </p:cNvSpPr>
+          <p:nvPr/>
+        </p:nvSpPr>
+        <p:spPr>
+          <a:xfrm xmlns:a="http://schemas.openxmlformats.org/drawingml/2006/main">
+            <a:off x="514350" y="1743075"/>
+            <a:ext cx="3619500" cy="247650"/>
+          </a:xfrm>
+          <a:prstGeom xmlns:a="http://schemas.openxmlformats.org/drawingml/2006/main" prst="rect">
+            <a:avLst/>
+          </a:prstGeom>
+          <a:noFill xmlns:a="http://schemas.openxmlformats.org/drawingml/2006/main"/>
+          <a:ln xmlns:a="http://schemas.openxmlformats.org/drawingml/2006/main" w="0">
+            <a:noFill/>
+            <a:prstDash val="solid"/>
+          </a:ln>
+        </p:spPr>
+        <p:txBody>
+          <a:bodyPr xmlns:a="http://schemas.openxmlformats.org/drawingml/2006/main" lIns="0" tIns="0" rIns="0" bIns="0">
+            <a:noAutofit/>
+          </a:bodyPr>
+          <a:lstStyle xmlns:a="http://schemas.openxmlformats.org/drawingml/2006/main"/>
+          <a:p xmlns:a="http://schemas.openxmlformats.org/drawingml/2006/main">
+            <a:pPr>
+              <a:defRPr sz="1500" b="1">
+                <a:solidFill>
+                  <a:srgbClr val="102A34"/>
+                </a:solidFill>
+                <a:latin typeface="Helvetica Neue"/>
+                <a:ea typeface="Helvetica Neue"/>
+                <a:cs typeface="Helvetica Neue"/>
+              </a:defRPr>
+            </a:pPr>
+            <a:r>
+              <a:rPr sz="1500" b="1">
+                <a:solidFill>
+                  <a:srgbClr val="102A34"/>
+                </a:solidFill>
+                <a:latin typeface="Helvetica Neue"/>
+                <a:ea typeface="Helvetica Neue"/>
+                <a:cs typeface="Helvetica Neue"/>
+              </a:rPr>
+              <a:t>Evidence from the full analysis</a:t>
+            </a:r>
+          </a:p>
+        </p:txBody>
+      </p:sp>
+      <p:graphicFrame>
+        <p:nvGraphicFramePr>
+          <p:cNvPr id="25" name="Chart"/>
+          <p:cNvGraphicFramePr/>
+          <p:nvPr/>
+        </p:nvGraphicFramePr>
+        <p:xfrm>
+          <a:off xmlns:a="http://schemas.openxmlformats.org/drawingml/2006/main" x="514350" y="2095500"/>
+          <a:ext xmlns:a="http://schemas.openxmlformats.org/drawingml/2006/main" cx="4724400" cy="1524000"/>
+        </p:xfrm>
+        <a:graphic xmlns:a="http://schemas.openxmlformats.org/drawingml/2006/main">
+          <a:graphicData uri="http://schemas.openxmlformats.org/drawingml/2006/chart">
+            <c:chart xmlns:r="http://schemas.openxmlformats.org/officeDocument/2006/relationships" xmlns:c="http://schemas.openxmlformats.org/drawingml/2006/chart" r:id="R9d9dccd0e8984b42"/>
+          </a:graphicData>
+        </a:graphic>
+      </p:graphicFrame>
+      <p:sp>
+        <p:nvSpPr>
+          <p:cNvPr id="8" name="">
+            <a:extLst xmlns:a="http://schemas.openxmlformats.org/drawingml/2006/main">
+              <a:ext uri="{FF2B5EF4-FFF2-40B4-BE49-F238E27FC236}">
+                <a16:creationId xmlns:a16="http://schemas.microsoft.com/office/drawing/2014/main" id="{3FA8CD6F-BCF1-4856-AFCD-B528CE7EDAE1}"/>
+              </a:ext>
+            </a:extLst>
+          </p:cNvPr>
+          <p:cNvSpPr>
+            <a:spLocks xmlns:a="http://schemas.openxmlformats.org/drawingml/2006/main" noGrp="1"/>
+          </p:cNvSpPr>
+          <p:nvPr/>
+        </p:nvSpPr>
+        <p:spPr>
+          <a:xfrm xmlns:a="http://schemas.openxmlformats.org/drawingml/2006/main">
+            <a:off x="514350" y="3695700"/>
+            <a:ext cx="4724400" cy="304800"/>
           </a:xfrm>
           <a:prstGeom xmlns:a="http://schemas.openxmlformats.org/drawingml/2006/main" prst="rect">
             <a:avLst/>
@@ -6243,17 +7889,17 @@
                 <a:ea typeface="Helvetica Neue"/>
                 <a:cs typeface="Helvetica Neue"/>
               </a:rPr>
-              <a:t>Example output: odds ratios, feature importance, predicted readmission risk</a:t>
+              <a:t>Risk deciles separate observed readmission rates from 11.8% in D1 to 82.3% in D10.</a:t>
             </a:r>
           </a:p>
         </p:txBody>
       </p:sp>
       <p:sp>
         <p:nvSpPr>
-          <p:cNvPr id="14" name="">
+          <p:cNvPr id="9" name="">
             <a:extLst xmlns:a="http://schemas.openxmlformats.org/drawingml/2006/main">
               <a:ext uri="{FF2B5EF4-FFF2-40B4-BE49-F238E27FC236}">
-                <a16:creationId xmlns:a16="http://schemas.microsoft.com/office/drawing/2014/main" id="{D3409BDB-E3D3-4590-836A-B21DE0042D3A}"/>
+                <a16:creationId xmlns:a16="http://schemas.microsoft.com/office/drawing/2014/main" id="{472302A5-11BA-4A7C-8C7D-4127F54007B9}"/>
               </a:ext>
             </a:extLst>
           </p:cNvPr>
@@ -6264,8 +7910,8 @@
         </p:nvSpPr>
         <p:spPr>
           <a:xfrm xmlns:a="http://schemas.openxmlformats.org/drawingml/2006/main">
-            <a:off x="4286250" y="3314700"/>
-            <a:ext cx="2914650" cy="238125"/>
+            <a:off x="6076950" y="1743075"/>
+            <a:ext cx="3619500" cy="247650"/>
           </a:xfrm>
           <a:prstGeom xmlns:a="http://schemas.openxmlformats.org/drawingml/2006/main" prst="rect">
             <a:avLst/>
@@ -6283,7 +7929,7 @@
           <a:lstStyle xmlns:a="http://schemas.openxmlformats.org/drawingml/2006/main"/>
           <a:p xmlns:a="http://schemas.openxmlformats.org/drawingml/2006/main">
             <a:pPr>
-              <a:defRPr sz="1425" b="1">
+              <a:defRPr sz="1500" b="1">
                 <a:solidFill>
                   <a:srgbClr val="102A34"/>
                 </a:solidFill>
@@ -6293,7 +7939,7 @@
               </a:defRPr>
             </a:pPr>
             <a:r>
-              <a:rPr sz="1425" b="1">
+              <a:rPr sz="1500" b="1">
                 <a:solidFill>
                   <a:srgbClr val="102A34"/>
                 </a:solidFill>
@@ -6301,17 +7947,481 @@
                 <a:ea typeface="Helvetica Neue"/>
                 <a:cs typeface="Helvetica Neue"/>
               </a:rPr>
-              <a:t>Patient segmentation</a:t>
+              <a:t>Business value scenario</a:t>
             </a:r>
           </a:p>
         </p:txBody>
       </p:sp>
+      <p:graphicFrame>
+        <p:nvGraphicFramePr>
+          <p:cNvPr id="28" name=""/>
+          <p:cNvGraphicFramePr/>
+          <p:nvPr/>
+        </p:nvGraphicFramePr>
+        <p:xfrm>
+          <a:off xmlns:a="http://schemas.openxmlformats.org/drawingml/2006/main" x="6076950" y="2095500"/>
+          <a:ext xmlns:a="http://schemas.openxmlformats.org/drawingml/2006/main" cx="4724400" cy="1485900"/>
+        </p:xfrm>
+        <a:graphic xmlns:a="http://schemas.openxmlformats.org/drawingml/2006/main">
+          <a:graphicData uri="http://schemas.openxmlformats.org/drawingml/2006/table">
+            <a:tbl>
+              <a:tblPr/>
+              <a:tblGrid>
+                <a:gridCol w="1352550"/>
+                <a:gridCol w="1047750"/>
+                <a:gridCol w="1162050"/>
+                <a:gridCol w="1162050"/>
+              </a:tblGrid>
+              <a:tr h="371475">
+                <a:tc>
+                  <a:txBody>
+                    <a:bodyPr lIns="66675" tIns="28575" rIns="57150" bIns="28575">
+                      <a:noAutofit/>
+                    </a:bodyPr>
+                    <a:lstStyle/>
+                    <a:p>
+                      <a:pPr algn="l"/>
+                      <a:r>
+                        <a:rPr sz="713" b="1">
+                          <a:solidFill>
+                            <a:srgbClr val="FFFFFF"/>
+                          </a:solidFill>
+                          <a:latin typeface="Helvetica Neue"/>
+                          <a:ea typeface="Helvetica Neue"/>
+                          <a:cs typeface="Helvetica Neue"/>
+                        </a:rPr>
+                        <a:t>Scenario</a:t>
+                      </a:r>
+                    </a:p>
+                  </a:txBody>
+                  <a:tcPr marL="91440" marR="91440" marT="45720" marB="45720" anchor="ctr">
+                    <a:solidFill>
+                      <a:srgbClr val="0F4C5C"/>
+                    </a:solidFill>
+                  </a:tcPr>
+                </a:tc>
+                <a:tc>
+                  <a:txBody>
+                    <a:bodyPr lIns="66675" tIns="28575" rIns="57150" bIns="28575">
+                      <a:noAutofit/>
+                    </a:bodyPr>
+                    <a:lstStyle/>
+                    <a:p>
+                      <a:pPr algn="ctr"/>
+                      <a:r>
+                        <a:rPr sz="713" b="1">
+                          <a:solidFill>
+                            <a:srgbClr val="FFFFFF"/>
+                          </a:solidFill>
+                          <a:latin typeface="Helvetica Neue"/>
+                          <a:ea typeface="Helvetica Neue"/>
+                          <a:cs typeface="Helvetica Neue"/>
+                        </a:rPr>
+                        <a:t>Reduction</a:t>
+                      </a:r>
+                    </a:p>
+                  </a:txBody>
+                  <a:tcPr marL="91440" marR="91440" marT="45720" marB="45720" anchor="ctr">
+                    <a:solidFill>
+                      <a:srgbClr val="0F4C5C"/>
+                    </a:solidFill>
+                  </a:tcPr>
+                </a:tc>
+                <a:tc>
+                  <a:txBody>
+                    <a:bodyPr lIns="66675" tIns="28575" rIns="57150" bIns="28575">
+                      <a:noAutofit/>
+                    </a:bodyPr>
+                    <a:lstStyle/>
+                    <a:p>
+                      <a:pPr algn="ctr"/>
+                      <a:r>
+                        <a:rPr sz="713" b="1">
+                          <a:solidFill>
+                            <a:srgbClr val="FFFFFF"/>
+                          </a:solidFill>
+                          <a:latin typeface="Helvetica Neue"/>
+                          <a:ea typeface="Helvetica Neue"/>
+                          <a:cs typeface="Helvetica Neue"/>
+                        </a:rPr>
+                        <a:t>Net savings</a:t>
+                      </a:r>
+                    </a:p>
+                  </a:txBody>
+                  <a:tcPr marL="91440" marR="91440" marT="45720" marB="45720" anchor="ctr">
+                    <a:solidFill>
+                      <a:srgbClr val="0F4C5C"/>
+                    </a:solidFill>
+                  </a:tcPr>
+                </a:tc>
+                <a:tc>
+                  <a:txBody>
+                    <a:bodyPr lIns="66675" tIns="28575" rIns="57150" bIns="28575">
+                      <a:noAutofit/>
+                    </a:bodyPr>
+                    <a:lstStyle/>
+                    <a:p>
+                      <a:pPr algn="ctr"/>
+                      <a:r>
+                        <a:rPr sz="713" b="1">
+                          <a:solidFill>
+                            <a:srgbClr val="FFFFFF"/>
+                          </a:solidFill>
+                          <a:latin typeface="Helvetica Neue"/>
+                          <a:ea typeface="Helvetica Neue"/>
+                          <a:cs typeface="Helvetica Neue"/>
+                        </a:rPr>
+                        <a:t>ROI</a:t>
+                      </a:r>
+                    </a:p>
+                  </a:txBody>
+                  <a:tcPr marL="91440" marR="91440" marT="45720" marB="45720" anchor="ctr">
+                    <a:solidFill>
+                      <a:srgbClr val="0F4C5C"/>
+                    </a:solidFill>
+                  </a:tcPr>
+                </a:tc>
+              </a:tr>
+              <a:tr h="371475">
+                <a:tc>
+                  <a:txBody>
+                    <a:bodyPr lIns="66675" tIns="28575" rIns="57150" bIns="28575">
+                      <a:noAutofit/>
+                    </a:bodyPr>
+                    <a:lstStyle/>
+                    <a:p>
+                      <a:pPr algn="l"/>
+                      <a:r>
+                        <a:rPr sz="690" b="1">
+                          <a:solidFill>
+                            <a:srgbClr val="253B44"/>
+                          </a:solidFill>
+                          <a:latin typeface="Helvetica Neue"/>
+                          <a:ea typeface="Helvetica Neue"/>
+                          <a:cs typeface="Helvetica Neue"/>
+                        </a:rPr>
+                        <a:t>Conservative</a:t>
+                      </a:r>
+                    </a:p>
+                  </a:txBody>
+                  <a:tcPr marL="91440" marR="91440" marT="45720" marB="45720" anchor="ctr">
+                    <a:solidFill>
+                      <a:srgbClr val="EEF6F7"/>
+                    </a:solidFill>
+                  </a:tcPr>
+                </a:tc>
+                <a:tc>
+                  <a:txBody>
+                    <a:bodyPr lIns="66675" tIns="28575" rIns="57150" bIns="28575">
+                      <a:noAutofit/>
+                    </a:bodyPr>
+                    <a:lstStyle/>
+                    <a:p>
+                      <a:pPr algn="ctr"/>
+                      <a:r>
+                        <a:rPr sz="690" b="0">
+                          <a:solidFill>
+                            <a:srgbClr val="253B44"/>
+                          </a:solidFill>
+                          <a:latin typeface="Helvetica Neue"/>
+                          <a:ea typeface="Helvetica Neue"/>
+                          <a:cs typeface="Helvetica Neue"/>
+                        </a:rPr>
+                        <a:t>5.0%</a:t>
+                      </a:r>
+                    </a:p>
+                  </a:txBody>
+                  <a:tcPr marL="91440" marR="91440" marT="45720" marB="45720" anchor="ctr">
+                    <a:solidFill>
+                      <a:srgbClr val="EEF6F7"/>
+                    </a:solidFill>
+                  </a:tcPr>
+                </a:tc>
+                <a:tc>
+                  <a:txBody>
+                    <a:bodyPr lIns="66675" tIns="28575" rIns="57150" bIns="28575">
+                      <a:noAutofit/>
+                    </a:bodyPr>
+                    <a:lstStyle/>
+                    <a:p>
+                      <a:pPr algn="ctr"/>
+                      <a:r>
+                        <a:rPr sz="690" b="0">
+                          <a:solidFill>
+                            <a:srgbClr val="253B44"/>
+                          </a:solidFill>
+                          <a:latin typeface="Helvetica Neue"/>
+                          <a:ea typeface="Helvetica Neue"/>
+                          <a:cs typeface="Helvetica Neue"/>
+                        </a:rPr>
+                        <a:t>$4.28M</a:t>
+                      </a:r>
+                    </a:p>
+                  </a:txBody>
+                  <a:tcPr marL="91440" marR="91440" marT="45720" marB="45720" anchor="ctr">
+                    <a:solidFill>
+                      <a:srgbClr val="EEF6F7"/>
+                    </a:solidFill>
+                  </a:tcPr>
+                </a:tc>
+                <a:tc>
+                  <a:txBody>
+                    <a:bodyPr lIns="66675" tIns="28575" rIns="57150" bIns="28575">
+                      <a:noAutofit/>
+                    </a:bodyPr>
+                    <a:lstStyle/>
+                    <a:p>
+                      <a:pPr algn="ctr"/>
+                      <a:r>
+                        <a:rPr sz="690" b="0">
+                          <a:solidFill>
+                            <a:srgbClr val="253B44"/>
+                          </a:solidFill>
+                          <a:latin typeface="Helvetica Neue"/>
+                          <a:ea typeface="Helvetica Neue"/>
+                          <a:cs typeface="Helvetica Neue"/>
+                        </a:rPr>
+                        <a:t>4.28x</a:t>
+                      </a:r>
+                    </a:p>
+                  </a:txBody>
+                  <a:tcPr marL="91440" marR="91440" marT="45720" marB="45720" anchor="ctr">
+                    <a:solidFill>
+                      <a:srgbClr val="EEF6F7"/>
+                    </a:solidFill>
+                  </a:tcPr>
+                </a:tc>
+              </a:tr>
+              <a:tr h="371475">
+                <a:tc>
+                  <a:txBody>
+                    <a:bodyPr lIns="66675" tIns="28575" rIns="57150" bIns="28575">
+                      <a:noAutofit/>
+                    </a:bodyPr>
+                    <a:lstStyle/>
+                    <a:p>
+                      <a:pPr algn="l"/>
+                      <a:r>
+                        <a:rPr sz="690" b="1">
+                          <a:solidFill>
+                            <a:srgbClr val="253B44"/>
+                          </a:solidFill>
+                          <a:latin typeface="Helvetica Neue"/>
+                          <a:ea typeface="Helvetica Neue"/>
+                          <a:cs typeface="Helvetica Neue"/>
+                        </a:rPr>
+                        <a:t>Expected</a:t>
+                      </a:r>
+                    </a:p>
+                  </a:txBody>
+                  <a:tcPr marL="91440" marR="91440" marT="45720" marB="45720" anchor="ctr">
+                    <a:solidFill>
+                      <a:srgbClr val="F8FBFC"/>
+                    </a:solidFill>
+                  </a:tcPr>
+                </a:tc>
+                <a:tc>
+                  <a:txBody>
+                    <a:bodyPr lIns="66675" tIns="28575" rIns="57150" bIns="28575">
+                      <a:noAutofit/>
+                    </a:bodyPr>
+                    <a:lstStyle/>
+                    <a:p>
+                      <a:pPr algn="ctr"/>
+                      <a:r>
+                        <a:rPr sz="690" b="0">
+                          <a:solidFill>
+                            <a:srgbClr val="253B44"/>
+                          </a:solidFill>
+                          <a:latin typeface="Helvetica Neue"/>
+                          <a:ea typeface="Helvetica Neue"/>
+                          <a:cs typeface="Helvetica Neue"/>
+                        </a:rPr>
+                        <a:t>10.0%</a:t>
+                      </a:r>
+                    </a:p>
+                  </a:txBody>
+                  <a:tcPr marL="91440" marR="91440" marT="45720" marB="45720" anchor="ctr">
+                    <a:solidFill>
+                      <a:srgbClr val="F8FBFC"/>
+                    </a:solidFill>
+                  </a:tcPr>
+                </a:tc>
+                <a:tc>
+                  <a:txBody>
+                    <a:bodyPr lIns="66675" tIns="28575" rIns="57150" bIns="28575">
+                      <a:noAutofit/>
+                    </a:bodyPr>
+                    <a:lstStyle/>
+                    <a:p>
+                      <a:pPr algn="ctr"/>
+                      <a:r>
+                        <a:rPr sz="690" b="0">
+                          <a:solidFill>
+                            <a:srgbClr val="253B44"/>
+                          </a:solidFill>
+                          <a:latin typeface="Helvetica Neue"/>
+                          <a:ea typeface="Helvetica Neue"/>
+                          <a:cs typeface="Helvetica Neue"/>
+                        </a:rPr>
+                        <a:t>$8.81M</a:t>
+                      </a:r>
+                    </a:p>
+                  </a:txBody>
+                  <a:tcPr marL="91440" marR="91440" marT="45720" marB="45720" anchor="ctr">
+                    <a:solidFill>
+                      <a:srgbClr val="F8FBFC"/>
+                    </a:solidFill>
+                  </a:tcPr>
+                </a:tc>
+                <a:tc>
+                  <a:txBody>
+                    <a:bodyPr lIns="66675" tIns="28575" rIns="57150" bIns="28575">
+                      <a:noAutofit/>
+                    </a:bodyPr>
+                    <a:lstStyle/>
+                    <a:p>
+                      <a:pPr algn="ctr"/>
+                      <a:r>
+                        <a:rPr sz="690" b="0">
+                          <a:solidFill>
+                            <a:srgbClr val="253B44"/>
+                          </a:solidFill>
+                          <a:latin typeface="Helvetica Neue"/>
+                          <a:ea typeface="Helvetica Neue"/>
+                          <a:cs typeface="Helvetica Neue"/>
+                        </a:rPr>
+                        <a:t>5.03x</a:t>
+                      </a:r>
+                    </a:p>
+                  </a:txBody>
+                  <a:tcPr marL="91440" marR="91440" marT="45720" marB="45720" anchor="ctr">
+                    <a:solidFill>
+                      <a:srgbClr val="F8FBFC"/>
+                    </a:solidFill>
+                  </a:tcPr>
+                </a:tc>
+              </a:tr>
+              <a:tr h="371475">
+                <a:tc>
+                  <a:txBody>
+                    <a:bodyPr lIns="66675" tIns="28575" rIns="57150" bIns="28575">
+                      <a:noAutofit/>
+                    </a:bodyPr>
+                    <a:lstStyle/>
+                    <a:p>
+                      <a:pPr algn="l"/>
+                      <a:r>
+                        <a:rPr sz="690" b="1">
+                          <a:solidFill>
+                            <a:srgbClr val="253B44"/>
+                          </a:solidFill>
+                          <a:latin typeface="Helvetica Neue"/>
+                          <a:ea typeface="Helvetica Neue"/>
+                          <a:cs typeface="Helvetica Neue"/>
+                        </a:rPr>
+                        <a:t>Optimistic</a:t>
+                      </a:r>
+                    </a:p>
+                  </a:txBody>
+                  <a:tcPr marL="91440" marR="91440" marT="45720" marB="45720" anchor="ctr">
+                    <a:solidFill>
+                      <a:srgbClr val="EEF6F7"/>
+                    </a:solidFill>
+                  </a:tcPr>
+                </a:tc>
+                <a:tc>
+                  <a:txBody>
+                    <a:bodyPr lIns="66675" tIns="28575" rIns="57150" bIns="28575">
+                      <a:noAutofit/>
+                    </a:bodyPr>
+                    <a:lstStyle/>
+                    <a:p>
+                      <a:pPr algn="ctr"/>
+                      <a:r>
+                        <a:rPr sz="690" b="0">
+                          <a:solidFill>
+                            <a:srgbClr val="253B44"/>
+                          </a:solidFill>
+                          <a:latin typeface="Helvetica Neue"/>
+                          <a:ea typeface="Helvetica Neue"/>
+                          <a:cs typeface="Helvetica Neue"/>
+                        </a:rPr>
+                        <a:t>15.0%</a:t>
+                      </a:r>
+                    </a:p>
+                  </a:txBody>
+                  <a:tcPr marL="91440" marR="91440" marT="45720" marB="45720" anchor="ctr">
+                    <a:solidFill>
+                      <a:srgbClr val="EEF6F7"/>
+                    </a:solidFill>
+                  </a:tcPr>
+                </a:tc>
+                <a:tc>
+                  <a:txBody>
+                    <a:bodyPr lIns="66675" tIns="28575" rIns="57150" bIns="28575">
+                      <a:noAutofit/>
+                    </a:bodyPr>
+                    <a:lstStyle/>
+                    <a:p>
+                      <a:pPr algn="ctr"/>
+                      <a:r>
+                        <a:rPr sz="690" b="0">
+                          <a:solidFill>
+                            <a:srgbClr val="253B44"/>
+                          </a:solidFill>
+                          <a:latin typeface="Helvetica Neue"/>
+                          <a:ea typeface="Helvetica Neue"/>
+                          <a:cs typeface="Helvetica Neue"/>
+                        </a:rPr>
+                        <a:t>$13.36M</a:t>
+                      </a:r>
+                    </a:p>
+                  </a:txBody>
+                  <a:tcPr marL="91440" marR="91440" marT="45720" marB="45720" anchor="ctr">
+                    <a:solidFill>
+                      <a:srgbClr val="EEF6F7"/>
+                    </a:solidFill>
+                  </a:tcPr>
+                </a:tc>
+                <a:tc>
+                  <a:txBody>
+                    <a:bodyPr lIns="66675" tIns="28575" rIns="57150" bIns="28575">
+                      <a:noAutofit/>
+                    </a:bodyPr>
+                    <a:lstStyle/>
+                    <a:p>
+                      <a:pPr algn="ctr"/>
+                      <a:r>
+                        <a:rPr sz="690" b="0">
+                          <a:solidFill>
+                            <a:srgbClr val="253B44"/>
+                          </a:solidFill>
+                          <a:latin typeface="Helvetica Neue"/>
+                          <a:ea typeface="Helvetica Neue"/>
+                          <a:cs typeface="Helvetica Neue"/>
+                        </a:rPr>
+                        <a:t>5.34x</a:t>
+                      </a:r>
+                    </a:p>
+                  </a:txBody>
+                  <a:tcPr marL="91440" marR="91440" marT="45720" marB="45720" anchor="ctr">
+                    <a:solidFill>
+                      <a:srgbClr val="EEF6F7"/>
+                    </a:solidFill>
+                  </a:tcPr>
+                </a:tc>
+              </a:tr>
+            </a:tbl>
+          </a:graphicData>
+        </a:graphic>
+      </p:graphicFrame>
       <p:sp>
         <p:nvSpPr>
-          <p:cNvPr id="15" name="">
+          <p:cNvPr id="11" name="">
             <a:extLst xmlns:a="http://schemas.openxmlformats.org/drawingml/2006/main">
               <a:ext uri="{FF2B5EF4-FFF2-40B4-BE49-F238E27FC236}">
-                <a16:creationId xmlns:a16="http://schemas.microsoft.com/office/drawing/2014/main" id="{43766048-F8C9-46C3-926F-F6FFC98FAE83}"/>
+                <a16:creationId xmlns:a16="http://schemas.microsoft.com/office/drawing/2014/main" id="{55C905E1-460B-44C3-B63E-9B441CA0C5C9}"/>
               </a:ext>
             </a:extLst>
           </p:cNvPr>
@@ -6322,191 +8432,8 @@
         </p:nvSpPr>
         <p:spPr>
           <a:xfrm xmlns:a="http://schemas.openxmlformats.org/drawingml/2006/main">
-            <a:off x="4286250" y="3609975"/>
-            <a:ext cx="2914650" cy="190500"/>
-          </a:xfrm>
-          <a:prstGeom xmlns:a="http://schemas.openxmlformats.org/drawingml/2006/main" prst="rect">
-            <a:avLst/>
-          </a:prstGeom>
-          <a:noFill xmlns:a="http://schemas.openxmlformats.org/drawingml/2006/main"/>
-          <a:ln xmlns:a="http://schemas.openxmlformats.org/drawingml/2006/main" w="0">
-            <a:noFill/>
-            <a:prstDash val="solid"/>
-          </a:ln>
-        </p:spPr>
-        <p:txBody>
-          <a:bodyPr xmlns:a="http://schemas.openxmlformats.org/drawingml/2006/main" lIns="0" tIns="0" rIns="0" bIns="0">
-            <a:noAutofit/>
-          </a:bodyPr>
-          <a:lstStyle xmlns:a="http://schemas.openxmlformats.org/drawingml/2006/main"/>
-          <a:p xmlns:a="http://schemas.openxmlformats.org/drawingml/2006/main">
-            <a:pPr>
-              <a:defRPr sz="938" b="1">
-                <a:solidFill>
-                  <a:srgbClr val="0F6F73"/>
-                </a:solidFill>
-                <a:latin typeface="Helvetica Neue"/>
-                <a:ea typeface="Helvetica Neue"/>
-                <a:cs typeface="Helvetica Neue"/>
-              </a:defRPr>
-            </a:pPr>
-            <a:r>
-              <a:rPr sz="938" b="1">
-                <a:solidFill>
-                  <a:srgbClr val="0F6F73"/>
-                </a:solidFill>
-                <a:latin typeface="Helvetica Neue"/>
-                <a:ea typeface="Helvetica Neue"/>
-                <a:cs typeface="Helvetica Neue"/>
-              </a:rPr>
-              <a:t>Group patients into action pools</a:t>
-            </a:r>
-          </a:p>
-        </p:txBody>
-      </p:sp>
-      <p:sp>
-        <p:nvSpPr>
-          <p:cNvPr id="16" name="">
-            <a:extLst xmlns:a="http://schemas.openxmlformats.org/drawingml/2006/main">
-              <a:ext uri="{FF2B5EF4-FFF2-40B4-BE49-F238E27FC236}">
-                <a16:creationId xmlns:a16="http://schemas.microsoft.com/office/drawing/2014/main" id="{C2C30E18-7CCC-4A13-9B35-5C9C932E4325}"/>
-              </a:ext>
-            </a:extLst>
-          </p:cNvPr>
-          <p:cNvSpPr>
-            <a:spLocks xmlns:a="http://schemas.openxmlformats.org/drawingml/2006/main" noGrp="1"/>
-          </p:cNvSpPr>
-          <p:nvPr/>
-        </p:nvSpPr>
-        <p:spPr>
-          <a:xfrm xmlns:a="http://schemas.openxmlformats.org/drawingml/2006/main">
-            <a:off x="4286250" y="3943350"/>
-            <a:ext cx="2914650" cy="1257300"/>
-          </a:xfrm>
-          <a:prstGeom xmlns:a="http://schemas.openxmlformats.org/drawingml/2006/main" prst="rect">
-            <a:avLst/>
-          </a:prstGeom>
-          <a:noFill xmlns:a="http://schemas.openxmlformats.org/drawingml/2006/main"/>
-          <a:ln xmlns:a="http://schemas.openxmlformats.org/drawingml/2006/main" w="0">
-            <a:noFill/>
-            <a:prstDash val="solid"/>
-          </a:ln>
-        </p:spPr>
-        <p:txBody>
-          <a:bodyPr xmlns:a="http://schemas.openxmlformats.org/drawingml/2006/main" lIns="0" tIns="0" rIns="0" bIns="0">
-            <a:noAutofit/>
-          </a:bodyPr>
-          <a:lstStyle xmlns:a="http://schemas.openxmlformats.org/drawingml/2006/main"/>
-          <a:p xmlns:a="http://schemas.openxmlformats.org/drawingml/2006/main">
-            <a:pPr marL="165100" indent="-76200">
-              <a:lnSpc>
-                <a:spcPct val="102000"/>
-              </a:lnSpc>
-              <a:spcAft>
-                <a:spcPts val="400"/>
-              </a:spcAft>
-              <a:buNone/>
-              <a:defRPr sz="848">
-                <a:solidFill>
-                  <a:srgbClr val="253B44"/>
-                </a:solidFill>
-                <a:latin typeface="Helvetica Neue"/>
-                <a:ea typeface="Helvetica Neue"/>
-                <a:cs typeface="Helvetica Neue"/>
-              </a:defRPr>
-            </a:pPr>
-            <a:r>
-              <a:rPr sz="848">
-                <a:solidFill>
-                  <a:srgbClr val="253B44"/>
-                </a:solidFill>
-                <a:latin typeface="Helvetica Neue"/>
-                <a:ea typeface="Helvetica Neue"/>
-                <a:cs typeface="Helvetica Neue"/>
-              </a:rPr>
-              <a:t>Create clinically meaningful groups by age, chronic burden, prior admissions, discharge setting, and follow-up status</a:t>
-            </a:r>
-          </a:p>
-          <a:p xmlns:a="http://schemas.openxmlformats.org/drawingml/2006/main">
-            <a:pPr marL="165100" indent="-76200">
-              <a:lnSpc>
-                <a:spcPct val="102000"/>
-              </a:lnSpc>
-              <a:spcAft>
-                <a:spcPts val="400"/>
-              </a:spcAft>
-              <a:buNone/>
-              <a:defRPr sz="848">
-                <a:solidFill>
-                  <a:srgbClr val="253B44"/>
-                </a:solidFill>
-                <a:latin typeface="Helvetica Neue"/>
-                <a:ea typeface="Helvetica Neue"/>
-                <a:cs typeface="Helvetica Neue"/>
-              </a:defRPr>
-            </a:pPr>
-            <a:r>
-              <a:rPr sz="848">
-                <a:solidFill>
-                  <a:srgbClr val="253B44"/>
-                </a:solidFill>
-                <a:latin typeface="Helvetica Neue"/>
-                <a:ea typeface="Helvetica Neue"/>
-                <a:cs typeface="Helvetica Neue"/>
-              </a:rPr>
-              <a:t>Compare readmission rates and cost exposure across segments</a:t>
-            </a:r>
-          </a:p>
-          <a:p xmlns:a="http://schemas.openxmlformats.org/drawingml/2006/main">
-            <a:pPr marL="165100" indent="-76200">
-              <a:lnSpc>
-                <a:spcPct val="102000"/>
-              </a:lnSpc>
-              <a:spcAft>
-                <a:spcPts val="400"/>
-              </a:spcAft>
-              <a:buNone/>
-              <a:defRPr sz="848">
-                <a:solidFill>
-                  <a:srgbClr val="253B44"/>
-                </a:solidFill>
-                <a:latin typeface="Helvetica Neue"/>
-                <a:ea typeface="Helvetica Neue"/>
-                <a:cs typeface="Helvetica Neue"/>
-              </a:defRPr>
-            </a:pPr>
-            <a:r>
-              <a:rPr sz="848">
-                <a:solidFill>
-                  <a:srgbClr val="253B44"/>
-                </a:solidFill>
-                <a:latin typeface="Helvetica Neue"/>
-                <a:ea typeface="Helvetica Neue"/>
-                <a:cs typeface="Helvetica Neue"/>
-              </a:rPr>
-              <a:t>Identify where targeted care coordination can have the largest practical effect</a:t>
-            </a:r>
-          </a:p>
-        </p:txBody>
-      </p:sp>
-      <p:sp>
-        <p:nvSpPr>
-          <p:cNvPr id="17" name="">
-            <a:extLst xmlns:a="http://schemas.openxmlformats.org/drawingml/2006/main">
-              <a:ext uri="{FF2B5EF4-FFF2-40B4-BE49-F238E27FC236}">
-                <a16:creationId xmlns:a16="http://schemas.microsoft.com/office/drawing/2014/main" id="{EC97399E-82E7-410D-804F-C028C18D9C36}"/>
-              </a:ext>
-            </a:extLst>
-          </p:cNvPr>
-          <p:cNvSpPr>
-            <a:spLocks xmlns:a="http://schemas.openxmlformats.org/drawingml/2006/main" noGrp="1"/>
-          </p:cNvSpPr>
-          <p:nvPr/>
-        </p:nvSpPr>
-        <p:spPr>
-          <a:xfrm xmlns:a="http://schemas.openxmlformats.org/drawingml/2006/main">
-            <a:off x="4286250" y="5381625"/>
-            <a:ext cx="2914650" cy="514350"/>
+            <a:off x="6076950" y="3695700"/>
+            <a:ext cx="4724400" cy="304800"/>
           </a:xfrm>
           <a:prstGeom xmlns:a="http://schemas.openxmlformats.org/drawingml/2006/main" prst="rect">
             <a:avLst/>
@@ -6546,17 +8473,17 @@
                 <a:ea typeface="Helvetica Neue"/>
                 <a:cs typeface="Helvetica Neue"/>
               </a:rPr>
-              <a:t>Example output: high-risk cohorts and intervention priority list</a:t>
+              <a:t>Expected case avoids about 518 readmissions and produces $8.81M in net savings.</a:t>
             </a:r>
           </a:p>
         </p:txBody>
       </p:sp>
       <p:sp>
         <p:nvSpPr>
-          <p:cNvPr id="18" name="">
+          <p:cNvPr id="12" name="">
             <a:extLst xmlns:a="http://schemas.openxmlformats.org/drawingml/2006/main">
               <a:ext uri="{FF2B5EF4-FFF2-40B4-BE49-F238E27FC236}">
-                <a16:creationId xmlns:a16="http://schemas.microsoft.com/office/drawing/2014/main" id="{6B0A09D3-032D-4277-B87D-5B1C0DEADD91}"/>
+                <a16:creationId xmlns:a16="http://schemas.microsoft.com/office/drawing/2014/main" id="{49B5AEEA-41FE-4110-9024-C1AC21A08BEA}"/>
               </a:ext>
             </a:extLst>
           </p:cNvPr>
@@ -6567,8 +8494,39 @@
         </p:nvSpPr>
         <p:spPr>
           <a:xfrm xmlns:a="http://schemas.openxmlformats.org/drawingml/2006/main">
-            <a:off x="8058150" y="3314700"/>
-            <a:ext cx="2914650" cy="238125"/>
+            <a:off x="514350" y="4162425"/>
+            <a:ext cx="10287000" cy="14288"/>
+          </a:xfrm>
+          <a:prstGeom xmlns:a="http://schemas.openxmlformats.org/drawingml/2006/main" prst="rect">
+            <a:avLst/>
+          </a:prstGeom>
+          <a:solidFill xmlns:a="http://schemas.openxmlformats.org/drawingml/2006/main">
+            <a:srgbClr val="D1E1E5"/>
+          </a:solidFill>
+          <a:ln xmlns:a="http://schemas.openxmlformats.org/drawingml/2006/main" w="0">
+            <a:noFill/>
+            <a:prstDash val="solid"/>
+          </a:ln>
+        </p:spPr>
+      </p:sp>
+      <p:sp>
+        <p:nvSpPr>
+          <p:cNvPr id="13" name="">
+            <a:extLst xmlns:a="http://schemas.openxmlformats.org/drawingml/2006/main">
+              <a:ext uri="{FF2B5EF4-FFF2-40B4-BE49-F238E27FC236}">
+                <a16:creationId xmlns:a16="http://schemas.microsoft.com/office/drawing/2014/main" id="{4FE6822A-F942-495F-8793-0F4FED1C4BFC}"/>
+              </a:ext>
+            </a:extLst>
+          </p:cNvPr>
+          <p:cNvSpPr>
+            <a:spLocks xmlns:a="http://schemas.openxmlformats.org/drawingml/2006/main" noGrp="1"/>
+          </p:cNvSpPr>
+          <p:nvPr/>
+        </p:nvSpPr>
+        <p:spPr>
+          <a:xfrm xmlns:a="http://schemas.openxmlformats.org/drawingml/2006/main">
+            <a:off x="514350" y="4400550"/>
+            <a:ext cx="2476500" cy="228600"/>
           </a:xfrm>
           <a:prstGeom xmlns:a="http://schemas.openxmlformats.org/drawingml/2006/main" prst="rect">
             <a:avLst/>
@@ -6586,7 +8544,7 @@
           <a:lstStyle xmlns:a="http://schemas.openxmlformats.org/drawingml/2006/main"/>
           <a:p xmlns:a="http://schemas.openxmlformats.org/drawingml/2006/main">
             <a:pPr>
-              <a:defRPr sz="1425" b="1">
+              <a:defRPr sz="1500" b="1">
                 <a:solidFill>
                   <a:srgbClr val="102A34"/>
                 </a:solidFill>
@@ -6596,7 +8554,7 @@
               </a:defRPr>
             </a:pPr>
             <a:r>
-              <a:rPr sz="1425" b="1">
+              <a:rPr sz="1500" b="1">
                 <a:solidFill>
                   <a:srgbClr val="102A34"/>
                 </a:solidFill>
@@ -6604,17 +8562,319 @@
                 <a:ea typeface="Helvetica Neue"/>
                 <a:cs typeface="Helvetica Neue"/>
               </a:rPr>
-              <a:t>Market and baseline analysis</a:t>
+              <a:t>Team identified</a:t>
             </a:r>
           </a:p>
         </p:txBody>
       </p:sp>
+      <p:graphicFrame>
+        <p:nvGraphicFramePr>
+          <p:cNvPr id="32" name=""/>
+          <p:cNvGraphicFramePr/>
+          <p:nvPr/>
+        </p:nvGraphicFramePr>
+        <p:xfrm>
+          <a:off xmlns:a="http://schemas.openxmlformats.org/drawingml/2006/main" x="514350" y="4743450"/>
+          <a:ext xmlns:a="http://schemas.openxmlformats.org/drawingml/2006/main" cx="4953000" cy="1143000"/>
+        </p:xfrm>
+        <a:graphic xmlns:a="http://schemas.openxmlformats.org/drawingml/2006/main">
+          <a:graphicData uri="http://schemas.openxmlformats.org/drawingml/2006/table">
+            <a:tbl>
+              <a:tblPr/>
+              <a:tblGrid>
+                <a:gridCol w="1657350"/>
+                <a:gridCol w="3295650"/>
+              </a:tblGrid>
+              <a:tr h="228600">
+                <a:tc>
+                  <a:txBody>
+                    <a:bodyPr lIns="66675" tIns="28575" rIns="57150" bIns="28575">
+                      <a:noAutofit/>
+                    </a:bodyPr>
+                    <a:lstStyle/>
+                    <a:p>
+                      <a:pPr algn="l"/>
+                      <a:r>
+                        <a:rPr sz="638" b="1">
+                          <a:solidFill>
+                            <a:srgbClr val="FFFFFF"/>
+                          </a:solidFill>
+                          <a:latin typeface="Helvetica Neue"/>
+                          <a:ea typeface="Helvetica Neue"/>
+                          <a:cs typeface="Helvetica Neue"/>
+                        </a:rPr>
+                        <a:t>Insight area</a:t>
+                      </a:r>
+                    </a:p>
+                  </a:txBody>
+                  <a:tcPr marL="91440" marR="91440" marT="45720" marB="45720" anchor="ctr">
+                    <a:solidFill>
+                      <a:srgbClr val="0F4C5C"/>
+                    </a:solidFill>
+                  </a:tcPr>
+                </a:tc>
+                <a:tc>
+                  <a:txBody>
+                    <a:bodyPr lIns="66675" tIns="28575" rIns="57150" bIns="28575">
+                      <a:noAutofit/>
+                    </a:bodyPr>
+                    <a:lstStyle/>
+                    <a:p>
+                      <a:pPr algn="l"/>
+                      <a:r>
+                        <a:rPr sz="638" b="1">
+                          <a:solidFill>
+                            <a:srgbClr val="FFFFFF"/>
+                          </a:solidFill>
+                          <a:latin typeface="Helvetica Neue"/>
+                          <a:ea typeface="Helvetica Neue"/>
+                          <a:cs typeface="Helvetica Neue"/>
+                        </a:rPr>
+                        <a:t>What the team found</a:t>
+                      </a:r>
+                    </a:p>
+                  </a:txBody>
+                  <a:tcPr marL="91440" marR="91440" marT="45720" marB="45720" anchor="ctr">
+                    <a:solidFill>
+                      <a:srgbClr val="0F4C5C"/>
+                    </a:solidFill>
+                  </a:tcPr>
+                </a:tc>
+              </a:tr>
+              <a:tr h="228600">
+                <a:tc>
+                  <a:txBody>
+                    <a:bodyPr lIns="66675" tIns="28575" rIns="57150" bIns="28575">
+                      <a:noAutofit/>
+                    </a:bodyPr>
+                    <a:lstStyle/>
+                    <a:p>
+                      <a:pPr algn="l"/>
+                      <a:r>
+                        <a:rPr sz="585" b="1">
+                          <a:solidFill>
+                            <a:srgbClr val="253B44"/>
+                          </a:solidFill>
+                          <a:latin typeface="Helvetica Neue"/>
+                          <a:ea typeface="Helvetica Neue"/>
+                          <a:cs typeface="Helvetica Neue"/>
+                        </a:rPr>
+                        <a:t>Major performance drivers</a:t>
+                      </a:r>
+                    </a:p>
+                  </a:txBody>
+                  <a:tcPr marL="91440" marR="91440" marT="45720" marB="45720" anchor="ctr">
+                    <a:solidFill>
+                      <a:srgbClr val="EEF6F7"/>
+                    </a:solidFill>
+                  </a:tcPr>
+                </a:tc>
+                <a:tc>
+                  <a:txBody>
+                    <a:bodyPr lIns="66675" tIns="28575" rIns="57150" bIns="28575">
+                      <a:noAutofit/>
+                    </a:bodyPr>
+                    <a:lstStyle/>
+                    <a:p>
+                      <a:pPr algn="l"/>
+                      <a:r>
+                        <a:rPr sz="585" b="0">
+                          <a:solidFill>
+                            <a:srgbClr val="253B44"/>
+                          </a:solidFill>
+                          <a:latin typeface="Helvetica Neue"/>
+                          <a:ea typeface="Helvetica Neue"/>
+                          <a:cs typeface="Helvetica Neue"/>
+                        </a:rPr>
+                        <a:t>Chronic burden, prior admissions, emergency admission, and skilled nursing discharge</a:t>
+                      </a:r>
+                    </a:p>
+                  </a:txBody>
+                  <a:tcPr marL="91440" marR="91440" marT="45720" marB="45720" anchor="ctr">
+                    <a:solidFill>
+                      <a:srgbClr val="EEF6F7"/>
+                    </a:solidFill>
+                  </a:tcPr>
+                </a:tc>
+              </a:tr>
+              <a:tr h="228600">
+                <a:tc>
+                  <a:txBody>
+                    <a:bodyPr lIns="66675" tIns="28575" rIns="57150" bIns="28575">
+                      <a:noAutofit/>
+                    </a:bodyPr>
+                    <a:lstStyle/>
+                    <a:p>
+                      <a:pPr algn="l"/>
+                      <a:r>
+                        <a:rPr sz="585" b="1">
+                          <a:solidFill>
+                            <a:srgbClr val="253B44"/>
+                          </a:solidFill>
+                          <a:latin typeface="Helvetica Neue"/>
+                          <a:ea typeface="Helvetica Neue"/>
+                          <a:cs typeface="Helvetica Neue"/>
+                        </a:rPr>
+                        <a:t>Hidden opportunities</a:t>
+                      </a:r>
+                    </a:p>
+                  </a:txBody>
+                  <a:tcPr marL="91440" marR="91440" marT="45720" marB="45720" anchor="ctr">
+                    <a:solidFill>
+                      <a:srgbClr val="F8FBFC"/>
+                    </a:solidFill>
+                  </a:tcPr>
+                </a:tc>
+                <a:tc>
+                  <a:txBody>
+                    <a:bodyPr lIns="66675" tIns="28575" rIns="57150" bIns="28575">
+                      <a:noAutofit/>
+                    </a:bodyPr>
+                    <a:lstStyle/>
+                    <a:p>
+                      <a:pPr algn="l"/>
+                      <a:r>
+                        <a:rPr sz="585" b="0">
+                          <a:solidFill>
+                            <a:srgbClr val="253B44"/>
+                          </a:solidFill>
+                          <a:latin typeface="Helvetica Neue"/>
+                          <a:ea typeface="Helvetica Neue"/>
+                          <a:cs typeface="Helvetica Neue"/>
+                        </a:rPr>
+                        <a:t>Risk tiers can focus support on patients most likely to return</a:t>
+                      </a:r>
+                    </a:p>
+                  </a:txBody>
+                  <a:tcPr marL="91440" marR="91440" marT="45720" marB="45720" anchor="ctr">
+                    <a:solidFill>
+                      <a:srgbClr val="F8FBFC"/>
+                    </a:solidFill>
+                  </a:tcPr>
+                </a:tc>
+              </a:tr>
+              <a:tr h="228600">
+                <a:tc>
+                  <a:txBody>
+                    <a:bodyPr lIns="66675" tIns="28575" rIns="57150" bIns="28575">
+                      <a:noAutofit/>
+                    </a:bodyPr>
+                    <a:lstStyle/>
+                    <a:p>
+                      <a:pPr algn="l"/>
+                      <a:r>
+                        <a:rPr sz="585" b="1">
+                          <a:solidFill>
+                            <a:srgbClr val="253B44"/>
+                          </a:solidFill>
+                          <a:latin typeface="Helvetica Neue"/>
+                          <a:ea typeface="Helvetica Neue"/>
+                          <a:cs typeface="Helvetica Neue"/>
+                        </a:rPr>
+                        <a:t>Risk factors</a:t>
+                      </a:r>
+                    </a:p>
+                  </a:txBody>
+                  <a:tcPr marL="91440" marR="91440" marT="45720" marB="45720" anchor="ctr">
+                    <a:solidFill>
+                      <a:srgbClr val="EEF6F7"/>
+                    </a:solidFill>
+                  </a:tcPr>
+                </a:tc>
+                <a:tc>
+                  <a:txBody>
+                    <a:bodyPr lIns="66675" tIns="28575" rIns="57150" bIns="28575">
+                      <a:noAutofit/>
+                    </a:bodyPr>
+                    <a:lstStyle/>
+                    <a:p>
+                      <a:pPr algn="l"/>
+                      <a:r>
+                        <a:rPr sz="585" b="0">
+                          <a:solidFill>
+                            <a:srgbClr val="253B44"/>
+                          </a:solidFill>
+                          <a:latin typeface="Helvetica Neue"/>
+                          <a:ea typeface="Helvetica Neue"/>
+                          <a:cs typeface="Helvetica Neue"/>
+                        </a:rPr>
+                        <a:t>Unknown follow-up status, high-acuity discharge, repeat utilization, and financial data quality</a:t>
+                      </a:r>
+                    </a:p>
+                  </a:txBody>
+                  <a:tcPr marL="91440" marR="91440" marT="45720" marB="45720" anchor="ctr">
+                    <a:solidFill>
+                      <a:srgbClr val="EEF6F7"/>
+                    </a:solidFill>
+                  </a:tcPr>
+                </a:tc>
+              </a:tr>
+              <a:tr h="228600">
+                <a:tc>
+                  <a:txBody>
+                    <a:bodyPr lIns="66675" tIns="28575" rIns="57150" bIns="28575">
+                      <a:noAutofit/>
+                    </a:bodyPr>
+                    <a:lstStyle/>
+                    <a:p>
+                      <a:pPr algn="l"/>
+                      <a:r>
+                        <a:rPr sz="585" b="1">
+                          <a:solidFill>
+                            <a:srgbClr val="253B44"/>
+                          </a:solidFill>
+                          <a:latin typeface="Helvetica Neue"/>
+                          <a:ea typeface="Helvetica Neue"/>
+                          <a:cs typeface="Helvetica Neue"/>
+                        </a:rPr>
+                        <a:t>Unexpected findings</a:t>
+                      </a:r>
+                    </a:p>
+                  </a:txBody>
+                  <a:tcPr marL="91440" marR="91440" marT="45720" marB="45720" anchor="ctr">
+                    <a:solidFill>
+                      <a:srgbClr val="F8FBFC"/>
+                    </a:solidFill>
+                  </a:tcPr>
+                </a:tc>
+                <a:tc>
+                  <a:txBody>
+                    <a:bodyPr lIns="66675" tIns="28575" rIns="57150" bIns="28575">
+                      <a:noAutofit/>
+                    </a:bodyPr>
+                    <a:lstStyle/>
+                    <a:p>
+                      <a:pPr algn="l"/>
+                      <a:r>
+                        <a:rPr sz="585" b="0">
+                          <a:solidFill>
+                            <a:srgbClr val="253B44"/>
+                          </a:solidFill>
+                          <a:latin typeface="Helvetica Neue"/>
+                          <a:ea typeface="Helvetica Neue"/>
+                          <a:cs typeface="Helvetica Neue"/>
+                        </a:rPr>
+                        <a:t>Unknown follow-up status has the highest observed readmission rate</a:t>
+                      </a:r>
+                    </a:p>
+                  </a:txBody>
+                  <a:tcPr marL="91440" marR="91440" marT="45720" marB="45720" anchor="ctr">
+                    <a:solidFill>
+                      <a:srgbClr val="F8FBFC"/>
+                    </a:solidFill>
+                  </a:tcPr>
+                </a:tc>
+              </a:tr>
+            </a:tbl>
+          </a:graphicData>
+        </a:graphic>
+      </p:graphicFrame>
       <p:sp>
         <p:nvSpPr>
-          <p:cNvPr id="19" name="">
+          <p:cNvPr id="15" name="">
             <a:extLst xmlns:a="http://schemas.openxmlformats.org/drawingml/2006/main">
               <a:ext uri="{FF2B5EF4-FFF2-40B4-BE49-F238E27FC236}">
-                <a16:creationId xmlns:a16="http://schemas.microsoft.com/office/drawing/2014/main" id="{7646D6CA-9815-49B6-B377-1CD6E92370D0}"/>
+                <a16:creationId xmlns:a16="http://schemas.microsoft.com/office/drawing/2014/main" id="{2221DD45-9CBF-4899-B565-E8D974F6D0D9}"/>
               </a:ext>
             </a:extLst>
           </p:cNvPr>
@@ -6625,8 +8885,8 @@
         </p:nvSpPr>
         <p:spPr>
           <a:xfrm xmlns:a="http://schemas.openxmlformats.org/drawingml/2006/main">
-            <a:off x="8058150" y="3609975"/>
-            <a:ext cx="2914650" cy="190500"/>
+            <a:off x="6076950" y="4400550"/>
+            <a:ext cx="3238500" cy="228600"/>
           </a:xfrm>
           <a:prstGeom xmlns:a="http://schemas.openxmlformats.org/drawingml/2006/main" prst="rect">
             <a:avLst/>
@@ -6644,9 +8904,9 @@
           <a:lstStyle xmlns:a="http://schemas.openxmlformats.org/drawingml/2006/main"/>
           <a:p xmlns:a="http://schemas.openxmlformats.org/drawingml/2006/main">
             <a:pPr>
-              <a:defRPr sz="938" b="1">
-                <a:solidFill>
-                  <a:srgbClr val="0F6F73"/>
+              <a:defRPr sz="1500" b="1">
+                <a:solidFill>
+                  <a:srgbClr val="102A34"/>
                 </a:solidFill>
                 <a:latin typeface="Helvetica Neue"/>
                 <a:ea typeface="Helvetica Neue"/>
@@ -6654,25 +8914,271 @@
               </a:defRPr>
             </a:pPr>
             <a:r>
-              <a:rPr sz="938" b="1">
-                <a:solidFill>
-                  <a:srgbClr val="0F6F73"/>
+              <a:rPr sz="1500" b="1">
+                <a:solidFill>
+                  <a:srgbClr val="102A34"/>
                 </a:solidFill>
                 <a:latin typeface="Helvetica Neue"/>
                 <a:ea typeface="Helvetica Neue"/>
                 <a:cs typeface="Helvetica Neue"/>
               </a:rPr>
-              <a:t>Place results in context</a:t>
+              <a:t>Significance distinction</a:t>
             </a:r>
           </a:p>
         </p:txBody>
       </p:sp>
+      <p:graphicFrame>
+        <p:nvGraphicFramePr>
+          <p:cNvPr id="34" name=""/>
+          <p:cNvGraphicFramePr/>
+          <p:nvPr/>
+        </p:nvGraphicFramePr>
+        <p:xfrm>
+          <a:off xmlns:a="http://schemas.openxmlformats.org/drawingml/2006/main" x="6076950" y="4743450"/>
+          <a:ext xmlns:a="http://schemas.openxmlformats.org/drawingml/2006/main" cx="4724400" cy="1028700"/>
+        </p:xfrm>
+        <a:graphic xmlns:a="http://schemas.openxmlformats.org/drawingml/2006/main">
+          <a:graphicData uri="http://schemas.openxmlformats.org/drawingml/2006/table">
+            <a:tbl>
+              <a:tblPr/>
+              <a:tblGrid>
+                <a:gridCol w="1181100"/>
+                <a:gridCol w="3543300"/>
+              </a:tblGrid>
+              <a:tr h="257175">
+                <a:tc>
+                  <a:txBody>
+                    <a:bodyPr lIns="66675" tIns="28575" rIns="57150" bIns="28575">
+                      <a:noAutofit/>
+                    </a:bodyPr>
+                    <a:lstStyle/>
+                    <a:p>
+                      <a:pPr algn="l"/>
+                      <a:r>
+                        <a:rPr sz="660" b="1">
+                          <a:solidFill>
+                            <a:srgbClr val="FFFFFF"/>
+                          </a:solidFill>
+                          <a:latin typeface="Helvetica Neue"/>
+                          <a:ea typeface="Helvetica Neue"/>
+                          <a:cs typeface="Helvetica Neue"/>
+                        </a:rPr>
+                        <a:t>Lens</a:t>
+                      </a:r>
+                    </a:p>
+                  </a:txBody>
+                  <a:tcPr marL="91440" marR="91440" marT="45720" marB="45720" anchor="ctr">
+                    <a:solidFill>
+                      <a:srgbClr val="0F4C5C"/>
+                    </a:solidFill>
+                  </a:tcPr>
+                </a:tc>
+                <a:tc>
+                  <a:txBody>
+                    <a:bodyPr lIns="66675" tIns="28575" rIns="57150" bIns="28575">
+                      <a:noAutofit/>
+                    </a:bodyPr>
+                    <a:lstStyle/>
+                    <a:p>
+                      <a:pPr algn="l"/>
+                      <a:r>
+                        <a:rPr sz="660" b="1">
+                          <a:solidFill>
+                            <a:srgbClr val="FFFFFF"/>
+                          </a:solidFill>
+                          <a:latin typeface="Helvetica Neue"/>
+                          <a:ea typeface="Helvetica Neue"/>
+                          <a:cs typeface="Helvetica Neue"/>
+                        </a:rPr>
+                        <a:t>Meaning for NHN</a:t>
+                      </a:r>
+                    </a:p>
+                  </a:txBody>
+                  <a:tcPr marL="91440" marR="91440" marT="45720" marB="45720" anchor="ctr">
+                    <a:solidFill>
+                      <a:srgbClr val="0F4C5C"/>
+                    </a:solidFill>
+                  </a:tcPr>
+                </a:tc>
+              </a:tr>
+              <a:tr h="257175">
+                <a:tc>
+                  <a:txBody>
+                    <a:bodyPr lIns="66675" tIns="28575" rIns="57150" bIns="28575">
+                      <a:noAutofit/>
+                    </a:bodyPr>
+                    <a:lstStyle/>
+                    <a:p>
+                      <a:pPr algn="l"/>
+                      <a:r>
+                        <a:rPr sz="615" b="1">
+                          <a:solidFill>
+                            <a:srgbClr val="253B44"/>
+                          </a:solidFill>
+                          <a:latin typeface="Helvetica Neue"/>
+                          <a:ea typeface="Helvetica Neue"/>
+                          <a:cs typeface="Helvetica Neue"/>
+                        </a:rPr>
+                        <a:t>Statistical</a:t>
+                      </a:r>
+                    </a:p>
+                  </a:txBody>
+                  <a:tcPr marL="91440" marR="91440" marT="45720" marB="45720" anchor="ctr">
+                    <a:solidFill>
+                      <a:srgbClr val="EEF6F7"/>
+                    </a:solidFill>
+                  </a:tcPr>
+                </a:tc>
+                <a:tc>
+                  <a:txBody>
+                    <a:bodyPr lIns="66675" tIns="28575" rIns="57150" bIns="28575">
+                      <a:noAutofit/>
+                    </a:bodyPr>
+                    <a:lstStyle/>
+                    <a:p>
+                      <a:pPr algn="l"/>
+                      <a:r>
+                        <a:rPr sz="615" b="0">
+                          <a:solidFill>
+                            <a:srgbClr val="253B44"/>
+                          </a:solidFill>
+                          <a:latin typeface="Helvetica Neue"/>
+                          <a:ea typeface="Helvetica Neue"/>
+                          <a:cs typeface="Helvetica Neue"/>
+                        </a:rPr>
+                        <a:t>The model and deciles reliably separate higher-risk patients</a:t>
+                      </a:r>
+                    </a:p>
+                  </a:txBody>
+                  <a:tcPr marL="91440" marR="91440" marT="45720" marB="45720" anchor="ctr">
+                    <a:solidFill>
+                      <a:srgbClr val="EEF6F7"/>
+                    </a:solidFill>
+                  </a:tcPr>
+                </a:tc>
+              </a:tr>
+              <a:tr h="257175">
+                <a:tc>
+                  <a:txBody>
+                    <a:bodyPr lIns="66675" tIns="28575" rIns="57150" bIns="28575">
+                      <a:noAutofit/>
+                    </a:bodyPr>
+                    <a:lstStyle/>
+                    <a:p>
+                      <a:pPr algn="l"/>
+                      <a:r>
+                        <a:rPr sz="615" b="1">
+                          <a:solidFill>
+                            <a:srgbClr val="253B44"/>
+                          </a:solidFill>
+                          <a:latin typeface="Helvetica Neue"/>
+                          <a:ea typeface="Helvetica Neue"/>
+                          <a:cs typeface="Helvetica Neue"/>
+                        </a:rPr>
+                        <a:t>Practical</a:t>
+                      </a:r>
+                    </a:p>
+                  </a:txBody>
+                  <a:tcPr marL="91440" marR="91440" marT="45720" marB="45720" anchor="ctr">
+                    <a:solidFill>
+                      <a:srgbClr val="F8FBFC"/>
+                    </a:solidFill>
+                  </a:tcPr>
+                </a:tc>
+                <a:tc>
+                  <a:txBody>
+                    <a:bodyPr lIns="66675" tIns="28575" rIns="57150" bIns="28575">
+                      <a:noAutofit/>
+                    </a:bodyPr>
+                    <a:lstStyle/>
+                    <a:p>
+                      <a:pPr algn="l"/>
+                      <a:r>
+                        <a:rPr sz="615" b="0">
+                          <a:solidFill>
+                            <a:srgbClr val="253B44"/>
+                          </a:solidFill>
+                          <a:latin typeface="Helvetica Neue"/>
+                          <a:ea typeface="Helvetica Neue"/>
+                          <a:cs typeface="Helvetica Neue"/>
+                        </a:rPr>
+                        <a:t>Care teams can act on risk tiers before discharge or during follow-up</a:t>
+                      </a:r>
+                    </a:p>
+                  </a:txBody>
+                  <a:tcPr marL="91440" marR="91440" marT="45720" marB="45720" anchor="ctr">
+                    <a:solidFill>
+                      <a:srgbClr val="F8FBFC"/>
+                    </a:solidFill>
+                  </a:tcPr>
+                </a:tc>
+              </a:tr>
+              <a:tr h="257175">
+                <a:tc>
+                  <a:txBody>
+                    <a:bodyPr lIns="66675" tIns="28575" rIns="57150" bIns="28575">
+                      <a:noAutofit/>
+                    </a:bodyPr>
+                    <a:lstStyle/>
+                    <a:p>
+                      <a:pPr algn="l"/>
+                      <a:r>
+                        <a:rPr sz="615" b="1">
+                          <a:solidFill>
+                            <a:srgbClr val="253B44"/>
+                          </a:solidFill>
+                          <a:latin typeface="Helvetica Neue"/>
+                          <a:ea typeface="Helvetica Neue"/>
+                          <a:cs typeface="Helvetica Neue"/>
+                        </a:rPr>
+                        <a:t>Business</a:t>
+                      </a:r>
+                    </a:p>
+                  </a:txBody>
+                  <a:tcPr marL="91440" marR="91440" marT="45720" marB="45720" anchor="ctr">
+                    <a:solidFill>
+                      <a:srgbClr val="EEF6F7"/>
+                    </a:solidFill>
+                  </a:tcPr>
+                </a:tc>
+                <a:tc>
+                  <a:txBody>
+                    <a:bodyPr lIns="66675" tIns="28575" rIns="57150" bIns="28575">
+                      <a:noAutofit/>
+                    </a:bodyPr>
+                    <a:lstStyle/>
+                    <a:p>
+                      <a:pPr algn="l"/>
+                      <a:r>
+                        <a:rPr sz="615" b="0">
+                          <a:solidFill>
+                            <a:srgbClr val="253B44"/>
+                          </a:solidFill>
+                          <a:latin typeface="Helvetica Neue"/>
+                          <a:ea typeface="Helvetica Neue"/>
+                          <a:cs typeface="Helvetica Neue"/>
+                        </a:rPr>
+                        <a:t>Targeted action must improve outcomes, capacity, penalties, or savings</a:t>
+                      </a:r>
+                    </a:p>
+                  </a:txBody>
+                  <a:tcPr marL="91440" marR="91440" marT="45720" marB="45720" anchor="ctr">
+                    <a:solidFill>
+                      <a:srgbClr val="EEF6F7"/>
+                    </a:solidFill>
+                  </a:tcPr>
+                </a:tc>
+              </a:tr>
+            </a:tbl>
+          </a:graphicData>
+        </a:graphic>
+      </p:graphicFrame>
       <p:sp>
         <p:nvSpPr>
-          <p:cNvPr id="20" name="">
+          <p:cNvPr id="17" name="">
             <a:extLst xmlns:a="http://schemas.openxmlformats.org/drawingml/2006/main">
               <a:ext uri="{FF2B5EF4-FFF2-40B4-BE49-F238E27FC236}">
-                <a16:creationId xmlns:a16="http://schemas.microsoft.com/office/drawing/2014/main" id="{6F4E9A88-BACC-442C-9606-1579CEB97003}"/>
+                <a16:creationId xmlns:a16="http://schemas.microsoft.com/office/drawing/2014/main" id="{2F249CEF-6ED7-439E-B222-DFB04AE08BA2}"/>
               </a:ext>
             </a:extLst>
           </p:cNvPr>
@@ -6683,133 +9189,8 @@
         </p:nvSpPr>
         <p:spPr>
           <a:xfrm xmlns:a="http://schemas.openxmlformats.org/drawingml/2006/main">
-            <a:off x="8058150" y="3943350"/>
-            <a:ext cx="2914650" cy="1257300"/>
-          </a:xfrm>
-          <a:prstGeom xmlns:a="http://schemas.openxmlformats.org/drawingml/2006/main" prst="rect">
-            <a:avLst/>
-          </a:prstGeom>
-          <a:noFill xmlns:a="http://schemas.openxmlformats.org/drawingml/2006/main"/>
-          <a:ln xmlns:a="http://schemas.openxmlformats.org/drawingml/2006/main" w="0">
-            <a:noFill/>
-            <a:prstDash val="solid"/>
-          </a:ln>
-        </p:spPr>
-        <p:txBody>
-          <a:bodyPr xmlns:a="http://schemas.openxmlformats.org/drawingml/2006/main" lIns="0" tIns="0" rIns="0" bIns="0">
-            <a:noAutofit/>
-          </a:bodyPr>
-          <a:lstStyle xmlns:a="http://schemas.openxmlformats.org/drawingml/2006/main"/>
-          <a:p xmlns:a="http://schemas.openxmlformats.org/drawingml/2006/main">
-            <a:pPr marL="165100" indent="-76200">
-              <a:lnSpc>
-                <a:spcPct val="102000"/>
-              </a:lnSpc>
-              <a:spcAft>
-                <a:spcPts val="400"/>
-              </a:spcAft>
-              <a:buNone/>
-              <a:defRPr sz="848">
-                <a:solidFill>
-                  <a:srgbClr val="253B44"/>
-                </a:solidFill>
-                <a:latin typeface="Helvetica Neue"/>
-                <a:ea typeface="Helvetica Neue"/>
-                <a:cs typeface="Helvetica Neue"/>
-              </a:defRPr>
-            </a:pPr>
-            <a:r>
-              <a:rPr sz="848">
-                <a:solidFill>
-                  <a:srgbClr val="253B44"/>
-                </a:solidFill>
-                <a:latin typeface="Helvetica Neue"/>
-                <a:ea typeface="Helvetica Neue"/>
-                <a:cs typeface="Helvetica Neue"/>
-              </a:rPr>
-              <a:t>Compare NHN patterns across service lines, discharge types, and care-transition activity</a:t>
-            </a:r>
-          </a:p>
-          <a:p xmlns:a="http://schemas.openxmlformats.org/drawingml/2006/main">
-            <a:pPr marL="165100" indent="-76200">
-              <a:lnSpc>
-                <a:spcPct val="102000"/>
-              </a:lnSpc>
-              <a:spcAft>
-                <a:spcPts val="400"/>
-              </a:spcAft>
-              <a:buNone/>
-              <a:defRPr sz="848">
-                <a:solidFill>
-                  <a:srgbClr val="253B44"/>
-                </a:solidFill>
-                <a:latin typeface="Helvetica Neue"/>
-                <a:ea typeface="Helvetica Neue"/>
-                <a:cs typeface="Helvetica Neue"/>
-              </a:defRPr>
-            </a:pPr>
-            <a:r>
-              <a:rPr sz="848">
-                <a:solidFill>
-                  <a:srgbClr val="253B44"/>
-                </a:solidFill>
-                <a:latin typeface="Helvetica Neue"/>
-                <a:ea typeface="Helvetica Neue"/>
-                <a:cs typeface="Helvetica Neue"/>
-              </a:rPr>
-              <a:t>Separate broad readmission pressure from segment-specific performance gaps</a:t>
-            </a:r>
-          </a:p>
-          <a:p xmlns:a="http://schemas.openxmlformats.org/drawingml/2006/main">
-            <a:pPr marL="165100" indent="-76200">
-              <a:lnSpc>
-                <a:spcPct val="102000"/>
-              </a:lnSpc>
-              <a:spcAft>
-                <a:spcPts val="400"/>
-              </a:spcAft>
-              <a:buNone/>
-              <a:defRPr sz="848">
-                <a:solidFill>
-                  <a:srgbClr val="253B44"/>
-                </a:solidFill>
-                <a:latin typeface="Helvetica Neue"/>
-                <a:ea typeface="Helvetica Neue"/>
-                <a:cs typeface="Helvetica Neue"/>
-              </a:defRPr>
-            </a:pPr>
-            <a:r>
-              <a:rPr sz="848">
-                <a:solidFill>
-                  <a:srgbClr val="253B44"/>
-                </a:solidFill>
-                <a:latin typeface="Helvetica Neue"/>
-                <a:ea typeface="Helvetica Neue"/>
-                <a:cs typeface="Helvetica Neue"/>
-              </a:rPr>
-              <a:t>Use baseline patterns to set realistic improvement targets and financial scenarios</a:t>
-            </a:r>
-          </a:p>
-        </p:txBody>
-      </p:sp>
-      <p:sp>
-        <p:nvSpPr>
-          <p:cNvPr id="21" name="">
-            <a:extLst xmlns:a="http://schemas.openxmlformats.org/drawingml/2006/main">
-              <a:ext uri="{FF2B5EF4-FFF2-40B4-BE49-F238E27FC236}">
-                <a16:creationId xmlns:a16="http://schemas.microsoft.com/office/drawing/2014/main" id="{97E9C1BD-B09C-4E9C-8BA3-567A38690713}"/>
-              </a:ext>
-            </a:extLst>
-          </p:cNvPr>
-          <p:cNvSpPr>
-            <a:spLocks xmlns:a="http://schemas.openxmlformats.org/drawingml/2006/main" noGrp="1"/>
-          </p:cNvSpPr>
-          <p:nvPr/>
-        </p:nvSpPr>
-        <p:spPr>
-          <a:xfrm xmlns:a="http://schemas.openxmlformats.org/drawingml/2006/main">
-            <a:off x="8058150" y="5381625"/>
-            <a:ext cx="2914650" cy="514350"/>
+            <a:off x="6076950" y="5924550"/>
+            <a:ext cx="4724400" cy="304800"/>
           </a:xfrm>
           <a:prstGeom xmlns:a="http://schemas.openxmlformats.org/drawingml/2006/main" prst="rect">
             <a:avLst/>
@@ -6831,9 +9212,9 @@
                 <a:spcPct val="104000"/>
               </a:lnSpc>
               <a:buNone/>
-              <a:defRPr sz="810">
-                <a:solidFill>
-                  <a:srgbClr val="50636B"/>
+              <a:defRPr sz="818">
+                <a:solidFill>
+                  <a:srgbClr val="253B44"/>
                 </a:solidFill>
                 <a:latin typeface="Helvetica Neue"/>
                 <a:ea typeface="Helvetica Neue"/>
@@ -6841,25 +9222,25 @@
               </a:defRPr>
             </a:pPr>
             <a:r>
-              <a:rPr sz="810">
-                <a:solidFill>
-                  <a:srgbClr val="50636B"/>
+              <a:rPr sz="818">
+                <a:solidFill>
+                  <a:srgbClr val="253B44"/>
                 </a:solidFill>
                 <a:latin typeface="Helvetica Neue"/>
                 <a:ea typeface="Helvetica Neue"/>
                 <a:cs typeface="Helvetica Neue"/>
               </a:rPr>
-              <a:t>Example output: benchmark table, trend summary, savings scenarios</a:t>
+              <a:t>Board implication: prioritize insights that are credible in the model, actionable in the workflow, and material to the business case.</a:t>
             </a:r>
           </a:p>
         </p:txBody>
       </p:sp>
       <p:sp>
         <p:nvSpPr>
-          <p:cNvPr id="22" name="">
+          <p:cNvPr id="18" name="">
             <a:extLst xmlns:a="http://schemas.openxmlformats.org/drawingml/2006/main">
               <a:ext uri="{FF2B5EF4-FFF2-40B4-BE49-F238E27FC236}">
-                <a16:creationId xmlns:a16="http://schemas.microsoft.com/office/drawing/2014/main" id="{B35473DE-7B9A-4833-B150-326DB0F6A08B}"/>
+                <a16:creationId xmlns:a16="http://schemas.microsoft.com/office/drawing/2014/main" id="{74436DFD-E55A-4199-B799-775493A2F735}"/>
               </a:ext>
             </a:extLst>
           </p:cNvPr>
@@ -6870,39 +9251,8 @@
         </p:nvSpPr>
         <p:spPr>
           <a:xfrm xmlns:a="http://schemas.openxmlformats.org/drawingml/2006/main">
-            <a:off x="514350" y="6057900"/>
-            <a:ext cx="10287000" cy="14288"/>
-          </a:xfrm>
-          <a:prstGeom xmlns:a="http://schemas.openxmlformats.org/drawingml/2006/main" prst="rect">
-            <a:avLst/>
-          </a:prstGeom>
-          <a:solidFill xmlns:a="http://schemas.openxmlformats.org/drawingml/2006/main">
-            <a:srgbClr val="D1E1E5"/>
-          </a:solidFill>
-          <a:ln xmlns:a="http://schemas.openxmlformats.org/drawingml/2006/main" w="0">
-            <a:noFill/>
-            <a:prstDash val="solid"/>
-          </a:ln>
-        </p:spPr>
-      </p:sp>
-      <p:sp>
-        <p:nvSpPr>
-          <p:cNvPr id="23" name="">
-            <a:extLst xmlns:a="http://schemas.openxmlformats.org/drawingml/2006/main">
-              <a:ext uri="{FF2B5EF4-FFF2-40B4-BE49-F238E27FC236}">
-                <a16:creationId xmlns:a16="http://schemas.microsoft.com/office/drawing/2014/main" id="{8B07D3E2-D979-4639-BB34-9CC97FFEBB3A}"/>
-              </a:ext>
-            </a:extLst>
-          </p:cNvPr>
-          <p:cNvSpPr>
-            <a:spLocks xmlns:a="http://schemas.openxmlformats.org/drawingml/2006/main" noGrp="1"/>
-          </p:cNvSpPr>
-          <p:nvPr/>
-        </p:nvSpPr>
-        <p:spPr>
-          <a:xfrm xmlns:a="http://schemas.openxmlformats.org/drawingml/2006/main">
-            <a:off x="514350" y="6248400"/>
-            <a:ext cx="1809750" cy="209550"/>
+            <a:off x="514350" y="6572250"/>
+            <a:ext cx="8191500" cy="171450"/>
           </a:xfrm>
           <a:prstGeom xmlns:a="http://schemas.openxmlformats.org/drawingml/2006/main" prst="rect">
             <a:avLst/>
@@ -6920,9 +9270,9 @@
           <a:lstStyle xmlns:a="http://schemas.openxmlformats.org/drawingml/2006/main"/>
           <a:p xmlns:a="http://schemas.openxmlformats.org/drawingml/2006/main">
             <a:pPr>
-              <a:defRPr sz="1200" b="1">
-                <a:solidFill>
-                  <a:srgbClr val="102A34"/>
+              <a:defRPr sz="750">
+                <a:solidFill>
+                  <a:srgbClr val="667A82"/>
                 </a:solidFill>
                 <a:latin typeface="Helvetica Neue"/>
                 <a:ea typeface="Helvetica Neue"/>
@@ -6930,131 +9280,15 @@
               </a:defRPr>
             </a:pPr>
             <a:r>
-              <a:rPr sz="1200" b="1">
-                <a:solidFill>
-                  <a:srgbClr val="102A34"/>
+              <a:rPr sz="750">
+                <a:solidFill>
+                  <a:srgbClr val="667A82"/>
                 </a:solidFill>
                 <a:latin typeface="Helvetica Neue"/>
                 <a:ea typeface="Helvetica Neue"/>
                 <a:cs typeface="Helvetica Neue"/>
               </a:rPr>
-              <a:t>Decision standard</a:t>
-            </a:r>
-          </a:p>
-        </p:txBody>
-      </p:sp>
-      <p:sp>
-        <p:nvSpPr>
-          <p:cNvPr id="24" name="">
-            <a:extLst xmlns:a="http://schemas.openxmlformats.org/drawingml/2006/main">
-              <a:ext uri="{FF2B5EF4-FFF2-40B4-BE49-F238E27FC236}">
-                <a16:creationId xmlns:a16="http://schemas.microsoft.com/office/drawing/2014/main" id="{9EA0327A-34F4-492B-A517-70C3596F2489}"/>
-              </a:ext>
-            </a:extLst>
-          </p:cNvPr>
-          <p:cNvSpPr>
-            <a:spLocks xmlns:a="http://schemas.openxmlformats.org/drawingml/2006/main" noGrp="1"/>
-          </p:cNvSpPr>
-          <p:nvPr/>
-        </p:nvSpPr>
-        <p:spPr>
-          <a:xfrm xmlns:a="http://schemas.openxmlformats.org/drawingml/2006/main">
-            <a:off x="2324100" y="6267450"/>
-            <a:ext cx="7239000" cy="209550"/>
-          </a:xfrm>
-          <a:prstGeom xmlns:a="http://schemas.openxmlformats.org/drawingml/2006/main" prst="rect">
-            <a:avLst/>
-          </a:prstGeom>
-          <a:noFill xmlns:a="http://schemas.openxmlformats.org/drawingml/2006/main"/>
-          <a:ln xmlns:a="http://schemas.openxmlformats.org/drawingml/2006/main" w="0">
-            <a:noFill/>
-            <a:prstDash val="solid"/>
-          </a:ln>
-        </p:spPr>
-        <p:txBody>
-          <a:bodyPr xmlns:a="http://schemas.openxmlformats.org/drawingml/2006/main" lIns="0" tIns="0" rIns="0" bIns="0">
-            <a:noAutofit/>
-          </a:bodyPr>
-          <a:lstStyle xmlns:a="http://schemas.openxmlformats.org/drawingml/2006/main"/>
-          <a:p xmlns:a="http://schemas.openxmlformats.org/drawingml/2006/main">
-            <a:pPr>
-              <a:defRPr sz="938">
-                <a:solidFill>
-                  <a:srgbClr val="253B44"/>
-                </a:solidFill>
-                <a:latin typeface="Helvetica Neue"/>
-                <a:ea typeface="Helvetica Neue"/>
-                <a:cs typeface="Helvetica Neue"/>
-              </a:defRPr>
-            </a:pPr>
-            <a:r>
-              <a:rPr sz="938">
-                <a:solidFill>
-                  <a:srgbClr val="253B44"/>
-                </a:solidFill>
-                <a:latin typeface="Helvetica Neue"/>
-                <a:ea typeface="Helvetica Neue"/>
-                <a:cs typeface="Helvetica Neue"/>
-              </a:rPr>
-              <a:t>Prioritize actions that are statistically supported, clinically explainable, operationally feasible, and financially material.</a:t>
-            </a:r>
-          </a:p>
-        </p:txBody>
-      </p:sp>
-      <p:sp>
-        <p:nvSpPr>
-          <p:cNvPr id="25" name="">
-            <a:extLst xmlns:a="http://schemas.openxmlformats.org/drawingml/2006/main">
-              <a:ext uri="{FF2B5EF4-FFF2-40B4-BE49-F238E27FC236}">
-                <a16:creationId xmlns:a16="http://schemas.microsoft.com/office/drawing/2014/main" id="{13AF19D2-7587-44BA-B724-A52055B1F9BC}"/>
-              </a:ext>
-            </a:extLst>
-          </p:cNvPr>
-          <p:cNvSpPr>
-            <a:spLocks xmlns:a="http://schemas.openxmlformats.org/drawingml/2006/main" noGrp="1"/>
-          </p:cNvSpPr>
-          <p:nvPr/>
-        </p:nvSpPr>
-        <p:spPr>
-          <a:xfrm xmlns:a="http://schemas.openxmlformats.org/drawingml/2006/main">
-            <a:off x="514350" y="6572250"/>
-            <a:ext cx="6477000" cy="171450"/>
-          </a:xfrm>
-          <a:prstGeom xmlns:a="http://schemas.openxmlformats.org/drawingml/2006/main" prst="rect">
-            <a:avLst/>
-          </a:prstGeom>
-          <a:noFill xmlns:a="http://schemas.openxmlformats.org/drawingml/2006/main"/>
-          <a:ln xmlns:a="http://schemas.openxmlformats.org/drawingml/2006/main" w="0">
-            <a:noFill/>
-            <a:prstDash val="solid"/>
-          </a:ln>
-        </p:spPr>
-        <p:txBody>
-          <a:bodyPr xmlns:a="http://schemas.openxmlformats.org/drawingml/2006/main" lIns="0" tIns="0" rIns="0" bIns="0">
-            <a:noAutofit/>
-          </a:bodyPr>
-          <a:lstStyle xmlns:a="http://schemas.openxmlformats.org/drawingml/2006/main"/>
-          <a:p xmlns:a="http://schemas.openxmlformats.org/drawingml/2006/main">
-            <a:pPr>
-              <a:defRPr sz="788">
-                <a:solidFill>
-                  <a:srgbClr val="667A82"/>
-                </a:solidFill>
-                <a:latin typeface="Helvetica Neue"/>
-                <a:ea typeface="Helvetica Neue"/>
-                <a:cs typeface="Helvetica Neue"/>
-              </a:defRPr>
-            </a:pPr>
-            <a:r>
-              <a:rPr sz="788">
-                <a:solidFill>
-                  <a:srgbClr val="667A82"/>
-                </a:solidFill>
-                <a:latin typeface="Helvetica Neue"/>
-                <a:ea typeface="Helvetica Neue"/>
-                <a:cs typeface="Helvetica Neue"/>
-              </a:rPr>
-              <a:t>Source: NHN cleaned datasets and project charter analytical requirements</a:t>
+              <a:t>Source: risk score deciles, ROI scenarios, clinical segments, and cleaned NHN analysis outputs</a:t>
             </a:r>
           </a:p>
         </p:txBody>
@@ -7062,7 +9296,7 @@
     </p:spTree>
     <p:extLst>
       <p:ext uri="{BB962C8B-B14F-4D97-AF65-F5344CB8AC3E}">
-        <p14:creationId xmlns:p14="http://schemas.microsoft.com/office/powerpoint/2010/main" val="434448205"/>
+        <p14:creationId xmlns:p14="http://schemas.microsoft.com/office/powerpoint/2010/main" val="1500652471"/>
       </p:ext>
     </p:extLst>
   </p:cSld>

--- a/drafts/saturday_submission.pptx
+++ b/drafts/saturday_submission.pptx
@@ -2,16 +2,16 @@
 <file path=ppt/presentation.xml><?xml version="1.0" encoding="utf-8"?>
 <p:presentation xmlns:p="http://schemas.openxmlformats.org/presentationml/2006/main">
   <p:sldMasterIdLst>
-    <p:sldMasterId xmlns:r="http://schemas.openxmlformats.org/officeDocument/2006/relationships" id="2147483648" r:id="R83e5211d570049a0"/>
+    <p:sldMasterId xmlns:r="http://schemas.openxmlformats.org/officeDocument/2006/relationships" id="2147483648" r:id="R778ab3701b814490"/>
   </p:sldMasterIdLst>
   <p:notesMasterIdLst>
-    <p:notesMasterId xmlns:r="http://schemas.openxmlformats.org/officeDocument/2006/relationships" r:id="Rf249dc5b30fc488a"/>
+    <p:notesMasterId xmlns:r="http://schemas.openxmlformats.org/officeDocument/2006/relationships" r:id="Rdc93340fec654148"/>
   </p:notesMasterIdLst>
   <p:sldIdLst>
-    <p:sldId xmlns:r="http://schemas.openxmlformats.org/officeDocument/2006/relationships" id="256" r:id="Rc3bbee5b9fa64587"/>
-    <p:sldId xmlns:r="http://schemas.openxmlformats.org/officeDocument/2006/relationships" id="257" r:id="R1b413e7099eb4cc8"/>
-    <p:sldId xmlns:r="http://schemas.openxmlformats.org/officeDocument/2006/relationships" id="258" r:id="R3b2884483b534da6"/>
-    <p:sldId xmlns:r="http://schemas.openxmlformats.org/officeDocument/2006/relationships" id="259" r:id="R8bd42fe633b84346"/>
+    <p:sldId xmlns:r="http://schemas.openxmlformats.org/officeDocument/2006/relationships" id="256" r:id="R93203bb4ca784b82"/>
+    <p:sldId xmlns:r="http://schemas.openxmlformats.org/officeDocument/2006/relationships" id="257" r:id="R0ca987cedb014f98"/>
+    <p:sldId xmlns:r="http://schemas.openxmlformats.org/officeDocument/2006/relationships" id="258" r:id="Redc741d5cb5f46b7"/>
+    <p:sldId xmlns:r="http://schemas.openxmlformats.org/officeDocument/2006/relationships" id="259" r:id="Red9b7cb8bb3a4fcb"/>
   </p:sldIdLst>
   <p:sldSz cx="12192000" cy="6858000"/>
   <p:notesSz cx="6858000" cy="9144000"/>
@@ -723,7 +723,7 @@
   </p:cSld>
   <p:clrMap bg1="lt1" tx1="dk1" bg2="lt2" tx2="dk2" accent1="accent1" accent2="accent2" accent3="accent3" accent4="accent4" accent5="accent5" accent6="accent6" hlink="hlink" folHlink="folHlink"/>
   <p:sldLayoutIdLst>
-    <p:sldLayoutId xmlns:r="http://schemas.openxmlformats.org/officeDocument/2006/relationships" id="2147483649" r:id="R95a32dffb6d54095"/>
+    <p:sldLayoutId xmlns:r="http://schemas.openxmlformats.org/officeDocument/2006/relationships" id="2147483649" r:id="Rfab8b5b54975464b"/>
   </p:sldLayoutIdLst>
   <p:txStyles>
     <p:titleStyle>
@@ -2390,7 +2390,7 @@
           <p:cNvPr id="22" name="">
             <a:extLst xmlns:a="http://schemas.openxmlformats.org/drawingml/2006/main">
               <a:ext uri="{FF2B5EF4-FFF2-40B4-BE49-F238E27FC236}">
-                <a16:creationId xmlns:a16="http://schemas.microsoft.com/office/drawing/2014/main" id="{365B45ED-A701-47C5-B832-D632D3853629}"/>
+                <a16:creationId xmlns:a16="http://schemas.microsoft.com/office/drawing/2014/main" id="{840958B4-1550-4B8A-997E-AE80BD142712}"/>
               </a:ext>
             </a:extLst>
           </p:cNvPr>
@@ -2421,7 +2421,7 @@
           <p:cNvPr id="2" name="">
             <a:extLst xmlns:a="http://schemas.openxmlformats.org/drawingml/2006/main">
               <a:ext uri="{FF2B5EF4-FFF2-40B4-BE49-F238E27FC236}">
-                <a16:creationId xmlns:a16="http://schemas.microsoft.com/office/drawing/2014/main" id="{277C59C3-6537-4388-8FA5-C7A2367C233D}"/>
+                <a16:creationId xmlns:a16="http://schemas.microsoft.com/office/drawing/2014/main" id="{E4534141-7F0F-4F4B-A4BA-9BC50C6C1CEF}"/>
               </a:ext>
             </a:extLst>
           </p:cNvPr>
@@ -2479,7 +2479,7 @@
           <p:cNvPr id="3" name="">
             <a:extLst xmlns:a="http://schemas.openxmlformats.org/drawingml/2006/main">
               <a:ext uri="{FF2B5EF4-FFF2-40B4-BE49-F238E27FC236}">
-                <a16:creationId xmlns:a16="http://schemas.microsoft.com/office/drawing/2014/main" id="{8AE5956B-C133-4F5A-856C-B40043A3CEA0}"/>
+                <a16:creationId xmlns:a16="http://schemas.microsoft.com/office/drawing/2014/main" id="{621ABB3A-A66B-404C-B66A-BB5F398DFE6D}"/>
               </a:ext>
             </a:extLst>
           </p:cNvPr>
@@ -2537,7 +2537,7 @@
           <p:cNvPr id="4" name="">
             <a:extLst xmlns:a="http://schemas.openxmlformats.org/drawingml/2006/main">
               <a:ext uri="{FF2B5EF4-FFF2-40B4-BE49-F238E27FC236}">
-                <a16:creationId xmlns:a16="http://schemas.microsoft.com/office/drawing/2014/main" id="{D88FD964-39C7-46F3-A64F-9798F47773BA}"/>
+                <a16:creationId xmlns:a16="http://schemas.microsoft.com/office/drawing/2014/main" id="{79CF29B1-FD1D-4596-A35C-CF2E7CC1DD52}"/>
               </a:ext>
             </a:extLst>
           </p:cNvPr>
@@ -2577,7 +2577,7 @@
           <p:cNvPr id="5" name="">
             <a:extLst xmlns:a="http://schemas.openxmlformats.org/drawingml/2006/main">
               <a:ext uri="{FF2B5EF4-FFF2-40B4-BE49-F238E27FC236}">
-                <a16:creationId xmlns:a16="http://schemas.microsoft.com/office/drawing/2014/main" id="{1D0130E0-0465-4E4C-950D-D31A764EAA47}"/>
+                <a16:creationId xmlns:a16="http://schemas.microsoft.com/office/drawing/2014/main" id="{1179516A-3953-47DC-9FB1-1A5CA96F1743}"/>
               </a:ext>
             </a:extLst>
           </p:cNvPr>
@@ -2608,7 +2608,7 @@
           <p:cNvPr id="6" name="">
             <a:extLst xmlns:a="http://schemas.openxmlformats.org/drawingml/2006/main">
               <a:ext uri="{FF2B5EF4-FFF2-40B4-BE49-F238E27FC236}">
-                <a16:creationId xmlns:a16="http://schemas.microsoft.com/office/drawing/2014/main" id="{C3F4FCE1-C681-4E4D-8B34-39752D24704F}"/>
+                <a16:creationId xmlns:a16="http://schemas.microsoft.com/office/drawing/2014/main" id="{911F4F45-399F-445C-8698-66C52DC9A195}"/>
               </a:ext>
             </a:extLst>
           </p:cNvPr>
@@ -2666,7 +2666,7 @@
           <p:cNvPr id="7" name="">
             <a:extLst xmlns:a="http://schemas.openxmlformats.org/drawingml/2006/main">
               <a:ext uri="{FF2B5EF4-FFF2-40B4-BE49-F238E27FC236}">
-                <a16:creationId xmlns:a16="http://schemas.microsoft.com/office/drawing/2014/main" id="{72ADFD96-0C77-444F-87FB-A9265E155106}"/>
+                <a16:creationId xmlns:a16="http://schemas.microsoft.com/office/drawing/2014/main" id="{160A3781-174D-446D-AEE7-5CC33A3F801A}"/>
               </a:ext>
             </a:extLst>
           </p:cNvPr>
@@ -2972,7 +2972,7 @@
           <p:cNvPr id="9" name="">
             <a:extLst xmlns:a="http://schemas.openxmlformats.org/drawingml/2006/main">
               <a:ext uri="{FF2B5EF4-FFF2-40B4-BE49-F238E27FC236}">
-                <a16:creationId xmlns:a16="http://schemas.microsoft.com/office/drawing/2014/main" id="{B67EFAF9-E96F-44D4-A9BF-0218F6077D0D}"/>
+                <a16:creationId xmlns:a16="http://schemas.microsoft.com/office/drawing/2014/main" id="{FEDE8069-3F1A-4E43-A2D0-61E028E57AB7}"/>
               </a:ext>
             </a:extLst>
           </p:cNvPr>
@@ -3030,7 +3030,7 @@
           <p:cNvPr id="10" name="">
             <a:extLst xmlns:a="http://schemas.openxmlformats.org/drawingml/2006/main">
               <a:ext uri="{FF2B5EF4-FFF2-40B4-BE49-F238E27FC236}">
-                <a16:creationId xmlns:a16="http://schemas.microsoft.com/office/drawing/2014/main" id="{DDC49FA7-65DA-4129-8504-D1869E203AB5}"/>
+                <a16:creationId xmlns:a16="http://schemas.microsoft.com/office/drawing/2014/main" id="{F56439E0-A195-4924-9A4E-F13465DEAEAC}"/>
               </a:ext>
             </a:extLst>
           </p:cNvPr>
@@ -3099,7 +3099,7 @@
         </p:xfrm>
         <a:graphic xmlns:a="http://schemas.openxmlformats.org/drawingml/2006/main">
           <a:graphicData uri="http://schemas.openxmlformats.org/drawingml/2006/chart">
-            <c:chart xmlns:r="http://schemas.openxmlformats.org/officeDocument/2006/relationships" xmlns:c="http://schemas.openxmlformats.org/drawingml/2006/chart" r:id="Rc7644f3738914494"/>
+            <c:chart xmlns:r="http://schemas.openxmlformats.org/officeDocument/2006/relationships" xmlns:c="http://schemas.openxmlformats.org/drawingml/2006/chart" r:id="Rf0fcadf4c1644f50"/>
           </a:graphicData>
         </a:graphic>
       </p:graphicFrame>
@@ -3108,7 +3108,7 @@
           <p:cNvPr id="12" name="">
             <a:extLst xmlns:a="http://schemas.openxmlformats.org/drawingml/2006/main">
               <a:ext uri="{FF2B5EF4-FFF2-40B4-BE49-F238E27FC236}">
-                <a16:creationId xmlns:a16="http://schemas.microsoft.com/office/drawing/2014/main" id="{52F7C1C2-F62C-4C56-9BA7-94B35B053768}"/>
+                <a16:creationId xmlns:a16="http://schemas.microsoft.com/office/drawing/2014/main" id="{69E775F8-1E87-4F40-A977-0E08ED4F8D8A}"/>
               </a:ext>
             </a:extLst>
           </p:cNvPr>
@@ -3166,7 +3166,7 @@
           <p:cNvPr id="13" name="">
             <a:extLst xmlns:a="http://schemas.openxmlformats.org/drawingml/2006/main">
               <a:ext uri="{FF2B5EF4-FFF2-40B4-BE49-F238E27FC236}">
-                <a16:creationId xmlns:a16="http://schemas.microsoft.com/office/drawing/2014/main" id="{C809369D-D12E-47EA-B407-30339FA498E2}"/>
+                <a16:creationId xmlns:a16="http://schemas.microsoft.com/office/drawing/2014/main" id="{F3998250-408D-437E-BDF9-BD42097F2A51}"/>
               </a:ext>
             </a:extLst>
           </p:cNvPr>
@@ -3197,7 +3197,7 @@
           <p:cNvPr id="14" name="">
             <a:extLst xmlns:a="http://schemas.openxmlformats.org/drawingml/2006/main">
               <a:ext uri="{FF2B5EF4-FFF2-40B4-BE49-F238E27FC236}">
-                <a16:creationId xmlns:a16="http://schemas.microsoft.com/office/drawing/2014/main" id="{7FE9F527-0092-4FDC-A4E5-E3E3A84A9E6A}"/>
+                <a16:creationId xmlns:a16="http://schemas.microsoft.com/office/drawing/2014/main" id="{980B1D63-3E53-4D04-8373-C27589FDF00A}"/>
               </a:ext>
             </a:extLst>
           </p:cNvPr>
@@ -3725,7 +3725,7 @@
           <p:cNvPr id="16" name="">
             <a:extLst xmlns:a="http://schemas.openxmlformats.org/drawingml/2006/main">
               <a:ext uri="{FF2B5EF4-FFF2-40B4-BE49-F238E27FC236}">
-                <a16:creationId xmlns:a16="http://schemas.microsoft.com/office/drawing/2014/main" id="{1C971B73-6FB5-4954-B9A7-32B613C996EB}"/>
+                <a16:creationId xmlns:a16="http://schemas.microsoft.com/office/drawing/2014/main" id="{7627B2E6-0BD7-4692-BBD1-4033C16A477C}"/>
               </a:ext>
             </a:extLst>
           </p:cNvPr>
@@ -3783,7 +3783,7 @@
           <p:cNvPr id="17" name="">
             <a:extLst xmlns:a="http://schemas.openxmlformats.org/drawingml/2006/main">
               <a:ext uri="{FF2B5EF4-FFF2-40B4-BE49-F238E27FC236}">
-                <a16:creationId xmlns:a16="http://schemas.microsoft.com/office/drawing/2014/main" id="{A6FC7095-5901-4597-B999-E424D9348D51}"/>
+                <a16:creationId xmlns:a16="http://schemas.microsoft.com/office/drawing/2014/main" id="{329D8282-2D32-47BA-B131-EE5292EC5901}"/>
               </a:ext>
             </a:extLst>
           </p:cNvPr>
@@ -3938,7 +3938,7 @@
           <p:cNvPr id="18" name="">
             <a:extLst xmlns:a="http://schemas.openxmlformats.org/drawingml/2006/main">
               <a:ext uri="{FF2B5EF4-FFF2-40B4-BE49-F238E27FC236}">
-                <a16:creationId xmlns:a16="http://schemas.microsoft.com/office/drawing/2014/main" id="{B76DD0D2-2F9A-40B9-AFEA-C007E2BA51D2}"/>
+                <a16:creationId xmlns:a16="http://schemas.microsoft.com/office/drawing/2014/main" id="{453C664F-E163-44F2-8CB1-EE18DA7671D3}"/>
               </a:ext>
             </a:extLst>
           </p:cNvPr>
@@ -3996,7 +3996,7 @@
           <p:cNvPr id="19" name="">
             <a:extLst xmlns:a="http://schemas.openxmlformats.org/drawingml/2006/main">
               <a:ext uri="{FF2B5EF4-FFF2-40B4-BE49-F238E27FC236}">
-                <a16:creationId xmlns:a16="http://schemas.microsoft.com/office/drawing/2014/main" id="{530E71B5-6BD1-4AFB-9C80-07D578AB51E1}"/>
+                <a16:creationId xmlns:a16="http://schemas.microsoft.com/office/drawing/2014/main" id="{E75AECFA-D892-4198-BBB4-71F25B9CE08E}"/>
               </a:ext>
             </a:extLst>
           </p:cNvPr>
@@ -4058,7 +4058,7 @@
           <p:cNvPr id="20" name="">
             <a:extLst xmlns:a="http://schemas.openxmlformats.org/drawingml/2006/main">
               <a:ext uri="{FF2B5EF4-FFF2-40B4-BE49-F238E27FC236}">
-                <a16:creationId xmlns:a16="http://schemas.microsoft.com/office/drawing/2014/main" id="{BA5C1C28-4FAD-47D3-9DDD-96DB1B01908B}"/>
+                <a16:creationId xmlns:a16="http://schemas.microsoft.com/office/drawing/2014/main" id="{1120F8E1-0036-4450-BCBF-EB64B6B713EF}"/>
               </a:ext>
             </a:extLst>
           </p:cNvPr>
@@ -4120,7 +4120,7 @@
           <p:cNvPr id="21" name="">
             <a:extLst xmlns:a="http://schemas.openxmlformats.org/drawingml/2006/main">
               <a:ext uri="{FF2B5EF4-FFF2-40B4-BE49-F238E27FC236}">
-                <a16:creationId xmlns:a16="http://schemas.microsoft.com/office/drawing/2014/main" id="{87F0E997-DE30-4E1A-BC0A-A6428E44BC44}"/>
+                <a16:creationId xmlns:a16="http://schemas.microsoft.com/office/drawing/2014/main" id="{33BF9946-63B2-47DE-872C-8E89A9694701}"/>
               </a:ext>
             </a:extLst>
           </p:cNvPr>
@@ -4176,7 +4176,7 @@
     </p:spTree>
     <p:extLst>
       <p:ext uri="{BB962C8B-B14F-4D97-AF65-F5344CB8AC3E}">
-        <p14:creationId xmlns:p14="http://schemas.microsoft.com/office/powerpoint/2010/main" val="1287843829"/>
+        <p14:creationId xmlns:p14="http://schemas.microsoft.com/office/powerpoint/2010/main" val="1131303972"/>
       </p:ext>
     </p:extLst>
   </p:cSld>
@@ -4207,7 +4207,7 @@
           <p:cNvPr id="21" name="">
             <a:extLst xmlns:a="http://schemas.openxmlformats.org/drawingml/2006/main">
               <a:ext uri="{FF2B5EF4-FFF2-40B4-BE49-F238E27FC236}">
-                <a16:creationId xmlns:a16="http://schemas.microsoft.com/office/drawing/2014/main" id="{FD728F0A-0DFD-4640-808F-627B87580082}"/>
+                <a16:creationId xmlns:a16="http://schemas.microsoft.com/office/drawing/2014/main" id="{CDD6A91A-DF1C-4916-94FA-02141E7E4D28}"/>
               </a:ext>
             </a:extLst>
           </p:cNvPr>
@@ -4238,7 +4238,7 @@
           <p:cNvPr id="2" name="">
             <a:extLst xmlns:a="http://schemas.openxmlformats.org/drawingml/2006/main">
               <a:ext uri="{FF2B5EF4-FFF2-40B4-BE49-F238E27FC236}">
-                <a16:creationId xmlns:a16="http://schemas.microsoft.com/office/drawing/2014/main" id="{D59A3C79-DED7-4CFC-BB3C-92E1A4777CFF}"/>
+                <a16:creationId xmlns:a16="http://schemas.microsoft.com/office/drawing/2014/main" id="{43EA5A1B-C4B4-42E9-81B9-A8D520CB1AD0}"/>
               </a:ext>
             </a:extLst>
           </p:cNvPr>
@@ -4296,7 +4296,7 @@
           <p:cNvPr id="3" name="">
             <a:extLst xmlns:a="http://schemas.openxmlformats.org/drawingml/2006/main">
               <a:ext uri="{FF2B5EF4-FFF2-40B4-BE49-F238E27FC236}">
-                <a16:creationId xmlns:a16="http://schemas.microsoft.com/office/drawing/2014/main" id="{A9C27983-154F-49F2-BBCF-50E16DD6EC21}"/>
+                <a16:creationId xmlns:a16="http://schemas.microsoft.com/office/drawing/2014/main" id="{60A211A8-DC06-47B9-854F-CA7CC9D094F1}"/>
               </a:ext>
             </a:extLst>
           </p:cNvPr>
@@ -4354,7 +4354,7 @@
           <p:cNvPr id="4" name="">
             <a:extLst xmlns:a="http://schemas.openxmlformats.org/drawingml/2006/main">
               <a:ext uri="{FF2B5EF4-FFF2-40B4-BE49-F238E27FC236}">
-                <a16:creationId xmlns:a16="http://schemas.microsoft.com/office/drawing/2014/main" id="{B87313FB-319F-45CA-A9D4-9BEB4B14C317}"/>
+                <a16:creationId xmlns:a16="http://schemas.microsoft.com/office/drawing/2014/main" id="{6CB4E249-947A-49C9-AADD-A9488EFE1829}"/>
               </a:ext>
             </a:extLst>
           </p:cNvPr>
@@ -4412,7 +4412,7 @@
           <p:cNvPr id="5" name="">
             <a:extLst xmlns:a="http://schemas.openxmlformats.org/drawingml/2006/main">
               <a:ext uri="{FF2B5EF4-FFF2-40B4-BE49-F238E27FC236}">
-                <a16:creationId xmlns:a16="http://schemas.microsoft.com/office/drawing/2014/main" id="{35D7F22C-0E03-491A-A73A-74FE8F0CC7FE}"/>
+                <a16:creationId xmlns:a16="http://schemas.microsoft.com/office/drawing/2014/main" id="{0D15AA0C-8CC5-42EB-B253-6D7CDB61E4FA}"/>
               </a:ext>
             </a:extLst>
           </p:cNvPr>
@@ -4687,7 +4687,7 @@
           <p:cNvPr id="7" name="">
             <a:extLst xmlns:a="http://schemas.openxmlformats.org/drawingml/2006/main">
               <a:ext uri="{FF2B5EF4-FFF2-40B4-BE49-F238E27FC236}">
-                <a16:creationId xmlns:a16="http://schemas.microsoft.com/office/drawing/2014/main" id="{676755AE-4025-45A4-83D3-B0495D797966}"/>
+                <a16:creationId xmlns:a16="http://schemas.microsoft.com/office/drawing/2014/main" id="{2115EF24-EBAD-499B-9D6B-4299E5134AAE}"/>
               </a:ext>
             </a:extLst>
           </p:cNvPr>
@@ -4718,7 +4718,7 @@
           <p:cNvPr id="8" name="">
             <a:extLst xmlns:a="http://schemas.openxmlformats.org/drawingml/2006/main">
               <a:ext uri="{FF2B5EF4-FFF2-40B4-BE49-F238E27FC236}">
-                <a16:creationId xmlns:a16="http://schemas.microsoft.com/office/drawing/2014/main" id="{FFF0995D-8F0F-4AB8-AB62-8FB39A8F9A64}"/>
+                <a16:creationId xmlns:a16="http://schemas.microsoft.com/office/drawing/2014/main" id="{D18472F2-7FF3-4F6F-9106-68B48298A785}"/>
               </a:ext>
             </a:extLst>
           </p:cNvPr>
@@ -5297,7 +5297,7 @@
           <p:cNvPr id="10" name="">
             <a:extLst xmlns:a="http://schemas.openxmlformats.org/drawingml/2006/main">
               <a:ext uri="{FF2B5EF4-FFF2-40B4-BE49-F238E27FC236}">
-                <a16:creationId xmlns:a16="http://schemas.microsoft.com/office/drawing/2014/main" id="{E5C190DA-4ADD-4172-8957-E52F3241D48D}"/>
+                <a16:creationId xmlns:a16="http://schemas.microsoft.com/office/drawing/2014/main" id="{6976DC48-01D1-497C-8BB5-25F84D0D2E26}"/>
               </a:ext>
             </a:extLst>
           </p:cNvPr>
@@ -5359,7 +5359,7 @@
           <p:cNvPr id="11" name="">
             <a:extLst xmlns:a="http://schemas.openxmlformats.org/drawingml/2006/main">
               <a:ext uri="{FF2B5EF4-FFF2-40B4-BE49-F238E27FC236}">
-                <a16:creationId xmlns:a16="http://schemas.microsoft.com/office/drawing/2014/main" id="{AD3D69AB-F38F-4F05-9E89-C225BE520CB7}"/>
+                <a16:creationId xmlns:a16="http://schemas.microsoft.com/office/drawing/2014/main" id="{CE428306-5EC9-408E-BAB8-08CB472513B5}"/>
               </a:ext>
             </a:extLst>
           </p:cNvPr>
@@ -5424,7 +5424,7 @@
         </p:xfrm>
         <a:graphic xmlns:a="http://schemas.openxmlformats.org/drawingml/2006/main">
           <a:graphicData uri="http://schemas.openxmlformats.org/drawingml/2006/chart">
-            <c:chart xmlns:r="http://schemas.openxmlformats.org/officeDocument/2006/relationships" xmlns:c="http://schemas.openxmlformats.org/drawingml/2006/chart" r:id="Ra97aadc4020b40ba"/>
+            <c:chart xmlns:r="http://schemas.openxmlformats.org/officeDocument/2006/relationships" xmlns:c="http://schemas.openxmlformats.org/drawingml/2006/chart" r:id="Rcd094564a20d409a"/>
           </a:graphicData>
         </a:graphic>
       </p:graphicFrame>
@@ -5433,7 +5433,7 @@
           <p:cNvPr id="13" name="">
             <a:extLst xmlns:a="http://schemas.openxmlformats.org/drawingml/2006/main">
               <a:ext uri="{FF2B5EF4-FFF2-40B4-BE49-F238E27FC236}">
-                <a16:creationId xmlns:a16="http://schemas.microsoft.com/office/drawing/2014/main" id="{A78F0C7A-6A5F-4BD1-A5E0-BDE73C852C8A}"/>
+                <a16:creationId xmlns:a16="http://schemas.microsoft.com/office/drawing/2014/main" id="{53AE3BAE-B9B4-413C-8AE1-11B983C99058}"/>
               </a:ext>
             </a:extLst>
           </p:cNvPr>
@@ -5491,7 +5491,7 @@
           <p:cNvPr id="14" name="">
             <a:extLst xmlns:a="http://schemas.openxmlformats.org/drawingml/2006/main">
               <a:ext uri="{FF2B5EF4-FFF2-40B4-BE49-F238E27FC236}">
-                <a16:creationId xmlns:a16="http://schemas.microsoft.com/office/drawing/2014/main" id="{5C5ECDBE-3DE4-4274-86C3-FD674E59DDFD}"/>
+                <a16:creationId xmlns:a16="http://schemas.microsoft.com/office/drawing/2014/main" id="{5C42A6B2-DB5D-4D78-9162-EE2FCA32B2A8}"/>
               </a:ext>
             </a:extLst>
           </p:cNvPr>
@@ -5556,7 +5556,7 @@
         </p:xfrm>
         <a:graphic xmlns:a="http://schemas.openxmlformats.org/drawingml/2006/main">
           <a:graphicData uri="http://schemas.openxmlformats.org/drawingml/2006/chart">
-            <c:chart xmlns:r="http://schemas.openxmlformats.org/officeDocument/2006/relationships" xmlns:c="http://schemas.openxmlformats.org/drawingml/2006/chart" r:id="Rfdae77fb7fd84ef1"/>
+            <c:chart xmlns:r="http://schemas.openxmlformats.org/officeDocument/2006/relationships" xmlns:c="http://schemas.openxmlformats.org/drawingml/2006/chart" r:id="Rd276613a7b99405a"/>
           </a:graphicData>
         </a:graphic>
       </p:graphicFrame>
@@ -5565,7 +5565,7 @@
           <p:cNvPr id="16" name="">
             <a:extLst xmlns:a="http://schemas.openxmlformats.org/drawingml/2006/main">
               <a:ext uri="{FF2B5EF4-FFF2-40B4-BE49-F238E27FC236}">
-                <a16:creationId xmlns:a16="http://schemas.microsoft.com/office/drawing/2014/main" id="{CF0102D0-C346-440F-8CF3-F3323141E960}"/>
+                <a16:creationId xmlns:a16="http://schemas.microsoft.com/office/drawing/2014/main" id="{DE278F89-0C81-44A3-9E7E-93D89928A935}"/>
               </a:ext>
             </a:extLst>
           </p:cNvPr>
@@ -5627,7 +5627,7 @@
           <p:cNvPr id="17" name="">
             <a:extLst xmlns:a="http://schemas.openxmlformats.org/drawingml/2006/main">
               <a:ext uri="{FF2B5EF4-FFF2-40B4-BE49-F238E27FC236}">
-                <a16:creationId xmlns:a16="http://schemas.microsoft.com/office/drawing/2014/main" id="{6511E1A9-5016-49B8-A5A7-8708D1D19CDA}"/>
+                <a16:creationId xmlns:a16="http://schemas.microsoft.com/office/drawing/2014/main" id="{ED6B5336-8658-488D-BD7D-2F5B33F95132}"/>
               </a:ext>
             </a:extLst>
           </p:cNvPr>
@@ -5658,7 +5658,7 @@
           <p:cNvPr id="18" name="">
             <a:extLst xmlns:a="http://schemas.openxmlformats.org/drawingml/2006/main">
               <a:ext uri="{FF2B5EF4-FFF2-40B4-BE49-F238E27FC236}">
-                <a16:creationId xmlns:a16="http://schemas.microsoft.com/office/drawing/2014/main" id="{DF609F2F-9AC3-44BC-92BE-17E5170BE2AD}"/>
+                <a16:creationId xmlns:a16="http://schemas.microsoft.com/office/drawing/2014/main" id="{6D2B291C-CB48-479B-B381-93A8BA222395}"/>
               </a:ext>
             </a:extLst>
           </p:cNvPr>
@@ -5716,7 +5716,7 @@
           <p:cNvPr id="19" name="">
             <a:extLst xmlns:a="http://schemas.openxmlformats.org/drawingml/2006/main">
               <a:ext uri="{FF2B5EF4-FFF2-40B4-BE49-F238E27FC236}">
-                <a16:creationId xmlns:a16="http://schemas.microsoft.com/office/drawing/2014/main" id="{609538A9-9542-48CA-BE1F-5E6D037ED41F}"/>
+                <a16:creationId xmlns:a16="http://schemas.microsoft.com/office/drawing/2014/main" id="{6E9E404C-2026-4B70-BDD0-0648FB87FAAD}"/>
               </a:ext>
             </a:extLst>
           </p:cNvPr>
@@ -5774,7 +5774,7 @@
           <p:cNvPr id="20" name="">
             <a:extLst xmlns:a="http://schemas.openxmlformats.org/drawingml/2006/main">
               <a:ext uri="{FF2B5EF4-FFF2-40B4-BE49-F238E27FC236}">
-                <a16:creationId xmlns:a16="http://schemas.microsoft.com/office/drawing/2014/main" id="{30D2F951-9DA6-42EE-9A07-C8E89756B077}"/>
+                <a16:creationId xmlns:a16="http://schemas.microsoft.com/office/drawing/2014/main" id="{AFB96C95-DF0F-46F4-9A20-DA4674B33A43}"/>
               </a:ext>
             </a:extLst>
           </p:cNvPr>
@@ -5830,7 +5830,7 @@
     </p:spTree>
     <p:extLst>
       <p:ext uri="{BB962C8B-B14F-4D97-AF65-F5344CB8AC3E}">
-        <p14:creationId xmlns:p14="http://schemas.microsoft.com/office/powerpoint/2010/main" val="1355499876"/>
+        <p14:creationId xmlns:p14="http://schemas.microsoft.com/office/powerpoint/2010/main" val="1990438380"/>
       </p:ext>
     </p:extLst>
   </p:cSld>
@@ -5861,7 +5861,7 @@
           <p:cNvPr id="28" name="">
             <a:extLst xmlns:a="http://schemas.openxmlformats.org/drawingml/2006/main">
               <a:ext uri="{FF2B5EF4-FFF2-40B4-BE49-F238E27FC236}">
-                <a16:creationId xmlns:a16="http://schemas.microsoft.com/office/drawing/2014/main" id="{74A3C80E-BC4A-4578-99D4-127DA38AE02B}"/>
+                <a16:creationId xmlns:a16="http://schemas.microsoft.com/office/drawing/2014/main" id="{F82FB901-EDFE-49BD-AC7E-B0A9EF87DFAF}"/>
               </a:ext>
             </a:extLst>
           </p:cNvPr>
@@ -5892,7 +5892,7 @@
           <p:cNvPr id="2" name="">
             <a:extLst xmlns:a="http://schemas.openxmlformats.org/drawingml/2006/main">
               <a:ext uri="{FF2B5EF4-FFF2-40B4-BE49-F238E27FC236}">
-                <a16:creationId xmlns:a16="http://schemas.microsoft.com/office/drawing/2014/main" id="{8F930ABA-0719-497A-AD76-9775FFFFBEF2}"/>
+                <a16:creationId xmlns:a16="http://schemas.microsoft.com/office/drawing/2014/main" id="{AC736904-BC1E-4E63-AD38-5C588E1C6164}"/>
               </a:ext>
             </a:extLst>
           </p:cNvPr>
@@ -5950,7 +5950,7 @@
           <p:cNvPr id="3" name="">
             <a:extLst xmlns:a="http://schemas.openxmlformats.org/drawingml/2006/main">
               <a:ext uri="{FF2B5EF4-FFF2-40B4-BE49-F238E27FC236}">
-                <a16:creationId xmlns:a16="http://schemas.microsoft.com/office/drawing/2014/main" id="{9FEF2F63-ABD8-4A3B-BCA1-F262E819BF74}"/>
+                <a16:creationId xmlns:a16="http://schemas.microsoft.com/office/drawing/2014/main" id="{E8A8D4F3-74D4-4400-B8FF-DB7851B6CA31}"/>
               </a:ext>
             </a:extLst>
           </p:cNvPr>
@@ -6008,7 +6008,7 @@
           <p:cNvPr id="4" name="">
             <a:extLst xmlns:a="http://schemas.openxmlformats.org/drawingml/2006/main">
               <a:ext uri="{FF2B5EF4-FFF2-40B4-BE49-F238E27FC236}">
-                <a16:creationId xmlns:a16="http://schemas.microsoft.com/office/drawing/2014/main" id="{2F651B96-E82A-47C6-A8DA-1DD18EBC52FE}"/>
+                <a16:creationId xmlns:a16="http://schemas.microsoft.com/office/drawing/2014/main" id="{42F3AD27-9B89-4469-A4F5-423C79285F01}"/>
               </a:ext>
             </a:extLst>
           </p:cNvPr>
@@ -6066,7 +6066,7 @@
           <p:cNvPr id="5" name="">
             <a:extLst xmlns:a="http://schemas.openxmlformats.org/drawingml/2006/main">
               <a:ext uri="{FF2B5EF4-FFF2-40B4-BE49-F238E27FC236}">
-                <a16:creationId xmlns:a16="http://schemas.microsoft.com/office/drawing/2014/main" id="{C2628BC5-E3E5-4AE4-9744-9802E18CFD78}"/>
+                <a16:creationId xmlns:a16="http://schemas.microsoft.com/office/drawing/2014/main" id="{568FEDEF-215A-4874-95BF-4A9CA2260A34}"/>
               </a:ext>
             </a:extLst>
           </p:cNvPr>
@@ -6097,7 +6097,7 @@
           <p:cNvPr id="6" name="">
             <a:extLst xmlns:a="http://schemas.openxmlformats.org/drawingml/2006/main">
               <a:ext uri="{FF2B5EF4-FFF2-40B4-BE49-F238E27FC236}">
-                <a16:creationId xmlns:a16="http://schemas.microsoft.com/office/drawing/2014/main" id="{D0B00843-9181-4F2F-B5F1-4E19E43E26E1}"/>
+                <a16:creationId xmlns:a16="http://schemas.microsoft.com/office/drawing/2014/main" id="{12BA9839-ADE7-46E3-A8A0-65C67667948D}"/>
               </a:ext>
             </a:extLst>
           </p:cNvPr>
@@ -6155,7 +6155,7 @@
           <p:cNvPr id="7" name="">
             <a:extLst xmlns:a="http://schemas.openxmlformats.org/drawingml/2006/main">
               <a:ext uri="{FF2B5EF4-FFF2-40B4-BE49-F238E27FC236}">
-                <a16:creationId xmlns:a16="http://schemas.microsoft.com/office/drawing/2014/main" id="{4537D5A4-549D-45F3-B96B-DDFE7F5183DB}"/>
+                <a16:creationId xmlns:a16="http://schemas.microsoft.com/office/drawing/2014/main" id="{DB240333-B84A-44C6-BBD6-430DFB29A117}"/>
               </a:ext>
             </a:extLst>
           </p:cNvPr>
@@ -6217,7 +6217,7 @@
           <p:cNvPr id="8" name="">
             <a:extLst xmlns:a="http://schemas.openxmlformats.org/drawingml/2006/main">
               <a:ext uri="{FF2B5EF4-FFF2-40B4-BE49-F238E27FC236}">
-                <a16:creationId xmlns:a16="http://schemas.microsoft.com/office/drawing/2014/main" id="{8DACC257-0DD8-4A93-A591-DC8A4B6E6BE7}"/>
+                <a16:creationId xmlns:a16="http://schemas.microsoft.com/office/drawing/2014/main" id="{DA54F51C-8AD2-46D0-881E-53E01D16943D}"/>
               </a:ext>
             </a:extLst>
           </p:cNvPr>
@@ -6265,7 +6265,7 @@
                 <a:ea typeface="Helvetica Neue"/>
                 <a:cs typeface="Helvetica Neue"/>
               </a:rPr>
-              <a:t>Model evidence from the 16-slide analysis</a:t>
+              <a:t>Model performance evidence</a:t>
             </a:r>
           </a:p>
         </p:txBody>
@@ -6282,7 +6282,7 @@
         </p:xfrm>
         <a:graphic xmlns:a="http://schemas.openxmlformats.org/drawingml/2006/main">
           <a:graphicData uri="http://schemas.openxmlformats.org/drawingml/2006/chart">
-            <c:chart xmlns:r="http://schemas.openxmlformats.org/officeDocument/2006/relationships" xmlns:c="http://schemas.openxmlformats.org/drawingml/2006/chart" r:id="R52eec6023ef64542"/>
+            <c:chart xmlns:r="http://schemas.openxmlformats.org/officeDocument/2006/relationships" xmlns:c="http://schemas.openxmlformats.org/drawingml/2006/chart" r:id="R245aa5ae02df443f"/>
           </a:graphicData>
         </a:graphic>
       </p:graphicFrame>
@@ -6291,7 +6291,7 @@
           <p:cNvPr id="10" name="">
             <a:extLst xmlns:a="http://schemas.openxmlformats.org/drawingml/2006/main">
               <a:ext uri="{FF2B5EF4-FFF2-40B4-BE49-F238E27FC236}">
-                <a16:creationId xmlns:a16="http://schemas.microsoft.com/office/drawing/2014/main" id="{5045F837-938D-4A59-AA69-8C1780E1A423}"/>
+                <a16:creationId xmlns:a16="http://schemas.microsoft.com/office/drawing/2014/main" id="{551ED51A-28A9-4D7A-8510-9006C8E891E1}"/>
               </a:ext>
             </a:extLst>
           </p:cNvPr>
@@ -6353,7 +6353,7 @@
           <p:cNvPr id="11" name="">
             <a:extLst xmlns:a="http://schemas.openxmlformats.org/drawingml/2006/main">
               <a:ext uri="{FF2B5EF4-FFF2-40B4-BE49-F238E27FC236}">
-                <a16:creationId xmlns:a16="http://schemas.microsoft.com/office/drawing/2014/main" id="{F5ACCF5F-1BE3-4996-99DE-DDE02BCFF3E4}"/>
+                <a16:creationId xmlns:a16="http://schemas.microsoft.com/office/drawing/2014/main" id="{3CD2AA5C-AEE9-433F-A3D4-D2C7D18CD4AB}"/>
               </a:ext>
             </a:extLst>
           </p:cNvPr>
@@ -6384,7 +6384,7 @@
           <p:cNvPr id="12" name="">
             <a:extLst xmlns:a="http://schemas.openxmlformats.org/drawingml/2006/main">
               <a:ext uri="{FF2B5EF4-FFF2-40B4-BE49-F238E27FC236}">
-                <a16:creationId xmlns:a16="http://schemas.microsoft.com/office/drawing/2014/main" id="{514F34BB-21B4-4029-864F-8B17E94DFC6A}"/>
+                <a16:creationId xmlns:a16="http://schemas.microsoft.com/office/drawing/2014/main" id="{E72C00FC-9D88-432E-86DC-20AAF3ABAB86}"/>
               </a:ext>
             </a:extLst>
           </p:cNvPr>
@@ -6442,7 +6442,7 @@
           <p:cNvPr id="13" name="">
             <a:extLst xmlns:a="http://schemas.openxmlformats.org/drawingml/2006/main">
               <a:ext uri="{FF2B5EF4-FFF2-40B4-BE49-F238E27FC236}">
-                <a16:creationId xmlns:a16="http://schemas.microsoft.com/office/drawing/2014/main" id="{A9DD6A3B-2469-4131-BEA4-FF4651485C1C}"/>
+                <a16:creationId xmlns:a16="http://schemas.microsoft.com/office/drawing/2014/main" id="{90147ABA-D9E8-447E-A324-F57472B31894}"/>
               </a:ext>
             </a:extLst>
           </p:cNvPr>
@@ -6500,7 +6500,7 @@
           <p:cNvPr id="14" name="">
             <a:extLst xmlns:a="http://schemas.openxmlformats.org/drawingml/2006/main">
               <a:ext uri="{FF2B5EF4-FFF2-40B4-BE49-F238E27FC236}">
-                <a16:creationId xmlns:a16="http://schemas.microsoft.com/office/drawing/2014/main" id="{51127571-0B4E-44C5-800D-4BE12026D290}"/>
+                <a16:creationId xmlns:a16="http://schemas.microsoft.com/office/drawing/2014/main" id="{E0518B7C-6CE7-4DF9-8E1A-A00AEC86FDBD}"/>
               </a:ext>
             </a:extLst>
           </p:cNvPr>
@@ -6625,7 +6625,7 @@
           <p:cNvPr id="15" name="">
             <a:extLst xmlns:a="http://schemas.openxmlformats.org/drawingml/2006/main">
               <a:ext uri="{FF2B5EF4-FFF2-40B4-BE49-F238E27FC236}">
-                <a16:creationId xmlns:a16="http://schemas.microsoft.com/office/drawing/2014/main" id="{01A7AB22-C4EC-4CB4-9F5A-23E845F6F18A}"/>
+                <a16:creationId xmlns:a16="http://schemas.microsoft.com/office/drawing/2014/main" id="{9EA5B34B-8F5E-4AE9-8ECA-290D98A585CD}"/>
               </a:ext>
             </a:extLst>
           </p:cNvPr>
@@ -6687,7 +6687,7 @@
           <p:cNvPr id="16" name="">
             <a:extLst xmlns:a="http://schemas.openxmlformats.org/drawingml/2006/main">
               <a:ext uri="{FF2B5EF4-FFF2-40B4-BE49-F238E27FC236}">
-                <a16:creationId xmlns:a16="http://schemas.microsoft.com/office/drawing/2014/main" id="{82D750E2-C7FC-49E8-8EEB-715268026A15}"/>
+                <a16:creationId xmlns:a16="http://schemas.microsoft.com/office/drawing/2014/main" id="{3914B36D-59D6-440A-B9AF-3485FA226216}"/>
               </a:ext>
             </a:extLst>
           </p:cNvPr>
@@ -6745,7 +6745,7 @@
           <p:cNvPr id="17" name="">
             <a:extLst xmlns:a="http://schemas.openxmlformats.org/drawingml/2006/main">
               <a:ext uri="{FF2B5EF4-FFF2-40B4-BE49-F238E27FC236}">
-                <a16:creationId xmlns:a16="http://schemas.microsoft.com/office/drawing/2014/main" id="{E694BABD-E120-40F5-B6F8-C9A4E0ED5C9B}"/>
+                <a16:creationId xmlns:a16="http://schemas.microsoft.com/office/drawing/2014/main" id="{0369827B-B173-4A5C-806B-4A63D4552BF0}"/>
               </a:ext>
             </a:extLst>
           </p:cNvPr>
@@ -6803,7 +6803,7 @@
           <p:cNvPr id="18" name="">
             <a:extLst xmlns:a="http://schemas.openxmlformats.org/drawingml/2006/main">
               <a:ext uri="{FF2B5EF4-FFF2-40B4-BE49-F238E27FC236}">
-                <a16:creationId xmlns:a16="http://schemas.microsoft.com/office/drawing/2014/main" id="{D49DBDE9-963E-4BF5-BE82-6ECEF6D9D6A4}"/>
+                <a16:creationId xmlns:a16="http://schemas.microsoft.com/office/drawing/2014/main" id="{7E3DD76F-B37A-4E33-BAB9-29DC98C5CA7A}"/>
               </a:ext>
             </a:extLst>
           </p:cNvPr>
@@ -6928,7 +6928,7 @@
           <p:cNvPr id="19" name="">
             <a:extLst xmlns:a="http://schemas.openxmlformats.org/drawingml/2006/main">
               <a:ext uri="{FF2B5EF4-FFF2-40B4-BE49-F238E27FC236}">
-                <a16:creationId xmlns:a16="http://schemas.microsoft.com/office/drawing/2014/main" id="{03F7641C-A3D1-48DB-B563-C835AC54E7DF}"/>
+                <a16:creationId xmlns:a16="http://schemas.microsoft.com/office/drawing/2014/main" id="{AC97C2E5-4D8E-4BBD-9A0A-A3927DA4E83C}"/>
               </a:ext>
             </a:extLst>
           </p:cNvPr>
@@ -6990,7 +6990,7 @@
           <p:cNvPr id="20" name="">
             <a:extLst xmlns:a="http://schemas.openxmlformats.org/drawingml/2006/main">
               <a:ext uri="{FF2B5EF4-FFF2-40B4-BE49-F238E27FC236}">
-                <a16:creationId xmlns:a16="http://schemas.microsoft.com/office/drawing/2014/main" id="{516C2A07-97A6-4C28-9A92-37F62355C4DA}"/>
+                <a16:creationId xmlns:a16="http://schemas.microsoft.com/office/drawing/2014/main" id="{789D9F5B-862C-40C6-90FB-47859954EA9A}"/>
               </a:ext>
             </a:extLst>
           </p:cNvPr>
@@ -7048,7 +7048,7 @@
           <p:cNvPr id="21" name="">
             <a:extLst xmlns:a="http://schemas.openxmlformats.org/drawingml/2006/main">
               <a:ext uri="{FF2B5EF4-FFF2-40B4-BE49-F238E27FC236}">
-                <a16:creationId xmlns:a16="http://schemas.microsoft.com/office/drawing/2014/main" id="{1CBD4E8E-CE6D-4EB6-B9FE-F7A4BE894756}"/>
+                <a16:creationId xmlns:a16="http://schemas.microsoft.com/office/drawing/2014/main" id="{BCB435D4-31E8-489B-928D-C6BD3356E50D}"/>
               </a:ext>
             </a:extLst>
           </p:cNvPr>
@@ -7106,7 +7106,7 @@
           <p:cNvPr id="22" name="">
             <a:extLst xmlns:a="http://schemas.openxmlformats.org/drawingml/2006/main">
               <a:ext uri="{FF2B5EF4-FFF2-40B4-BE49-F238E27FC236}">
-                <a16:creationId xmlns:a16="http://schemas.microsoft.com/office/drawing/2014/main" id="{1EB7C7B9-FFA5-4E90-8163-ABD1E3CAEB45}"/>
+                <a16:creationId xmlns:a16="http://schemas.microsoft.com/office/drawing/2014/main" id="{30D3382D-AE19-4B18-A475-BDF394D6A43A}"/>
               </a:ext>
             </a:extLst>
           </p:cNvPr>
@@ -7231,7 +7231,7 @@
           <p:cNvPr id="23" name="">
             <a:extLst xmlns:a="http://schemas.openxmlformats.org/drawingml/2006/main">
               <a:ext uri="{FF2B5EF4-FFF2-40B4-BE49-F238E27FC236}">
-                <a16:creationId xmlns:a16="http://schemas.microsoft.com/office/drawing/2014/main" id="{B953B072-4AE4-4853-9656-ED1096A3422F}"/>
+                <a16:creationId xmlns:a16="http://schemas.microsoft.com/office/drawing/2014/main" id="{76AE44BE-AAC9-42C8-9668-73F0BC33EA70}"/>
               </a:ext>
             </a:extLst>
           </p:cNvPr>
@@ -7293,7 +7293,7 @@
           <p:cNvPr id="24" name="">
             <a:extLst xmlns:a="http://schemas.openxmlformats.org/drawingml/2006/main">
               <a:ext uri="{FF2B5EF4-FFF2-40B4-BE49-F238E27FC236}">
-                <a16:creationId xmlns:a16="http://schemas.microsoft.com/office/drawing/2014/main" id="{E6E761BF-35F3-4102-AB48-7948614DD375}"/>
+                <a16:creationId xmlns:a16="http://schemas.microsoft.com/office/drawing/2014/main" id="{91BA5935-7C24-4152-ADBF-097BDC50B47C}"/>
               </a:ext>
             </a:extLst>
           </p:cNvPr>
@@ -7324,7 +7324,7 @@
           <p:cNvPr id="25" name="">
             <a:extLst xmlns:a="http://schemas.openxmlformats.org/drawingml/2006/main">
               <a:ext uri="{FF2B5EF4-FFF2-40B4-BE49-F238E27FC236}">
-                <a16:creationId xmlns:a16="http://schemas.microsoft.com/office/drawing/2014/main" id="{E2B34E6A-073F-433F-BA78-AE57047213B8}"/>
+                <a16:creationId xmlns:a16="http://schemas.microsoft.com/office/drawing/2014/main" id="{EC4E0C64-CD65-4107-8908-21CF8198861A}"/>
               </a:ext>
             </a:extLst>
           </p:cNvPr>
@@ -7382,7 +7382,7 @@
           <p:cNvPr id="26" name="">
             <a:extLst xmlns:a="http://schemas.openxmlformats.org/drawingml/2006/main">
               <a:ext uri="{FF2B5EF4-FFF2-40B4-BE49-F238E27FC236}">
-                <a16:creationId xmlns:a16="http://schemas.microsoft.com/office/drawing/2014/main" id="{47A4FEB7-7BFB-437E-877F-42212070F8D5}"/>
+                <a16:creationId xmlns:a16="http://schemas.microsoft.com/office/drawing/2014/main" id="{72C80FB7-128C-4602-A89A-751A0E7A9F67}"/>
               </a:ext>
             </a:extLst>
           </p:cNvPr>
@@ -7440,7 +7440,7 @@
           <p:cNvPr id="27" name="">
             <a:extLst xmlns:a="http://schemas.openxmlformats.org/drawingml/2006/main">
               <a:ext uri="{FF2B5EF4-FFF2-40B4-BE49-F238E27FC236}">
-                <a16:creationId xmlns:a16="http://schemas.microsoft.com/office/drawing/2014/main" id="{F028615C-B5A9-4AC0-A927-D7C5AACE57EB}"/>
+                <a16:creationId xmlns:a16="http://schemas.microsoft.com/office/drawing/2014/main" id="{11473622-116B-4966-9E12-FA4810BFE9D7}"/>
               </a:ext>
             </a:extLst>
           </p:cNvPr>
@@ -7496,7 +7496,7 @@
     </p:spTree>
     <p:extLst>
       <p:ext uri="{BB962C8B-B14F-4D97-AF65-F5344CB8AC3E}">
-        <p14:creationId xmlns:p14="http://schemas.microsoft.com/office/powerpoint/2010/main" val="1442061715"/>
+        <p14:creationId xmlns:p14="http://schemas.microsoft.com/office/powerpoint/2010/main" val="1419618753"/>
       </p:ext>
     </p:extLst>
   </p:cSld>
@@ -7527,7 +7527,7 @@
           <p:cNvPr id="19" name="">
             <a:extLst xmlns:a="http://schemas.openxmlformats.org/drawingml/2006/main">
               <a:ext uri="{FF2B5EF4-FFF2-40B4-BE49-F238E27FC236}">
-                <a16:creationId xmlns:a16="http://schemas.microsoft.com/office/drawing/2014/main" id="{EE597846-FAB9-4352-82D4-219AD1D5DCB6}"/>
+                <a16:creationId xmlns:a16="http://schemas.microsoft.com/office/drawing/2014/main" id="{3C25A798-3771-4638-89F8-17091B246AB2}"/>
               </a:ext>
             </a:extLst>
           </p:cNvPr>
@@ -7558,7 +7558,7 @@
           <p:cNvPr id="2" name="">
             <a:extLst xmlns:a="http://schemas.openxmlformats.org/drawingml/2006/main">
               <a:ext uri="{FF2B5EF4-FFF2-40B4-BE49-F238E27FC236}">
-                <a16:creationId xmlns:a16="http://schemas.microsoft.com/office/drawing/2014/main" id="{2967FEE9-61A2-4B6B-B759-BF47ED555F52}"/>
+                <a16:creationId xmlns:a16="http://schemas.microsoft.com/office/drawing/2014/main" id="{695FDFAA-A7B9-40CA-8AFD-B4376EE92CDC}"/>
               </a:ext>
             </a:extLst>
           </p:cNvPr>
@@ -7616,7 +7616,7 @@
           <p:cNvPr id="3" name="">
             <a:extLst xmlns:a="http://schemas.openxmlformats.org/drawingml/2006/main">
               <a:ext uri="{FF2B5EF4-FFF2-40B4-BE49-F238E27FC236}">
-                <a16:creationId xmlns:a16="http://schemas.microsoft.com/office/drawing/2014/main" id="{7B32CE82-01A3-472A-83F3-67994BD3F891}"/>
+                <a16:creationId xmlns:a16="http://schemas.microsoft.com/office/drawing/2014/main" id="{1F74C329-C232-4D39-A7B4-386630AC687D}"/>
               </a:ext>
             </a:extLst>
           </p:cNvPr>
@@ -7674,7 +7674,7 @@
           <p:cNvPr id="4" name="">
             <a:extLst xmlns:a="http://schemas.openxmlformats.org/drawingml/2006/main">
               <a:ext uri="{FF2B5EF4-FFF2-40B4-BE49-F238E27FC236}">
-                <a16:creationId xmlns:a16="http://schemas.microsoft.com/office/drawing/2014/main" id="{D0879696-CDEE-4A54-BEAD-E8B0A700A898}"/>
+                <a16:creationId xmlns:a16="http://schemas.microsoft.com/office/drawing/2014/main" id="{9B6E1582-D73E-4FFE-8DDF-09333EDBE1DB}"/>
               </a:ext>
             </a:extLst>
           </p:cNvPr>
@@ -7732,7 +7732,7 @@
           <p:cNvPr id="5" name="">
             <a:extLst xmlns:a="http://schemas.openxmlformats.org/drawingml/2006/main">
               <a:ext uri="{FF2B5EF4-FFF2-40B4-BE49-F238E27FC236}">
-                <a16:creationId xmlns:a16="http://schemas.microsoft.com/office/drawing/2014/main" id="{A3C7C6EE-B245-4C4D-9BF0-5CBE9AA27209}"/>
+                <a16:creationId xmlns:a16="http://schemas.microsoft.com/office/drawing/2014/main" id="{CEA368E6-A393-41E5-97E2-943E3761C363}"/>
               </a:ext>
             </a:extLst>
           </p:cNvPr>
@@ -7763,7 +7763,7 @@
           <p:cNvPr id="6" name="">
             <a:extLst xmlns:a="http://schemas.openxmlformats.org/drawingml/2006/main">
               <a:ext uri="{FF2B5EF4-FFF2-40B4-BE49-F238E27FC236}">
-                <a16:creationId xmlns:a16="http://schemas.microsoft.com/office/drawing/2014/main" id="{49F5C89C-8703-4045-AA06-4DF0E06553A1}"/>
+                <a16:creationId xmlns:a16="http://schemas.microsoft.com/office/drawing/2014/main" id="{D4C830D4-24E5-4B08-A575-EFD043CC0C76}"/>
               </a:ext>
             </a:extLst>
           </p:cNvPr>
@@ -7775,7 +7775,7 @@
         <p:spPr>
           <a:xfrm xmlns:a="http://schemas.openxmlformats.org/drawingml/2006/main">
             <a:off x="514350" y="1743075"/>
-            <a:ext cx="3619500" cy="247650"/>
+            <a:ext cx="4000500" cy="247650"/>
           </a:xfrm>
           <a:prstGeom xmlns:a="http://schemas.openxmlformats.org/drawingml/2006/main" prst="rect">
             <a:avLst/>
@@ -7811,7 +7811,7 @@
                 <a:ea typeface="Helvetica Neue"/>
                 <a:cs typeface="Helvetica Neue"/>
               </a:rPr>
-              <a:t>Evidence from the full analysis</a:t>
+              <a:t>Readmission risk stratification</a:t>
             </a:r>
           </a:p>
         </p:txBody>
@@ -7828,7 +7828,7 @@
         </p:xfrm>
         <a:graphic xmlns:a="http://schemas.openxmlformats.org/drawingml/2006/main">
           <a:graphicData uri="http://schemas.openxmlformats.org/drawingml/2006/chart">
-            <c:chart xmlns:r="http://schemas.openxmlformats.org/officeDocument/2006/relationships" xmlns:c="http://schemas.openxmlformats.org/drawingml/2006/chart" r:id="R9d9dccd0e8984b42"/>
+            <c:chart xmlns:r="http://schemas.openxmlformats.org/officeDocument/2006/relationships" xmlns:c="http://schemas.openxmlformats.org/drawingml/2006/chart" r:id="R4426ab9da4634f83"/>
           </a:graphicData>
         </a:graphic>
       </p:graphicFrame>
@@ -7837,7 +7837,7 @@
           <p:cNvPr id="8" name="">
             <a:extLst xmlns:a="http://schemas.openxmlformats.org/drawingml/2006/main">
               <a:ext uri="{FF2B5EF4-FFF2-40B4-BE49-F238E27FC236}">
-                <a16:creationId xmlns:a16="http://schemas.microsoft.com/office/drawing/2014/main" id="{3FA8CD6F-BCF1-4856-AFCD-B528CE7EDAE1}"/>
+                <a16:creationId xmlns:a16="http://schemas.microsoft.com/office/drawing/2014/main" id="{65C5CD5A-A4DA-4078-8A17-0E2DEF1040E4}"/>
               </a:ext>
             </a:extLst>
           </p:cNvPr>
@@ -7899,7 +7899,7 @@
           <p:cNvPr id="9" name="">
             <a:extLst xmlns:a="http://schemas.openxmlformats.org/drawingml/2006/main">
               <a:ext uri="{FF2B5EF4-FFF2-40B4-BE49-F238E27FC236}">
-                <a16:creationId xmlns:a16="http://schemas.microsoft.com/office/drawing/2014/main" id="{472302A5-11BA-4A7C-8C7D-4127F54007B9}"/>
+                <a16:creationId xmlns:a16="http://schemas.microsoft.com/office/drawing/2014/main" id="{187D0BFF-462D-4F5E-9B82-863586FF4A32}"/>
               </a:ext>
             </a:extLst>
           </p:cNvPr>
@@ -8421,7 +8421,7 @@
           <p:cNvPr id="11" name="">
             <a:extLst xmlns:a="http://schemas.openxmlformats.org/drawingml/2006/main">
               <a:ext uri="{FF2B5EF4-FFF2-40B4-BE49-F238E27FC236}">
-                <a16:creationId xmlns:a16="http://schemas.microsoft.com/office/drawing/2014/main" id="{55C905E1-460B-44C3-B63E-9B441CA0C5C9}"/>
+                <a16:creationId xmlns:a16="http://schemas.microsoft.com/office/drawing/2014/main" id="{7751825C-64DE-4F59-A130-3D80F548786C}"/>
               </a:ext>
             </a:extLst>
           </p:cNvPr>
@@ -8483,7 +8483,7 @@
           <p:cNvPr id="12" name="">
             <a:extLst xmlns:a="http://schemas.openxmlformats.org/drawingml/2006/main">
               <a:ext uri="{FF2B5EF4-FFF2-40B4-BE49-F238E27FC236}">
-                <a16:creationId xmlns:a16="http://schemas.microsoft.com/office/drawing/2014/main" id="{49B5AEEA-41FE-4110-9024-C1AC21A08BEA}"/>
+                <a16:creationId xmlns:a16="http://schemas.microsoft.com/office/drawing/2014/main" id="{AC9C6E7C-9F21-452D-89A6-47102BB53978}"/>
               </a:ext>
             </a:extLst>
           </p:cNvPr>
@@ -8514,7 +8514,7 @@
           <p:cNvPr id="13" name="">
             <a:extLst xmlns:a="http://schemas.openxmlformats.org/drawingml/2006/main">
               <a:ext uri="{FF2B5EF4-FFF2-40B4-BE49-F238E27FC236}">
-                <a16:creationId xmlns:a16="http://schemas.microsoft.com/office/drawing/2014/main" id="{4FE6822A-F942-495F-8793-0F4FED1C4BFC}"/>
+                <a16:creationId xmlns:a16="http://schemas.microsoft.com/office/drawing/2014/main" id="{A248CF0E-88E9-40ED-BE76-0983143FD4CD}"/>
               </a:ext>
             </a:extLst>
           </p:cNvPr>
@@ -8874,7 +8874,7 @@
           <p:cNvPr id="15" name="">
             <a:extLst xmlns:a="http://schemas.openxmlformats.org/drawingml/2006/main">
               <a:ext uri="{FF2B5EF4-FFF2-40B4-BE49-F238E27FC236}">
-                <a16:creationId xmlns:a16="http://schemas.microsoft.com/office/drawing/2014/main" id="{2221DD45-9CBF-4899-B565-E8D974F6D0D9}"/>
+                <a16:creationId xmlns:a16="http://schemas.microsoft.com/office/drawing/2014/main" id="{52D7337B-02A8-44EB-B84D-98C92CBDDAEF}"/>
               </a:ext>
             </a:extLst>
           </p:cNvPr>
@@ -9178,7 +9178,7 @@
           <p:cNvPr id="17" name="">
             <a:extLst xmlns:a="http://schemas.openxmlformats.org/drawingml/2006/main">
               <a:ext uri="{FF2B5EF4-FFF2-40B4-BE49-F238E27FC236}">
-                <a16:creationId xmlns:a16="http://schemas.microsoft.com/office/drawing/2014/main" id="{2F249CEF-6ED7-439E-B222-DFB04AE08BA2}"/>
+                <a16:creationId xmlns:a16="http://schemas.microsoft.com/office/drawing/2014/main" id="{451F7855-B894-46A8-96A1-D6556E46B8EF}"/>
               </a:ext>
             </a:extLst>
           </p:cNvPr>
@@ -9240,7 +9240,7 @@
           <p:cNvPr id="18" name="">
             <a:extLst xmlns:a="http://schemas.openxmlformats.org/drawingml/2006/main">
               <a:ext uri="{FF2B5EF4-FFF2-40B4-BE49-F238E27FC236}">
-                <a16:creationId xmlns:a16="http://schemas.microsoft.com/office/drawing/2014/main" id="{74436DFD-E55A-4199-B799-775493A2F735}"/>
+                <a16:creationId xmlns:a16="http://schemas.microsoft.com/office/drawing/2014/main" id="{3763E0E4-7F90-4273-A3BA-B0D7948213AB}"/>
               </a:ext>
             </a:extLst>
           </p:cNvPr>
@@ -9296,7 +9296,7 @@
     </p:spTree>
     <p:extLst>
       <p:ext uri="{BB962C8B-B14F-4D97-AF65-F5344CB8AC3E}">
-        <p14:creationId xmlns:p14="http://schemas.microsoft.com/office/powerpoint/2010/main" val="1500652471"/>
+        <p14:creationId xmlns:p14="http://schemas.microsoft.com/office/powerpoint/2010/main" val="1539863027"/>
       </p:ext>
     </p:extLst>
   </p:cSld>

--- a/drafts/saturday_submission.pptx
+++ b/drafts/saturday_submission.pptx
@@ -2,16 +2,17 @@
 <file path=ppt/presentation.xml><?xml version="1.0" encoding="utf-8"?>
 <p:presentation xmlns:p="http://schemas.openxmlformats.org/presentationml/2006/main">
   <p:sldMasterIdLst>
-    <p:sldMasterId xmlns:r="http://schemas.openxmlformats.org/officeDocument/2006/relationships" id="2147483648" r:id="R778ab3701b814490"/>
+    <p:sldMasterId xmlns:r="http://schemas.openxmlformats.org/officeDocument/2006/relationships" id="2147483648" r:id="Rcd7c15550c694192"/>
   </p:sldMasterIdLst>
   <p:notesMasterIdLst>
-    <p:notesMasterId xmlns:r="http://schemas.openxmlformats.org/officeDocument/2006/relationships" r:id="Rdc93340fec654148"/>
+    <p:notesMasterId xmlns:r="http://schemas.openxmlformats.org/officeDocument/2006/relationships" r:id="R066f954fd2054f3e"/>
   </p:notesMasterIdLst>
   <p:sldIdLst>
-    <p:sldId xmlns:r="http://schemas.openxmlformats.org/officeDocument/2006/relationships" id="256" r:id="R93203bb4ca784b82"/>
-    <p:sldId xmlns:r="http://schemas.openxmlformats.org/officeDocument/2006/relationships" id="257" r:id="R0ca987cedb014f98"/>
-    <p:sldId xmlns:r="http://schemas.openxmlformats.org/officeDocument/2006/relationships" id="258" r:id="Redc741d5cb5f46b7"/>
-    <p:sldId xmlns:r="http://schemas.openxmlformats.org/officeDocument/2006/relationships" id="259" r:id="Red9b7cb8bb3a4fcb"/>
+    <p:sldId xmlns:r="http://schemas.openxmlformats.org/officeDocument/2006/relationships" id="256" r:id="Rdc0ca1a2234d4406"/>
+    <p:sldId xmlns:r="http://schemas.openxmlformats.org/officeDocument/2006/relationships" id="257" r:id="Reef764a09d5943b3"/>
+    <p:sldId xmlns:r="http://schemas.openxmlformats.org/officeDocument/2006/relationships" id="258" r:id="R465c7a2b31ed4402"/>
+    <p:sldId xmlns:r="http://schemas.openxmlformats.org/officeDocument/2006/relationships" id="259" r:id="R8c93694254284f2e"/>
+    <p:sldId xmlns:r="http://schemas.openxmlformats.org/officeDocument/2006/relationships" id="260" r:id="Rcd57b6c014124ca4"/>
   </p:sldIdLst>
   <p:sldSz cx="12192000" cy="6858000"/>
   <p:notesSz cx="6858000" cy="9144000"/>
@@ -685,6 +686,76 @@
 </p:notes>
 </file>
 
+<file path=ppt/notesSlides/notesSlide5.xml><?xml version="1.0" encoding="utf-8"?>
+<p:notes xmlns:p="http://schemas.openxmlformats.org/presentationml/2006/main">
+  <p:cSld>
+    <p:spTree>
+      <p:nvGrpSpPr>
+        <p:cNvPr id="1" name=""/>
+        <p:cNvGrpSpPr/>
+        <p:nvPr/>
+      </p:nvGrpSpPr>
+      <p:grpSpPr>
+        <a:xfrm xmlns:a="http://schemas.openxmlformats.org/drawingml/2006/main"/>
+      </p:grpSpPr>
+      <p:sp>
+        <p:nvSpPr>
+          <p:cNvPr id="2" name="Slide Image Placeholder 1"/>
+          <p:cNvSpPr>
+            <a:spLocks xmlns:a="http://schemas.openxmlformats.org/drawingml/2006/main" noGrp="1"/>
+          </p:cNvSpPr>
+          <p:nvPr>
+            <p:ph type="sldImg" idx="0"/>
+          </p:nvPr>
+        </p:nvSpPr>
+        <p:spPr/>
+      </p:sp>
+      <p:sp>
+        <p:nvSpPr>
+          <p:cNvPr id="3" name="Notes Placeholder 2"/>
+          <p:cNvSpPr>
+            <a:spLocks xmlns:a="http://schemas.openxmlformats.org/drawingml/2006/main" noGrp="1"/>
+          </p:cNvSpPr>
+          <p:nvPr>
+            <p:ph type="body" idx="1"/>
+          </p:nvPr>
+        </p:nvSpPr>
+        <p:spPr/>
+        <p:txBody>
+          <a:bodyPr xmlns:a="http://schemas.openxmlformats.org/drawingml/2006/main"/>
+          <a:lstStyle xmlns:a="http://schemas.openxmlformats.org/drawingml/2006/main"/>
+          <a:p xmlns:a="http://schemas.openxmlformats.org/drawingml/2006/main">
+            <a:r>
+              <a:t>Present the recommended path. In the short term, pilot pre-discharge risk scoring, close follow-up documentation gaps, and align dashboard KPIs. In the longer term, expand targeted care coordination and track ROI, penalty exposure, and model performance monthly. The expected scenario estimates $1.75 million in implementation cost, 518 avoided readmissions, $8.81 million in net savings, and a 5.03x ROI. Close by naming the major risks: adoption, documentation quality, and financial assumption validation.</a:t>
+            </a:r>
+          </a:p>
+        </p:txBody>
+      </p:sp>
+      <p:sp>
+        <p:nvSpPr>
+          <p:cNvPr id="4" name="Slide Number Placeholder 3"/>
+          <p:cNvSpPr>
+            <a:spLocks xmlns:a="http://schemas.openxmlformats.org/drawingml/2006/main" noGrp="1"/>
+          </p:cNvSpPr>
+          <p:nvPr>
+            <p:ph type="sldNum" idx="5"/>
+          </p:nvPr>
+        </p:nvSpPr>
+        <p:spPr/>
+        <p:txBody>
+          <a:bodyPr xmlns:a="http://schemas.openxmlformats.org/drawingml/2006/main"/>
+          <a:lstStyle xmlns:a="http://schemas.openxmlformats.org/drawingml/2006/main"/>
+          <a:p xmlns:a="http://schemas.openxmlformats.org/drawingml/2006/main"/>
+        </p:txBody>
+      </p:sp>
+    </p:spTree>
+  </p:cSld>
+  <p:clrMapOvr>
+    <a:masterClrMapping xmlns:a="http://schemas.openxmlformats.org/drawingml/2006/main"/>
+  </p:clrMapOvr>
+</p:notes>
+</file>
+
 <file path=ppt/slideLayouts/slideLayout1.xml><?xml version="1.0" encoding="utf-8"?>
 <p:sldLayout xmlns:p="http://schemas.openxmlformats.org/presentationml/2006/main" type="title">
   <p:cSld name="Title Slide">
@@ -723,7 +794,7 @@
   </p:cSld>
   <p:clrMap bg1="lt1" tx1="dk1" bg2="lt2" tx2="dk2" accent1="accent1" accent2="accent2" accent3="accent3" accent4="accent4" accent5="accent5" accent6="accent6" hlink="hlink" folHlink="folHlink"/>
   <p:sldLayoutIdLst>
-    <p:sldLayoutId xmlns:r="http://schemas.openxmlformats.org/officeDocument/2006/relationships" id="2147483649" r:id="Rfab8b5b54975464b"/>
+    <p:sldLayoutId xmlns:r="http://schemas.openxmlformats.org/officeDocument/2006/relationships" id="2147483649" r:id="R880a254c02cb4e24"/>
   </p:sldLayoutIdLst>
   <p:txStyles>
     <p:titleStyle>
@@ -2390,7 +2461,7 @@
           <p:cNvPr id="22" name="">
             <a:extLst xmlns:a="http://schemas.openxmlformats.org/drawingml/2006/main">
               <a:ext uri="{FF2B5EF4-FFF2-40B4-BE49-F238E27FC236}">
-                <a16:creationId xmlns:a16="http://schemas.microsoft.com/office/drawing/2014/main" id="{840958B4-1550-4B8A-997E-AE80BD142712}"/>
+                <a16:creationId xmlns:a16="http://schemas.microsoft.com/office/drawing/2014/main" id="{606E2580-DC82-4E07-B0F0-E1C57EE64C8C}"/>
               </a:ext>
             </a:extLst>
           </p:cNvPr>
@@ -2421,7 +2492,7 @@
           <p:cNvPr id="2" name="">
             <a:extLst xmlns:a="http://schemas.openxmlformats.org/drawingml/2006/main">
               <a:ext uri="{FF2B5EF4-FFF2-40B4-BE49-F238E27FC236}">
-                <a16:creationId xmlns:a16="http://schemas.microsoft.com/office/drawing/2014/main" id="{E4534141-7F0F-4F4B-A4BA-9BC50C6C1CEF}"/>
+                <a16:creationId xmlns:a16="http://schemas.microsoft.com/office/drawing/2014/main" id="{D695F6CE-FFE7-4BB0-B411-93D95E572BF2}"/>
               </a:ext>
             </a:extLst>
           </p:cNvPr>
@@ -2479,7 +2550,7 @@
           <p:cNvPr id="3" name="">
             <a:extLst xmlns:a="http://schemas.openxmlformats.org/drawingml/2006/main">
               <a:ext uri="{FF2B5EF4-FFF2-40B4-BE49-F238E27FC236}">
-                <a16:creationId xmlns:a16="http://schemas.microsoft.com/office/drawing/2014/main" id="{621ABB3A-A66B-404C-B66A-BB5F398DFE6D}"/>
+                <a16:creationId xmlns:a16="http://schemas.microsoft.com/office/drawing/2014/main" id="{BA35BF8A-D15E-42B7-ADC8-1964916838E9}"/>
               </a:ext>
             </a:extLst>
           </p:cNvPr>
@@ -2537,7 +2608,7 @@
           <p:cNvPr id="4" name="">
             <a:extLst xmlns:a="http://schemas.openxmlformats.org/drawingml/2006/main">
               <a:ext uri="{FF2B5EF4-FFF2-40B4-BE49-F238E27FC236}">
-                <a16:creationId xmlns:a16="http://schemas.microsoft.com/office/drawing/2014/main" id="{79CF29B1-FD1D-4596-A35C-CF2E7CC1DD52}"/>
+                <a16:creationId xmlns:a16="http://schemas.microsoft.com/office/drawing/2014/main" id="{317A2D8E-FB4B-41CC-977D-D31E5679FA66}"/>
               </a:ext>
             </a:extLst>
           </p:cNvPr>
@@ -2577,7 +2648,7 @@
           <p:cNvPr id="5" name="">
             <a:extLst xmlns:a="http://schemas.openxmlformats.org/drawingml/2006/main">
               <a:ext uri="{FF2B5EF4-FFF2-40B4-BE49-F238E27FC236}">
-                <a16:creationId xmlns:a16="http://schemas.microsoft.com/office/drawing/2014/main" id="{1179516A-3953-47DC-9FB1-1A5CA96F1743}"/>
+                <a16:creationId xmlns:a16="http://schemas.microsoft.com/office/drawing/2014/main" id="{3DD25391-40B4-42B2-9330-FF5DEF89F04F}"/>
               </a:ext>
             </a:extLst>
           </p:cNvPr>
@@ -2608,7 +2679,7 @@
           <p:cNvPr id="6" name="">
             <a:extLst xmlns:a="http://schemas.openxmlformats.org/drawingml/2006/main">
               <a:ext uri="{FF2B5EF4-FFF2-40B4-BE49-F238E27FC236}">
-                <a16:creationId xmlns:a16="http://schemas.microsoft.com/office/drawing/2014/main" id="{911F4F45-399F-445C-8698-66C52DC9A195}"/>
+                <a16:creationId xmlns:a16="http://schemas.microsoft.com/office/drawing/2014/main" id="{6F73BC7B-B9D4-4EAD-899C-5D46DC932898}"/>
               </a:ext>
             </a:extLst>
           </p:cNvPr>
@@ -2666,7 +2737,7 @@
           <p:cNvPr id="7" name="">
             <a:extLst xmlns:a="http://schemas.openxmlformats.org/drawingml/2006/main">
               <a:ext uri="{FF2B5EF4-FFF2-40B4-BE49-F238E27FC236}">
-                <a16:creationId xmlns:a16="http://schemas.microsoft.com/office/drawing/2014/main" id="{160A3781-174D-446D-AEE7-5CC33A3F801A}"/>
+                <a16:creationId xmlns:a16="http://schemas.microsoft.com/office/drawing/2014/main" id="{1229ECF0-8451-42D1-981B-D5EAF4C59638}"/>
               </a:ext>
             </a:extLst>
           </p:cNvPr>
@@ -2972,7 +3043,7 @@
           <p:cNvPr id="9" name="">
             <a:extLst xmlns:a="http://schemas.openxmlformats.org/drawingml/2006/main">
               <a:ext uri="{FF2B5EF4-FFF2-40B4-BE49-F238E27FC236}">
-                <a16:creationId xmlns:a16="http://schemas.microsoft.com/office/drawing/2014/main" id="{FEDE8069-3F1A-4E43-A2D0-61E028E57AB7}"/>
+                <a16:creationId xmlns:a16="http://schemas.microsoft.com/office/drawing/2014/main" id="{DD9E160F-55EA-441F-9727-52BBC96B2753}"/>
               </a:ext>
             </a:extLst>
           </p:cNvPr>
@@ -3030,7 +3101,7 @@
           <p:cNvPr id="10" name="">
             <a:extLst xmlns:a="http://schemas.openxmlformats.org/drawingml/2006/main">
               <a:ext uri="{FF2B5EF4-FFF2-40B4-BE49-F238E27FC236}">
-                <a16:creationId xmlns:a16="http://schemas.microsoft.com/office/drawing/2014/main" id="{F56439E0-A195-4924-9A4E-F13465DEAEAC}"/>
+                <a16:creationId xmlns:a16="http://schemas.microsoft.com/office/drawing/2014/main" id="{296060D4-6312-4B83-A1A7-6406E585F7C6}"/>
               </a:ext>
             </a:extLst>
           </p:cNvPr>
@@ -3099,7 +3170,7 @@
         </p:xfrm>
         <a:graphic xmlns:a="http://schemas.openxmlformats.org/drawingml/2006/main">
           <a:graphicData uri="http://schemas.openxmlformats.org/drawingml/2006/chart">
-            <c:chart xmlns:r="http://schemas.openxmlformats.org/officeDocument/2006/relationships" xmlns:c="http://schemas.openxmlformats.org/drawingml/2006/chart" r:id="Rf0fcadf4c1644f50"/>
+            <c:chart xmlns:r="http://schemas.openxmlformats.org/officeDocument/2006/relationships" xmlns:c="http://schemas.openxmlformats.org/drawingml/2006/chart" r:id="Rf51abda887bb431f"/>
           </a:graphicData>
         </a:graphic>
       </p:graphicFrame>
@@ -3108,7 +3179,7 @@
           <p:cNvPr id="12" name="">
             <a:extLst xmlns:a="http://schemas.openxmlformats.org/drawingml/2006/main">
               <a:ext uri="{FF2B5EF4-FFF2-40B4-BE49-F238E27FC236}">
-                <a16:creationId xmlns:a16="http://schemas.microsoft.com/office/drawing/2014/main" id="{69E775F8-1E87-4F40-A977-0E08ED4F8D8A}"/>
+                <a16:creationId xmlns:a16="http://schemas.microsoft.com/office/drawing/2014/main" id="{025F2AA4-4024-40D7-A0B4-4E57BA509B85}"/>
               </a:ext>
             </a:extLst>
           </p:cNvPr>
@@ -3166,7 +3237,7 @@
           <p:cNvPr id="13" name="">
             <a:extLst xmlns:a="http://schemas.openxmlformats.org/drawingml/2006/main">
               <a:ext uri="{FF2B5EF4-FFF2-40B4-BE49-F238E27FC236}">
-                <a16:creationId xmlns:a16="http://schemas.microsoft.com/office/drawing/2014/main" id="{F3998250-408D-437E-BDF9-BD42097F2A51}"/>
+                <a16:creationId xmlns:a16="http://schemas.microsoft.com/office/drawing/2014/main" id="{357BF4C1-91BD-4BF8-B61B-6A7BF8A66FD1}"/>
               </a:ext>
             </a:extLst>
           </p:cNvPr>
@@ -3197,7 +3268,7 @@
           <p:cNvPr id="14" name="">
             <a:extLst xmlns:a="http://schemas.openxmlformats.org/drawingml/2006/main">
               <a:ext uri="{FF2B5EF4-FFF2-40B4-BE49-F238E27FC236}">
-                <a16:creationId xmlns:a16="http://schemas.microsoft.com/office/drawing/2014/main" id="{980B1D63-3E53-4D04-8373-C27589FDF00A}"/>
+                <a16:creationId xmlns:a16="http://schemas.microsoft.com/office/drawing/2014/main" id="{BBF4EA0A-03CA-4A00-84B9-417595EE7D36}"/>
               </a:ext>
             </a:extLst>
           </p:cNvPr>
@@ -3725,7 +3796,7 @@
           <p:cNvPr id="16" name="">
             <a:extLst xmlns:a="http://schemas.openxmlformats.org/drawingml/2006/main">
               <a:ext uri="{FF2B5EF4-FFF2-40B4-BE49-F238E27FC236}">
-                <a16:creationId xmlns:a16="http://schemas.microsoft.com/office/drawing/2014/main" id="{7627B2E6-0BD7-4692-BBD1-4033C16A477C}"/>
+                <a16:creationId xmlns:a16="http://schemas.microsoft.com/office/drawing/2014/main" id="{A860BB2A-D996-43B3-B649-2838410A85BA}"/>
               </a:ext>
             </a:extLst>
           </p:cNvPr>
@@ -3783,7 +3854,7 @@
           <p:cNvPr id="17" name="">
             <a:extLst xmlns:a="http://schemas.openxmlformats.org/drawingml/2006/main">
               <a:ext uri="{FF2B5EF4-FFF2-40B4-BE49-F238E27FC236}">
-                <a16:creationId xmlns:a16="http://schemas.microsoft.com/office/drawing/2014/main" id="{329D8282-2D32-47BA-B131-EE5292EC5901}"/>
+                <a16:creationId xmlns:a16="http://schemas.microsoft.com/office/drawing/2014/main" id="{CC4E949B-6F6B-4269-B210-EF22F5D4694D}"/>
               </a:ext>
             </a:extLst>
           </p:cNvPr>
@@ -3938,7 +4009,7 @@
           <p:cNvPr id="18" name="">
             <a:extLst xmlns:a="http://schemas.openxmlformats.org/drawingml/2006/main">
               <a:ext uri="{FF2B5EF4-FFF2-40B4-BE49-F238E27FC236}">
-                <a16:creationId xmlns:a16="http://schemas.microsoft.com/office/drawing/2014/main" id="{453C664F-E163-44F2-8CB1-EE18DA7671D3}"/>
+                <a16:creationId xmlns:a16="http://schemas.microsoft.com/office/drawing/2014/main" id="{460ED8ED-FAB3-4AEF-B93A-4C9A379C29EC}"/>
               </a:ext>
             </a:extLst>
           </p:cNvPr>
@@ -3996,7 +4067,7 @@
           <p:cNvPr id="19" name="">
             <a:extLst xmlns:a="http://schemas.openxmlformats.org/drawingml/2006/main">
               <a:ext uri="{FF2B5EF4-FFF2-40B4-BE49-F238E27FC236}">
-                <a16:creationId xmlns:a16="http://schemas.microsoft.com/office/drawing/2014/main" id="{E75AECFA-D892-4198-BBB4-71F25B9CE08E}"/>
+                <a16:creationId xmlns:a16="http://schemas.microsoft.com/office/drawing/2014/main" id="{CCDFDF6E-5126-4C40-A56F-F5EAF3109DBD}"/>
               </a:ext>
             </a:extLst>
           </p:cNvPr>
@@ -4058,7 +4129,7 @@
           <p:cNvPr id="20" name="">
             <a:extLst xmlns:a="http://schemas.openxmlformats.org/drawingml/2006/main">
               <a:ext uri="{FF2B5EF4-FFF2-40B4-BE49-F238E27FC236}">
-                <a16:creationId xmlns:a16="http://schemas.microsoft.com/office/drawing/2014/main" id="{1120F8E1-0036-4450-BCBF-EB64B6B713EF}"/>
+                <a16:creationId xmlns:a16="http://schemas.microsoft.com/office/drawing/2014/main" id="{A89D705D-D518-4A90-96A5-001EE77B71E7}"/>
               </a:ext>
             </a:extLst>
           </p:cNvPr>
@@ -4120,7 +4191,7 @@
           <p:cNvPr id="21" name="">
             <a:extLst xmlns:a="http://schemas.openxmlformats.org/drawingml/2006/main">
               <a:ext uri="{FF2B5EF4-FFF2-40B4-BE49-F238E27FC236}">
-                <a16:creationId xmlns:a16="http://schemas.microsoft.com/office/drawing/2014/main" id="{33BF9946-63B2-47DE-872C-8E89A9694701}"/>
+                <a16:creationId xmlns:a16="http://schemas.microsoft.com/office/drawing/2014/main" id="{92DB43B1-54DB-484D-AF20-025EFFF5CAE3}"/>
               </a:ext>
             </a:extLst>
           </p:cNvPr>
@@ -4176,7 +4247,7 @@
     </p:spTree>
     <p:extLst>
       <p:ext uri="{BB962C8B-B14F-4D97-AF65-F5344CB8AC3E}">
-        <p14:creationId xmlns:p14="http://schemas.microsoft.com/office/powerpoint/2010/main" val="1131303972"/>
+        <p14:creationId xmlns:p14="http://schemas.microsoft.com/office/powerpoint/2010/main" val="1410948838"/>
       </p:ext>
     </p:extLst>
   </p:cSld>
@@ -4207,7 +4278,7 @@
           <p:cNvPr id="21" name="">
             <a:extLst xmlns:a="http://schemas.openxmlformats.org/drawingml/2006/main">
               <a:ext uri="{FF2B5EF4-FFF2-40B4-BE49-F238E27FC236}">
-                <a16:creationId xmlns:a16="http://schemas.microsoft.com/office/drawing/2014/main" id="{CDD6A91A-DF1C-4916-94FA-02141E7E4D28}"/>
+                <a16:creationId xmlns:a16="http://schemas.microsoft.com/office/drawing/2014/main" id="{898D0177-C3E3-4EB0-89A1-1641E9F5DF1B}"/>
               </a:ext>
             </a:extLst>
           </p:cNvPr>
@@ -4238,7 +4309,7 @@
           <p:cNvPr id="2" name="">
             <a:extLst xmlns:a="http://schemas.openxmlformats.org/drawingml/2006/main">
               <a:ext uri="{FF2B5EF4-FFF2-40B4-BE49-F238E27FC236}">
-                <a16:creationId xmlns:a16="http://schemas.microsoft.com/office/drawing/2014/main" id="{43EA5A1B-C4B4-42E9-81B9-A8D520CB1AD0}"/>
+                <a16:creationId xmlns:a16="http://schemas.microsoft.com/office/drawing/2014/main" id="{03746EF9-4F03-4EF6-9988-14E903B1DF37}"/>
               </a:ext>
             </a:extLst>
           </p:cNvPr>
@@ -4296,7 +4367,7 @@
           <p:cNvPr id="3" name="">
             <a:extLst xmlns:a="http://schemas.openxmlformats.org/drawingml/2006/main">
               <a:ext uri="{FF2B5EF4-FFF2-40B4-BE49-F238E27FC236}">
-                <a16:creationId xmlns:a16="http://schemas.microsoft.com/office/drawing/2014/main" id="{60A211A8-DC06-47B9-854F-CA7CC9D094F1}"/>
+                <a16:creationId xmlns:a16="http://schemas.microsoft.com/office/drawing/2014/main" id="{DB15A1B3-5E2F-41B8-A15A-E6FE61617BD0}"/>
               </a:ext>
             </a:extLst>
           </p:cNvPr>
@@ -4354,7 +4425,7 @@
           <p:cNvPr id="4" name="">
             <a:extLst xmlns:a="http://schemas.openxmlformats.org/drawingml/2006/main">
               <a:ext uri="{FF2B5EF4-FFF2-40B4-BE49-F238E27FC236}">
-                <a16:creationId xmlns:a16="http://schemas.microsoft.com/office/drawing/2014/main" id="{6CB4E249-947A-49C9-AADD-A9488EFE1829}"/>
+                <a16:creationId xmlns:a16="http://schemas.microsoft.com/office/drawing/2014/main" id="{BF0795ED-11BC-4B40-9B36-5208B807505B}"/>
               </a:ext>
             </a:extLst>
           </p:cNvPr>
@@ -4412,7 +4483,7 @@
           <p:cNvPr id="5" name="">
             <a:extLst xmlns:a="http://schemas.openxmlformats.org/drawingml/2006/main">
               <a:ext uri="{FF2B5EF4-FFF2-40B4-BE49-F238E27FC236}">
-                <a16:creationId xmlns:a16="http://schemas.microsoft.com/office/drawing/2014/main" id="{0D15AA0C-8CC5-42EB-B253-6D7CDB61E4FA}"/>
+                <a16:creationId xmlns:a16="http://schemas.microsoft.com/office/drawing/2014/main" id="{5C4D61CF-651D-49FE-AEEA-68B48B734BA8}"/>
               </a:ext>
             </a:extLst>
           </p:cNvPr>
@@ -4687,7 +4758,7 @@
           <p:cNvPr id="7" name="">
             <a:extLst xmlns:a="http://schemas.openxmlformats.org/drawingml/2006/main">
               <a:ext uri="{FF2B5EF4-FFF2-40B4-BE49-F238E27FC236}">
-                <a16:creationId xmlns:a16="http://schemas.microsoft.com/office/drawing/2014/main" id="{2115EF24-EBAD-499B-9D6B-4299E5134AAE}"/>
+                <a16:creationId xmlns:a16="http://schemas.microsoft.com/office/drawing/2014/main" id="{F0402867-5A24-4721-B439-3AF9D7A10B37}"/>
               </a:ext>
             </a:extLst>
           </p:cNvPr>
@@ -4718,7 +4789,7 @@
           <p:cNvPr id="8" name="">
             <a:extLst xmlns:a="http://schemas.openxmlformats.org/drawingml/2006/main">
               <a:ext uri="{FF2B5EF4-FFF2-40B4-BE49-F238E27FC236}">
-                <a16:creationId xmlns:a16="http://schemas.microsoft.com/office/drawing/2014/main" id="{D18472F2-7FF3-4F6F-9106-68B48298A785}"/>
+                <a16:creationId xmlns:a16="http://schemas.microsoft.com/office/drawing/2014/main" id="{8FCBBE16-C64C-41B3-8CC4-3ED12B27CA9F}"/>
               </a:ext>
             </a:extLst>
           </p:cNvPr>
@@ -5297,7 +5368,7 @@
           <p:cNvPr id="10" name="">
             <a:extLst xmlns:a="http://schemas.openxmlformats.org/drawingml/2006/main">
               <a:ext uri="{FF2B5EF4-FFF2-40B4-BE49-F238E27FC236}">
-                <a16:creationId xmlns:a16="http://schemas.microsoft.com/office/drawing/2014/main" id="{6976DC48-01D1-497C-8BB5-25F84D0D2E26}"/>
+                <a16:creationId xmlns:a16="http://schemas.microsoft.com/office/drawing/2014/main" id="{AF50E18D-9567-4659-8FCF-F72B84B1D65E}"/>
               </a:ext>
             </a:extLst>
           </p:cNvPr>
@@ -5359,7 +5430,7 @@
           <p:cNvPr id="11" name="">
             <a:extLst xmlns:a="http://schemas.openxmlformats.org/drawingml/2006/main">
               <a:ext uri="{FF2B5EF4-FFF2-40B4-BE49-F238E27FC236}">
-                <a16:creationId xmlns:a16="http://schemas.microsoft.com/office/drawing/2014/main" id="{CE428306-5EC9-408E-BAB8-08CB472513B5}"/>
+                <a16:creationId xmlns:a16="http://schemas.microsoft.com/office/drawing/2014/main" id="{304F1B4E-2614-4BBD-91B6-E6E221F688C6}"/>
               </a:ext>
             </a:extLst>
           </p:cNvPr>
@@ -5424,7 +5495,7 @@
         </p:xfrm>
         <a:graphic xmlns:a="http://schemas.openxmlformats.org/drawingml/2006/main">
           <a:graphicData uri="http://schemas.openxmlformats.org/drawingml/2006/chart">
-            <c:chart xmlns:r="http://schemas.openxmlformats.org/officeDocument/2006/relationships" xmlns:c="http://schemas.openxmlformats.org/drawingml/2006/chart" r:id="Rcd094564a20d409a"/>
+            <c:chart xmlns:r="http://schemas.openxmlformats.org/officeDocument/2006/relationships" xmlns:c="http://schemas.openxmlformats.org/drawingml/2006/chart" r:id="R7a90cc35ad0f46be"/>
           </a:graphicData>
         </a:graphic>
       </p:graphicFrame>
@@ -5433,7 +5504,7 @@
           <p:cNvPr id="13" name="">
             <a:extLst xmlns:a="http://schemas.openxmlformats.org/drawingml/2006/main">
               <a:ext uri="{FF2B5EF4-FFF2-40B4-BE49-F238E27FC236}">
-                <a16:creationId xmlns:a16="http://schemas.microsoft.com/office/drawing/2014/main" id="{53AE3BAE-B9B4-413C-8AE1-11B983C99058}"/>
+                <a16:creationId xmlns:a16="http://schemas.microsoft.com/office/drawing/2014/main" id="{6E50017F-6762-45C8-BFA4-89706D5C2188}"/>
               </a:ext>
             </a:extLst>
           </p:cNvPr>
@@ -5491,7 +5562,7 @@
           <p:cNvPr id="14" name="">
             <a:extLst xmlns:a="http://schemas.openxmlformats.org/drawingml/2006/main">
               <a:ext uri="{FF2B5EF4-FFF2-40B4-BE49-F238E27FC236}">
-                <a16:creationId xmlns:a16="http://schemas.microsoft.com/office/drawing/2014/main" id="{5C42A6B2-DB5D-4D78-9162-EE2FCA32B2A8}"/>
+                <a16:creationId xmlns:a16="http://schemas.microsoft.com/office/drawing/2014/main" id="{F4D1B179-7E99-4138-9009-1553E0EAB6A9}"/>
               </a:ext>
             </a:extLst>
           </p:cNvPr>
@@ -5556,7 +5627,7 @@
         </p:xfrm>
         <a:graphic xmlns:a="http://schemas.openxmlformats.org/drawingml/2006/main">
           <a:graphicData uri="http://schemas.openxmlformats.org/drawingml/2006/chart">
-            <c:chart xmlns:r="http://schemas.openxmlformats.org/officeDocument/2006/relationships" xmlns:c="http://schemas.openxmlformats.org/drawingml/2006/chart" r:id="Rd276613a7b99405a"/>
+            <c:chart xmlns:r="http://schemas.openxmlformats.org/officeDocument/2006/relationships" xmlns:c="http://schemas.openxmlformats.org/drawingml/2006/chart" r:id="Re82274e37e864c11"/>
           </a:graphicData>
         </a:graphic>
       </p:graphicFrame>
@@ -5565,7 +5636,7 @@
           <p:cNvPr id="16" name="">
             <a:extLst xmlns:a="http://schemas.openxmlformats.org/drawingml/2006/main">
               <a:ext uri="{FF2B5EF4-FFF2-40B4-BE49-F238E27FC236}">
-                <a16:creationId xmlns:a16="http://schemas.microsoft.com/office/drawing/2014/main" id="{DE278F89-0C81-44A3-9E7E-93D89928A935}"/>
+                <a16:creationId xmlns:a16="http://schemas.microsoft.com/office/drawing/2014/main" id="{34921299-E135-4E8F-B1E6-48EA37BB534C}"/>
               </a:ext>
             </a:extLst>
           </p:cNvPr>
@@ -5627,7 +5698,7 @@
           <p:cNvPr id="17" name="">
             <a:extLst xmlns:a="http://schemas.openxmlformats.org/drawingml/2006/main">
               <a:ext uri="{FF2B5EF4-FFF2-40B4-BE49-F238E27FC236}">
-                <a16:creationId xmlns:a16="http://schemas.microsoft.com/office/drawing/2014/main" id="{ED6B5336-8658-488D-BD7D-2F5B33F95132}"/>
+                <a16:creationId xmlns:a16="http://schemas.microsoft.com/office/drawing/2014/main" id="{7540CB38-5626-417E-8D5F-E226F235290E}"/>
               </a:ext>
             </a:extLst>
           </p:cNvPr>
@@ -5658,7 +5729,7 @@
           <p:cNvPr id="18" name="">
             <a:extLst xmlns:a="http://schemas.openxmlformats.org/drawingml/2006/main">
               <a:ext uri="{FF2B5EF4-FFF2-40B4-BE49-F238E27FC236}">
-                <a16:creationId xmlns:a16="http://schemas.microsoft.com/office/drawing/2014/main" id="{6D2B291C-CB48-479B-B381-93A8BA222395}"/>
+                <a16:creationId xmlns:a16="http://schemas.microsoft.com/office/drawing/2014/main" id="{2E3D65CC-E374-4074-9DB2-8B2A02F63556}"/>
               </a:ext>
             </a:extLst>
           </p:cNvPr>
@@ -5716,7 +5787,7 @@
           <p:cNvPr id="19" name="">
             <a:extLst xmlns:a="http://schemas.openxmlformats.org/drawingml/2006/main">
               <a:ext uri="{FF2B5EF4-FFF2-40B4-BE49-F238E27FC236}">
-                <a16:creationId xmlns:a16="http://schemas.microsoft.com/office/drawing/2014/main" id="{6E9E404C-2026-4B70-BDD0-0648FB87FAAD}"/>
+                <a16:creationId xmlns:a16="http://schemas.microsoft.com/office/drawing/2014/main" id="{08946074-F8F0-4F6A-A346-7B47FEF48D5F}"/>
               </a:ext>
             </a:extLst>
           </p:cNvPr>
@@ -5774,7 +5845,7 @@
           <p:cNvPr id="20" name="">
             <a:extLst xmlns:a="http://schemas.openxmlformats.org/drawingml/2006/main">
               <a:ext uri="{FF2B5EF4-FFF2-40B4-BE49-F238E27FC236}">
-                <a16:creationId xmlns:a16="http://schemas.microsoft.com/office/drawing/2014/main" id="{AFB96C95-DF0F-46F4-9A20-DA4674B33A43}"/>
+                <a16:creationId xmlns:a16="http://schemas.microsoft.com/office/drawing/2014/main" id="{423DB0D5-DD70-44FB-8C46-F60FA4B6EB37}"/>
               </a:ext>
             </a:extLst>
           </p:cNvPr>
@@ -5830,7 +5901,7 @@
     </p:spTree>
     <p:extLst>
       <p:ext uri="{BB962C8B-B14F-4D97-AF65-F5344CB8AC3E}">
-        <p14:creationId xmlns:p14="http://schemas.microsoft.com/office/powerpoint/2010/main" val="1990438380"/>
+        <p14:creationId xmlns:p14="http://schemas.microsoft.com/office/powerpoint/2010/main" val="24911965"/>
       </p:ext>
     </p:extLst>
   </p:cSld>
@@ -5861,7 +5932,7 @@
           <p:cNvPr id="28" name="">
             <a:extLst xmlns:a="http://schemas.openxmlformats.org/drawingml/2006/main">
               <a:ext uri="{FF2B5EF4-FFF2-40B4-BE49-F238E27FC236}">
-                <a16:creationId xmlns:a16="http://schemas.microsoft.com/office/drawing/2014/main" id="{F82FB901-EDFE-49BD-AC7E-B0A9EF87DFAF}"/>
+                <a16:creationId xmlns:a16="http://schemas.microsoft.com/office/drawing/2014/main" id="{3EADE791-1FCA-4A7C-988A-DC66C7251EC9}"/>
               </a:ext>
             </a:extLst>
           </p:cNvPr>
@@ -5892,7 +5963,7 @@
           <p:cNvPr id="2" name="">
             <a:extLst xmlns:a="http://schemas.openxmlformats.org/drawingml/2006/main">
               <a:ext uri="{FF2B5EF4-FFF2-40B4-BE49-F238E27FC236}">
-                <a16:creationId xmlns:a16="http://schemas.microsoft.com/office/drawing/2014/main" id="{AC736904-BC1E-4E63-AD38-5C588E1C6164}"/>
+                <a16:creationId xmlns:a16="http://schemas.microsoft.com/office/drawing/2014/main" id="{C62B1A9E-7F6D-4B86-A424-C21C7BBB629A}"/>
               </a:ext>
             </a:extLst>
           </p:cNvPr>
@@ -5950,7 +6021,7 @@
           <p:cNvPr id="3" name="">
             <a:extLst xmlns:a="http://schemas.openxmlformats.org/drawingml/2006/main">
               <a:ext uri="{FF2B5EF4-FFF2-40B4-BE49-F238E27FC236}">
-                <a16:creationId xmlns:a16="http://schemas.microsoft.com/office/drawing/2014/main" id="{E8A8D4F3-74D4-4400-B8FF-DB7851B6CA31}"/>
+                <a16:creationId xmlns:a16="http://schemas.microsoft.com/office/drawing/2014/main" id="{0A5B2C4E-923B-4B81-B483-499EA8D9BDBD}"/>
               </a:ext>
             </a:extLst>
           </p:cNvPr>
@@ -6008,7 +6079,7 @@
           <p:cNvPr id="4" name="">
             <a:extLst xmlns:a="http://schemas.openxmlformats.org/drawingml/2006/main">
               <a:ext uri="{FF2B5EF4-FFF2-40B4-BE49-F238E27FC236}">
-                <a16:creationId xmlns:a16="http://schemas.microsoft.com/office/drawing/2014/main" id="{42F3AD27-9B89-4469-A4F5-423C79285F01}"/>
+                <a16:creationId xmlns:a16="http://schemas.microsoft.com/office/drawing/2014/main" id="{1203CE1E-4D56-475E-9673-1A7FE053537D}"/>
               </a:ext>
             </a:extLst>
           </p:cNvPr>
@@ -6066,7 +6137,7 @@
           <p:cNvPr id="5" name="">
             <a:extLst xmlns:a="http://schemas.openxmlformats.org/drawingml/2006/main">
               <a:ext uri="{FF2B5EF4-FFF2-40B4-BE49-F238E27FC236}">
-                <a16:creationId xmlns:a16="http://schemas.microsoft.com/office/drawing/2014/main" id="{568FEDEF-215A-4874-95BF-4A9CA2260A34}"/>
+                <a16:creationId xmlns:a16="http://schemas.microsoft.com/office/drawing/2014/main" id="{A6EE068A-C9F2-41F6-89E5-9887CCA81EF2}"/>
               </a:ext>
             </a:extLst>
           </p:cNvPr>
@@ -6097,7 +6168,7 @@
           <p:cNvPr id="6" name="">
             <a:extLst xmlns:a="http://schemas.openxmlformats.org/drawingml/2006/main">
               <a:ext uri="{FF2B5EF4-FFF2-40B4-BE49-F238E27FC236}">
-                <a16:creationId xmlns:a16="http://schemas.microsoft.com/office/drawing/2014/main" id="{12BA9839-ADE7-46E3-A8A0-65C67667948D}"/>
+                <a16:creationId xmlns:a16="http://schemas.microsoft.com/office/drawing/2014/main" id="{0F68A4D7-1511-47C5-B98A-5CFF9F121F1B}"/>
               </a:ext>
             </a:extLst>
           </p:cNvPr>
@@ -6155,7 +6226,7 @@
           <p:cNvPr id="7" name="">
             <a:extLst xmlns:a="http://schemas.openxmlformats.org/drawingml/2006/main">
               <a:ext uri="{FF2B5EF4-FFF2-40B4-BE49-F238E27FC236}">
-                <a16:creationId xmlns:a16="http://schemas.microsoft.com/office/drawing/2014/main" id="{DB240333-B84A-44C6-BBD6-430DFB29A117}"/>
+                <a16:creationId xmlns:a16="http://schemas.microsoft.com/office/drawing/2014/main" id="{08ED6BDF-493D-4FCB-A28B-9EC8837C158B}"/>
               </a:ext>
             </a:extLst>
           </p:cNvPr>
@@ -6217,7 +6288,7 @@
           <p:cNvPr id="8" name="">
             <a:extLst xmlns:a="http://schemas.openxmlformats.org/drawingml/2006/main">
               <a:ext uri="{FF2B5EF4-FFF2-40B4-BE49-F238E27FC236}">
-                <a16:creationId xmlns:a16="http://schemas.microsoft.com/office/drawing/2014/main" id="{DA54F51C-8AD2-46D0-881E-53E01D16943D}"/>
+                <a16:creationId xmlns:a16="http://schemas.microsoft.com/office/drawing/2014/main" id="{0A991127-B45B-483F-98FC-4A96A61FFC40}"/>
               </a:ext>
             </a:extLst>
           </p:cNvPr>
@@ -6282,7 +6353,7 @@
         </p:xfrm>
         <a:graphic xmlns:a="http://schemas.openxmlformats.org/drawingml/2006/main">
           <a:graphicData uri="http://schemas.openxmlformats.org/drawingml/2006/chart">
-            <c:chart xmlns:r="http://schemas.openxmlformats.org/officeDocument/2006/relationships" xmlns:c="http://schemas.openxmlformats.org/drawingml/2006/chart" r:id="R245aa5ae02df443f"/>
+            <c:chart xmlns:r="http://schemas.openxmlformats.org/officeDocument/2006/relationships" xmlns:c="http://schemas.openxmlformats.org/drawingml/2006/chart" r:id="R716022696a6246de"/>
           </a:graphicData>
         </a:graphic>
       </p:graphicFrame>
@@ -6291,7 +6362,7 @@
           <p:cNvPr id="10" name="">
             <a:extLst xmlns:a="http://schemas.openxmlformats.org/drawingml/2006/main">
               <a:ext uri="{FF2B5EF4-FFF2-40B4-BE49-F238E27FC236}">
-                <a16:creationId xmlns:a16="http://schemas.microsoft.com/office/drawing/2014/main" id="{551ED51A-28A9-4D7A-8510-9006C8E891E1}"/>
+                <a16:creationId xmlns:a16="http://schemas.microsoft.com/office/drawing/2014/main" id="{9F538C61-6FC7-482C-9ECC-10192492928A}"/>
               </a:ext>
             </a:extLst>
           </p:cNvPr>
@@ -6353,7 +6424,7 @@
           <p:cNvPr id="11" name="">
             <a:extLst xmlns:a="http://schemas.openxmlformats.org/drawingml/2006/main">
               <a:ext uri="{FF2B5EF4-FFF2-40B4-BE49-F238E27FC236}">
-                <a16:creationId xmlns:a16="http://schemas.microsoft.com/office/drawing/2014/main" id="{3CD2AA5C-AEE9-433F-A3D4-D2C7D18CD4AB}"/>
+                <a16:creationId xmlns:a16="http://schemas.microsoft.com/office/drawing/2014/main" id="{2271EDD3-C45B-4EEC-B8CD-D084362188B1}"/>
               </a:ext>
             </a:extLst>
           </p:cNvPr>
@@ -6384,7 +6455,7 @@
           <p:cNvPr id="12" name="">
             <a:extLst xmlns:a="http://schemas.openxmlformats.org/drawingml/2006/main">
               <a:ext uri="{FF2B5EF4-FFF2-40B4-BE49-F238E27FC236}">
-                <a16:creationId xmlns:a16="http://schemas.microsoft.com/office/drawing/2014/main" id="{E72C00FC-9D88-432E-86DC-20AAF3ABAB86}"/>
+                <a16:creationId xmlns:a16="http://schemas.microsoft.com/office/drawing/2014/main" id="{21175F49-C34F-43B6-ADF3-C9D0DEF5B36B}"/>
               </a:ext>
             </a:extLst>
           </p:cNvPr>
@@ -6442,7 +6513,7 @@
           <p:cNvPr id="13" name="">
             <a:extLst xmlns:a="http://schemas.openxmlformats.org/drawingml/2006/main">
               <a:ext uri="{FF2B5EF4-FFF2-40B4-BE49-F238E27FC236}">
-                <a16:creationId xmlns:a16="http://schemas.microsoft.com/office/drawing/2014/main" id="{90147ABA-D9E8-447E-A324-F57472B31894}"/>
+                <a16:creationId xmlns:a16="http://schemas.microsoft.com/office/drawing/2014/main" id="{2BB8C7A8-1FDC-4845-AC98-00098DA2C9AF}"/>
               </a:ext>
             </a:extLst>
           </p:cNvPr>
@@ -6500,7 +6571,7 @@
           <p:cNvPr id="14" name="">
             <a:extLst xmlns:a="http://schemas.openxmlformats.org/drawingml/2006/main">
               <a:ext uri="{FF2B5EF4-FFF2-40B4-BE49-F238E27FC236}">
-                <a16:creationId xmlns:a16="http://schemas.microsoft.com/office/drawing/2014/main" id="{E0518B7C-6CE7-4DF9-8E1A-A00AEC86FDBD}"/>
+                <a16:creationId xmlns:a16="http://schemas.microsoft.com/office/drawing/2014/main" id="{3978C81A-23E4-4917-AB16-737364BFCA3D}"/>
               </a:ext>
             </a:extLst>
           </p:cNvPr>
@@ -6625,7 +6696,7 @@
           <p:cNvPr id="15" name="">
             <a:extLst xmlns:a="http://schemas.openxmlformats.org/drawingml/2006/main">
               <a:ext uri="{FF2B5EF4-FFF2-40B4-BE49-F238E27FC236}">
-                <a16:creationId xmlns:a16="http://schemas.microsoft.com/office/drawing/2014/main" id="{9EA5B34B-8F5E-4AE9-8ECA-290D98A585CD}"/>
+                <a16:creationId xmlns:a16="http://schemas.microsoft.com/office/drawing/2014/main" id="{43C6B7AC-73B0-4103-9A11-AD2EC8185C5E}"/>
               </a:ext>
             </a:extLst>
           </p:cNvPr>
@@ -6687,7 +6758,7 @@
           <p:cNvPr id="16" name="">
             <a:extLst xmlns:a="http://schemas.openxmlformats.org/drawingml/2006/main">
               <a:ext uri="{FF2B5EF4-FFF2-40B4-BE49-F238E27FC236}">
-                <a16:creationId xmlns:a16="http://schemas.microsoft.com/office/drawing/2014/main" id="{3914B36D-59D6-440A-B9AF-3485FA226216}"/>
+                <a16:creationId xmlns:a16="http://schemas.microsoft.com/office/drawing/2014/main" id="{EA5E3F6E-1498-4AC3-A39A-06E139489B49}"/>
               </a:ext>
             </a:extLst>
           </p:cNvPr>
@@ -6745,7 +6816,7 @@
           <p:cNvPr id="17" name="">
             <a:extLst xmlns:a="http://schemas.openxmlformats.org/drawingml/2006/main">
               <a:ext uri="{FF2B5EF4-FFF2-40B4-BE49-F238E27FC236}">
-                <a16:creationId xmlns:a16="http://schemas.microsoft.com/office/drawing/2014/main" id="{0369827B-B173-4A5C-806B-4A63D4552BF0}"/>
+                <a16:creationId xmlns:a16="http://schemas.microsoft.com/office/drawing/2014/main" id="{3F464F23-1D9B-4382-9352-425347C15E34}"/>
               </a:ext>
             </a:extLst>
           </p:cNvPr>
@@ -6803,7 +6874,7 @@
           <p:cNvPr id="18" name="">
             <a:extLst xmlns:a="http://schemas.openxmlformats.org/drawingml/2006/main">
               <a:ext uri="{FF2B5EF4-FFF2-40B4-BE49-F238E27FC236}">
-                <a16:creationId xmlns:a16="http://schemas.microsoft.com/office/drawing/2014/main" id="{7E3DD76F-B37A-4E33-BAB9-29DC98C5CA7A}"/>
+                <a16:creationId xmlns:a16="http://schemas.microsoft.com/office/drawing/2014/main" id="{30B5F5CF-462A-48A1-A639-05B451F5FDF7}"/>
               </a:ext>
             </a:extLst>
           </p:cNvPr>
@@ -6928,7 +6999,7 @@
           <p:cNvPr id="19" name="">
             <a:extLst xmlns:a="http://schemas.openxmlformats.org/drawingml/2006/main">
               <a:ext uri="{FF2B5EF4-FFF2-40B4-BE49-F238E27FC236}">
-                <a16:creationId xmlns:a16="http://schemas.microsoft.com/office/drawing/2014/main" id="{AC97C2E5-4D8E-4BBD-9A0A-A3927DA4E83C}"/>
+                <a16:creationId xmlns:a16="http://schemas.microsoft.com/office/drawing/2014/main" id="{DACDED6B-8DC5-45F1-83E1-264326CD2B8A}"/>
               </a:ext>
             </a:extLst>
           </p:cNvPr>
@@ -6990,7 +7061,7 @@
           <p:cNvPr id="20" name="">
             <a:extLst xmlns:a="http://schemas.openxmlformats.org/drawingml/2006/main">
               <a:ext uri="{FF2B5EF4-FFF2-40B4-BE49-F238E27FC236}">
-                <a16:creationId xmlns:a16="http://schemas.microsoft.com/office/drawing/2014/main" id="{789D9F5B-862C-40C6-90FB-47859954EA9A}"/>
+                <a16:creationId xmlns:a16="http://schemas.microsoft.com/office/drawing/2014/main" id="{30DAE800-9A6B-49A3-87AB-ABA14BE843F7}"/>
               </a:ext>
             </a:extLst>
           </p:cNvPr>
@@ -7048,7 +7119,7 @@
           <p:cNvPr id="21" name="">
             <a:extLst xmlns:a="http://schemas.openxmlformats.org/drawingml/2006/main">
               <a:ext uri="{FF2B5EF4-FFF2-40B4-BE49-F238E27FC236}">
-                <a16:creationId xmlns:a16="http://schemas.microsoft.com/office/drawing/2014/main" id="{BCB435D4-31E8-489B-928D-C6BD3356E50D}"/>
+                <a16:creationId xmlns:a16="http://schemas.microsoft.com/office/drawing/2014/main" id="{D68C96DC-62C1-4BE8-BBB8-29677AEF5BF1}"/>
               </a:ext>
             </a:extLst>
           </p:cNvPr>
@@ -7106,7 +7177,7 @@
           <p:cNvPr id="22" name="">
             <a:extLst xmlns:a="http://schemas.openxmlformats.org/drawingml/2006/main">
               <a:ext uri="{FF2B5EF4-FFF2-40B4-BE49-F238E27FC236}">
-                <a16:creationId xmlns:a16="http://schemas.microsoft.com/office/drawing/2014/main" id="{30D3382D-AE19-4B18-A475-BDF394D6A43A}"/>
+                <a16:creationId xmlns:a16="http://schemas.microsoft.com/office/drawing/2014/main" id="{E2983D8D-9293-490D-B12A-34CAC20F705C}"/>
               </a:ext>
             </a:extLst>
           </p:cNvPr>
@@ -7231,7 +7302,7 @@
           <p:cNvPr id="23" name="">
             <a:extLst xmlns:a="http://schemas.openxmlformats.org/drawingml/2006/main">
               <a:ext uri="{FF2B5EF4-FFF2-40B4-BE49-F238E27FC236}">
-                <a16:creationId xmlns:a16="http://schemas.microsoft.com/office/drawing/2014/main" id="{76AE44BE-AAC9-42C8-9668-73F0BC33EA70}"/>
+                <a16:creationId xmlns:a16="http://schemas.microsoft.com/office/drawing/2014/main" id="{2887F7E1-1D91-46BF-B490-6E743004FB37}"/>
               </a:ext>
             </a:extLst>
           </p:cNvPr>
@@ -7293,7 +7364,7 @@
           <p:cNvPr id="24" name="">
             <a:extLst xmlns:a="http://schemas.openxmlformats.org/drawingml/2006/main">
               <a:ext uri="{FF2B5EF4-FFF2-40B4-BE49-F238E27FC236}">
-                <a16:creationId xmlns:a16="http://schemas.microsoft.com/office/drawing/2014/main" id="{91BA5935-7C24-4152-ADBF-097BDC50B47C}"/>
+                <a16:creationId xmlns:a16="http://schemas.microsoft.com/office/drawing/2014/main" id="{9FA2D58A-A98E-4FBF-9C39-185CECEFE8E5}"/>
               </a:ext>
             </a:extLst>
           </p:cNvPr>
@@ -7324,7 +7395,7 @@
           <p:cNvPr id="25" name="">
             <a:extLst xmlns:a="http://schemas.openxmlformats.org/drawingml/2006/main">
               <a:ext uri="{FF2B5EF4-FFF2-40B4-BE49-F238E27FC236}">
-                <a16:creationId xmlns:a16="http://schemas.microsoft.com/office/drawing/2014/main" id="{EC4E0C64-CD65-4107-8908-21CF8198861A}"/>
+                <a16:creationId xmlns:a16="http://schemas.microsoft.com/office/drawing/2014/main" id="{A9112A8D-E5F5-4168-A75C-10A3C0991098}"/>
               </a:ext>
             </a:extLst>
           </p:cNvPr>
@@ -7382,7 +7453,7 @@
           <p:cNvPr id="26" name="">
             <a:extLst xmlns:a="http://schemas.openxmlformats.org/drawingml/2006/main">
               <a:ext uri="{FF2B5EF4-FFF2-40B4-BE49-F238E27FC236}">
-                <a16:creationId xmlns:a16="http://schemas.microsoft.com/office/drawing/2014/main" id="{72C80FB7-128C-4602-A89A-751A0E7A9F67}"/>
+                <a16:creationId xmlns:a16="http://schemas.microsoft.com/office/drawing/2014/main" id="{7F5B5CCC-364B-4DA0-AAA3-ED4AB7153E94}"/>
               </a:ext>
             </a:extLst>
           </p:cNvPr>
@@ -7440,7 +7511,7 @@
           <p:cNvPr id="27" name="">
             <a:extLst xmlns:a="http://schemas.openxmlformats.org/drawingml/2006/main">
               <a:ext uri="{FF2B5EF4-FFF2-40B4-BE49-F238E27FC236}">
-                <a16:creationId xmlns:a16="http://schemas.microsoft.com/office/drawing/2014/main" id="{11473622-116B-4966-9E12-FA4810BFE9D7}"/>
+                <a16:creationId xmlns:a16="http://schemas.microsoft.com/office/drawing/2014/main" id="{354E71C7-99A9-414B-8D9F-9169CE2F9253}"/>
               </a:ext>
             </a:extLst>
           </p:cNvPr>
@@ -7496,7 +7567,7 @@
     </p:spTree>
     <p:extLst>
       <p:ext uri="{BB962C8B-B14F-4D97-AF65-F5344CB8AC3E}">
-        <p14:creationId xmlns:p14="http://schemas.microsoft.com/office/powerpoint/2010/main" val="1419618753"/>
+        <p14:creationId xmlns:p14="http://schemas.microsoft.com/office/powerpoint/2010/main" val="1325649716"/>
       </p:ext>
     </p:extLst>
   </p:cSld>
@@ -7527,7 +7598,7 @@
           <p:cNvPr id="19" name="">
             <a:extLst xmlns:a="http://schemas.openxmlformats.org/drawingml/2006/main">
               <a:ext uri="{FF2B5EF4-FFF2-40B4-BE49-F238E27FC236}">
-                <a16:creationId xmlns:a16="http://schemas.microsoft.com/office/drawing/2014/main" id="{3C25A798-3771-4638-89F8-17091B246AB2}"/>
+                <a16:creationId xmlns:a16="http://schemas.microsoft.com/office/drawing/2014/main" id="{D418F832-8C4E-49EB-91EE-AF7AA7D0FC66}"/>
               </a:ext>
             </a:extLst>
           </p:cNvPr>
@@ -7558,7 +7629,7 @@
           <p:cNvPr id="2" name="">
             <a:extLst xmlns:a="http://schemas.openxmlformats.org/drawingml/2006/main">
               <a:ext uri="{FF2B5EF4-FFF2-40B4-BE49-F238E27FC236}">
-                <a16:creationId xmlns:a16="http://schemas.microsoft.com/office/drawing/2014/main" id="{695FDFAA-A7B9-40CA-8AFD-B4376EE92CDC}"/>
+                <a16:creationId xmlns:a16="http://schemas.microsoft.com/office/drawing/2014/main" id="{FFC5D0AD-BAE6-4C80-AF50-258E710168EA}"/>
               </a:ext>
             </a:extLst>
           </p:cNvPr>
@@ -7616,7 +7687,7 @@
           <p:cNvPr id="3" name="">
             <a:extLst xmlns:a="http://schemas.openxmlformats.org/drawingml/2006/main">
               <a:ext uri="{FF2B5EF4-FFF2-40B4-BE49-F238E27FC236}">
-                <a16:creationId xmlns:a16="http://schemas.microsoft.com/office/drawing/2014/main" id="{1F74C329-C232-4D39-A7B4-386630AC687D}"/>
+                <a16:creationId xmlns:a16="http://schemas.microsoft.com/office/drawing/2014/main" id="{488BF421-9871-4B88-83DB-4AD77F72E603}"/>
               </a:ext>
             </a:extLst>
           </p:cNvPr>
@@ -7674,7 +7745,7 @@
           <p:cNvPr id="4" name="">
             <a:extLst xmlns:a="http://schemas.openxmlformats.org/drawingml/2006/main">
               <a:ext uri="{FF2B5EF4-FFF2-40B4-BE49-F238E27FC236}">
-                <a16:creationId xmlns:a16="http://schemas.microsoft.com/office/drawing/2014/main" id="{9B6E1582-D73E-4FFE-8DDF-09333EDBE1DB}"/>
+                <a16:creationId xmlns:a16="http://schemas.microsoft.com/office/drawing/2014/main" id="{D20119AB-EF87-4B3B-ADD8-24B640561BCD}"/>
               </a:ext>
             </a:extLst>
           </p:cNvPr>
@@ -7732,7 +7803,7 @@
           <p:cNvPr id="5" name="">
             <a:extLst xmlns:a="http://schemas.openxmlformats.org/drawingml/2006/main">
               <a:ext uri="{FF2B5EF4-FFF2-40B4-BE49-F238E27FC236}">
-                <a16:creationId xmlns:a16="http://schemas.microsoft.com/office/drawing/2014/main" id="{CEA368E6-A393-41E5-97E2-943E3761C363}"/>
+                <a16:creationId xmlns:a16="http://schemas.microsoft.com/office/drawing/2014/main" id="{D359FF68-50C9-4C88-9FD3-95D442FAD55A}"/>
               </a:ext>
             </a:extLst>
           </p:cNvPr>
@@ -7763,7 +7834,7 @@
           <p:cNvPr id="6" name="">
             <a:extLst xmlns:a="http://schemas.openxmlformats.org/drawingml/2006/main">
               <a:ext uri="{FF2B5EF4-FFF2-40B4-BE49-F238E27FC236}">
-                <a16:creationId xmlns:a16="http://schemas.microsoft.com/office/drawing/2014/main" id="{D4C830D4-24E5-4B08-A575-EFD043CC0C76}"/>
+                <a16:creationId xmlns:a16="http://schemas.microsoft.com/office/drawing/2014/main" id="{9724C9DA-8D45-40BA-8899-9AD22F4E6A88}"/>
               </a:ext>
             </a:extLst>
           </p:cNvPr>
@@ -7828,7 +7899,7 @@
         </p:xfrm>
         <a:graphic xmlns:a="http://schemas.openxmlformats.org/drawingml/2006/main">
           <a:graphicData uri="http://schemas.openxmlformats.org/drawingml/2006/chart">
-            <c:chart xmlns:r="http://schemas.openxmlformats.org/officeDocument/2006/relationships" xmlns:c="http://schemas.openxmlformats.org/drawingml/2006/chart" r:id="R4426ab9da4634f83"/>
+            <c:chart xmlns:r="http://schemas.openxmlformats.org/officeDocument/2006/relationships" xmlns:c="http://schemas.openxmlformats.org/drawingml/2006/chart" r:id="Ra677d170313b4d00"/>
           </a:graphicData>
         </a:graphic>
       </p:graphicFrame>
@@ -7837,7 +7908,7 @@
           <p:cNvPr id="8" name="">
             <a:extLst xmlns:a="http://schemas.openxmlformats.org/drawingml/2006/main">
               <a:ext uri="{FF2B5EF4-FFF2-40B4-BE49-F238E27FC236}">
-                <a16:creationId xmlns:a16="http://schemas.microsoft.com/office/drawing/2014/main" id="{65C5CD5A-A4DA-4078-8A17-0E2DEF1040E4}"/>
+                <a16:creationId xmlns:a16="http://schemas.microsoft.com/office/drawing/2014/main" id="{FEB35BCE-EA0F-4657-8098-A3209ECA7A0F}"/>
               </a:ext>
             </a:extLst>
           </p:cNvPr>
@@ -7899,7 +7970,7 @@
           <p:cNvPr id="9" name="">
             <a:extLst xmlns:a="http://schemas.openxmlformats.org/drawingml/2006/main">
               <a:ext uri="{FF2B5EF4-FFF2-40B4-BE49-F238E27FC236}">
-                <a16:creationId xmlns:a16="http://schemas.microsoft.com/office/drawing/2014/main" id="{187D0BFF-462D-4F5E-9B82-863586FF4A32}"/>
+                <a16:creationId xmlns:a16="http://schemas.microsoft.com/office/drawing/2014/main" id="{7DBDB3D8-65EE-4B99-8923-808FE515D47C}"/>
               </a:ext>
             </a:extLst>
           </p:cNvPr>
@@ -8421,7 +8492,7 @@
           <p:cNvPr id="11" name="">
             <a:extLst xmlns:a="http://schemas.openxmlformats.org/drawingml/2006/main">
               <a:ext uri="{FF2B5EF4-FFF2-40B4-BE49-F238E27FC236}">
-                <a16:creationId xmlns:a16="http://schemas.microsoft.com/office/drawing/2014/main" id="{7751825C-64DE-4F59-A130-3D80F548786C}"/>
+                <a16:creationId xmlns:a16="http://schemas.microsoft.com/office/drawing/2014/main" id="{70141F9B-25FF-4272-80D7-A78A6CE6B3D8}"/>
               </a:ext>
             </a:extLst>
           </p:cNvPr>
@@ -8483,7 +8554,7 @@
           <p:cNvPr id="12" name="">
             <a:extLst xmlns:a="http://schemas.openxmlformats.org/drawingml/2006/main">
               <a:ext uri="{FF2B5EF4-FFF2-40B4-BE49-F238E27FC236}">
-                <a16:creationId xmlns:a16="http://schemas.microsoft.com/office/drawing/2014/main" id="{AC9C6E7C-9F21-452D-89A6-47102BB53978}"/>
+                <a16:creationId xmlns:a16="http://schemas.microsoft.com/office/drawing/2014/main" id="{17F5E38B-9048-47A5-9558-DF69DAD92E74}"/>
               </a:ext>
             </a:extLst>
           </p:cNvPr>
@@ -8514,7 +8585,7 @@
           <p:cNvPr id="13" name="">
             <a:extLst xmlns:a="http://schemas.openxmlformats.org/drawingml/2006/main">
               <a:ext uri="{FF2B5EF4-FFF2-40B4-BE49-F238E27FC236}">
-                <a16:creationId xmlns:a16="http://schemas.microsoft.com/office/drawing/2014/main" id="{A248CF0E-88E9-40ED-BE76-0983143FD4CD}"/>
+                <a16:creationId xmlns:a16="http://schemas.microsoft.com/office/drawing/2014/main" id="{8662FF9B-24A5-4284-820F-511330003451}"/>
               </a:ext>
             </a:extLst>
           </p:cNvPr>
@@ -8874,7 +8945,7 @@
           <p:cNvPr id="15" name="">
             <a:extLst xmlns:a="http://schemas.openxmlformats.org/drawingml/2006/main">
               <a:ext uri="{FF2B5EF4-FFF2-40B4-BE49-F238E27FC236}">
-                <a16:creationId xmlns:a16="http://schemas.microsoft.com/office/drawing/2014/main" id="{52D7337B-02A8-44EB-B84D-98C92CBDDAEF}"/>
+                <a16:creationId xmlns:a16="http://schemas.microsoft.com/office/drawing/2014/main" id="{E99F4089-A559-4A3D-BE81-07B51AFEAC37}"/>
               </a:ext>
             </a:extLst>
           </p:cNvPr>
@@ -9178,7 +9249,7 @@
           <p:cNvPr id="17" name="">
             <a:extLst xmlns:a="http://schemas.openxmlformats.org/drawingml/2006/main">
               <a:ext uri="{FF2B5EF4-FFF2-40B4-BE49-F238E27FC236}">
-                <a16:creationId xmlns:a16="http://schemas.microsoft.com/office/drawing/2014/main" id="{451F7855-B894-46A8-96A1-D6556E46B8EF}"/>
+                <a16:creationId xmlns:a16="http://schemas.microsoft.com/office/drawing/2014/main" id="{AAF01B1A-DB38-45B6-8C46-8799B8DEC9B8}"/>
               </a:ext>
             </a:extLst>
           </p:cNvPr>
@@ -9240,7 +9311,7 @@
           <p:cNvPr id="18" name="">
             <a:extLst xmlns:a="http://schemas.openxmlformats.org/drawingml/2006/main">
               <a:ext uri="{FF2B5EF4-FFF2-40B4-BE49-F238E27FC236}">
-                <a16:creationId xmlns:a16="http://schemas.microsoft.com/office/drawing/2014/main" id="{3763E0E4-7F90-4273-A3BA-B0D7948213AB}"/>
+                <a16:creationId xmlns:a16="http://schemas.microsoft.com/office/drawing/2014/main" id="{B4FCBF8A-1B64-48D5-80F5-D2091AE58358}"/>
               </a:ext>
             </a:extLst>
           </p:cNvPr>
@@ -9296,7 +9367,2105 @@
     </p:spTree>
     <p:extLst>
       <p:ext uri="{BB962C8B-B14F-4D97-AF65-F5344CB8AC3E}">
-        <p14:creationId xmlns:p14="http://schemas.microsoft.com/office/powerpoint/2010/main" val="1539863027"/>
+        <p14:creationId xmlns:p14="http://schemas.microsoft.com/office/powerpoint/2010/main" val="2009785202"/>
+      </p:ext>
+    </p:extLst>
+  </p:cSld>
+</p:sld>
+</file>
+
+<file path=ppt/slides/slide5.xml><?xml version="1.0" encoding="utf-8"?>
+<p:sld xmlns:p="http://schemas.openxmlformats.org/presentationml/2006/main">
+  <p:cSld>
+    <p:bg>
+      <p:bgPr>
+        <a:solidFill xmlns:a="http://schemas.openxmlformats.org/drawingml/2006/main">
+          <a:srgbClr val="F8FBFC"/>
+        </a:solidFill>
+      </p:bgPr>
+    </p:bg>
+    <p:spTree>
+      <p:nvGrpSpPr>
+        <p:cNvPr id="1" name=""/>
+        <p:cNvGrpSpPr/>
+        <p:nvPr/>
+      </p:nvGrpSpPr>
+      <p:grpSpPr>
+        <a:xfrm xmlns:a="http://schemas.openxmlformats.org/drawingml/2006/main"/>
+      </p:grpSpPr>
+      <p:sp>
+        <p:nvSpPr>
+          <p:cNvPr id="20" name="">
+            <a:extLst xmlns:a="http://schemas.openxmlformats.org/drawingml/2006/main">
+              <a:ext uri="{FF2B5EF4-FFF2-40B4-BE49-F238E27FC236}">
+                <a16:creationId xmlns:a16="http://schemas.microsoft.com/office/drawing/2014/main" id="{434465A5-A768-47DD-A79E-0A597E436147}"/>
+              </a:ext>
+            </a:extLst>
+          </p:cNvPr>
+          <p:cNvSpPr>
+            <a:spLocks xmlns:a="http://schemas.openxmlformats.org/drawingml/2006/main" noGrp="1"/>
+          </p:cNvSpPr>
+          <p:nvPr/>
+        </p:nvSpPr>
+        <p:spPr>
+          <a:xfrm xmlns:a="http://schemas.openxmlformats.org/drawingml/2006/main">
+            <a:off x="0" y="0"/>
+            <a:ext cx="12192000" cy="152400"/>
+          </a:xfrm>
+          <a:prstGeom xmlns:a="http://schemas.openxmlformats.org/drawingml/2006/main" prst="rect">
+            <a:avLst/>
+          </a:prstGeom>
+          <a:solidFill xmlns:a="http://schemas.openxmlformats.org/drawingml/2006/main">
+            <a:srgbClr val="0F4C5C"/>
+          </a:solidFill>
+          <a:ln xmlns:a="http://schemas.openxmlformats.org/drawingml/2006/main" w="0">
+            <a:noFill/>
+            <a:prstDash val="solid"/>
+          </a:ln>
+        </p:spPr>
+      </p:sp>
+      <p:sp>
+        <p:nvSpPr>
+          <p:cNvPr id="2" name="">
+            <a:extLst xmlns:a="http://schemas.openxmlformats.org/drawingml/2006/main">
+              <a:ext uri="{FF2B5EF4-FFF2-40B4-BE49-F238E27FC236}">
+                <a16:creationId xmlns:a16="http://schemas.microsoft.com/office/drawing/2014/main" id="{F025EBC5-6356-437A-92F2-46F298D46C69}"/>
+              </a:ext>
+            </a:extLst>
+          </p:cNvPr>
+          <p:cNvSpPr>
+            <a:spLocks xmlns:a="http://schemas.openxmlformats.org/drawingml/2006/main" noGrp="1"/>
+          </p:cNvSpPr>
+          <p:nvPr/>
+        </p:nvSpPr>
+        <p:spPr>
+          <a:xfrm xmlns:a="http://schemas.openxmlformats.org/drawingml/2006/main">
+            <a:off x="514350" y="361950"/>
+            <a:ext cx="3429000" cy="247650"/>
+          </a:xfrm>
+          <a:prstGeom xmlns:a="http://schemas.openxmlformats.org/drawingml/2006/main" prst="rect">
+            <a:avLst/>
+          </a:prstGeom>
+          <a:noFill xmlns:a="http://schemas.openxmlformats.org/drawingml/2006/main"/>
+          <a:ln xmlns:a="http://schemas.openxmlformats.org/drawingml/2006/main" w="0">
+            <a:noFill/>
+            <a:prstDash val="solid"/>
+          </a:ln>
+        </p:spPr>
+        <p:txBody>
+          <a:bodyPr xmlns:a="http://schemas.openxmlformats.org/drawingml/2006/main" lIns="0" tIns="0" rIns="0" bIns="0">
+            <a:noAutofit/>
+          </a:bodyPr>
+          <a:lstStyle xmlns:a="http://schemas.openxmlformats.org/drawingml/2006/main"/>
+          <a:p xmlns:a="http://schemas.openxmlformats.org/drawingml/2006/main">
+            <a:pPr>
+              <a:defRPr sz="1275" b="1">
+                <a:solidFill>
+                  <a:srgbClr val="0F6F73"/>
+                </a:solidFill>
+                <a:latin typeface="Helvetica Neue"/>
+                <a:ea typeface="Helvetica Neue"/>
+                <a:cs typeface="Helvetica Neue"/>
+              </a:defRPr>
+            </a:pPr>
+            <a:r>
+              <a:rPr sz="1275" b="1">
+                <a:solidFill>
+                  <a:srgbClr val="0F6F73"/>
+                </a:solidFill>
+                <a:latin typeface="Helvetica Neue"/>
+                <a:ea typeface="Helvetica Neue"/>
+                <a:cs typeface="Helvetica Neue"/>
+              </a:rPr>
+              <a:t>Meds Counsulting LLC</a:t>
+            </a:r>
+          </a:p>
+        </p:txBody>
+      </p:sp>
+      <p:sp>
+        <p:nvSpPr>
+          <p:cNvPr id="3" name="">
+            <a:extLst xmlns:a="http://schemas.openxmlformats.org/drawingml/2006/main">
+              <a:ext uri="{FF2B5EF4-FFF2-40B4-BE49-F238E27FC236}">
+                <a16:creationId xmlns:a16="http://schemas.microsoft.com/office/drawing/2014/main" id="{7778A4DC-B196-4AE4-99CA-48658A4D2B08}"/>
+              </a:ext>
+            </a:extLst>
+          </p:cNvPr>
+          <p:cNvSpPr>
+            <a:spLocks xmlns:a="http://schemas.openxmlformats.org/drawingml/2006/main" noGrp="1"/>
+          </p:cNvSpPr>
+          <p:nvPr/>
+        </p:nvSpPr>
+        <p:spPr>
+          <a:xfrm xmlns:a="http://schemas.openxmlformats.org/drawingml/2006/main">
+            <a:off x="514350" y="723900"/>
+            <a:ext cx="8191500" cy="457200"/>
+          </a:xfrm>
+          <a:prstGeom xmlns:a="http://schemas.openxmlformats.org/drawingml/2006/main" prst="rect">
+            <a:avLst/>
+          </a:prstGeom>
+          <a:noFill xmlns:a="http://schemas.openxmlformats.org/drawingml/2006/main"/>
+          <a:ln xmlns:a="http://schemas.openxmlformats.org/drawingml/2006/main" w="0">
+            <a:noFill/>
+            <a:prstDash val="solid"/>
+          </a:ln>
+        </p:spPr>
+        <p:txBody>
+          <a:bodyPr xmlns:a="http://schemas.openxmlformats.org/drawingml/2006/main" lIns="0" tIns="0" rIns="0" bIns="0">
+            <a:noAutofit/>
+          </a:bodyPr>
+          <a:lstStyle xmlns:a="http://schemas.openxmlformats.org/drawingml/2006/main"/>
+          <a:p xmlns:a="http://schemas.openxmlformats.org/drawingml/2006/main">
+            <a:pPr>
+              <a:defRPr sz="2700" b="1">
+                <a:solidFill>
+                  <a:srgbClr val="102A34"/>
+                </a:solidFill>
+                <a:latin typeface="Helvetica Neue"/>
+                <a:ea typeface="Helvetica Neue"/>
+                <a:cs typeface="Helvetica Neue"/>
+              </a:defRPr>
+            </a:pPr>
+            <a:r>
+              <a:rPr sz="2700" b="1">
+                <a:solidFill>
+                  <a:srgbClr val="102A34"/>
+                </a:solidFill>
+                <a:latin typeface="Helvetica Neue"/>
+                <a:ea typeface="Helvetica Neue"/>
+                <a:cs typeface="Helvetica Neue"/>
+              </a:rPr>
+              <a:t>Recommendations</a:t>
+            </a:r>
+          </a:p>
+        </p:txBody>
+      </p:sp>
+      <p:sp>
+        <p:nvSpPr>
+          <p:cNvPr id="4" name="">
+            <a:extLst xmlns:a="http://schemas.openxmlformats.org/drawingml/2006/main">
+              <a:ext uri="{FF2B5EF4-FFF2-40B4-BE49-F238E27FC236}">
+                <a16:creationId xmlns:a16="http://schemas.microsoft.com/office/drawing/2014/main" id="{7DD75931-C767-4409-BF72-15DCAA2A81B9}"/>
+              </a:ext>
+            </a:extLst>
+          </p:cNvPr>
+          <p:cNvSpPr>
+            <a:spLocks xmlns:a="http://schemas.openxmlformats.org/drawingml/2006/main" noGrp="1"/>
+          </p:cNvSpPr>
+          <p:nvPr/>
+        </p:nvSpPr>
+        <p:spPr>
+          <a:xfrm xmlns:a="http://schemas.openxmlformats.org/drawingml/2006/main">
+            <a:off x="514350" y="1162050"/>
+            <a:ext cx="8096250" cy="209550"/>
+          </a:xfrm>
+          <a:prstGeom xmlns:a="http://schemas.openxmlformats.org/drawingml/2006/main" prst="rect">
+            <a:avLst/>
+          </a:prstGeom>
+          <a:noFill xmlns:a="http://schemas.openxmlformats.org/drawingml/2006/main"/>
+          <a:ln xmlns:a="http://schemas.openxmlformats.org/drawingml/2006/main" w="0">
+            <a:noFill/>
+            <a:prstDash val="solid"/>
+          </a:ln>
+        </p:spPr>
+        <p:txBody>
+          <a:bodyPr xmlns:a="http://schemas.openxmlformats.org/drawingml/2006/main" lIns="0" tIns="0" rIns="0" bIns="0">
+            <a:noAutofit/>
+          </a:bodyPr>
+          <a:lstStyle xmlns:a="http://schemas.openxmlformats.org/drawingml/2006/main"/>
+          <a:p xmlns:a="http://schemas.openxmlformats.org/drawingml/2006/main">
+            <a:pPr>
+              <a:defRPr sz="1088">
+                <a:solidFill>
+                  <a:srgbClr val="50636B"/>
+                </a:solidFill>
+                <a:latin typeface="Helvetica Neue"/>
+                <a:ea typeface="Helvetica Neue"/>
+                <a:cs typeface="Helvetica Neue"/>
+              </a:defRPr>
+            </a:pPr>
+            <a:r>
+              <a:rPr sz="1088">
+                <a:solidFill>
+                  <a:srgbClr val="50636B"/>
+                </a:solidFill>
+                <a:latin typeface="Helvetica Neue"/>
+                <a:ea typeface="Helvetica Neue"/>
+                <a:cs typeface="Helvetica Neue"/>
+              </a:rPr>
+              <a:t>Actions, strategy, cost, benefits, timeline, and risks</a:t>
+            </a:r>
+          </a:p>
+        </p:txBody>
+      </p:sp>
+      <p:sp>
+        <p:nvSpPr>
+          <p:cNvPr id="5" name="">
+            <a:extLst xmlns:a="http://schemas.openxmlformats.org/drawingml/2006/main">
+              <a:ext uri="{FF2B5EF4-FFF2-40B4-BE49-F238E27FC236}">
+                <a16:creationId xmlns:a16="http://schemas.microsoft.com/office/drawing/2014/main" id="{A8B90E13-20DF-4ADE-AD86-305D39409100}"/>
+              </a:ext>
+            </a:extLst>
+          </p:cNvPr>
+          <p:cNvSpPr>
+            <a:spLocks xmlns:a="http://schemas.openxmlformats.org/drawingml/2006/main" noGrp="1"/>
+          </p:cNvSpPr>
+          <p:nvPr/>
+        </p:nvSpPr>
+        <p:spPr>
+          <a:xfrm xmlns:a="http://schemas.openxmlformats.org/drawingml/2006/main">
+            <a:off x="514350" y="1466850"/>
+            <a:ext cx="10287000" cy="28575"/>
+          </a:xfrm>
+          <a:prstGeom xmlns:a="http://schemas.openxmlformats.org/drawingml/2006/main" prst="rect">
+            <a:avLst/>
+          </a:prstGeom>
+          <a:solidFill xmlns:a="http://schemas.openxmlformats.org/drawingml/2006/main">
+            <a:srgbClr val="E9A93A"/>
+          </a:solidFill>
+          <a:ln xmlns:a="http://schemas.openxmlformats.org/drawingml/2006/main" w="0">
+            <a:noFill/>
+            <a:prstDash val="solid"/>
+          </a:ln>
+        </p:spPr>
+      </p:sp>
+      <p:graphicFrame>
+        <p:nvGraphicFramePr>
+          <p:cNvPr id="25" name=""/>
+          <p:cNvGraphicFramePr/>
+          <p:nvPr/>
+        </p:nvGraphicFramePr>
+        <p:xfrm>
+          <a:off xmlns:a="http://schemas.openxmlformats.org/drawingml/2006/main" x="514350" y="1695450"/>
+          <a:ext xmlns:a="http://schemas.openxmlformats.org/drawingml/2006/main" cx="10287000" cy="819150"/>
+        </p:xfrm>
+        <a:graphic xmlns:a="http://schemas.openxmlformats.org/drawingml/2006/main">
+          <a:graphicData uri="http://schemas.openxmlformats.org/drawingml/2006/table">
+            <a:tbl>
+              <a:tblPr/>
+              <a:tblGrid>
+                <a:gridCol w="2571750"/>
+                <a:gridCol w="2571750"/>
+                <a:gridCol w="2571750"/>
+                <a:gridCol w="2571750"/>
+              </a:tblGrid>
+              <a:tr h="409575">
+                <a:tc>
+                  <a:txBody>
+                    <a:bodyPr lIns="66675" tIns="28575" rIns="57150" bIns="28575">
+                      <a:noAutofit/>
+                    </a:bodyPr>
+                    <a:lstStyle/>
+                    <a:p>
+                      <a:pPr algn="ctr"/>
+                      <a:r>
+                        <a:rPr sz="1650" b="1">
+                          <a:solidFill>
+                            <a:srgbClr val="0F4C5C"/>
+                          </a:solidFill>
+                          <a:latin typeface="Helvetica Neue"/>
+                          <a:ea typeface="Helvetica Neue"/>
+                          <a:cs typeface="Helvetica Neue"/>
+                        </a:rPr>
+                        <a:t>$1.75M</a:t>
+                      </a:r>
+                    </a:p>
+                  </a:txBody>
+                  <a:tcPr marL="91440" marR="91440" marT="45720" marB="45720" anchor="ctr">
+                    <a:solidFill>
+                      <a:srgbClr val="EEF6F7"/>
+                    </a:solidFill>
+                  </a:tcPr>
+                </a:tc>
+                <a:tc>
+                  <a:txBody>
+                    <a:bodyPr lIns="66675" tIns="28575" rIns="57150" bIns="28575">
+                      <a:noAutofit/>
+                    </a:bodyPr>
+                    <a:lstStyle/>
+                    <a:p>
+                      <a:pPr algn="ctr"/>
+                      <a:r>
+                        <a:rPr sz="1650" b="1">
+                          <a:solidFill>
+                            <a:srgbClr val="0F4C5C"/>
+                          </a:solidFill>
+                          <a:latin typeface="Helvetica Neue"/>
+                          <a:ea typeface="Helvetica Neue"/>
+                          <a:cs typeface="Helvetica Neue"/>
+                        </a:rPr>
+                        <a:t>518</a:t>
+                      </a:r>
+                    </a:p>
+                  </a:txBody>
+                  <a:tcPr marL="91440" marR="91440" marT="45720" marB="45720" anchor="ctr">
+                    <a:solidFill>
+                      <a:srgbClr val="EEF6F7"/>
+                    </a:solidFill>
+                  </a:tcPr>
+                </a:tc>
+                <a:tc>
+                  <a:txBody>
+                    <a:bodyPr lIns="66675" tIns="28575" rIns="57150" bIns="28575">
+                      <a:noAutofit/>
+                    </a:bodyPr>
+                    <a:lstStyle/>
+                    <a:p>
+                      <a:pPr algn="ctr"/>
+                      <a:r>
+                        <a:rPr sz="1650" b="1">
+                          <a:solidFill>
+                            <a:srgbClr val="0F4C5C"/>
+                          </a:solidFill>
+                          <a:latin typeface="Helvetica Neue"/>
+                          <a:ea typeface="Helvetica Neue"/>
+                          <a:cs typeface="Helvetica Neue"/>
+                        </a:rPr>
+                        <a:t>$8.81M</a:t>
+                      </a:r>
+                    </a:p>
+                  </a:txBody>
+                  <a:tcPr marL="91440" marR="91440" marT="45720" marB="45720" anchor="ctr">
+                    <a:solidFill>
+                      <a:srgbClr val="EEF6F7"/>
+                    </a:solidFill>
+                  </a:tcPr>
+                </a:tc>
+                <a:tc>
+                  <a:txBody>
+                    <a:bodyPr lIns="66675" tIns="28575" rIns="57150" bIns="28575">
+                      <a:noAutofit/>
+                    </a:bodyPr>
+                    <a:lstStyle/>
+                    <a:p>
+                      <a:pPr algn="ctr"/>
+                      <a:r>
+                        <a:rPr sz="1650" b="1">
+                          <a:solidFill>
+                            <a:srgbClr val="0F4C5C"/>
+                          </a:solidFill>
+                          <a:latin typeface="Helvetica Neue"/>
+                          <a:ea typeface="Helvetica Neue"/>
+                          <a:cs typeface="Helvetica Neue"/>
+                        </a:rPr>
+                        <a:t>5.03x</a:t>
+                      </a:r>
+                    </a:p>
+                  </a:txBody>
+                  <a:tcPr marL="91440" marR="91440" marT="45720" marB="45720" anchor="ctr">
+                    <a:solidFill>
+                      <a:srgbClr val="EEF6F7"/>
+                    </a:solidFill>
+                  </a:tcPr>
+                </a:tc>
+              </a:tr>
+              <a:tr h="409575">
+                <a:tc>
+                  <a:txBody>
+                    <a:bodyPr lIns="66675" tIns="28575" rIns="57150" bIns="28575">
+                      <a:noAutofit/>
+                    </a:bodyPr>
+                    <a:lstStyle/>
+                    <a:p>
+                      <a:pPr algn="ctr"/>
+                      <a:r>
+                        <a:rPr sz="705" b="0">
+                          <a:solidFill>
+                            <a:srgbClr val="50636B"/>
+                          </a:solidFill>
+                          <a:latin typeface="Helvetica Neue"/>
+                          <a:ea typeface="Helvetica Neue"/>
+                          <a:cs typeface="Helvetica Neue"/>
+                        </a:rPr>
+                        <a:t>Estimated implementation cost</a:t>
+                      </a:r>
+                    </a:p>
+                  </a:txBody>
+                  <a:tcPr marL="91440" marR="91440" marT="45720" marB="45720" anchor="ctr">
+                    <a:solidFill>
+                      <a:srgbClr val="F8FBFC"/>
+                    </a:solidFill>
+                  </a:tcPr>
+                </a:tc>
+                <a:tc>
+                  <a:txBody>
+                    <a:bodyPr lIns="66675" tIns="28575" rIns="57150" bIns="28575">
+                      <a:noAutofit/>
+                    </a:bodyPr>
+                    <a:lstStyle/>
+                    <a:p>
+                      <a:pPr algn="ctr"/>
+                      <a:r>
+                        <a:rPr sz="705" b="0">
+                          <a:solidFill>
+                            <a:srgbClr val="50636B"/>
+                          </a:solidFill>
+                          <a:latin typeface="Helvetica Neue"/>
+                          <a:ea typeface="Helvetica Neue"/>
+                          <a:cs typeface="Helvetica Neue"/>
+                        </a:rPr>
+                        <a:t>Expected avoided readmissions</a:t>
+                      </a:r>
+                    </a:p>
+                  </a:txBody>
+                  <a:tcPr marL="91440" marR="91440" marT="45720" marB="45720" anchor="ctr">
+                    <a:solidFill>
+                      <a:srgbClr val="F8FBFC"/>
+                    </a:solidFill>
+                  </a:tcPr>
+                </a:tc>
+                <a:tc>
+                  <a:txBody>
+                    <a:bodyPr lIns="66675" tIns="28575" rIns="57150" bIns="28575">
+                      <a:noAutofit/>
+                    </a:bodyPr>
+                    <a:lstStyle/>
+                    <a:p>
+                      <a:pPr algn="ctr"/>
+                      <a:r>
+                        <a:rPr sz="705" b="0">
+                          <a:solidFill>
+                            <a:srgbClr val="50636B"/>
+                          </a:solidFill>
+                          <a:latin typeface="Helvetica Neue"/>
+                          <a:ea typeface="Helvetica Neue"/>
+                          <a:cs typeface="Helvetica Neue"/>
+                        </a:rPr>
+                        <a:t>Expected net savings</a:t>
+                      </a:r>
+                    </a:p>
+                  </a:txBody>
+                  <a:tcPr marL="91440" marR="91440" marT="45720" marB="45720" anchor="ctr">
+                    <a:solidFill>
+                      <a:srgbClr val="F8FBFC"/>
+                    </a:solidFill>
+                  </a:tcPr>
+                </a:tc>
+                <a:tc>
+                  <a:txBody>
+                    <a:bodyPr lIns="66675" tIns="28575" rIns="57150" bIns="28575">
+                      <a:noAutofit/>
+                    </a:bodyPr>
+                    <a:lstStyle/>
+                    <a:p>
+                      <a:pPr algn="ctr"/>
+                      <a:r>
+                        <a:rPr sz="705" b="0">
+                          <a:solidFill>
+                            <a:srgbClr val="50636B"/>
+                          </a:solidFill>
+                          <a:latin typeface="Helvetica Neue"/>
+                          <a:ea typeface="Helvetica Neue"/>
+                          <a:cs typeface="Helvetica Neue"/>
+                        </a:rPr>
+                        <a:t>Expected ROI</a:t>
+                      </a:r>
+                    </a:p>
+                  </a:txBody>
+                  <a:tcPr marL="91440" marR="91440" marT="45720" marB="45720" anchor="ctr">
+                    <a:solidFill>
+                      <a:srgbClr val="F8FBFC"/>
+                    </a:solidFill>
+                  </a:tcPr>
+                </a:tc>
+              </a:tr>
+            </a:tbl>
+          </a:graphicData>
+        </a:graphic>
+      </p:graphicFrame>
+      <p:sp>
+        <p:nvSpPr>
+          <p:cNvPr id="7" name="">
+            <a:extLst xmlns:a="http://schemas.openxmlformats.org/drawingml/2006/main">
+              <a:ext uri="{FF2B5EF4-FFF2-40B4-BE49-F238E27FC236}">
+                <a16:creationId xmlns:a16="http://schemas.microsoft.com/office/drawing/2014/main" id="{EFD793B9-EC11-4558-BB92-248F53980688}"/>
+              </a:ext>
+            </a:extLst>
+          </p:cNvPr>
+          <p:cNvSpPr>
+            <a:spLocks xmlns:a="http://schemas.openxmlformats.org/drawingml/2006/main" noGrp="1"/>
+          </p:cNvSpPr>
+          <p:nvPr/>
+        </p:nvSpPr>
+        <p:spPr>
+          <a:xfrm xmlns:a="http://schemas.openxmlformats.org/drawingml/2006/main">
+            <a:off x="514350" y="2771775"/>
+            <a:ext cx="10287000" cy="14288"/>
+          </a:xfrm>
+          <a:prstGeom xmlns:a="http://schemas.openxmlformats.org/drawingml/2006/main" prst="rect">
+            <a:avLst/>
+          </a:prstGeom>
+          <a:solidFill xmlns:a="http://schemas.openxmlformats.org/drawingml/2006/main">
+            <a:srgbClr val="D1E1E5"/>
+          </a:solidFill>
+          <a:ln xmlns:a="http://schemas.openxmlformats.org/drawingml/2006/main" w="0">
+            <a:noFill/>
+            <a:prstDash val="solid"/>
+          </a:ln>
+        </p:spPr>
+      </p:sp>
+      <p:sp>
+        <p:nvSpPr>
+          <p:cNvPr id="8" name="">
+            <a:extLst xmlns:a="http://schemas.openxmlformats.org/drawingml/2006/main">
+              <a:ext uri="{FF2B5EF4-FFF2-40B4-BE49-F238E27FC236}">
+                <a16:creationId xmlns:a16="http://schemas.microsoft.com/office/drawing/2014/main" id="{78BB5B85-1EF3-48A7-8770-807CF1D0E530}"/>
+              </a:ext>
+            </a:extLst>
+          </p:cNvPr>
+          <p:cNvSpPr>
+            <a:spLocks xmlns:a="http://schemas.openxmlformats.org/drawingml/2006/main" noGrp="1"/>
+          </p:cNvSpPr>
+          <p:nvPr/>
+        </p:nvSpPr>
+        <p:spPr>
+          <a:xfrm xmlns:a="http://schemas.openxmlformats.org/drawingml/2006/main">
+            <a:off x="514350" y="3009900"/>
+            <a:ext cx="3619500" cy="228600"/>
+          </a:xfrm>
+          <a:prstGeom xmlns:a="http://schemas.openxmlformats.org/drawingml/2006/main" prst="rect">
+            <a:avLst/>
+          </a:prstGeom>
+          <a:noFill xmlns:a="http://schemas.openxmlformats.org/drawingml/2006/main"/>
+          <a:ln xmlns:a="http://schemas.openxmlformats.org/drawingml/2006/main" w="0">
+            <a:noFill/>
+            <a:prstDash val="solid"/>
+          </a:ln>
+        </p:spPr>
+        <p:txBody>
+          <a:bodyPr xmlns:a="http://schemas.openxmlformats.org/drawingml/2006/main" lIns="0" tIns="0" rIns="0" bIns="0">
+            <a:noAutofit/>
+          </a:bodyPr>
+          <a:lstStyle xmlns:a="http://schemas.openxmlformats.org/drawingml/2006/main"/>
+          <a:p xmlns:a="http://schemas.openxmlformats.org/drawingml/2006/main">
+            <a:pPr>
+              <a:defRPr sz="1500" b="1">
+                <a:solidFill>
+                  <a:srgbClr val="102A34"/>
+                </a:solidFill>
+                <a:latin typeface="Helvetica Neue"/>
+                <a:ea typeface="Helvetica Neue"/>
+                <a:cs typeface="Helvetica Neue"/>
+              </a:defRPr>
+            </a:pPr>
+            <a:r>
+              <a:rPr sz="1500" b="1">
+                <a:solidFill>
+                  <a:srgbClr val="102A34"/>
+                </a:solidFill>
+                <a:latin typeface="Helvetica Neue"/>
+                <a:ea typeface="Helvetica Neue"/>
+                <a:cs typeface="Helvetica Neue"/>
+              </a:rPr>
+              <a:t>Recommendation roadmap</a:t>
+            </a:r>
+          </a:p>
+        </p:txBody>
+      </p:sp>
+      <p:graphicFrame>
+        <p:nvGraphicFramePr>
+          <p:cNvPr id="28" name=""/>
+          <p:cNvGraphicFramePr/>
+          <p:nvPr/>
+        </p:nvGraphicFramePr>
+        <p:xfrm>
+          <a:off xmlns:a="http://schemas.openxmlformats.org/drawingml/2006/main" x="514350" y="3362325"/>
+          <a:ext xmlns:a="http://schemas.openxmlformats.org/drawingml/2006/main" cx="6343650" cy="1752600"/>
+        </p:xfrm>
+        <a:graphic xmlns:a="http://schemas.openxmlformats.org/drawingml/2006/main">
+          <a:graphicData uri="http://schemas.openxmlformats.org/drawingml/2006/table">
+            <a:tbl>
+              <a:tblPr/>
+              <a:tblGrid>
+                <a:gridCol w="1295400"/>
+                <a:gridCol w="2400300"/>
+                <a:gridCol w="1333500"/>
+                <a:gridCol w="1314450"/>
+              </a:tblGrid>
+              <a:tr h="292100">
+                <a:tc>
+                  <a:txBody>
+                    <a:bodyPr lIns="66675" tIns="28575" rIns="57150" bIns="28575">
+                      <a:noAutofit/>
+                    </a:bodyPr>
+                    <a:lstStyle/>
+                    <a:p>
+                      <a:pPr algn="l"/>
+                      <a:r>
+                        <a:rPr sz="623" b="1">
+                          <a:solidFill>
+                            <a:srgbClr val="FFFFFF"/>
+                          </a:solidFill>
+                          <a:latin typeface="Helvetica Neue"/>
+                          <a:ea typeface="Helvetica Neue"/>
+                          <a:cs typeface="Helvetica Neue"/>
+                        </a:rPr>
+                        <a:t>Action</a:t>
+                      </a:r>
+                    </a:p>
+                  </a:txBody>
+                  <a:tcPr marL="91440" marR="91440" marT="45720" marB="45720" anchor="ctr">
+                    <a:solidFill>
+                      <a:srgbClr val="0F4C5C"/>
+                    </a:solidFill>
+                  </a:tcPr>
+                </a:tc>
+                <a:tc>
+                  <a:txBody>
+                    <a:bodyPr lIns="66675" tIns="28575" rIns="57150" bIns="28575">
+                      <a:noAutofit/>
+                    </a:bodyPr>
+                    <a:lstStyle/>
+                    <a:p>
+                      <a:pPr algn="l"/>
+                      <a:r>
+                        <a:rPr sz="623" b="1">
+                          <a:solidFill>
+                            <a:srgbClr val="FFFFFF"/>
+                          </a:solidFill>
+                          <a:latin typeface="Helvetica Neue"/>
+                          <a:ea typeface="Helvetica Neue"/>
+                          <a:cs typeface="Helvetica Neue"/>
+                        </a:rPr>
+                        <a:t>Recommendation</a:t>
+                      </a:r>
+                    </a:p>
+                  </a:txBody>
+                  <a:tcPr marL="91440" marR="91440" marT="45720" marB="45720" anchor="ctr">
+                    <a:solidFill>
+                      <a:srgbClr val="0F4C5C"/>
+                    </a:solidFill>
+                  </a:tcPr>
+                </a:tc>
+                <a:tc>
+                  <a:txBody>
+                    <a:bodyPr lIns="66675" tIns="28575" rIns="57150" bIns="28575">
+                      <a:noAutofit/>
+                    </a:bodyPr>
+                    <a:lstStyle/>
+                    <a:p>
+                      <a:pPr algn="l"/>
+                      <a:r>
+                        <a:rPr sz="623" b="1">
+                          <a:solidFill>
+                            <a:srgbClr val="FFFFFF"/>
+                          </a:solidFill>
+                          <a:latin typeface="Helvetica Neue"/>
+                          <a:ea typeface="Helvetica Neue"/>
+                          <a:cs typeface="Helvetica Neue"/>
+                        </a:rPr>
+                        <a:t>Timing</a:t>
+                      </a:r>
+                    </a:p>
+                  </a:txBody>
+                  <a:tcPr marL="91440" marR="91440" marT="45720" marB="45720" anchor="ctr">
+                    <a:solidFill>
+                      <a:srgbClr val="0F4C5C"/>
+                    </a:solidFill>
+                  </a:tcPr>
+                </a:tc>
+                <a:tc>
+                  <a:txBody>
+                    <a:bodyPr lIns="66675" tIns="28575" rIns="57150" bIns="28575">
+                      <a:noAutofit/>
+                    </a:bodyPr>
+                    <a:lstStyle/>
+                    <a:p>
+                      <a:pPr algn="l"/>
+                      <a:r>
+                        <a:rPr sz="623" b="1">
+                          <a:solidFill>
+                            <a:srgbClr val="FFFFFF"/>
+                          </a:solidFill>
+                          <a:latin typeface="Helvetica Neue"/>
+                          <a:ea typeface="Helvetica Neue"/>
+                          <a:cs typeface="Helvetica Neue"/>
+                        </a:rPr>
+                        <a:t>Expected benefit</a:t>
+                      </a:r>
+                    </a:p>
+                  </a:txBody>
+                  <a:tcPr marL="91440" marR="91440" marT="45720" marB="45720" anchor="ctr">
+                    <a:solidFill>
+                      <a:srgbClr val="0F4C5C"/>
+                    </a:solidFill>
+                  </a:tcPr>
+                </a:tc>
+              </a:tr>
+              <a:tr h="292100">
+                <a:tc>
+                  <a:txBody>
+                    <a:bodyPr lIns="66675" tIns="28575" rIns="57150" bIns="28575">
+                      <a:noAutofit/>
+                    </a:bodyPr>
+                    <a:lstStyle/>
+                    <a:p>
+                      <a:pPr algn="l"/>
+                      <a:r>
+                        <a:rPr sz="555" b="1">
+                          <a:solidFill>
+                            <a:srgbClr val="253B44"/>
+                          </a:solidFill>
+                          <a:latin typeface="Helvetica Neue"/>
+                          <a:ea typeface="Helvetica Neue"/>
+                          <a:cs typeface="Helvetica Neue"/>
+                        </a:rPr>
+                        <a:t>Short term</a:t>
+                      </a:r>
+                    </a:p>
+                  </a:txBody>
+                  <a:tcPr marL="91440" marR="91440" marT="45720" marB="45720" anchor="ctr">
+                    <a:solidFill>
+                      <a:srgbClr val="EEF6F7"/>
+                    </a:solidFill>
+                  </a:tcPr>
+                </a:tc>
+                <a:tc>
+                  <a:txBody>
+                    <a:bodyPr lIns="66675" tIns="28575" rIns="57150" bIns="28575">
+                      <a:noAutofit/>
+                    </a:bodyPr>
+                    <a:lstStyle/>
+                    <a:p>
+                      <a:pPr algn="l"/>
+                      <a:r>
+                        <a:rPr sz="555" b="0">
+                          <a:solidFill>
+                            <a:srgbClr val="253B44"/>
+                          </a:solidFill>
+                          <a:latin typeface="Helvetica Neue"/>
+                          <a:ea typeface="Helvetica Neue"/>
+                          <a:cs typeface="Helvetica Neue"/>
+                        </a:rPr>
+                        <a:t>Pilot pre-discharge risk scoring for emergency and skilled nursing discharges</a:t>
+                      </a:r>
+                    </a:p>
+                  </a:txBody>
+                  <a:tcPr marL="91440" marR="91440" marT="45720" marB="45720" anchor="ctr">
+                    <a:solidFill>
+                      <a:srgbClr val="EEF6F7"/>
+                    </a:solidFill>
+                  </a:tcPr>
+                </a:tc>
+                <a:tc>
+                  <a:txBody>
+                    <a:bodyPr lIns="66675" tIns="28575" rIns="57150" bIns="28575">
+                      <a:noAutofit/>
+                    </a:bodyPr>
+                    <a:lstStyle/>
+                    <a:p>
+                      <a:pPr algn="l"/>
+                      <a:r>
+                        <a:rPr sz="555" b="0">
+                          <a:solidFill>
+                            <a:srgbClr val="253B44"/>
+                          </a:solidFill>
+                          <a:latin typeface="Helvetica Neue"/>
+                          <a:ea typeface="Helvetica Neue"/>
+                          <a:cs typeface="Helvetica Neue"/>
+                        </a:rPr>
+                        <a:t>0-3 months</a:t>
+                      </a:r>
+                    </a:p>
+                  </a:txBody>
+                  <a:tcPr marL="91440" marR="91440" marT="45720" marB="45720" anchor="ctr">
+                    <a:solidFill>
+                      <a:srgbClr val="EEF6F7"/>
+                    </a:solidFill>
+                  </a:tcPr>
+                </a:tc>
+                <a:tc>
+                  <a:txBody>
+                    <a:bodyPr lIns="66675" tIns="28575" rIns="57150" bIns="28575">
+                      <a:noAutofit/>
+                    </a:bodyPr>
+                    <a:lstStyle/>
+                    <a:p>
+                      <a:pPr algn="l"/>
+                      <a:r>
+                        <a:rPr sz="555" b="0">
+                          <a:solidFill>
+                            <a:srgbClr val="253B44"/>
+                          </a:solidFill>
+                          <a:latin typeface="Helvetica Neue"/>
+                          <a:ea typeface="Helvetica Neue"/>
+                          <a:cs typeface="Helvetica Neue"/>
+                        </a:rPr>
+                        <a:t>Earlier targeting of highest-risk patients</a:t>
+                      </a:r>
+                    </a:p>
+                  </a:txBody>
+                  <a:tcPr marL="91440" marR="91440" marT="45720" marB="45720" anchor="ctr">
+                    <a:solidFill>
+                      <a:srgbClr val="EEF6F7"/>
+                    </a:solidFill>
+                  </a:tcPr>
+                </a:tc>
+              </a:tr>
+              <a:tr h="292100">
+                <a:tc>
+                  <a:txBody>
+                    <a:bodyPr lIns="66675" tIns="28575" rIns="57150" bIns="28575">
+                      <a:noAutofit/>
+                    </a:bodyPr>
+                    <a:lstStyle/>
+                    <a:p>
+                      <a:pPr algn="l"/>
+                      <a:r>
+                        <a:rPr sz="555" b="1">
+                          <a:solidFill>
+                            <a:srgbClr val="253B44"/>
+                          </a:solidFill>
+                          <a:latin typeface="Helvetica Neue"/>
+                          <a:ea typeface="Helvetica Neue"/>
+                          <a:cs typeface="Helvetica Neue"/>
+                        </a:rPr>
+                        <a:t>Short term</a:t>
+                      </a:r>
+                    </a:p>
+                  </a:txBody>
+                  <a:tcPr marL="91440" marR="91440" marT="45720" marB="45720" anchor="ctr">
+                    <a:solidFill>
+                      <a:srgbClr val="F8FBFC"/>
+                    </a:solidFill>
+                  </a:tcPr>
+                </a:tc>
+                <a:tc>
+                  <a:txBody>
+                    <a:bodyPr lIns="66675" tIns="28575" rIns="57150" bIns="28575">
+                      <a:noAutofit/>
+                    </a:bodyPr>
+                    <a:lstStyle/>
+                    <a:p>
+                      <a:pPr algn="l"/>
+                      <a:r>
+                        <a:rPr sz="555" b="0">
+                          <a:solidFill>
+                            <a:srgbClr val="253B44"/>
+                          </a:solidFill>
+                          <a:latin typeface="Helvetica Neue"/>
+                          <a:ea typeface="Helvetica Neue"/>
+                          <a:cs typeface="Helvetica Neue"/>
+                        </a:rPr>
+                        <a:t>Close follow-up documentation and completion gaps</a:t>
+                      </a:r>
+                    </a:p>
+                  </a:txBody>
+                  <a:tcPr marL="91440" marR="91440" marT="45720" marB="45720" anchor="ctr">
+                    <a:solidFill>
+                      <a:srgbClr val="F8FBFC"/>
+                    </a:solidFill>
+                  </a:tcPr>
+                </a:tc>
+                <a:tc>
+                  <a:txBody>
+                    <a:bodyPr lIns="66675" tIns="28575" rIns="57150" bIns="28575">
+                      <a:noAutofit/>
+                    </a:bodyPr>
+                    <a:lstStyle/>
+                    <a:p>
+                      <a:pPr algn="l"/>
+                      <a:r>
+                        <a:rPr sz="555" b="0">
+                          <a:solidFill>
+                            <a:srgbClr val="253B44"/>
+                          </a:solidFill>
+                          <a:latin typeface="Helvetica Neue"/>
+                          <a:ea typeface="Helvetica Neue"/>
+                          <a:cs typeface="Helvetica Neue"/>
+                        </a:rPr>
+                        <a:t>0-3 months</a:t>
+                      </a:r>
+                    </a:p>
+                  </a:txBody>
+                  <a:tcPr marL="91440" marR="91440" marT="45720" marB="45720" anchor="ctr">
+                    <a:solidFill>
+                      <a:srgbClr val="F8FBFC"/>
+                    </a:solidFill>
+                  </a:tcPr>
+                </a:tc>
+                <a:tc>
+                  <a:txBody>
+                    <a:bodyPr lIns="66675" tIns="28575" rIns="57150" bIns="28575">
+                      <a:noAutofit/>
+                    </a:bodyPr>
+                    <a:lstStyle/>
+                    <a:p>
+                      <a:pPr algn="l"/>
+                      <a:r>
+                        <a:rPr sz="555" b="0">
+                          <a:solidFill>
+                            <a:srgbClr val="253B44"/>
+                          </a:solidFill>
+                          <a:latin typeface="Helvetica Neue"/>
+                          <a:ea typeface="Helvetica Neue"/>
+                          <a:cs typeface="Helvetica Neue"/>
+                        </a:rPr>
+                        <a:t>Lower unknown follow-up status rate</a:t>
+                      </a:r>
+                    </a:p>
+                  </a:txBody>
+                  <a:tcPr marL="91440" marR="91440" marT="45720" marB="45720" anchor="ctr">
+                    <a:solidFill>
+                      <a:srgbClr val="F8FBFC"/>
+                    </a:solidFill>
+                  </a:tcPr>
+                </a:tc>
+              </a:tr>
+              <a:tr h="292100">
+                <a:tc>
+                  <a:txBody>
+                    <a:bodyPr lIns="66675" tIns="28575" rIns="57150" bIns="28575">
+                      <a:noAutofit/>
+                    </a:bodyPr>
+                    <a:lstStyle/>
+                    <a:p>
+                      <a:pPr algn="l"/>
+                      <a:r>
+                        <a:rPr sz="555" b="1">
+                          <a:solidFill>
+                            <a:srgbClr val="253B44"/>
+                          </a:solidFill>
+                          <a:latin typeface="Helvetica Neue"/>
+                          <a:ea typeface="Helvetica Neue"/>
+                          <a:cs typeface="Helvetica Neue"/>
+                        </a:rPr>
+                        <a:t>Short term</a:t>
+                      </a:r>
+                    </a:p>
+                  </a:txBody>
+                  <a:tcPr marL="91440" marR="91440" marT="45720" marB="45720" anchor="ctr">
+                    <a:solidFill>
+                      <a:srgbClr val="EEF6F7"/>
+                    </a:solidFill>
+                  </a:tcPr>
+                </a:tc>
+                <a:tc>
+                  <a:txBody>
+                    <a:bodyPr lIns="66675" tIns="28575" rIns="57150" bIns="28575">
+                      <a:noAutofit/>
+                    </a:bodyPr>
+                    <a:lstStyle/>
+                    <a:p>
+                      <a:pPr algn="l"/>
+                      <a:r>
+                        <a:rPr sz="555" b="0">
+                          <a:solidFill>
+                            <a:srgbClr val="253B44"/>
+                          </a:solidFill>
+                          <a:latin typeface="Helvetica Neue"/>
+                          <a:ea typeface="Helvetica Neue"/>
+                          <a:cs typeface="Helvetica Neue"/>
+                        </a:rPr>
+                        <a:t>Approve dashboard KPIs and readmission reduction targets</a:t>
+                      </a:r>
+                    </a:p>
+                  </a:txBody>
+                  <a:tcPr marL="91440" marR="91440" marT="45720" marB="45720" anchor="ctr">
+                    <a:solidFill>
+                      <a:srgbClr val="EEF6F7"/>
+                    </a:solidFill>
+                  </a:tcPr>
+                </a:tc>
+                <a:tc>
+                  <a:txBody>
+                    <a:bodyPr lIns="66675" tIns="28575" rIns="57150" bIns="28575">
+                      <a:noAutofit/>
+                    </a:bodyPr>
+                    <a:lstStyle/>
+                    <a:p>
+                      <a:pPr algn="l"/>
+                      <a:r>
+                        <a:rPr sz="555" b="0">
+                          <a:solidFill>
+                            <a:srgbClr val="253B44"/>
+                          </a:solidFill>
+                          <a:latin typeface="Helvetica Neue"/>
+                          <a:ea typeface="Helvetica Neue"/>
+                          <a:cs typeface="Helvetica Neue"/>
+                        </a:rPr>
+                        <a:t>0-3 months</a:t>
+                      </a:r>
+                    </a:p>
+                  </a:txBody>
+                  <a:tcPr marL="91440" marR="91440" marT="45720" marB="45720" anchor="ctr">
+                    <a:solidFill>
+                      <a:srgbClr val="EEF6F7"/>
+                    </a:solidFill>
+                  </a:tcPr>
+                </a:tc>
+                <a:tc>
+                  <a:txBody>
+                    <a:bodyPr lIns="66675" tIns="28575" rIns="57150" bIns="28575">
+                      <a:noAutofit/>
+                    </a:bodyPr>
+                    <a:lstStyle/>
+                    <a:p>
+                      <a:pPr algn="l"/>
+                      <a:r>
+                        <a:rPr sz="555" b="0">
+                          <a:solidFill>
+                            <a:srgbClr val="253B44"/>
+                          </a:solidFill>
+                          <a:latin typeface="Helvetica Neue"/>
+                          <a:ea typeface="Helvetica Neue"/>
+                          <a:cs typeface="Helvetica Neue"/>
+                        </a:rPr>
+                        <a:t>Consistent executive reporting</a:t>
+                      </a:r>
+                    </a:p>
+                  </a:txBody>
+                  <a:tcPr marL="91440" marR="91440" marT="45720" marB="45720" anchor="ctr">
+                    <a:solidFill>
+                      <a:srgbClr val="EEF6F7"/>
+                    </a:solidFill>
+                  </a:tcPr>
+                </a:tc>
+              </a:tr>
+              <a:tr h="292100">
+                <a:tc>
+                  <a:txBody>
+                    <a:bodyPr lIns="66675" tIns="28575" rIns="57150" bIns="28575">
+                      <a:noAutofit/>
+                    </a:bodyPr>
+                    <a:lstStyle/>
+                    <a:p>
+                      <a:pPr algn="l"/>
+                      <a:r>
+                        <a:rPr sz="555" b="1">
+                          <a:solidFill>
+                            <a:srgbClr val="253B44"/>
+                          </a:solidFill>
+                          <a:latin typeface="Helvetica Neue"/>
+                          <a:ea typeface="Helvetica Neue"/>
+                          <a:cs typeface="Helvetica Neue"/>
+                        </a:rPr>
+                        <a:t>Long term</a:t>
+                      </a:r>
+                    </a:p>
+                  </a:txBody>
+                  <a:tcPr marL="91440" marR="91440" marT="45720" marB="45720" anchor="ctr">
+                    <a:solidFill>
+                      <a:srgbClr val="F8FBFC"/>
+                    </a:solidFill>
+                  </a:tcPr>
+                </a:tc>
+                <a:tc>
+                  <a:txBody>
+                    <a:bodyPr lIns="66675" tIns="28575" rIns="57150" bIns="28575">
+                      <a:noAutofit/>
+                    </a:bodyPr>
+                    <a:lstStyle/>
+                    <a:p>
+                      <a:pPr algn="l"/>
+                      <a:r>
+                        <a:rPr sz="555" b="0">
+                          <a:solidFill>
+                            <a:srgbClr val="253B44"/>
+                          </a:solidFill>
+                          <a:latin typeface="Helvetica Neue"/>
+                          <a:ea typeface="Helvetica Neue"/>
+                          <a:cs typeface="Helvetica Neue"/>
+                        </a:rPr>
+                        <a:t>Expand care coordination for chronic disease and repeat-admission groups</a:t>
+                      </a:r>
+                    </a:p>
+                  </a:txBody>
+                  <a:tcPr marL="91440" marR="91440" marT="45720" marB="45720" anchor="ctr">
+                    <a:solidFill>
+                      <a:srgbClr val="F8FBFC"/>
+                    </a:solidFill>
+                  </a:tcPr>
+                </a:tc>
+                <a:tc>
+                  <a:txBody>
+                    <a:bodyPr lIns="66675" tIns="28575" rIns="57150" bIns="28575">
+                      <a:noAutofit/>
+                    </a:bodyPr>
+                    <a:lstStyle/>
+                    <a:p>
+                      <a:pPr algn="l"/>
+                      <a:r>
+                        <a:rPr sz="555" b="0">
+                          <a:solidFill>
+                            <a:srgbClr val="253B44"/>
+                          </a:solidFill>
+                          <a:latin typeface="Helvetica Neue"/>
+                          <a:ea typeface="Helvetica Neue"/>
+                          <a:cs typeface="Helvetica Neue"/>
+                        </a:rPr>
+                        <a:t>3-6 months</a:t>
+                      </a:r>
+                    </a:p>
+                  </a:txBody>
+                  <a:tcPr marL="91440" marR="91440" marT="45720" marB="45720" anchor="ctr">
+                    <a:solidFill>
+                      <a:srgbClr val="F8FBFC"/>
+                    </a:solidFill>
+                  </a:tcPr>
+                </a:tc>
+                <a:tc>
+                  <a:txBody>
+                    <a:bodyPr lIns="66675" tIns="28575" rIns="57150" bIns="28575">
+                      <a:noAutofit/>
+                    </a:bodyPr>
+                    <a:lstStyle/>
+                    <a:p>
+                      <a:pPr algn="l"/>
+                      <a:r>
+                        <a:rPr sz="555" b="0">
+                          <a:solidFill>
+                            <a:srgbClr val="253B44"/>
+                          </a:solidFill>
+                          <a:latin typeface="Helvetica Neue"/>
+                          <a:ea typeface="Helvetica Neue"/>
+                          <a:cs typeface="Helvetica Neue"/>
+                        </a:rPr>
+                        <a:t>Higher intervention completion in high-risk groups</a:t>
+                      </a:r>
+                    </a:p>
+                  </a:txBody>
+                  <a:tcPr marL="91440" marR="91440" marT="45720" marB="45720" anchor="ctr">
+                    <a:solidFill>
+                      <a:srgbClr val="F8FBFC"/>
+                    </a:solidFill>
+                  </a:tcPr>
+                </a:tc>
+              </a:tr>
+              <a:tr h="292100">
+                <a:tc>
+                  <a:txBody>
+                    <a:bodyPr lIns="66675" tIns="28575" rIns="57150" bIns="28575">
+                      <a:noAutofit/>
+                    </a:bodyPr>
+                    <a:lstStyle/>
+                    <a:p>
+                      <a:pPr algn="l"/>
+                      <a:r>
+                        <a:rPr sz="555" b="1">
+                          <a:solidFill>
+                            <a:srgbClr val="253B44"/>
+                          </a:solidFill>
+                          <a:latin typeface="Helvetica Neue"/>
+                          <a:ea typeface="Helvetica Neue"/>
+                          <a:cs typeface="Helvetica Neue"/>
+                        </a:rPr>
+                        <a:t>Long term</a:t>
+                      </a:r>
+                    </a:p>
+                  </a:txBody>
+                  <a:tcPr marL="91440" marR="91440" marT="45720" marB="45720" anchor="ctr">
+                    <a:solidFill>
+                      <a:srgbClr val="EEF6F7"/>
+                    </a:solidFill>
+                  </a:tcPr>
+                </a:tc>
+                <a:tc>
+                  <a:txBody>
+                    <a:bodyPr lIns="66675" tIns="28575" rIns="57150" bIns="28575">
+                      <a:noAutofit/>
+                    </a:bodyPr>
+                    <a:lstStyle/>
+                    <a:p>
+                      <a:pPr algn="l"/>
+                      <a:r>
+                        <a:rPr sz="555" b="0">
+                          <a:solidFill>
+                            <a:srgbClr val="253B44"/>
+                          </a:solidFill>
+                          <a:latin typeface="Helvetica Neue"/>
+                          <a:ea typeface="Helvetica Neue"/>
+                          <a:cs typeface="Helvetica Neue"/>
+                        </a:rPr>
+                        <a:t>Track ROI, penalty exposure, and model performance monthly</a:t>
+                      </a:r>
+                    </a:p>
+                  </a:txBody>
+                  <a:tcPr marL="91440" marR="91440" marT="45720" marB="45720" anchor="ctr">
+                    <a:solidFill>
+                      <a:srgbClr val="EEF6F7"/>
+                    </a:solidFill>
+                  </a:tcPr>
+                </a:tc>
+                <a:tc>
+                  <a:txBody>
+                    <a:bodyPr lIns="66675" tIns="28575" rIns="57150" bIns="28575">
+                      <a:noAutofit/>
+                    </a:bodyPr>
+                    <a:lstStyle/>
+                    <a:p>
+                      <a:pPr algn="l"/>
+                      <a:r>
+                        <a:rPr sz="555" b="0">
+                          <a:solidFill>
+                            <a:srgbClr val="253B44"/>
+                          </a:solidFill>
+                          <a:latin typeface="Helvetica Neue"/>
+                          <a:ea typeface="Helvetica Neue"/>
+                          <a:cs typeface="Helvetica Neue"/>
+                        </a:rPr>
+                        <a:t>6-12 months</a:t>
+                      </a:r>
+                    </a:p>
+                  </a:txBody>
+                  <a:tcPr marL="91440" marR="91440" marT="45720" marB="45720" anchor="ctr">
+                    <a:solidFill>
+                      <a:srgbClr val="EEF6F7"/>
+                    </a:solidFill>
+                  </a:tcPr>
+                </a:tc>
+                <a:tc>
+                  <a:txBody>
+                    <a:bodyPr lIns="66675" tIns="28575" rIns="57150" bIns="28575">
+                      <a:noAutofit/>
+                    </a:bodyPr>
+                    <a:lstStyle/>
+                    <a:p>
+                      <a:pPr algn="l"/>
+                      <a:r>
+                        <a:rPr sz="555" b="0">
+                          <a:solidFill>
+                            <a:srgbClr val="253B44"/>
+                          </a:solidFill>
+                          <a:latin typeface="Helvetica Neue"/>
+                          <a:ea typeface="Helvetica Neue"/>
+                          <a:cs typeface="Helvetica Neue"/>
+                        </a:rPr>
+                        <a:t>Sustained savings and model governance</a:t>
+                      </a:r>
+                    </a:p>
+                  </a:txBody>
+                  <a:tcPr marL="91440" marR="91440" marT="45720" marB="45720" anchor="ctr">
+                    <a:solidFill>
+                      <a:srgbClr val="EEF6F7"/>
+                    </a:solidFill>
+                  </a:tcPr>
+                </a:tc>
+              </a:tr>
+            </a:tbl>
+          </a:graphicData>
+        </a:graphic>
+      </p:graphicFrame>
+      <p:sp>
+        <p:nvSpPr>
+          <p:cNvPr id="10" name="">
+            <a:extLst xmlns:a="http://schemas.openxmlformats.org/drawingml/2006/main">
+              <a:ext uri="{FF2B5EF4-FFF2-40B4-BE49-F238E27FC236}">
+                <a16:creationId xmlns:a16="http://schemas.microsoft.com/office/drawing/2014/main" id="{63391FE7-E85D-41AA-89C6-9A8E933530F6}"/>
+              </a:ext>
+            </a:extLst>
+          </p:cNvPr>
+          <p:cNvSpPr>
+            <a:spLocks xmlns:a="http://schemas.openxmlformats.org/drawingml/2006/main" noGrp="1"/>
+          </p:cNvSpPr>
+          <p:nvPr/>
+        </p:nvSpPr>
+        <p:spPr>
+          <a:xfrm xmlns:a="http://schemas.openxmlformats.org/drawingml/2006/main">
+            <a:off x="7277100" y="3009900"/>
+            <a:ext cx="3143250" cy="228600"/>
+          </a:xfrm>
+          <a:prstGeom xmlns:a="http://schemas.openxmlformats.org/drawingml/2006/main" prst="rect">
+            <a:avLst/>
+          </a:prstGeom>
+          <a:noFill xmlns:a="http://schemas.openxmlformats.org/drawingml/2006/main"/>
+          <a:ln xmlns:a="http://schemas.openxmlformats.org/drawingml/2006/main" w="0">
+            <a:noFill/>
+            <a:prstDash val="solid"/>
+          </a:ln>
+        </p:spPr>
+        <p:txBody>
+          <a:bodyPr xmlns:a="http://schemas.openxmlformats.org/drawingml/2006/main" lIns="0" tIns="0" rIns="0" bIns="0">
+            <a:noAutofit/>
+          </a:bodyPr>
+          <a:lstStyle xmlns:a="http://schemas.openxmlformats.org/drawingml/2006/main"/>
+          <a:p xmlns:a="http://schemas.openxmlformats.org/drawingml/2006/main">
+            <a:pPr>
+              <a:defRPr sz="1500" b="1">
+                <a:solidFill>
+                  <a:srgbClr val="102A34"/>
+                </a:solidFill>
+                <a:latin typeface="Helvetica Neue"/>
+                <a:ea typeface="Helvetica Neue"/>
+                <a:cs typeface="Helvetica Neue"/>
+              </a:defRPr>
+            </a:pPr>
+            <a:r>
+              <a:rPr sz="1500" b="1">
+                <a:solidFill>
+                  <a:srgbClr val="102A34"/>
+                </a:solidFill>
+                <a:latin typeface="Helvetica Neue"/>
+                <a:ea typeface="Helvetica Neue"/>
+                <a:cs typeface="Helvetica Neue"/>
+              </a:rPr>
+              <a:t>Implementation timeline</a:t>
+            </a:r>
+          </a:p>
+        </p:txBody>
+      </p:sp>
+      <p:graphicFrame>
+        <p:nvGraphicFramePr>
+          <p:cNvPr id="30" name=""/>
+          <p:cNvGraphicFramePr/>
+          <p:nvPr/>
+        </p:nvGraphicFramePr>
+        <p:xfrm>
+          <a:off xmlns:a="http://schemas.openxmlformats.org/drawingml/2006/main" x="7277100" y="3362325"/>
+          <a:ext xmlns:a="http://schemas.openxmlformats.org/drawingml/2006/main" cx="3524250" cy="1104900"/>
+        </p:xfrm>
+        <a:graphic xmlns:a="http://schemas.openxmlformats.org/drawingml/2006/main">
+          <a:graphicData uri="http://schemas.openxmlformats.org/drawingml/2006/table">
+            <a:tbl>
+              <a:tblPr/>
+              <a:tblGrid>
+                <a:gridCol w="990600"/>
+                <a:gridCol w="2533650"/>
+              </a:tblGrid>
+              <a:tr h="276225">
+                <a:tc>
+                  <a:txBody>
+                    <a:bodyPr lIns="66675" tIns="28575" rIns="57150" bIns="28575">
+                      <a:noAutofit/>
+                    </a:bodyPr>
+                    <a:lstStyle/>
+                    <a:p>
+                      <a:pPr algn="l"/>
+                      <a:r>
+                        <a:rPr sz="660" b="1">
+                          <a:solidFill>
+                            <a:srgbClr val="FFFFFF"/>
+                          </a:solidFill>
+                          <a:latin typeface="Helvetica Neue"/>
+                          <a:ea typeface="Helvetica Neue"/>
+                          <a:cs typeface="Helvetica Neue"/>
+                        </a:rPr>
+                        <a:t>Phase</a:t>
+                      </a:r>
+                    </a:p>
+                  </a:txBody>
+                  <a:tcPr marL="91440" marR="91440" marT="45720" marB="45720" anchor="ctr">
+                    <a:solidFill>
+                      <a:srgbClr val="0F4C5C"/>
+                    </a:solidFill>
+                  </a:tcPr>
+                </a:tc>
+                <a:tc>
+                  <a:txBody>
+                    <a:bodyPr lIns="66675" tIns="28575" rIns="57150" bIns="28575">
+                      <a:noAutofit/>
+                    </a:bodyPr>
+                    <a:lstStyle/>
+                    <a:p>
+                      <a:pPr algn="l"/>
+                      <a:r>
+                        <a:rPr sz="660" b="1">
+                          <a:solidFill>
+                            <a:srgbClr val="FFFFFF"/>
+                          </a:solidFill>
+                          <a:latin typeface="Helvetica Neue"/>
+                          <a:ea typeface="Helvetica Neue"/>
+                          <a:cs typeface="Helvetica Neue"/>
+                        </a:rPr>
+                        <a:t>Focus</a:t>
+                      </a:r>
+                    </a:p>
+                  </a:txBody>
+                  <a:tcPr marL="91440" marR="91440" marT="45720" marB="45720" anchor="ctr">
+                    <a:solidFill>
+                      <a:srgbClr val="0F4C5C"/>
+                    </a:solidFill>
+                  </a:tcPr>
+                </a:tc>
+              </a:tr>
+              <a:tr h="276225">
+                <a:tc>
+                  <a:txBody>
+                    <a:bodyPr lIns="66675" tIns="28575" rIns="57150" bIns="28575">
+                      <a:noAutofit/>
+                    </a:bodyPr>
+                    <a:lstStyle/>
+                    <a:p>
+                      <a:pPr algn="l"/>
+                      <a:r>
+                        <a:rPr sz="623" b="1">
+                          <a:solidFill>
+                            <a:srgbClr val="253B44"/>
+                          </a:solidFill>
+                          <a:latin typeface="Helvetica Neue"/>
+                          <a:ea typeface="Helvetica Neue"/>
+                          <a:cs typeface="Helvetica Neue"/>
+                        </a:rPr>
+                        <a:t>0-3 months</a:t>
+                      </a:r>
+                    </a:p>
+                  </a:txBody>
+                  <a:tcPr marL="91440" marR="91440" marT="45720" marB="45720" anchor="ctr">
+                    <a:solidFill>
+                      <a:srgbClr val="EEF6F7"/>
+                    </a:solidFill>
+                  </a:tcPr>
+                </a:tc>
+                <a:tc>
+                  <a:txBody>
+                    <a:bodyPr lIns="66675" tIns="28575" rIns="57150" bIns="28575">
+                      <a:noAutofit/>
+                    </a:bodyPr>
+                    <a:lstStyle/>
+                    <a:p>
+                      <a:pPr algn="l"/>
+                      <a:r>
+                        <a:rPr sz="623" b="0">
+                          <a:solidFill>
+                            <a:srgbClr val="253B44"/>
+                          </a:solidFill>
+                          <a:latin typeface="Helvetica Neue"/>
+                          <a:ea typeface="Helvetica Neue"/>
+                          <a:cs typeface="Helvetica Neue"/>
+                        </a:rPr>
+                        <a:t>Risk-score pilot, follow-up workflow fix, KPI governance</a:t>
+                      </a:r>
+                    </a:p>
+                  </a:txBody>
+                  <a:tcPr marL="91440" marR="91440" marT="45720" marB="45720" anchor="ctr">
+                    <a:solidFill>
+                      <a:srgbClr val="EEF6F7"/>
+                    </a:solidFill>
+                  </a:tcPr>
+                </a:tc>
+              </a:tr>
+              <a:tr h="276225">
+                <a:tc>
+                  <a:txBody>
+                    <a:bodyPr lIns="66675" tIns="28575" rIns="57150" bIns="28575">
+                      <a:noAutofit/>
+                    </a:bodyPr>
+                    <a:lstStyle/>
+                    <a:p>
+                      <a:pPr algn="l"/>
+                      <a:r>
+                        <a:rPr sz="623" b="1">
+                          <a:solidFill>
+                            <a:srgbClr val="253B44"/>
+                          </a:solidFill>
+                          <a:latin typeface="Helvetica Neue"/>
+                          <a:ea typeface="Helvetica Neue"/>
+                          <a:cs typeface="Helvetica Neue"/>
+                        </a:rPr>
+                        <a:t>3-6 months</a:t>
+                      </a:r>
+                    </a:p>
+                  </a:txBody>
+                  <a:tcPr marL="91440" marR="91440" marT="45720" marB="45720" anchor="ctr">
+                    <a:solidFill>
+                      <a:srgbClr val="F8FBFC"/>
+                    </a:solidFill>
+                  </a:tcPr>
+                </a:tc>
+                <a:tc>
+                  <a:txBody>
+                    <a:bodyPr lIns="66675" tIns="28575" rIns="57150" bIns="28575">
+                      <a:noAutofit/>
+                    </a:bodyPr>
+                    <a:lstStyle/>
+                    <a:p>
+                      <a:pPr algn="l"/>
+                      <a:r>
+                        <a:rPr sz="623" b="0">
+                          <a:solidFill>
+                            <a:srgbClr val="253B44"/>
+                          </a:solidFill>
+                          <a:latin typeface="Helvetica Neue"/>
+                          <a:ea typeface="Helvetica Neue"/>
+                          <a:cs typeface="Helvetica Neue"/>
+                        </a:rPr>
+                        <a:t>Targeted care coordination expansion and executive dashboard</a:t>
+                      </a:r>
+                    </a:p>
+                  </a:txBody>
+                  <a:tcPr marL="91440" marR="91440" marT="45720" marB="45720" anchor="ctr">
+                    <a:solidFill>
+                      <a:srgbClr val="F8FBFC"/>
+                    </a:solidFill>
+                  </a:tcPr>
+                </a:tc>
+              </a:tr>
+              <a:tr h="276225">
+                <a:tc>
+                  <a:txBody>
+                    <a:bodyPr lIns="66675" tIns="28575" rIns="57150" bIns="28575">
+                      <a:noAutofit/>
+                    </a:bodyPr>
+                    <a:lstStyle/>
+                    <a:p>
+                      <a:pPr algn="l"/>
+                      <a:r>
+                        <a:rPr sz="623" b="1">
+                          <a:solidFill>
+                            <a:srgbClr val="253B44"/>
+                          </a:solidFill>
+                          <a:latin typeface="Helvetica Neue"/>
+                          <a:ea typeface="Helvetica Neue"/>
+                          <a:cs typeface="Helvetica Neue"/>
+                        </a:rPr>
+                        <a:t>6-12 months</a:t>
+                      </a:r>
+                    </a:p>
+                  </a:txBody>
+                  <a:tcPr marL="91440" marR="91440" marT="45720" marB="45720" anchor="ctr">
+                    <a:solidFill>
+                      <a:srgbClr val="EEF6F7"/>
+                    </a:solidFill>
+                  </a:tcPr>
+                </a:tc>
+                <a:tc>
+                  <a:txBody>
+                    <a:bodyPr lIns="66675" tIns="28575" rIns="57150" bIns="28575">
+                      <a:noAutofit/>
+                    </a:bodyPr>
+                    <a:lstStyle/>
+                    <a:p>
+                      <a:pPr algn="l"/>
+                      <a:r>
+                        <a:rPr sz="623" b="0">
+                          <a:solidFill>
+                            <a:srgbClr val="253B44"/>
+                          </a:solidFill>
+                          <a:latin typeface="Helvetica Neue"/>
+                          <a:ea typeface="Helvetica Neue"/>
+                          <a:cs typeface="Helvetica Neue"/>
+                        </a:rPr>
+                        <a:t>Monthly ROI tracking and model refresh</a:t>
+                      </a:r>
+                    </a:p>
+                  </a:txBody>
+                  <a:tcPr marL="91440" marR="91440" marT="45720" marB="45720" anchor="ctr">
+                    <a:solidFill>
+                      <a:srgbClr val="EEF6F7"/>
+                    </a:solidFill>
+                  </a:tcPr>
+                </a:tc>
+              </a:tr>
+            </a:tbl>
+          </a:graphicData>
+        </a:graphic>
+      </p:graphicFrame>
+      <p:sp>
+        <p:nvSpPr>
+          <p:cNvPr id="12" name="">
+            <a:extLst xmlns:a="http://schemas.openxmlformats.org/drawingml/2006/main">
+              <a:ext uri="{FF2B5EF4-FFF2-40B4-BE49-F238E27FC236}">
+                <a16:creationId xmlns:a16="http://schemas.microsoft.com/office/drawing/2014/main" id="{488F6F33-4A2D-47C5-9D04-DC7DCF41CF25}"/>
+              </a:ext>
+            </a:extLst>
+          </p:cNvPr>
+          <p:cNvSpPr>
+            <a:spLocks xmlns:a="http://schemas.openxmlformats.org/drawingml/2006/main" noGrp="1"/>
+          </p:cNvSpPr>
+          <p:nvPr/>
+        </p:nvSpPr>
+        <p:spPr>
+          <a:xfrm xmlns:a="http://schemas.openxmlformats.org/drawingml/2006/main">
+            <a:off x="7277100" y="4695825"/>
+            <a:ext cx="2476500" cy="228600"/>
+          </a:xfrm>
+          <a:prstGeom xmlns:a="http://schemas.openxmlformats.org/drawingml/2006/main" prst="rect">
+            <a:avLst/>
+          </a:prstGeom>
+          <a:noFill xmlns:a="http://schemas.openxmlformats.org/drawingml/2006/main"/>
+          <a:ln xmlns:a="http://schemas.openxmlformats.org/drawingml/2006/main" w="0">
+            <a:noFill/>
+            <a:prstDash val="solid"/>
+          </a:ln>
+        </p:spPr>
+        <p:txBody>
+          <a:bodyPr xmlns:a="http://schemas.openxmlformats.org/drawingml/2006/main" lIns="0" tIns="0" rIns="0" bIns="0">
+            <a:noAutofit/>
+          </a:bodyPr>
+          <a:lstStyle xmlns:a="http://schemas.openxmlformats.org/drawingml/2006/main"/>
+          <a:p xmlns:a="http://schemas.openxmlformats.org/drawingml/2006/main">
+            <a:pPr>
+              <a:defRPr sz="1500" b="1">
+                <a:solidFill>
+                  <a:srgbClr val="102A34"/>
+                </a:solidFill>
+                <a:latin typeface="Helvetica Neue"/>
+                <a:ea typeface="Helvetica Neue"/>
+                <a:cs typeface="Helvetica Neue"/>
+              </a:defRPr>
+            </a:pPr>
+            <a:r>
+              <a:rPr sz="1500" b="1">
+                <a:solidFill>
+                  <a:srgbClr val="102A34"/>
+                </a:solidFill>
+                <a:latin typeface="Helvetica Neue"/>
+                <a:ea typeface="Helvetica Neue"/>
+                <a:cs typeface="Helvetica Neue"/>
+              </a:rPr>
+              <a:t>Potential risks</a:t>
+            </a:r>
+          </a:p>
+        </p:txBody>
+      </p:sp>
+      <p:sp>
+        <p:nvSpPr>
+          <p:cNvPr id="13" name="">
+            <a:extLst xmlns:a="http://schemas.openxmlformats.org/drawingml/2006/main">
+              <a:ext uri="{FF2B5EF4-FFF2-40B4-BE49-F238E27FC236}">
+                <a16:creationId xmlns:a16="http://schemas.microsoft.com/office/drawing/2014/main" id="{87D342A4-5AB4-4CB4-A209-9F4FF5EBD699}"/>
+              </a:ext>
+            </a:extLst>
+          </p:cNvPr>
+          <p:cNvSpPr>
+            <a:spLocks xmlns:a="http://schemas.openxmlformats.org/drawingml/2006/main" noGrp="1"/>
+          </p:cNvSpPr>
+          <p:nvPr/>
+        </p:nvSpPr>
+        <p:spPr>
+          <a:xfrm xmlns:a="http://schemas.openxmlformats.org/drawingml/2006/main">
+            <a:off x="7353300" y="5029200"/>
+            <a:ext cx="3333750" cy="838200"/>
+          </a:xfrm>
+          <a:prstGeom xmlns:a="http://schemas.openxmlformats.org/drawingml/2006/main" prst="rect">
+            <a:avLst/>
+          </a:prstGeom>
+          <a:noFill xmlns:a="http://schemas.openxmlformats.org/drawingml/2006/main"/>
+          <a:ln xmlns:a="http://schemas.openxmlformats.org/drawingml/2006/main" w="0">
+            <a:noFill/>
+            <a:prstDash val="solid"/>
+          </a:ln>
+        </p:spPr>
+        <p:txBody>
+          <a:bodyPr xmlns:a="http://schemas.openxmlformats.org/drawingml/2006/main" lIns="0" tIns="0" rIns="0" bIns="0">
+            <a:noAutofit/>
+          </a:bodyPr>
+          <a:lstStyle xmlns:a="http://schemas.openxmlformats.org/drawingml/2006/main"/>
+          <a:p xmlns:a="http://schemas.openxmlformats.org/drawingml/2006/main">
+            <a:pPr marL="139700" indent="-63500">
+              <a:lnSpc>
+                <a:spcPct val="103000"/>
+              </a:lnSpc>
+              <a:spcAft>
+                <a:spcPts val="300"/>
+              </a:spcAft>
+              <a:buNone/>
+              <a:defRPr sz="765">
+                <a:solidFill>
+                  <a:srgbClr val="253B44"/>
+                </a:solidFill>
+                <a:latin typeface="Helvetica Neue"/>
+                <a:ea typeface="Helvetica Neue"/>
+                <a:cs typeface="Helvetica Neue"/>
+              </a:defRPr>
+            </a:pPr>
+            <a:r>
+              <a:rPr sz="765">
+                <a:solidFill>
+                  <a:srgbClr val="253B44"/>
+                </a:solidFill>
+                <a:latin typeface="Helvetica Neue"/>
+                <a:ea typeface="Helvetica Neue"/>
+                <a:cs typeface="Helvetica Neue"/>
+              </a:rPr>
+              <a:t>Risk score adoption may stall without clear clinical workflow ownership</a:t>
+            </a:r>
+          </a:p>
+          <a:p xmlns:a="http://schemas.openxmlformats.org/drawingml/2006/main">
+            <a:pPr marL="139700" indent="-63500">
+              <a:lnSpc>
+                <a:spcPct val="103000"/>
+              </a:lnSpc>
+              <a:spcAft>
+                <a:spcPts val="300"/>
+              </a:spcAft>
+              <a:buNone/>
+              <a:defRPr sz="765">
+                <a:solidFill>
+                  <a:srgbClr val="253B44"/>
+                </a:solidFill>
+                <a:latin typeface="Helvetica Neue"/>
+                <a:ea typeface="Helvetica Neue"/>
+                <a:cs typeface="Helvetica Neue"/>
+              </a:defRPr>
+            </a:pPr>
+            <a:r>
+              <a:rPr sz="765">
+                <a:solidFill>
+                  <a:srgbClr val="253B44"/>
+                </a:solidFill>
+                <a:latin typeface="Helvetica Neue"/>
+                <a:ea typeface="Helvetica Neue"/>
+                <a:cs typeface="Helvetica Neue"/>
+              </a:rPr>
+              <a:t>Follow-up documentation gaps may hide operational performance issues</a:t>
+            </a:r>
+          </a:p>
+          <a:p xmlns:a="http://schemas.openxmlformats.org/drawingml/2006/main">
+            <a:pPr marL="139700" indent="-63500">
+              <a:lnSpc>
+                <a:spcPct val="103000"/>
+              </a:lnSpc>
+              <a:spcAft>
+                <a:spcPts val="300"/>
+              </a:spcAft>
+              <a:buNone/>
+              <a:defRPr sz="765">
+                <a:solidFill>
+                  <a:srgbClr val="253B44"/>
+                </a:solidFill>
+                <a:latin typeface="Helvetica Neue"/>
+                <a:ea typeface="Helvetica Neue"/>
+                <a:cs typeface="Helvetica Neue"/>
+              </a:defRPr>
+            </a:pPr>
+            <a:r>
+              <a:rPr sz="765">
+                <a:solidFill>
+                  <a:srgbClr val="253B44"/>
+                </a:solidFill>
+                <a:latin typeface="Helvetica Neue"/>
+                <a:ea typeface="Helvetica Neue"/>
+                <a:cs typeface="Helvetica Neue"/>
+              </a:rPr>
+              <a:t>ROI estimates depend on validated cost, penalty, and intervention assumptions</a:t>
+            </a:r>
+          </a:p>
+        </p:txBody>
+      </p:sp>
+      <p:sp>
+        <p:nvSpPr>
+          <p:cNvPr id="14" name="">
+            <a:extLst xmlns:a="http://schemas.openxmlformats.org/drawingml/2006/main">
+              <a:ext uri="{FF2B5EF4-FFF2-40B4-BE49-F238E27FC236}">
+                <a16:creationId xmlns:a16="http://schemas.microsoft.com/office/drawing/2014/main" id="{5A7250E2-C6AB-47AC-9AF0-6A33CAE42449}"/>
+              </a:ext>
+            </a:extLst>
+          </p:cNvPr>
+          <p:cNvSpPr>
+            <a:spLocks xmlns:a="http://schemas.openxmlformats.org/drawingml/2006/main" noGrp="1"/>
+          </p:cNvSpPr>
+          <p:nvPr/>
+        </p:nvSpPr>
+        <p:spPr>
+          <a:xfrm xmlns:a="http://schemas.openxmlformats.org/drawingml/2006/main">
+            <a:off x="514350" y="5400675"/>
+            <a:ext cx="6343650" cy="14288"/>
+          </a:xfrm>
+          <a:prstGeom xmlns:a="http://schemas.openxmlformats.org/drawingml/2006/main" prst="rect">
+            <a:avLst/>
+          </a:prstGeom>
+          <a:solidFill xmlns:a="http://schemas.openxmlformats.org/drawingml/2006/main">
+            <a:srgbClr val="D1E1E5"/>
+          </a:solidFill>
+          <a:ln xmlns:a="http://schemas.openxmlformats.org/drawingml/2006/main" w="0">
+            <a:noFill/>
+            <a:prstDash val="solid"/>
+          </a:ln>
+        </p:spPr>
+      </p:sp>
+      <p:sp>
+        <p:nvSpPr>
+          <p:cNvPr id="15" name="">
+            <a:extLst xmlns:a="http://schemas.openxmlformats.org/drawingml/2006/main">
+              <a:ext uri="{FF2B5EF4-FFF2-40B4-BE49-F238E27FC236}">
+                <a16:creationId xmlns:a16="http://schemas.microsoft.com/office/drawing/2014/main" id="{5BC093EE-2BEE-4430-8417-50FFC986DE31}"/>
+              </a:ext>
+            </a:extLst>
+          </p:cNvPr>
+          <p:cNvSpPr>
+            <a:spLocks xmlns:a="http://schemas.openxmlformats.org/drawingml/2006/main" noGrp="1"/>
+          </p:cNvSpPr>
+          <p:nvPr/>
+        </p:nvSpPr>
+        <p:spPr>
+          <a:xfrm xmlns:a="http://schemas.openxmlformats.org/drawingml/2006/main">
+            <a:off x="514350" y="5610225"/>
+            <a:ext cx="2095500" cy="209550"/>
+          </a:xfrm>
+          <a:prstGeom xmlns:a="http://schemas.openxmlformats.org/drawingml/2006/main" prst="rect">
+            <a:avLst/>
+          </a:prstGeom>
+          <a:noFill xmlns:a="http://schemas.openxmlformats.org/drawingml/2006/main"/>
+          <a:ln xmlns:a="http://schemas.openxmlformats.org/drawingml/2006/main" w="0">
+            <a:noFill/>
+            <a:prstDash val="solid"/>
+          </a:ln>
+        </p:spPr>
+        <p:txBody>
+          <a:bodyPr xmlns:a="http://schemas.openxmlformats.org/drawingml/2006/main" lIns="0" tIns="0" rIns="0" bIns="0">
+            <a:noAutofit/>
+          </a:bodyPr>
+          <a:lstStyle xmlns:a="http://schemas.openxmlformats.org/drawingml/2006/main"/>
+          <a:p xmlns:a="http://schemas.openxmlformats.org/drawingml/2006/main">
+            <a:pPr>
+              <a:defRPr sz="1200" b="1">
+                <a:solidFill>
+                  <a:srgbClr val="102A34"/>
+                </a:solidFill>
+                <a:latin typeface="Helvetica Neue"/>
+                <a:ea typeface="Helvetica Neue"/>
+                <a:cs typeface="Helvetica Neue"/>
+              </a:defRPr>
+            </a:pPr>
+            <a:r>
+              <a:rPr sz="1200" b="1">
+                <a:solidFill>
+                  <a:srgbClr val="102A34"/>
+                </a:solidFill>
+                <a:latin typeface="Helvetica Neue"/>
+                <a:ea typeface="Helvetica Neue"/>
+                <a:cs typeface="Helvetica Neue"/>
+              </a:rPr>
+              <a:t>Cost and benefit logic</a:t>
+            </a:r>
+          </a:p>
+        </p:txBody>
+      </p:sp>
+      <p:sp>
+        <p:nvSpPr>
+          <p:cNvPr id="16" name="">
+            <a:extLst xmlns:a="http://schemas.openxmlformats.org/drawingml/2006/main">
+              <a:ext uri="{FF2B5EF4-FFF2-40B4-BE49-F238E27FC236}">
+                <a16:creationId xmlns:a16="http://schemas.microsoft.com/office/drawing/2014/main" id="{146FBC89-3FC5-446D-88D3-4C48526936E0}"/>
+              </a:ext>
+            </a:extLst>
+          </p:cNvPr>
+          <p:cNvSpPr>
+            <a:spLocks xmlns:a="http://schemas.openxmlformats.org/drawingml/2006/main" noGrp="1"/>
+          </p:cNvSpPr>
+          <p:nvPr/>
+        </p:nvSpPr>
+        <p:spPr>
+          <a:xfrm xmlns:a="http://schemas.openxmlformats.org/drawingml/2006/main">
+            <a:off x="2609850" y="5629275"/>
+            <a:ext cx="4248150" cy="419100"/>
+          </a:xfrm>
+          <a:prstGeom xmlns:a="http://schemas.openxmlformats.org/drawingml/2006/main" prst="rect">
+            <a:avLst/>
+          </a:prstGeom>
+          <a:noFill xmlns:a="http://schemas.openxmlformats.org/drawingml/2006/main"/>
+          <a:ln xmlns:a="http://schemas.openxmlformats.org/drawingml/2006/main" w="0">
+            <a:noFill/>
+            <a:prstDash val="solid"/>
+          </a:ln>
+        </p:spPr>
+        <p:txBody>
+          <a:bodyPr xmlns:a="http://schemas.openxmlformats.org/drawingml/2006/main" lIns="0" tIns="0" rIns="0" bIns="0">
+            <a:noAutofit/>
+          </a:bodyPr>
+          <a:lstStyle xmlns:a="http://schemas.openxmlformats.org/drawingml/2006/main"/>
+          <a:p xmlns:a="http://schemas.openxmlformats.org/drawingml/2006/main">
+            <a:pPr>
+              <a:lnSpc>
+                <a:spcPct val="105000"/>
+              </a:lnSpc>
+              <a:buNone/>
+              <a:defRPr sz="810">
+                <a:solidFill>
+                  <a:srgbClr val="253B44"/>
+                </a:solidFill>
+                <a:latin typeface="Helvetica Neue"/>
+                <a:ea typeface="Helvetica Neue"/>
+                <a:cs typeface="Helvetica Neue"/>
+              </a:defRPr>
+            </a:pPr>
+            <a:r>
+              <a:rPr sz="810">
+                <a:solidFill>
+                  <a:srgbClr val="253B44"/>
+                </a:solidFill>
+                <a:latin typeface="Helvetica Neue"/>
+                <a:ea typeface="Helvetica Neue"/>
+                <a:cs typeface="Helvetica Neue"/>
+              </a:rPr>
+              <a:t>Expected scenario assumes a 10.0% readmission reduction, $1.75M implementation cost, and 518 avoided readmissions. Finance should validate assumptions before budget commitment.</a:t>
+            </a:r>
+          </a:p>
+        </p:txBody>
+      </p:sp>
+      <p:sp>
+        <p:nvSpPr>
+          <p:cNvPr id="17" name="">
+            <a:extLst xmlns:a="http://schemas.openxmlformats.org/drawingml/2006/main">
+              <a:ext uri="{FF2B5EF4-FFF2-40B4-BE49-F238E27FC236}">
+                <a16:creationId xmlns:a16="http://schemas.microsoft.com/office/drawing/2014/main" id="{C6818857-0A5A-482E-B5C4-E1C0CE787E4D}"/>
+              </a:ext>
+            </a:extLst>
+          </p:cNvPr>
+          <p:cNvSpPr>
+            <a:spLocks xmlns:a="http://schemas.openxmlformats.org/drawingml/2006/main" noGrp="1"/>
+          </p:cNvSpPr>
+          <p:nvPr/>
+        </p:nvSpPr>
+        <p:spPr>
+          <a:xfrm xmlns:a="http://schemas.openxmlformats.org/drawingml/2006/main">
+            <a:off x="7277100" y="6038850"/>
+            <a:ext cx="1143000" cy="209550"/>
+          </a:xfrm>
+          <a:prstGeom xmlns:a="http://schemas.openxmlformats.org/drawingml/2006/main" prst="rect">
+            <a:avLst/>
+          </a:prstGeom>
+          <a:noFill xmlns:a="http://schemas.openxmlformats.org/drawingml/2006/main"/>
+          <a:ln xmlns:a="http://schemas.openxmlformats.org/drawingml/2006/main" w="0">
+            <a:noFill/>
+            <a:prstDash val="solid"/>
+          </a:ln>
+        </p:spPr>
+        <p:txBody>
+          <a:bodyPr xmlns:a="http://schemas.openxmlformats.org/drawingml/2006/main" lIns="0" tIns="0" rIns="0" bIns="0">
+            <a:noAutofit/>
+          </a:bodyPr>
+          <a:lstStyle xmlns:a="http://schemas.openxmlformats.org/drawingml/2006/main"/>
+          <a:p xmlns:a="http://schemas.openxmlformats.org/drawingml/2006/main">
+            <a:pPr>
+              <a:defRPr sz="1200" b="1">
+                <a:solidFill>
+                  <a:srgbClr val="102A34"/>
+                </a:solidFill>
+                <a:latin typeface="Helvetica Neue"/>
+                <a:ea typeface="Helvetica Neue"/>
+                <a:cs typeface="Helvetica Neue"/>
+              </a:defRPr>
+            </a:pPr>
+            <a:r>
+              <a:rPr sz="1200" b="1">
+                <a:solidFill>
+                  <a:srgbClr val="102A34"/>
+                </a:solidFill>
+                <a:latin typeface="Helvetica Neue"/>
+                <a:ea typeface="Helvetica Neue"/>
+                <a:cs typeface="Helvetica Neue"/>
+              </a:rPr>
+              <a:t>Decision ask</a:t>
+            </a:r>
+          </a:p>
+        </p:txBody>
+      </p:sp>
+      <p:sp>
+        <p:nvSpPr>
+          <p:cNvPr id="18" name="">
+            <a:extLst xmlns:a="http://schemas.openxmlformats.org/drawingml/2006/main">
+              <a:ext uri="{FF2B5EF4-FFF2-40B4-BE49-F238E27FC236}">
+                <a16:creationId xmlns:a16="http://schemas.microsoft.com/office/drawing/2014/main" id="{F965EFF2-8506-47A3-A657-B2CC74A86D78}"/>
+              </a:ext>
+            </a:extLst>
+          </p:cNvPr>
+          <p:cNvSpPr>
+            <a:spLocks xmlns:a="http://schemas.openxmlformats.org/drawingml/2006/main" noGrp="1"/>
+          </p:cNvSpPr>
+          <p:nvPr/>
+        </p:nvSpPr>
+        <p:spPr>
+          <a:xfrm xmlns:a="http://schemas.openxmlformats.org/drawingml/2006/main">
+            <a:off x="8420100" y="6057900"/>
+            <a:ext cx="2381250" cy="333375"/>
+          </a:xfrm>
+          <a:prstGeom xmlns:a="http://schemas.openxmlformats.org/drawingml/2006/main" prst="rect">
+            <a:avLst/>
+          </a:prstGeom>
+          <a:noFill xmlns:a="http://schemas.openxmlformats.org/drawingml/2006/main"/>
+          <a:ln xmlns:a="http://schemas.openxmlformats.org/drawingml/2006/main" w="0">
+            <a:noFill/>
+            <a:prstDash val="solid"/>
+          </a:ln>
+        </p:spPr>
+        <p:txBody>
+          <a:bodyPr xmlns:a="http://schemas.openxmlformats.org/drawingml/2006/main" lIns="0" tIns="0" rIns="0" bIns="0">
+            <a:noAutofit/>
+          </a:bodyPr>
+          <a:lstStyle xmlns:a="http://schemas.openxmlformats.org/drawingml/2006/main"/>
+          <a:p xmlns:a="http://schemas.openxmlformats.org/drawingml/2006/main">
+            <a:pPr>
+              <a:lnSpc>
+                <a:spcPct val="104000"/>
+              </a:lnSpc>
+              <a:buNone/>
+              <a:defRPr sz="810">
+                <a:solidFill>
+                  <a:srgbClr val="253B44"/>
+                </a:solidFill>
+                <a:latin typeface="Helvetica Neue"/>
+                <a:ea typeface="Helvetica Neue"/>
+                <a:cs typeface="Helvetica Neue"/>
+              </a:defRPr>
+            </a:pPr>
+            <a:r>
+              <a:rPr sz="810">
+                <a:solidFill>
+                  <a:srgbClr val="253B44"/>
+                </a:solidFill>
+                <a:latin typeface="Helvetica Neue"/>
+                <a:ea typeface="Helvetica Neue"/>
+                <a:cs typeface="Helvetica Neue"/>
+              </a:rPr>
+              <a:t>Approve a 0-3 month pilot focused on risk scoring, follow-up visibility, and discharge review.</a:t>
+            </a:r>
+          </a:p>
+        </p:txBody>
+      </p:sp>
+      <p:sp>
+        <p:nvSpPr>
+          <p:cNvPr id="19" name="">
+            <a:extLst xmlns:a="http://schemas.openxmlformats.org/drawingml/2006/main">
+              <a:ext uri="{FF2B5EF4-FFF2-40B4-BE49-F238E27FC236}">
+                <a16:creationId xmlns:a16="http://schemas.microsoft.com/office/drawing/2014/main" id="{96232CFD-CE51-4E9D-B431-35717D83FAEE}"/>
+              </a:ext>
+            </a:extLst>
+          </p:cNvPr>
+          <p:cNvSpPr>
+            <a:spLocks xmlns:a="http://schemas.openxmlformats.org/drawingml/2006/main" noGrp="1"/>
+          </p:cNvSpPr>
+          <p:nvPr/>
+        </p:nvSpPr>
+        <p:spPr>
+          <a:xfrm xmlns:a="http://schemas.openxmlformats.org/drawingml/2006/main">
+            <a:off x="514350" y="6572250"/>
+            <a:ext cx="8191500" cy="171450"/>
+          </a:xfrm>
+          <a:prstGeom xmlns:a="http://schemas.openxmlformats.org/drawingml/2006/main" prst="rect">
+            <a:avLst/>
+          </a:prstGeom>
+          <a:noFill xmlns:a="http://schemas.openxmlformats.org/drawingml/2006/main"/>
+          <a:ln xmlns:a="http://schemas.openxmlformats.org/drawingml/2006/main" w="0">
+            <a:noFill/>
+            <a:prstDash val="solid"/>
+          </a:ln>
+        </p:spPr>
+        <p:txBody>
+          <a:bodyPr xmlns:a="http://schemas.openxmlformats.org/drawingml/2006/main" lIns="0" tIns="0" rIns="0" bIns="0">
+            <a:noAutofit/>
+          </a:bodyPr>
+          <a:lstStyle xmlns:a="http://schemas.openxmlformats.org/drawingml/2006/main"/>
+          <a:p xmlns:a="http://schemas.openxmlformats.org/drawingml/2006/main">
+            <a:pPr>
+              <a:defRPr sz="750">
+                <a:solidFill>
+                  <a:srgbClr val="667A82"/>
+                </a:solidFill>
+                <a:latin typeface="Helvetica Neue"/>
+                <a:ea typeface="Helvetica Neue"/>
+                <a:cs typeface="Helvetica Neue"/>
+              </a:defRPr>
+            </a:pPr>
+            <a:r>
+              <a:rPr sz="750">
+                <a:solidFill>
+                  <a:srgbClr val="667A82"/>
+                </a:solidFill>
+                <a:latin typeface="Helvetica Neue"/>
+                <a:ea typeface="Helvetica Neue"/>
+                <a:cs typeface="Helvetica Neue"/>
+              </a:rPr>
+              <a:t>Source: recommendation evidence matrix, implementation roadmap, ROI scenarios, and success metrics</a:t>
+            </a:r>
+          </a:p>
+        </p:txBody>
+      </p:sp>
+    </p:spTree>
+    <p:extLst>
+      <p:ext uri="{BB962C8B-B14F-4D97-AF65-F5344CB8AC3E}">
+        <p14:creationId xmlns:p14="http://schemas.microsoft.com/office/powerpoint/2010/main" val="1285780456"/>
       </p:ext>
     </p:extLst>
   </p:cSld>

--- a/drafts/saturday_submission.pptx
+++ b/drafts/saturday_submission.pptx
@@ -2,17 +2,18 @@
 <file path=ppt/presentation.xml><?xml version="1.0" encoding="utf-8"?>
 <p:presentation xmlns:p="http://schemas.openxmlformats.org/presentationml/2006/main">
   <p:sldMasterIdLst>
-    <p:sldMasterId xmlns:r="http://schemas.openxmlformats.org/officeDocument/2006/relationships" id="2147483648" r:id="Rcd7c15550c694192"/>
+    <p:sldMasterId xmlns:r="http://schemas.openxmlformats.org/officeDocument/2006/relationships" id="2147483648" r:id="Rfb1a74cab27f42b3"/>
   </p:sldMasterIdLst>
   <p:notesMasterIdLst>
-    <p:notesMasterId xmlns:r="http://schemas.openxmlformats.org/officeDocument/2006/relationships" r:id="R066f954fd2054f3e"/>
+    <p:notesMasterId xmlns:r="http://schemas.openxmlformats.org/officeDocument/2006/relationships" r:id="R0b3efe43e25b4219"/>
   </p:notesMasterIdLst>
   <p:sldIdLst>
-    <p:sldId xmlns:r="http://schemas.openxmlformats.org/officeDocument/2006/relationships" id="256" r:id="Rdc0ca1a2234d4406"/>
-    <p:sldId xmlns:r="http://schemas.openxmlformats.org/officeDocument/2006/relationships" id="257" r:id="Reef764a09d5943b3"/>
-    <p:sldId xmlns:r="http://schemas.openxmlformats.org/officeDocument/2006/relationships" id="258" r:id="R465c7a2b31ed4402"/>
-    <p:sldId xmlns:r="http://schemas.openxmlformats.org/officeDocument/2006/relationships" id="259" r:id="R8c93694254284f2e"/>
-    <p:sldId xmlns:r="http://schemas.openxmlformats.org/officeDocument/2006/relationships" id="260" r:id="Rcd57b6c014124ca4"/>
+    <p:sldId xmlns:r="http://schemas.openxmlformats.org/officeDocument/2006/relationships" id="256" r:id="Rcf104adae36b4049"/>
+    <p:sldId xmlns:r="http://schemas.openxmlformats.org/officeDocument/2006/relationships" id="257" r:id="R39926d04a4624de7"/>
+    <p:sldId xmlns:r="http://schemas.openxmlformats.org/officeDocument/2006/relationships" id="258" r:id="Rc90682541a5942fe"/>
+    <p:sldId xmlns:r="http://schemas.openxmlformats.org/officeDocument/2006/relationships" id="259" r:id="R08f52a4159b24347"/>
+    <p:sldId xmlns:r="http://schemas.openxmlformats.org/officeDocument/2006/relationships" id="260" r:id="Re4834e0d1c9a4bb2"/>
+    <p:sldId xmlns:r="http://schemas.openxmlformats.org/officeDocument/2006/relationships" id="261" r:id="R2cb7abaf31f2447c"/>
   </p:sldIdLst>
   <p:sldSz cx="12192000" cy="6858000"/>
   <p:notesSz cx="6858000" cy="9144000"/>
@@ -756,6 +757,76 @@
 </p:notes>
 </file>
 
+<file path=ppt/notesSlides/notesSlide6.xml><?xml version="1.0" encoding="utf-8"?>
+<p:notes xmlns:p="http://schemas.openxmlformats.org/presentationml/2006/main">
+  <p:cSld>
+    <p:spTree>
+      <p:nvGrpSpPr>
+        <p:cNvPr id="1" name=""/>
+        <p:cNvGrpSpPr/>
+        <p:nvPr/>
+      </p:nvGrpSpPr>
+      <p:grpSpPr>
+        <a:xfrm xmlns:a="http://schemas.openxmlformats.org/drawingml/2006/main"/>
+      </p:grpSpPr>
+      <p:sp>
+        <p:nvSpPr>
+          <p:cNvPr id="2" name="Slide Image Placeholder 1"/>
+          <p:cNvSpPr>
+            <a:spLocks xmlns:a="http://schemas.openxmlformats.org/drawingml/2006/main" noGrp="1"/>
+          </p:cNvSpPr>
+          <p:nvPr>
+            <p:ph type="sldImg" idx="0"/>
+          </p:nvPr>
+        </p:nvSpPr>
+        <p:spPr/>
+      </p:sp>
+      <p:sp>
+        <p:nvSpPr>
+          <p:cNvPr id="3" name="Notes Placeholder 2"/>
+          <p:cNvSpPr>
+            <a:spLocks xmlns:a="http://schemas.openxmlformats.org/drawingml/2006/main" noGrp="1"/>
+          </p:cNvSpPr>
+          <p:nvPr>
+            <p:ph type="body" idx="1"/>
+          </p:nvPr>
+        </p:nvSpPr>
+        <p:spPr/>
+        <p:txBody>
+          <a:bodyPr xmlns:a="http://schemas.openxmlformats.org/drawingml/2006/main"/>
+          <a:lstStyle xmlns:a="http://schemas.openxmlformats.org/drawingml/2006/main"/>
+          <a:p xmlns:a="http://schemas.openxmlformats.org/drawingml/2006/main">
+            <a:r>
+              <a:t>Use this slide to explain the ethical guardrails. Cover algorithmic bias, patient privacy, data governance, transparency, regulatory compliance, and responsible AI. Emphasize that the model should support human judgment rather than replace it. NHN should monitor fairness, limit access to sensitive data, validate data quality, explain score drivers, and complete compliance review before scaling.</a:t>
+            </a:r>
+          </a:p>
+        </p:txBody>
+      </p:sp>
+      <p:sp>
+        <p:nvSpPr>
+          <p:cNvPr id="4" name="Slide Number Placeholder 3"/>
+          <p:cNvSpPr>
+            <a:spLocks xmlns:a="http://schemas.openxmlformats.org/drawingml/2006/main" noGrp="1"/>
+          </p:cNvSpPr>
+          <p:nvPr>
+            <p:ph type="sldNum" idx="5"/>
+          </p:nvPr>
+        </p:nvSpPr>
+        <p:spPr/>
+        <p:txBody>
+          <a:bodyPr xmlns:a="http://schemas.openxmlformats.org/drawingml/2006/main"/>
+          <a:lstStyle xmlns:a="http://schemas.openxmlformats.org/drawingml/2006/main"/>
+          <a:p xmlns:a="http://schemas.openxmlformats.org/drawingml/2006/main"/>
+        </p:txBody>
+      </p:sp>
+    </p:spTree>
+  </p:cSld>
+  <p:clrMapOvr>
+    <a:masterClrMapping xmlns:a="http://schemas.openxmlformats.org/drawingml/2006/main"/>
+  </p:clrMapOvr>
+</p:notes>
+</file>
+
 <file path=ppt/slideLayouts/slideLayout1.xml><?xml version="1.0" encoding="utf-8"?>
 <p:sldLayout xmlns:p="http://schemas.openxmlformats.org/presentationml/2006/main" type="title">
   <p:cSld name="Title Slide">
@@ -794,7 +865,7 @@
   </p:cSld>
   <p:clrMap bg1="lt1" tx1="dk1" bg2="lt2" tx2="dk2" accent1="accent1" accent2="accent2" accent3="accent3" accent4="accent4" accent5="accent5" accent6="accent6" hlink="hlink" folHlink="folHlink"/>
   <p:sldLayoutIdLst>
-    <p:sldLayoutId xmlns:r="http://schemas.openxmlformats.org/officeDocument/2006/relationships" id="2147483649" r:id="R880a254c02cb4e24"/>
+    <p:sldLayoutId xmlns:r="http://schemas.openxmlformats.org/officeDocument/2006/relationships" id="2147483649" r:id="R53f4db76f9cb4377"/>
   </p:sldLayoutIdLst>
   <p:txStyles>
     <p:titleStyle>
@@ -2461,7 +2532,7 @@
           <p:cNvPr id="22" name="">
             <a:extLst xmlns:a="http://schemas.openxmlformats.org/drawingml/2006/main">
               <a:ext uri="{FF2B5EF4-FFF2-40B4-BE49-F238E27FC236}">
-                <a16:creationId xmlns:a16="http://schemas.microsoft.com/office/drawing/2014/main" id="{606E2580-DC82-4E07-B0F0-E1C57EE64C8C}"/>
+                <a16:creationId xmlns:a16="http://schemas.microsoft.com/office/drawing/2014/main" id="{761FD397-23F8-4A2C-8F38-F8B88E340C1F}"/>
               </a:ext>
             </a:extLst>
           </p:cNvPr>
@@ -2492,7 +2563,7 @@
           <p:cNvPr id="2" name="">
             <a:extLst xmlns:a="http://schemas.openxmlformats.org/drawingml/2006/main">
               <a:ext uri="{FF2B5EF4-FFF2-40B4-BE49-F238E27FC236}">
-                <a16:creationId xmlns:a16="http://schemas.microsoft.com/office/drawing/2014/main" id="{D695F6CE-FFE7-4BB0-B411-93D95E572BF2}"/>
+                <a16:creationId xmlns:a16="http://schemas.microsoft.com/office/drawing/2014/main" id="{48F306B6-AE6C-4805-97E9-609D36504694}"/>
               </a:ext>
             </a:extLst>
           </p:cNvPr>
@@ -2550,7 +2621,7 @@
           <p:cNvPr id="3" name="">
             <a:extLst xmlns:a="http://schemas.openxmlformats.org/drawingml/2006/main">
               <a:ext uri="{FF2B5EF4-FFF2-40B4-BE49-F238E27FC236}">
-                <a16:creationId xmlns:a16="http://schemas.microsoft.com/office/drawing/2014/main" id="{BA35BF8A-D15E-42B7-ADC8-1964916838E9}"/>
+                <a16:creationId xmlns:a16="http://schemas.microsoft.com/office/drawing/2014/main" id="{06140678-3CA4-478C-AC95-8A4F5C97B6C8}"/>
               </a:ext>
             </a:extLst>
           </p:cNvPr>
@@ -2608,7 +2679,7 @@
           <p:cNvPr id="4" name="">
             <a:extLst xmlns:a="http://schemas.openxmlformats.org/drawingml/2006/main">
               <a:ext uri="{FF2B5EF4-FFF2-40B4-BE49-F238E27FC236}">
-                <a16:creationId xmlns:a16="http://schemas.microsoft.com/office/drawing/2014/main" id="{317A2D8E-FB4B-41CC-977D-D31E5679FA66}"/>
+                <a16:creationId xmlns:a16="http://schemas.microsoft.com/office/drawing/2014/main" id="{99C94DFE-EDF2-4AC2-9F25-39A86607B59C}"/>
               </a:ext>
             </a:extLst>
           </p:cNvPr>
@@ -2648,7 +2719,7 @@
           <p:cNvPr id="5" name="">
             <a:extLst xmlns:a="http://schemas.openxmlformats.org/drawingml/2006/main">
               <a:ext uri="{FF2B5EF4-FFF2-40B4-BE49-F238E27FC236}">
-                <a16:creationId xmlns:a16="http://schemas.microsoft.com/office/drawing/2014/main" id="{3DD25391-40B4-42B2-9330-FF5DEF89F04F}"/>
+                <a16:creationId xmlns:a16="http://schemas.microsoft.com/office/drawing/2014/main" id="{6937DA1F-79BD-48C0-83AC-D52E340B90DD}"/>
               </a:ext>
             </a:extLst>
           </p:cNvPr>
@@ -2679,7 +2750,7 @@
           <p:cNvPr id="6" name="">
             <a:extLst xmlns:a="http://schemas.openxmlformats.org/drawingml/2006/main">
               <a:ext uri="{FF2B5EF4-FFF2-40B4-BE49-F238E27FC236}">
-                <a16:creationId xmlns:a16="http://schemas.microsoft.com/office/drawing/2014/main" id="{6F73BC7B-B9D4-4EAD-899C-5D46DC932898}"/>
+                <a16:creationId xmlns:a16="http://schemas.microsoft.com/office/drawing/2014/main" id="{06704897-E13C-467C-9663-DD0F9D723BEE}"/>
               </a:ext>
             </a:extLst>
           </p:cNvPr>
@@ -2737,7 +2808,7 @@
           <p:cNvPr id="7" name="">
             <a:extLst xmlns:a="http://schemas.openxmlformats.org/drawingml/2006/main">
               <a:ext uri="{FF2B5EF4-FFF2-40B4-BE49-F238E27FC236}">
-                <a16:creationId xmlns:a16="http://schemas.microsoft.com/office/drawing/2014/main" id="{1229ECF0-8451-42D1-981B-D5EAF4C59638}"/>
+                <a16:creationId xmlns:a16="http://schemas.microsoft.com/office/drawing/2014/main" id="{C4B8BCC1-5D6A-464C-8354-6F6DAB7880C1}"/>
               </a:ext>
             </a:extLst>
           </p:cNvPr>
@@ -3043,7 +3114,7 @@
           <p:cNvPr id="9" name="">
             <a:extLst xmlns:a="http://schemas.openxmlformats.org/drawingml/2006/main">
               <a:ext uri="{FF2B5EF4-FFF2-40B4-BE49-F238E27FC236}">
-                <a16:creationId xmlns:a16="http://schemas.microsoft.com/office/drawing/2014/main" id="{DD9E160F-55EA-441F-9727-52BBC96B2753}"/>
+                <a16:creationId xmlns:a16="http://schemas.microsoft.com/office/drawing/2014/main" id="{2C505739-BEFD-4034-8470-FA7D7B90B095}"/>
               </a:ext>
             </a:extLst>
           </p:cNvPr>
@@ -3101,7 +3172,7 @@
           <p:cNvPr id="10" name="">
             <a:extLst xmlns:a="http://schemas.openxmlformats.org/drawingml/2006/main">
               <a:ext uri="{FF2B5EF4-FFF2-40B4-BE49-F238E27FC236}">
-                <a16:creationId xmlns:a16="http://schemas.microsoft.com/office/drawing/2014/main" id="{296060D4-6312-4B83-A1A7-6406E585F7C6}"/>
+                <a16:creationId xmlns:a16="http://schemas.microsoft.com/office/drawing/2014/main" id="{E8ADF11A-1EC4-4D6B-AA4A-C34E73ED75DB}"/>
               </a:ext>
             </a:extLst>
           </p:cNvPr>
@@ -3170,7 +3241,7 @@
         </p:xfrm>
         <a:graphic xmlns:a="http://schemas.openxmlformats.org/drawingml/2006/main">
           <a:graphicData uri="http://schemas.openxmlformats.org/drawingml/2006/chart">
-            <c:chart xmlns:r="http://schemas.openxmlformats.org/officeDocument/2006/relationships" xmlns:c="http://schemas.openxmlformats.org/drawingml/2006/chart" r:id="Rf51abda887bb431f"/>
+            <c:chart xmlns:r="http://schemas.openxmlformats.org/officeDocument/2006/relationships" xmlns:c="http://schemas.openxmlformats.org/drawingml/2006/chart" r:id="R71b1a657f40b412a"/>
           </a:graphicData>
         </a:graphic>
       </p:graphicFrame>
@@ -3179,7 +3250,7 @@
           <p:cNvPr id="12" name="">
             <a:extLst xmlns:a="http://schemas.openxmlformats.org/drawingml/2006/main">
               <a:ext uri="{FF2B5EF4-FFF2-40B4-BE49-F238E27FC236}">
-                <a16:creationId xmlns:a16="http://schemas.microsoft.com/office/drawing/2014/main" id="{025F2AA4-4024-40D7-A0B4-4E57BA509B85}"/>
+                <a16:creationId xmlns:a16="http://schemas.microsoft.com/office/drawing/2014/main" id="{DD421EB8-D6FA-4E7D-A2C9-D8979E08555C}"/>
               </a:ext>
             </a:extLst>
           </p:cNvPr>
@@ -3237,7 +3308,7 @@
           <p:cNvPr id="13" name="">
             <a:extLst xmlns:a="http://schemas.openxmlformats.org/drawingml/2006/main">
               <a:ext uri="{FF2B5EF4-FFF2-40B4-BE49-F238E27FC236}">
-                <a16:creationId xmlns:a16="http://schemas.microsoft.com/office/drawing/2014/main" id="{357BF4C1-91BD-4BF8-B61B-6A7BF8A66FD1}"/>
+                <a16:creationId xmlns:a16="http://schemas.microsoft.com/office/drawing/2014/main" id="{ADA26561-8607-4830-A185-3B733B49A156}"/>
               </a:ext>
             </a:extLst>
           </p:cNvPr>
@@ -3268,7 +3339,7 @@
           <p:cNvPr id="14" name="">
             <a:extLst xmlns:a="http://schemas.openxmlformats.org/drawingml/2006/main">
               <a:ext uri="{FF2B5EF4-FFF2-40B4-BE49-F238E27FC236}">
-                <a16:creationId xmlns:a16="http://schemas.microsoft.com/office/drawing/2014/main" id="{BBF4EA0A-03CA-4A00-84B9-417595EE7D36}"/>
+                <a16:creationId xmlns:a16="http://schemas.microsoft.com/office/drawing/2014/main" id="{917CB7C0-BA19-4239-ADBD-EA1D1AD8F5A5}"/>
               </a:ext>
             </a:extLst>
           </p:cNvPr>
@@ -3796,7 +3867,7 @@
           <p:cNvPr id="16" name="">
             <a:extLst xmlns:a="http://schemas.openxmlformats.org/drawingml/2006/main">
               <a:ext uri="{FF2B5EF4-FFF2-40B4-BE49-F238E27FC236}">
-                <a16:creationId xmlns:a16="http://schemas.microsoft.com/office/drawing/2014/main" id="{A860BB2A-D996-43B3-B649-2838410A85BA}"/>
+                <a16:creationId xmlns:a16="http://schemas.microsoft.com/office/drawing/2014/main" id="{062C0834-9A97-4FF7-BEBC-D1A11AB868AF}"/>
               </a:ext>
             </a:extLst>
           </p:cNvPr>
@@ -3854,7 +3925,7 @@
           <p:cNvPr id="17" name="">
             <a:extLst xmlns:a="http://schemas.openxmlformats.org/drawingml/2006/main">
               <a:ext uri="{FF2B5EF4-FFF2-40B4-BE49-F238E27FC236}">
-                <a16:creationId xmlns:a16="http://schemas.microsoft.com/office/drawing/2014/main" id="{CC4E949B-6F6B-4269-B210-EF22F5D4694D}"/>
+                <a16:creationId xmlns:a16="http://schemas.microsoft.com/office/drawing/2014/main" id="{CD12F4B1-7B7D-4EA4-A2ED-07AFE926FCE5}"/>
               </a:ext>
             </a:extLst>
           </p:cNvPr>
@@ -4009,7 +4080,7 @@
           <p:cNvPr id="18" name="">
             <a:extLst xmlns:a="http://schemas.openxmlformats.org/drawingml/2006/main">
               <a:ext uri="{FF2B5EF4-FFF2-40B4-BE49-F238E27FC236}">
-                <a16:creationId xmlns:a16="http://schemas.microsoft.com/office/drawing/2014/main" id="{460ED8ED-FAB3-4AEF-B93A-4C9A379C29EC}"/>
+                <a16:creationId xmlns:a16="http://schemas.microsoft.com/office/drawing/2014/main" id="{1DE5D3CD-409A-40AD-A1B2-6B18A003E651}"/>
               </a:ext>
             </a:extLst>
           </p:cNvPr>
@@ -4067,7 +4138,7 @@
           <p:cNvPr id="19" name="">
             <a:extLst xmlns:a="http://schemas.openxmlformats.org/drawingml/2006/main">
               <a:ext uri="{FF2B5EF4-FFF2-40B4-BE49-F238E27FC236}">
-                <a16:creationId xmlns:a16="http://schemas.microsoft.com/office/drawing/2014/main" id="{CCDFDF6E-5126-4C40-A56F-F5EAF3109DBD}"/>
+                <a16:creationId xmlns:a16="http://schemas.microsoft.com/office/drawing/2014/main" id="{D57D933F-E82D-4FAD-87A5-2DACB8E9C52D}"/>
               </a:ext>
             </a:extLst>
           </p:cNvPr>
@@ -4129,7 +4200,7 @@
           <p:cNvPr id="20" name="">
             <a:extLst xmlns:a="http://schemas.openxmlformats.org/drawingml/2006/main">
               <a:ext uri="{FF2B5EF4-FFF2-40B4-BE49-F238E27FC236}">
-                <a16:creationId xmlns:a16="http://schemas.microsoft.com/office/drawing/2014/main" id="{A89D705D-D518-4A90-96A5-001EE77B71E7}"/>
+                <a16:creationId xmlns:a16="http://schemas.microsoft.com/office/drawing/2014/main" id="{FA6718B7-B101-41C0-B4A2-47A42B5C0457}"/>
               </a:ext>
             </a:extLst>
           </p:cNvPr>
@@ -4191,7 +4262,7 @@
           <p:cNvPr id="21" name="">
             <a:extLst xmlns:a="http://schemas.openxmlformats.org/drawingml/2006/main">
               <a:ext uri="{FF2B5EF4-FFF2-40B4-BE49-F238E27FC236}">
-                <a16:creationId xmlns:a16="http://schemas.microsoft.com/office/drawing/2014/main" id="{92DB43B1-54DB-484D-AF20-025EFFF5CAE3}"/>
+                <a16:creationId xmlns:a16="http://schemas.microsoft.com/office/drawing/2014/main" id="{711533EF-B046-4EF8-A36D-5F62924C8E4E}"/>
               </a:ext>
             </a:extLst>
           </p:cNvPr>
@@ -4247,7 +4318,7 @@
     </p:spTree>
     <p:extLst>
       <p:ext uri="{BB962C8B-B14F-4D97-AF65-F5344CB8AC3E}">
-        <p14:creationId xmlns:p14="http://schemas.microsoft.com/office/powerpoint/2010/main" val="1410948838"/>
+        <p14:creationId xmlns:p14="http://schemas.microsoft.com/office/powerpoint/2010/main" val="352484974"/>
       </p:ext>
     </p:extLst>
   </p:cSld>
@@ -4278,7 +4349,7 @@
           <p:cNvPr id="21" name="">
             <a:extLst xmlns:a="http://schemas.openxmlformats.org/drawingml/2006/main">
               <a:ext uri="{FF2B5EF4-FFF2-40B4-BE49-F238E27FC236}">
-                <a16:creationId xmlns:a16="http://schemas.microsoft.com/office/drawing/2014/main" id="{898D0177-C3E3-4EB0-89A1-1641E9F5DF1B}"/>
+                <a16:creationId xmlns:a16="http://schemas.microsoft.com/office/drawing/2014/main" id="{2C992B24-B45D-4E3E-998C-ED6744F82102}"/>
               </a:ext>
             </a:extLst>
           </p:cNvPr>
@@ -4309,7 +4380,7 @@
           <p:cNvPr id="2" name="">
             <a:extLst xmlns:a="http://schemas.openxmlformats.org/drawingml/2006/main">
               <a:ext uri="{FF2B5EF4-FFF2-40B4-BE49-F238E27FC236}">
-                <a16:creationId xmlns:a16="http://schemas.microsoft.com/office/drawing/2014/main" id="{03746EF9-4F03-4EF6-9988-14E903B1DF37}"/>
+                <a16:creationId xmlns:a16="http://schemas.microsoft.com/office/drawing/2014/main" id="{10BFFFF8-C585-490E-BDCF-470CE5905FB1}"/>
               </a:ext>
             </a:extLst>
           </p:cNvPr>
@@ -4367,7 +4438,7 @@
           <p:cNvPr id="3" name="">
             <a:extLst xmlns:a="http://schemas.openxmlformats.org/drawingml/2006/main">
               <a:ext uri="{FF2B5EF4-FFF2-40B4-BE49-F238E27FC236}">
-                <a16:creationId xmlns:a16="http://schemas.microsoft.com/office/drawing/2014/main" id="{DB15A1B3-5E2F-41B8-A15A-E6FE61617BD0}"/>
+                <a16:creationId xmlns:a16="http://schemas.microsoft.com/office/drawing/2014/main" id="{9B75E905-B243-4CCE-8326-A2F4E13B7895}"/>
               </a:ext>
             </a:extLst>
           </p:cNvPr>
@@ -4425,7 +4496,7 @@
           <p:cNvPr id="4" name="">
             <a:extLst xmlns:a="http://schemas.openxmlformats.org/drawingml/2006/main">
               <a:ext uri="{FF2B5EF4-FFF2-40B4-BE49-F238E27FC236}">
-                <a16:creationId xmlns:a16="http://schemas.microsoft.com/office/drawing/2014/main" id="{BF0795ED-11BC-4B40-9B36-5208B807505B}"/>
+                <a16:creationId xmlns:a16="http://schemas.microsoft.com/office/drawing/2014/main" id="{40A71C43-F2C3-48DC-BACA-1304F8E54FD4}"/>
               </a:ext>
             </a:extLst>
           </p:cNvPr>
@@ -4483,7 +4554,7 @@
           <p:cNvPr id="5" name="">
             <a:extLst xmlns:a="http://schemas.openxmlformats.org/drawingml/2006/main">
               <a:ext uri="{FF2B5EF4-FFF2-40B4-BE49-F238E27FC236}">
-                <a16:creationId xmlns:a16="http://schemas.microsoft.com/office/drawing/2014/main" id="{5C4D61CF-651D-49FE-AEEA-68B48B734BA8}"/>
+                <a16:creationId xmlns:a16="http://schemas.microsoft.com/office/drawing/2014/main" id="{119C03ED-45C7-4F64-AAEE-16E49A398D66}"/>
               </a:ext>
             </a:extLst>
           </p:cNvPr>
@@ -4758,7 +4829,7 @@
           <p:cNvPr id="7" name="">
             <a:extLst xmlns:a="http://schemas.openxmlformats.org/drawingml/2006/main">
               <a:ext uri="{FF2B5EF4-FFF2-40B4-BE49-F238E27FC236}">
-                <a16:creationId xmlns:a16="http://schemas.microsoft.com/office/drawing/2014/main" id="{F0402867-5A24-4721-B439-3AF9D7A10B37}"/>
+                <a16:creationId xmlns:a16="http://schemas.microsoft.com/office/drawing/2014/main" id="{737CD51D-86A7-4726-91A8-A8C8E26FB28F}"/>
               </a:ext>
             </a:extLst>
           </p:cNvPr>
@@ -4789,7 +4860,7 @@
           <p:cNvPr id="8" name="">
             <a:extLst xmlns:a="http://schemas.openxmlformats.org/drawingml/2006/main">
               <a:ext uri="{FF2B5EF4-FFF2-40B4-BE49-F238E27FC236}">
-                <a16:creationId xmlns:a16="http://schemas.microsoft.com/office/drawing/2014/main" id="{8FCBBE16-C64C-41B3-8CC4-3ED12B27CA9F}"/>
+                <a16:creationId xmlns:a16="http://schemas.microsoft.com/office/drawing/2014/main" id="{0B9B01B2-4020-4876-B94A-B75A8B792B3B}"/>
               </a:ext>
             </a:extLst>
           </p:cNvPr>
@@ -5368,7 +5439,7 @@
           <p:cNvPr id="10" name="">
             <a:extLst xmlns:a="http://schemas.openxmlformats.org/drawingml/2006/main">
               <a:ext uri="{FF2B5EF4-FFF2-40B4-BE49-F238E27FC236}">
-                <a16:creationId xmlns:a16="http://schemas.microsoft.com/office/drawing/2014/main" id="{AF50E18D-9567-4659-8FCF-F72B84B1D65E}"/>
+                <a16:creationId xmlns:a16="http://schemas.microsoft.com/office/drawing/2014/main" id="{B436F182-3CF5-4418-AE64-D3ED4B29B5DE}"/>
               </a:ext>
             </a:extLst>
           </p:cNvPr>
@@ -5430,7 +5501,7 @@
           <p:cNvPr id="11" name="">
             <a:extLst xmlns:a="http://schemas.openxmlformats.org/drawingml/2006/main">
               <a:ext uri="{FF2B5EF4-FFF2-40B4-BE49-F238E27FC236}">
-                <a16:creationId xmlns:a16="http://schemas.microsoft.com/office/drawing/2014/main" id="{304F1B4E-2614-4BBD-91B6-E6E221F688C6}"/>
+                <a16:creationId xmlns:a16="http://schemas.microsoft.com/office/drawing/2014/main" id="{C34A03FA-A052-4F35-BD6B-D08F88D31724}"/>
               </a:ext>
             </a:extLst>
           </p:cNvPr>
@@ -5495,7 +5566,7 @@
         </p:xfrm>
         <a:graphic xmlns:a="http://schemas.openxmlformats.org/drawingml/2006/main">
           <a:graphicData uri="http://schemas.openxmlformats.org/drawingml/2006/chart">
-            <c:chart xmlns:r="http://schemas.openxmlformats.org/officeDocument/2006/relationships" xmlns:c="http://schemas.openxmlformats.org/drawingml/2006/chart" r:id="R7a90cc35ad0f46be"/>
+            <c:chart xmlns:r="http://schemas.openxmlformats.org/officeDocument/2006/relationships" xmlns:c="http://schemas.openxmlformats.org/drawingml/2006/chart" r:id="R8ea86c02046349e2"/>
           </a:graphicData>
         </a:graphic>
       </p:graphicFrame>
@@ -5504,7 +5575,7 @@
           <p:cNvPr id="13" name="">
             <a:extLst xmlns:a="http://schemas.openxmlformats.org/drawingml/2006/main">
               <a:ext uri="{FF2B5EF4-FFF2-40B4-BE49-F238E27FC236}">
-                <a16:creationId xmlns:a16="http://schemas.microsoft.com/office/drawing/2014/main" id="{6E50017F-6762-45C8-BFA4-89706D5C2188}"/>
+                <a16:creationId xmlns:a16="http://schemas.microsoft.com/office/drawing/2014/main" id="{07DCB189-0F3A-4446-83C9-23FC462C90C1}"/>
               </a:ext>
             </a:extLst>
           </p:cNvPr>
@@ -5562,7 +5633,7 @@
           <p:cNvPr id="14" name="">
             <a:extLst xmlns:a="http://schemas.openxmlformats.org/drawingml/2006/main">
               <a:ext uri="{FF2B5EF4-FFF2-40B4-BE49-F238E27FC236}">
-                <a16:creationId xmlns:a16="http://schemas.microsoft.com/office/drawing/2014/main" id="{F4D1B179-7E99-4138-9009-1553E0EAB6A9}"/>
+                <a16:creationId xmlns:a16="http://schemas.microsoft.com/office/drawing/2014/main" id="{EC566AD2-193B-4761-AD8D-043CE07707DF}"/>
               </a:ext>
             </a:extLst>
           </p:cNvPr>
@@ -5627,7 +5698,7 @@
         </p:xfrm>
         <a:graphic xmlns:a="http://schemas.openxmlformats.org/drawingml/2006/main">
           <a:graphicData uri="http://schemas.openxmlformats.org/drawingml/2006/chart">
-            <c:chart xmlns:r="http://schemas.openxmlformats.org/officeDocument/2006/relationships" xmlns:c="http://schemas.openxmlformats.org/drawingml/2006/chart" r:id="Re82274e37e864c11"/>
+            <c:chart xmlns:r="http://schemas.openxmlformats.org/officeDocument/2006/relationships" xmlns:c="http://schemas.openxmlformats.org/drawingml/2006/chart" r:id="Rb05de982f991453d"/>
           </a:graphicData>
         </a:graphic>
       </p:graphicFrame>
@@ -5636,7 +5707,7 @@
           <p:cNvPr id="16" name="">
             <a:extLst xmlns:a="http://schemas.openxmlformats.org/drawingml/2006/main">
               <a:ext uri="{FF2B5EF4-FFF2-40B4-BE49-F238E27FC236}">
-                <a16:creationId xmlns:a16="http://schemas.microsoft.com/office/drawing/2014/main" id="{34921299-E135-4E8F-B1E6-48EA37BB534C}"/>
+                <a16:creationId xmlns:a16="http://schemas.microsoft.com/office/drawing/2014/main" id="{AB9A9B50-E5FB-4894-82FB-146B472BEA7E}"/>
               </a:ext>
             </a:extLst>
           </p:cNvPr>
@@ -5698,7 +5769,7 @@
           <p:cNvPr id="17" name="">
             <a:extLst xmlns:a="http://schemas.openxmlformats.org/drawingml/2006/main">
               <a:ext uri="{FF2B5EF4-FFF2-40B4-BE49-F238E27FC236}">
-                <a16:creationId xmlns:a16="http://schemas.microsoft.com/office/drawing/2014/main" id="{7540CB38-5626-417E-8D5F-E226F235290E}"/>
+                <a16:creationId xmlns:a16="http://schemas.microsoft.com/office/drawing/2014/main" id="{D780C389-DF2B-4223-B62E-7EE1EFAD1FC8}"/>
               </a:ext>
             </a:extLst>
           </p:cNvPr>
@@ -5729,7 +5800,7 @@
           <p:cNvPr id="18" name="">
             <a:extLst xmlns:a="http://schemas.openxmlformats.org/drawingml/2006/main">
               <a:ext uri="{FF2B5EF4-FFF2-40B4-BE49-F238E27FC236}">
-                <a16:creationId xmlns:a16="http://schemas.microsoft.com/office/drawing/2014/main" id="{2E3D65CC-E374-4074-9DB2-8B2A02F63556}"/>
+                <a16:creationId xmlns:a16="http://schemas.microsoft.com/office/drawing/2014/main" id="{68882C27-19E0-47FE-A770-021C6B1B7890}"/>
               </a:ext>
             </a:extLst>
           </p:cNvPr>
@@ -5787,7 +5858,7 @@
           <p:cNvPr id="19" name="">
             <a:extLst xmlns:a="http://schemas.openxmlformats.org/drawingml/2006/main">
               <a:ext uri="{FF2B5EF4-FFF2-40B4-BE49-F238E27FC236}">
-                <a16:creationId xmlns:a16="http://schemas.microsoft.com/office/drawing/2014/main" id="{08946074-F8F0-4F6A-A346-7B47FEF48D5F}"/>
+                <a16:creationId xmlns:a16="http://schemas.microsoft.com/office/drawing/2014/main" id="{A06E7242-0202-49EB-8AC9-F9DFB099F10A}"/>
               </a:ext>
             </a:extLst>
           </p:cNvPr>
@@ -5845,7 +5916,7 @@
           <p:cNvPr id="20" name="">
             <a:extLst xmlns:a="http://schemas.openxmlformats.org/drawingml/2006/main">
               <a:ext uri="{FF2B5EF4-FFF2-40B4-BE49-F238E27FC236}">
-                <a16:creationId xmlns:a16="http://schemas.microsoft.com/office/drawing/2014/main" id="{423DB0D5-DD70-44FB-8C46-F60FA4B6EB37}"/>
+                <a16:creationId xmlns:a16="http://schemas.microsoft.com/office/drawing/2014/main" id="{0D005E9F-97EA-4B34-A49B-212B84B6FFDF}"/>
               </a:ext>
             </a:extLst>
           </p:cNvPr>
@@ -5901,7 +5972,7 @@
     </p:spTree>
     <p:extLst>
       <p:ext uri="{BB962C8B-B14F-4D97-AF65-F5344CB8AC3E}">
-        <p14:creationId xmlns:p14="http://schemas.microsoft.com/office/powerpoint/2010/main" val="24911965"/>
+        <p14:creationId xmlns:p14="http://schemas.microsoft.com/office/powerpoint/2010/main" val="852660667"/>
       </p:ext>
     </p:extLst>
   </p:cSld>
@@ -5932,7 +6003,7 @@
           <p:cNvPr id="28" name="">
             <a:extLst xmlns:a="http://schemas.openxmlformats.org/drawingml/2006/main">
               <a:ext uri="{FF2B5EF4-FFF2-40B4-BE49-F238E27FC236}">
-                <a16:creationId xmlns:a16="http://schemas.microsoft.com/office/drawing/2014/main" id="{3EADE791-1FCA-4A7C-988A-DC66C7251EC9}"/>
+                <a16:creationId xmlns:a16="http://schemas.microsoft.com/office/drawing/2014/main" id="{2BEC2C06-D455-404C-B742-94BD777453D6}"/>
               </a:ext>
             </a:extLst>
           </p:cNvPr>
@@ -5963,7 +6034,7 @@
           <p:cNvPr id="2" name="">
             <a:extLst xmlns:a="http://schemas.openxmlformats.org/drawingml/2006/main">
               <a:ext uri="{FF2B5EF4-FFF2-40B4-BE49-F238E27FC236}">
-                <a16:creationId xmlns:a16="http://schemas.microsoft.com/office/drawing/2014/main" id="{C62B1A9E-7F6D-4B86-A424-C21C7BBB629A}"/>
+                <a16:creationId xmlns:a16="http://schemas.microsoft.com/office/drawing/2014/main" id="{4EDF17CC-2D62-4387-BA08-AFE779B5A792}"/>
               </a:ext>
             </a:extLst>
           </p:cNvPr>
@@ -6021,7 +6092,7 @@
           <p:cNvPr id="3" name="">
             <a:extLst xmlns:a="http://schemas.openxmlformats.org/drawingml/2006/main">
               <a:ext uri="{FF2B5EF4-FFF2-40B4-BE49-F238E27FC236}">
-                <a16:creationId xmlns:a16="http://schemas.microsoft.com/office/drawing/2014/main" id="{0A5B2C4E-923B-4B81-B483-499EA8D9BDBD}"/>
+                <a16:creationId xmlns:a16="http://schemas.microsoft.com/office/drawing/2014/main" id="{3B4082C0-5C62-4E14-822E-37D44C240B1C}"/>
               </a:ext>
             </a:extLst>
           </p:cNvPr>
@@ -6079,7 +6150,7 @@
           <p:cNvPr id="4" name="">
             <a:extLst xmlns:a="http://schemas.openxmlformats.org/drawingml/2006/main">
               <a:ext uri="{FF2B5EF4-FFF2-40B4-BE49-F238E27FC236}">
-                <a16:creationId xmlns:a16="http://schemas.microsoft.com/office/drawing/2014/main" id="{1203CE1E-4D56-475E-9673-1A7FE053537D}"/>
+                <a16:creationId xmlns:a16="http://schemas.microsoft.com/office/drawing/2014/main" id="{129CBD98-8737-4C7A-9CF6-619CC41E3EE7}"/>
               </a:ext>
             </a:extLst>
           </p:cNvPr>
@@ -6137,7 +6208,7 @@
           <p:cNvPr id="5" name="">
             <a:extLst xmlns:a="http://schemas.openxmlformats.org/drawingml/2006/main">
               <a:ext uri="{FF2B5EF4-FFF2-40B4-BE49-F238E27FC236}">
-                <a16:creationId xmlns:a16="http://schemas.microsoft.com/office/drawing/2014/main" id="{A6EE068A-C9F2-41F6-89E5-9887CCA81EF2}"/>
+                <a16:creationId xmlns:a16="http://schemas.microsoft.com/office/drawing/2014/main" id="{6A9E2481-CCDA-4CEF-9422-D5BB5B35FA9E}"/>
               </a:ext>
             </a:extLst>
           </p:cNvPr>
@@ -6168,7 +6239,7 @@
           <p:cNvPr id="6" name="">
             <a:extLst xmlns:a="http://schemas.openxmlformats.org/drawingml/2006/main">
               <a:ext uri="{FF2B5EF4-FFF2-40B4-BE49-F238E27FC236}">
-                <a16:creationId xmlns:a16="http://schemas.microsoft.com/office/drawing/2014/main" id="{0F68A4D7-1511-47C5-B98A-5CFF9F121F1B}"/>
+                <a16:creationId xmlns:a16="http://schemas.microsoft.com/office/drawing/2014/main" id="{11F5E836-1FA9-4339-A3B3-B0C3A7D8A6E8}"/>
               </a:ext>
             </a:extLst>
           </p:cNvPr>
@@ -6226,7 +6297,7 @@
           <p:cNvPr id="7" name="">
             <a:extLst xmlns:a="http://schemas.openxmlformats.org/drawingml/2006/main">
               <a:ext uri="{FF2B5EF4-FFF2-40B4-BE49-F238E27FC236}">
-                <a16:creationId xmlns:a16="http://schemas.microsoft.com/office/drawing/2014/main" id="{08ED6BDF-493D-4FCB-A28B-9EC8837C158B}"/>
+                <a16:creationId xmlns:a16="http://schemas.microsoft.com/office/drawing/2014/main" id="{3D81B3D2-B6F3-4F20-A6FE-9385420C315D}"/>
               </a:ext>
             </a:extLst>
           </p:cNvPr>
@@ -6288,7 +6359,7 @@
           <p:cNvPr id="8" name="">
             <a:extLst xmlns:a="http://schemas.openxmlformats.org/drawingml/2006/main">
               <a:ext uri="{FF2B5EF4-FFF2-40B4-BE49-F238E27FC236}">
-                <a16:creationId xmlns:a16="http://schemas.microsoft.com/office/drawing/2014/main" id="{0A991127-B45B-483F-98FC-4A96A61FFC40}"/>
+                <a16:creationId xmlns:a16="http://schemas.microsoft.com/office/drawing/2014/main" id="{4C0378CB-E2A9-4E06-972F-7D4E45225B71}"/>
               </a:ext>
             </a:extLst>
           </p:cNvPr>
@@ -6353,7 +6424,7 @@
         </p:xfrm>
         <a:graphic xmlns:a="http://schemas.openxmlformats.org/drawingml/2006/main">
           <a:graphicData uri="http://schemas.openxmlformats.org/drawingml/2006/chart">
-            <c:chart xmlns:r="http://schemas.openxmlformats.org/officeDocument/2006/relationships" xmlns:c="http://schemas.openxmlformats.org/drawingml/2006/chart" r:id="R716022696a6246de"/>
+            <c:chart xmlns:r="http://schemas.openxmlformats.org/officeDocument/2006/relationships" xmlns:c="http://schemas.openxmlformats.org/drawingml/2006/chart" r:id="Rcbaef17b9677406e"/>
           </a:graphicData>
         </a:graphic>
       </p:graphicFrame>
@@ -6362,7 +6433,7 @@
           <p:cNvPr id="10" name="">
             <a:extLst xmlns:a="http://schemas.openxmlformats.org/drawingml/2006/main">
               <a:ext uri="{FF2B5EF4-FFF2-40B4-BE49-F238E27FC236}">
-                <a16:creationId xmlns:a16="http://schemas.microsoft.com/office/drawing/2014/main" id="{9F538C61-6FC7-482C-9ECC-10192492928A}"/>
+                <a16:creationId xmlns:a16="http://schemas.microsoft.com/office/drawing/2014/main" id="{7230D23D-2EE6-451D-82D6-AD1A84F51097}"/>
               </a:ext>
             </a:extLst>
           </p:cNvPr>
@@ -6424,7 +6495,7 @@
           <p:cNvPr id="11" name="">
             <a:extLst xmlns:a="http://schemas.openxmlformats.org/drawingml/2006/main">
               <a:ext uri="{FF2B5EF4-FFF2-40B4-BE49-F238E27FC236}">
-                <a16:creationId xmlns:a16="http://schemas.microsoft.com/office/drawing/2014/main" id="{2271EDD3-C45B-4EEC-B8CD-D084362188B1}"/>
+                <a16:creationId xmlns:a16="http://schemas.microsoft.com/office/drawing/2014/main" id="{6C49B6BA-C1A5-433A-8C0D-83FBAC2220F3}"/>
               </a:ext>
             </a:extLst>
           </p:cNvPr>
@@ -6455,7 +6526,7 @@
           <p:cNvPr id="12" name="">
             <a:extLst xmlns:a="http://schemas.openxmlformats.org/drawingml/2006/main">
               <a:ext uri="{FF2B5EF4-FFF2-40B4-BE49-F238E27FC236}">
-                <a16:creationId xmlns:a16="http://schemas.microsoft.com/office/drawing/2014/main" id="{21175F49-C34F-43B6-ADF3-C9D0DEF5B36B}"/>
+                <a16:creationId xmlns:a16="http://schemas.microsoft.com/office/drawing/2014/main" id="{71B13C54-A78B-40DD-B303-2E03D3C0C14A}"/>
               </a:ext>
             </a:extLst>
           </p:cNvPr>
@@ -6513,7 +6584,7 @@
           <p:cNvPr id="13" name="">
             <a:extLst xmlns:a="http://schemas.openxmlformats.org/drawingml/2006/main">
               <a:ext uri="{FF2B5EF4-FFF2-40B4-BE49-F238E27FC236}">
-                <a16:creationId xmlns:a16="http://schemas.microsoft.com/office/drawing/2014/main" id="{2BB8C7A8-1FDC-4845-AC98-00098DA2C9AF}"/>
+                <a16:creationId xmlns:a16="http://schemas.microsoft.com/office/drawing/2014/main" id="{4D293ADD-8B8B-4436-8061-9E00B2BA4732}"/>
               </a:ext>
             </a:extLst>
           </p:cNvPr>
@@ -6571,7 +6642,7 @@
           <p:cNvPr id="14" name="">
             <a:extLst xmlns:a="http://schemas.openxmlformats.org/drawingml/2006/main">
               <a:ext uri="{FF2B5EF4-FFF2-40B4-BE49-F238E27FC236}">
-                <a16:creationId xmlns:a16="http://schemas.microsoft.com/office/drawing/2014/main" id="{3978C81A-23E4-4917-AB16-737364BFCA3D}"/>
+                <a16:creationId xmlns:a16="http://schemas.microsoft.com/office/drawing/2014/main" id="{D18474EB-B6B4-4200-8447-92460C693870}"/>
               </a:ext>
             </a:extLst>
           </p:cNvPr>
@@ -6696,7 +6767,7 @@
           <p:cNvPr id="15" name="">
             <a:extLst xmlns:a="http://schemas.openxmlformats.org/drawingml/2006/main">
               <a:ext uri="{FF2B5EF4-FFF2-40B4-BE49-F238E27FC236}">
-                <a16:creationId xmlns:a16="http://schemas.microsoft.com/office/drawing/2014/main" id="{43C6B7AC-73B0-4103-9A11-AD2EC8185C5E}"/>
+                <a16:creationId xmlns:a16="http://schemas.microsoft.com/office/drawing/2014/main" id="{64190CFF-FF2A-4042-A944-5C6D9E3AEC61}"/>
               </a:ext>
             </a:extLst>
           </p:cNvPr>
@@ -6758,7 +6829,7 @@
           <p:cNvPr id="16" name="">
             <a:extLst xmlns:a="http://schemas.openxmlformats.org/drawingml/2006/main">
               <a:ext uri="{FF2B5EF4-FFF2-40B4-BE49-F238E27FC236}">
-                <a16:creationId xmlns:a16="http://schemas.microsoft.com/office/drawing/2014/main" id="{EA5E3F6E-1498-4AC3-A39A-06E139489B49}"/>
+                <a16:creationId xmlns:a16="http://schemas.microsoft.com/office/drawing/2014/main" id="{CA146623-A236-49C4-9963-C475FB24F6BB}"/>
               </a:ext>
             </a:extLst>
           </p:cNvPr>
@@ -6816,7 +6887,7 @@
           <p:cNvPr id="17" name="">
             <a:extLst xmlns:a="http://schemas.openxmlformats.org/drawingml/2006/main">
               <a:ext uri="{FF2B5EF4-FFF2-40B4-BE49-F238E27FC236}">
-                <a16:creationId xmlns:a16="http://schemas.microsoft.com/office/drawing/2014/main" id="{3F464F23-1D9B-4382-9352-425347C15E34}"/>
+                <a16:creationId xmlns:a16="http://schemas.microsoft.com/office/drawing/2014/main" id="{4560A8C5-BA3D-4B68-9DC3-54731498E7D9}"/>
               </a:ext>
             </a:extLst>
           </p:cNvPr>
@@ -6874,7 +6945,7 @@
           <p:cNvPr id="18" name="">
             <a:extLst xmlns:a="http://schemas.openxmlformats.org/drawingml/2006/main">
               <a:ext uri="{FF2B5EF4-FFF2-40B4-BE49-F238E27FC236}">
-                <a16:creationId xmlns:a16="http://schemas.microsoft.com/office/drawing/2014/main" id="{30B5F5CF-462A-48A1-A639-05B451F5FDF7}"/>
+                <a16:creationId xmlns:a16="http://schemas.microsoft.com/office/drawing/2014/main" id="{39A2071B-6214-48CB-B0D0-3DC5A8C0B9E8}"/>
               </a:ext>
             </a:extLst>
           </p:cNvPr>
@@ -6999,7 +7070,7 @@
           <p:cNvPr id="19" name="">
             <a:extLst xmlns:a="http://schemas.openxmlformats.org/drawingml/2006/main">
               <a:ext uri="{FF2B5EF4-FFF2-40B4-BE49-F238E27FC236}">
-                <a16:creationId xmlns:a16="http://schemas.microsoft.com/office/drawing/2014/main" id="{DACDED6B-8DC5-45F1-83E1-264326CD2B8A}"/>
+                <a16:creationId xmlns:a16="http://schemas.microsoft.com/office/drawing/2014/main" id="{041311B8-3BBA-4A14-8D11-06A955C2E6D2}"/>
               </a:ext>
             </a:extLst>
           </p:cNvPr>
@@ -7061,7 +7132,7 @@
           <p:cNvPr id="20" name="">
             <a:extLst xmlns:a="http://schemas.openxmlformats.org/drawingml/2006/main">
               <a:ext uri="{FF2B5EF4-FFF2-40B4-BE49-F238E27FC236}">
-                <a16:creationId xmlns:a16="http://schemas.microsoft.com/office/drawing/2014/main" id="{30DAE800-9A6B-49A3-87AB-ABA14BE843F7}"/>
+                <a16:creationId xmlns:a16="http://schemas.microsoft.com/office/drawing/2014/main" id="{95129B28-90D8-496C-8D5C-A69802405CA7}"/>
               </a:ext>
             </a:extLst>
           </p:cNvPr>
@@ -7119,7 +7190,7 @@
           <p:cNvPr id="21" name="">
             <a:extLst xmlns:a="http://schemas.openxmlformats.org/drawingml/2006/main">
               <a:ext uri="{FF2B5EF4-FFF2-40B4-BE49-F238E27FC236}">
-                <a16:creationId xmlns:a16="http://schemas.microsoft.com/office/drawing/2014/main" id="{D68C96DC-62C1-4BE8-BBB8-29677AEF5BF1}"/>
+                <a16:creationId xmlns:a16="http://schemas.microsoft.com/office/drawing/2014/main" id="{756638EA-313B-4F65-BBDC-943CE99EBB46}"/>
               </a:ext>
             </a:extLst>
           </p:cNvPr>
@@ -7177,7 +7248,7 @@
           <p:cNvPr id="22" name="">
             <a:extLst xmlns:a="http://schemas.openxmlformats.org/drawingml/2006/main">
               <a:ext uri="{FF2B5EF4-FFF2-40B4-BE49-F238E27FC236}">
-                <a16:creationId xmlns:a16="http://schemas.microsoft.com/office/drawing/2014/main" id="{E2983D8D-9293-490D-B12A-34CAC20F705C}"/>
+                <a16:creationId xmlns:a16="http://schemas.microsoft.com/office/drawing/2014/main" id="{036E2EAB-D11F-4780-86DE-AAEC2257AA7E}"/>
               </a:ext>
             </a:extLst>
           </p:cNvPr>
@@ -7302,7 +7373,7 @@
           <p:cNvPr id="23" name="">
             <a:extLst xmlns:a="http://schemas.openxmlformats.org/drawingml/2006/main">
               <a:ext uri="{FF2B5EF4-FFF2-40B4-BE49-F238E27FC236}">
-                <a16:creationId xmlns:a16="http://schemas.microsoft.com/office/drawing/2014/main" id="{2887F7E1-1D91-46BF-B490-6E743004FB37}"/>
+                <a16:creationId xmlns:a16="http://schemas.microsoft.com/office/drawing/2014/main" id="{35701518-FBB2-4F4C-9E52-965D068D3C22}"/>
               </a:ext>
             </a:extLst>
           </p:cNvPr>
@@ -7364,7 +7435,7 @@
           <p:cNvPr id="24" name="">
             <a:extLst xmlns:a="http://schemas.openxmlformats.org/drawingml/2006/main">
               <a:ext uri="{FF2B5EF4-FFF2-40B4-BE49-F238E27FC236}">
-                <a16:creationId xmlns:a16="http://schemas.microsoft.com/office/drawing/2014/main" id="{9FA2D58A-A98E-4FBF-9C39-185CECEFE8E5}"/>
+                <a16:creationId xmlns:a16="http://schemas.microsoft.com/office/drawing/2014/main" id="{E3678DD3-F914-4D96-9454-DF265CD67AA3}"/>
               </a:ext>
             </a:extLst>
           </p:cNvPr>
@@ -7395,7 +7466,7 @@
           <p:cNvPr id="25" name="">
             <a:extLst xmlns:a="http://schemas.openxmlformats.org/drawingml/2006/main">
               <a:ext uri="{FF2B5EF4-FFF2-40B4-BE49-F238E27FC236}">
-                <a16:creationId xmlns:a16="http://schemas.microsoft.com/office/drawing/2014/main" id="{A9112A8D-E5F5-4168-A75C-10A3C0991098}"/>
+                <a16:creationId xmlns:a16="http://schemas.microsoft.com/office/drawing/2014/main" id="{451304E9-80CB-4D00-BA77-CA11327E680D}"/>
               </a:ext>
             </a:extLst>
           </p:cNvPr>
@@ -7453,7 +7524,7 @@
           <p:cNvPr id="26" name="">
             <a:extLst xmlns:a="http://schemas.openxmlformats.org/drawingml/2006/main">
               <a:ext uri="{FF2B5EF4-FFF2-40B4-BE49-F238E27FC236}">
-                <a16:creationId xmlns:a16="http://schemas.microsoft.com/office/drawing/2014/main" id="{7F5B5CCC-364B-4DA0-AAA3-ED4AB7153E94}"/>
+                <a16:creationId xmlns:a16="http://schemas.microsoft.com/office/drawing/2014/main" id="{EA459DAF-536E-4A9D-8678-2CF25EDB4A0C}"/>
               </a:ext>
             </a:extLst>
           </p:cNvPr>
@@ -7511,7 +7582,7 @@
           <p:cNvPr id="27" name="">
             <a:extLst xmlns:a="http://schemas.openxmlformats.org/drawingml/2006/main">
               <a:ext uri="{FF2B5EF4-FFF2-40B4-BE49-F238E27FC236}">
-                <a16:creationId xmlns:a16="http://schemas.microsoft.com/office/drawing/2014/main" id="{354E71C7-99A9-414B-8D9F-9169CE2F9253}"/>
+                <a16:creationId xmlns:a16="http://schemas.microsoft.com/office/drawing/2014/main" id="{2A902717-B4C6-43F1-AA3E-78D76DE62C24}"/>
               </a:ext>
             </a:extLst>
           </p:cNvPr>
@@ -7567,7 +7638,7 @@
     </p:spTree>
     <p:extLst>
       <p:ext uri="{BB962C8B-B14F-4D97-AF65-F5344CB8AC3E}">
-        <p14:creationId xmlns:p14="http://schemas.microsoft.com/office/powerpoint/2010/main" val="1325649716"/>
+        <p14:creationId xmlns:p14="http://schemas.microsoft.com/office/powerpoint/2010/main" val="1317530066"/>
       </p:ext>
     </p:extLst>
   </p:cSld>
@@ -7598,7 +7669,7 @@
           <p:cNvPr id="19" name="">
             <a:extLst xmlns:a="http://schemas.openxmlformats.org/drawingml/2006/main">
               <a:ext uri="{FF2B5EF4-FFF2-40B4-BE49-F238E27FC236}">
-                <a16:creationId xmlns:a16="http://schemas.microsoft.com/office/drawing/2014/main" id="{D418F832-8C4E-49EB-91EE-AF7AA7D0FC66}"/>
+                <a16:creationId xmlns:a16="http://schemas.microsoft.com/office/drawing/2014/main" id="{B3D4C214-34C9-484E-AFEB-9101A9155F35}"/>
               </a:ext>
             </a:extLst>
           </p:cNvPr>
@@ -7629,7 +7700,7 @@
           <p:cNvPr id="2" name="">
             <a:extLst xmlns:a="http://schemas.openxmlformats.org/drawingml/2006/main">
               <a:ext uri="{FF2B5EF4-FFF2-40B4-BE49-F238E27FC236}">
-                <a16:creationId xmlns:a16="http://schemas.microsoft.com/office/drawing/2014/main" id="{FFC5D0AD-BAE6-4C80-AF50-258E710168EA}"/>
+                <a16:creationId xmlns:a16="http://schemas.microsoft.com/office/drawing/2014/main" id="{32CBC757-B798-4920-9D43-62F1250D9C47}"/>
               </a:ext>
             </a:extLst>
           </p:cNvPr>
@@ -7687,7 +7758,7 @@
           <p:cNvPr id="3" name="">
             <a:extLst xmlns:a="http://schemas.openxmlformats.org/drawingml/2006/main">
               <a:ext uri="{FF2B5EF4-FFF2-40B4-BE49-F238E27FC236}">
-                <a16:creationId xmlns:a16="http://schemas.microsoft.com/office/drawing/2014/main" id="{488BF421-9871-4B88-83DB-4AD77F72E603}"/>
+                <a16:creationId xmlns:a16="http://schemas.microsoft.com/office/drawing/2014/main" id="{B72A5697-6BDB-4132-8992-3258EEAEA223}"/>
               </a:ext>
             </a:extLst>
           </p:cNvPr>
@@ -7745,7 +7816,7 @@
           <p:cNvPr id="4" name="">
             <a:extLst xmlns:a="http://schemas.openxmlformats.org/drawingml/2006/main">
               <a:ext uri="{FF2B5EF4-FFF2-40B4-BE49-F238E27FC236}">
-                <a16:creationId xmlns:a16="http://schemas.microsoft.com/office/drawing/2014/main" id="{D20119AB-EF87-4B3B-ADD8-24B640561BCD}"/>
+                <a16:creationId xmlns:a16="http://schemas.microsoft.com/office/drawing/2014/main" id="{F1C6A4A2-15D1-4F50-A1A6-7582087CBA60}"/>
               </a:ext>
             </a:extLst>
           </p:cNvPr>
@@ -7803,7 +7874,7 @@
           <p:cNvPr id="5" name="">
             <a:extLst xmlns:a="http://schemas.openxmlformats.org/drawingml/2006/main">
               <a:ext uri="{FF2B5EF4-FFF2-40B4-BE49-F238E27FC236}">
-                <a16:creationId xmlns:a16="http://schemas.microsoft.com/office/drawing/2014/main" id="{D359FF68-50C9-4C88-9FD3-95D442FAD55A}"/>
+                <a16:creationId xmlns:a16="http://schemas.microsoft.com/office/drawing/2014/main" id="{705DC09C-E104-408F-B854-24551A555AF4}"/>
               </a:ext>
             </a:extLst>
           </p:cNvPr>
@@ -7834,7 +7905,7 @@
           <p:cNvPr id="6" name="">
             <a:extLst xmlns:a="http://schemas.openxmlformats.org/drawingml/2006/main">
               <a:ext uri="{FF2B5EF4-FFF2-40B4-BE49-F238E27FC236}">
-                <a16:creationId xmlns:a16="http://schemas.microsoft.com/office/drawing/2014/main" id="{9724C9DA-8D45-40BA-8899-9AD22F4E6A88}"/>
+                <a16:creationId xmlns:a16="http://schemas.microsoft.com/office/drawing/2014/main" id="{FA4D050D-6808-4B49-956A-168C114D415C}"/>
               </a:ext>
             </a:extLst>
           </p:cNvPr>
@@ -7899,7 +7970,7 @@
         </p:xfrm>
         <a:graphic xmlns:a="http://schemas.openxmlformats.org/drawingml/2006/main">
           <a:graphicData uri="http://schemas.openxmlformats.org/drawingml/2006/chart">
-            <c:chart xmlns:r="http://schemas.openxmlformats.org/officeDocument/2006/relationships" xmlns:c="http://schemas.openxmlformats.org/drawingml/2006/chart" r:id="Ra677d170313b4d00"/>
+            <c:chart xmlns:r="http://schemas.openxmlformats.org/officeDocument/2006/relationships" xmlns:c="http://schemas.openxmlformats.org/drawingml/2006/chart" r:id="Rb4364b8ffc6949da"/>
           </a:graphicData>
         </a:graphic>
       </p:graphicFrame>
@@ -7908,7 +7979,7 @@
           <p:cNvPr id="8" name="">
             <a:extLst xmlns:a="http://schemas.openxmlformats.org/drawingml/2006/main">
               <a:ext uri="{FF2B5EF4-FFF2-40B4-BE49-F238E27FC236}">
-                <a16:creationId xmlns:a16="http://schemas.microsoft.com/office/drawing/2014/main" id="{FEB35BCE-EA0F-4657-8098-A3209ECA7A0F}"/>
+                <a16:creationId xmlns:a16="http://schemas.microsoft.com/office/drawing/2014/main" id="{8173FA8F-9740-435A-B6DA-1ECEC7292499}"/>
               </a:ext>
             </a:extLst>
           </p:cNvPr>
@@ -7970,7 +8041,7 @@
           <p:cNvPr id="9" name="">
             <a:extLst xmlns:a="http://schemas.openxmlformats.org/drawingml/2006/main">
               <a:ext uri="{FF2B5EF4-FFF2-40B4-BE49-F238E27FC236}">
-                <a16:creationId xmlns:a16="http://schemas.microsoft.com/office/drawing/2014/main" id="{7DBDB3D8-65EE-4B99-8923-808FE515D47C}"/>
+                <a16:creationId xmlns:a16="http://schemas.microsoft.com/office/drawing/2014/main" id="{4B002680-AD93-44D3-9BEE-0F5805AD57C0}"/>
               </a:ext>
             </a:extLst>
           </p:cNvPr>
@@ -8492,7 +8563,7 @@
           <p:cNvPr id="11" name="">
             <a:extLst xmlns:a="http://schemas.openxmlformats.org/drawingml/2006/main">
               <a:ext uri="{FF2B5EF4-FFF2-40B4-BE49-F238E27FC236}">
-                <a16:creationId xmlns:a16="http://schemas.microsoft.com/office/drawing/2014/main" id="{70141F9B-25FF-4272-80D7-A78A6CE6B3D8}"/>
+                <a16:creationId xmlns:a16="http://schemas.microsoft.com/office/drawing/2014/main" id="{EEF208B3-4B07-4A97-9646-B3A34EC838FD}"/>
               </a:ext>
             </a:extLst>
           </p:cNvPr>
@@ -8554,7 +8625,7 @@
           <p:cNvPr id="12" name="">
             <a:extLst xmlns:a="http://schemas.openxmlformats.org/drawingml/2006/main">
               <a:ext uri="{FF2B5EF4-FFF2-40B4-BE49-F238E27FC236}">
-                <a16:creationId xmlns:a16="http://schemas.microsoft.com/office/drawing/2014/main" id="{17F5E38B-9048-47A5-9558-DF69DAD92E74}"/>
+                <a16:creationId xmlns:a16="http://schemas.microsoft.com/office/drawing/2014/main" id="{12B55DC2-769C-4B94-9EE9-F063A8525FB8}"/>
               </a:ext>
             </a:extLst>
           </p:cNvPr>
@@ -8585,7 +8656,7 @@
           <p:cNvPr id="13" name="">
             <a:extLst xmlns:a="http://schemas.openxmlformats.org/drawingml/2006/main">
               <a:ext uri="{FF2B5EF4-FFF2-40B4-BE49-F238E27FC236}">
-                <a16:creationId xmlns:a16="http://schemas.microsoft.com/office/drawing/2014/main" id="{8662FF9B-24A5-4284-820F-511330003451}"/>
+                <a16:creationId xmlns:a16="http://schemas.microsoft.com/office/drawing/2014/main" id="{019C6DB1-6FAF-4EAE-B80B-DEC9A683A27A}"/>
               </a:ext>
             </a:extLst>
           </p:cNvPr>
@@ -8945,7 +9016,7 @@
           <p:cNvPr id="15" name="">
             <a:extLst xmlns:a="http://schemas.openxmlformats.org/drawingml/2006/main">
               <a:ext uri="{FF2B5EF4-FFF2-40B4-BE49-F238E27FC236}">
-                <a16:creationId xmlns:a16="http://schemas.microsoft.com/office/drawing/2014/main" id="{E99F4089-A559-4A3D-BE81-07B51AFEAC37}"/>
+                <a16:creationId xmlns:a16="http://schemas.microsoft.com/office/drawing/2014/main" id="{E161ECBF-7D1A-4949-BCD4-D96919240D4D}"/>
               </a:ext>
             </a:extLst>
           </p:cNvPr>
@@ -9249,7 +9320,7 @@
           <p:cNvPr id="17" name="">
             <a:extLst xmlns:a="http://schemas.openxmlformats.org/drawingml/2006/main">
               <a:ext uri="{FF2B5EF4-FFF2-40B4-BE49-F238E27FC236}">
-                <a16:creationId xmlns:a16="http://schemas.microsoft.com/office/drawing/2014/main" id="{AAF01B1A-DB38-45B6-8C46-8799B8DEC9B8}"/>
+                <a16:creationId xmlns:a16="http://schemas.microsoft.com/office/drawing/2014/main" id="{13459459-2CAC-451C-AB37-5DD8383D2CC0}"/>
               </a:ext>
             </a:extLst>
           </p:cNvPr>
@@ -9311,7 +9382,7 @@
           <p:cNvPr id="18" name="">
             <a:extLst xmlns:a="http://schemas.openxmlformats.org/drawingml/2006/main">
               <a:ext uri="{FF2B5EF4-FFF2-40B4-BE49-F238E27FC236}">
-                <a16:creationId xmlns:a16="http://schemas.microsoft.com/office/drawing/2014/main" id="{B4FCBF8A-1B64-48D5-80F5-D2091AE58358}"/>
+                <a16:creationId xmlns:a16="http://schemas.microsoft.com/office/drawing/2014/main" id="{77BF4164-A657-4391-B84D-7C043FBE7E3F}"/>
               </a:ext>
             </a:extLst>
           </p:cNvPr>
@@ -9367,7 +9438,7 @@
     </p:spTree>
     <p:extLst>
       <p:ext uri="{BB962C8B-B14F-4D97-AF65-F5344CB8AC3E}">
-        <p14:creationId xmlns:p14="http://schemas.microsoft.com/office/powerpoint/2010/main" val="2009785202"/>
+        <p14:creationId xmlns:p14="http://schemas.microsoft.com/office/powerpoint/2010/main" val="1069441159"/>
       </p:ext>
     </p:extLst>
   </p:cSld>
@@ -9398,7 +9469,7 @@
           <p:cNvPr id="20" name="">
             <a:extLst xmlns:a="http://schemas.openxmlformats.org/drawingml/2006/main">
               <a:ext uri="{FF2B5EF4-FFF2-40B4-BE49-F238E27FC236}">
-                <a16:creationId xmlns:a16="http://schemas.microsoft.com/office/drawing/2014/main" id="{434465A5-A768-47DD-A79E-0A597E436147}"/>
+                <a16:creationId xmlns:a16="http://schemas.microsoft.com/office/drawing/2014/main" id="{2DA68AC4-1C6A-4136-910B-77DBD54739A4}"/>
               </a:ext>
             </a:extLst>
           </p:cNvPr>
@@ -9429,7 +9500,7 @@
           <p:cNvPr id="2" name="">
             <a:extLst xmlns:a="http://schemas.openxmlformats.org/drawingml/2006/main">
               <a:ext uri="{FF2B5EF4-FFF2-40B4-BE49-F238E27FC236}">
-                <a16:creationId xmlns:a16="http://schemas.microsoft.com/office/drawing/2014/main" id="{F025EBC5-6356-437A-92F2-46F298D46C69}"/>
+                <a16:creationId xmlns:a16="http://schemas.microsoft.com/office/drawing/2014/main" id="{7AC182F5-669D-4616-AAEC-2714D3386DFE}"/>
               </a:ext>
             </a:extLst>
           </p:cNvPr>
@@ -9487,7 +9558,7 @@
           <p:cNvPr id="3" name="">
             <a:extLst xmlns:a="http://schemas.openxmlformats.org/drawingml/2006/main">
               <a:ext uri="{FF2B5EF4-FFF2-40B4-BE49-F238E27FC236}">
-                <a16:creationId xmlns:a16="http://schemas.microsoft.com/office/drawing/2014/main" id="{7778A4DC-B196-4AE4-99CA-48658A4D2B08}"/>
+                <a16:creationId xmlns:a16="http://schemas.microsoft.com/office/drawing/2014/main" id="{FE960C77-F85D-4AA9-9EC4-387E4D0259E4}"/>
               </a:ext>
             </a:extLst>
           </p:cNvPr>
@@ -9545,7 +9616,7 @@
           <p:cNvPr id="4" name="">
             <a:extLst xmlns:a="http://schemas.openxmlformats.org/drawingml/2006/main">
               <a:ext uri="{FF2B5EF4-FFF2-40B4-BE49-F238E27FC236}">
-                <a16:creationId xmlns:a16="http://schemas.microsoft.com/office/drawing/2014/main" id="{7DD75931-C767-4409-BF72-15DCAA2A81B9}"/>
+                <a16:creationId xmlns:a16="http://schemas.microsoft.com/office/drawing/2014/main" id="{23049776-850A-4756-83DD-7259E9E9B105}"/>
               </a:ext>
             </a:extLst>
           </p:cNvPr>
@@ -9603,7 +9674,7 @@
           <p:cNvPr id="5" name="">
             <a:extLst xmlns:a="http://schemas.openxmlformats.org/drawingml/2006/main">
               <a:ext uri="{FF2B5EF4-FFF2-40B4-BE49-F238E27FC236}">
-                <a16:creationId xmlns:a16="http://schemas.microsoft.com/office/drawing/2014/main" id="{A8B90E13-20DF-4ADE-AD86-305D39409100}"/>
+                <a16:creationId xmlns:a16="http://schemas.microsoft.com/office/drawing/2014/main" id="{649B4C41-994F-49DA-9B4E-61B8C7713E86}"/>
               </a:ext>
             </a:extLst>
           </p:cNvPr>
@@ -9878,7 +9949,7 @@
           <p:cNvPr id="7" name="">
             <a:extLst xmlns:a="http://schemas.openxmlformats.org/drawingml/2006/main">
               <a:ext uri="{FF2B5EF4-FFF2-40B4-BE49-F238E27FC236}">
-                <a16:creationId xmlns:a16="http://schemas.microsoft.com/office/drawing/2014/main" id="{EFD793B9-EC11-4558-BB92-248F53980688}"/>
+                <a16:creationId xmlns:a16="http://schemas.microsoft.com/office/drawing/2014/main" id="{1CBB179B-531F-4894-B771-4B629902B4EA}"/>
               </a:ext>
             </a:extLst>
           </p:cNvPr>
@@ -9909,7 +9980,7 @@
           <p:cNvPr id="8" name="">
             <a:extLst xmlns:a="http://schemas.openxmlformats.org/drawingml/2006/main">
               <a:ext uri="{FF2B5EF4-FFF2-40B4-BE49-F238E27FC236}">
-                <a16:creationId xmlns:a16="http://schemas.microsoft.com/office/drawing/2014/main" id="{78BB5B85-1EF3-48A7-8770-807CF1D0E530}"/>
+                <a16:creationId xmlns:a16="http://schemas.microsoft.com/office/drawing/2014/main" id="{7E790A05-8A4B-4574-9B29-1E3235F17792}"/>
               </a:ext>
             </a:extLst>
           </p:cNvPr>
@@ -10651,7 +10722,7 @@
           <p:cNvPr id="10" name="">
             <a:extLst xmlns:a="http://schemas.openxmlformats.org/drawingml/2006/main">
               <a:ext uri="{FF2B5EF4-FFF2-40B4-BE49-F238E27FC236}">
-                <a16:creationId xmlns:a16="http://schemas.microsoft.com/office/drawing/2014/main" id="{63391FE7-E85D-41AA-89C6-9A8E933530F6}"/>
+                <a16:creationId xmlns:a16="http://schemas.microsoft.com/office/drawing/2014/main" id="{6FF90696-BFBD-45B7-8D0D-8DFB2B45A574}"/>
               </a:ext>
             </a:extLst>
           </p:cNvPr>
@@ -10955,7 +11026,7 @@
           <p:cNvPr id="12" name="">
             <a:extLst xmlns:a="http://schemas.openxmlformats.org/drawingml/2006/main">
               <a:ext uri="{FF2B5EF4-FFF2-40B4-BE49-F238E27FC236}">
-                <a16:creationId xmlns:a16="http://schemas.microsoft.com/office/drawing/2014/main" id="{488F6F33-4A2D-47C5-9D04-DC7DCF41CF25}"/>
+                <a16:creationId xmlns:a16="http://schemas.microsoft.com/office/drawing/2014/main" id="{8CA4AD52-0599-424D-832E-397953DAA0DD}"/>
               </a:ext>
             </a:extLst>
           </p:cNvPr>
@@ -11013,7 +11084,7 @@
           <p:cNvPr id="13" name="">
             <a:extLst xmlns:a="http://schemas.openxmlformats.org/drawingml/2006/main">
               <a:ext uri="{FF2B5EF4-FFF2-40B4-BE49-F238E27FC236}">
-                <a16:creationId xmlns:a16="http://schemas.microsoft.com/office/drawing/2014/main" id="{87D342A4-5AB4-4CB4-A209-9F4FF5EBD699}"/>
+                <a16:creationId xmlns:a16="http://schemas.microsoft.com/office/drawing/2014/main" id="{42615C7B-D428-4338-A448-C332E2CC856F}"/>
               </a:ext>
             </a:extLst>
           </p:cNvPr>
@@ -11138,7 +11209,7 @@
           <p:cNvPr id="14" name="">
             <a:extLst xmlns:a="http://schemas.openxmlformats.org/drawingml/2006/main">
               <a:ext uri="{FF2B5EF4-FFF2-40B4-BE49-F238E27FC236}">
-                <a16:creationId xmlns:a16="http://schemas.microsoft.com/office/drawing/2014/main" id="{5A7250E2-C6AB-47AC-9AF0-6A33CAE42449}"/>
+                <a16:creationId xmlns:a16="http://schemas.microsoft.com/office/drawing/2014/main" id="{7D502137-E1F4-46AA-99CC-75553F78EFEB}"/>
               </a:ext>
             </a:extLst>
           </p:cNvPr>
@@ -11169,7 +11240,7 @@
           <p:cNvPr id="15" name="">
             <a:extLst xmlns:a="http://schemas.openxmlformats.org/drawingml/2006/main">
               <a:ext uri="{FF2B5EF4-FFF2-40B4-BE49-F238E27FC236}">
-                <a16:creationId xmlns:a16="http://schemas.microsoft.com/office/drawing/2014/main" id="{5BC093EE-2BEE-4430-8417-50FFC986DE31}"/>
+                <a16:creationId xmlns:a16="http://schemas.microsoft.com/office/drawing/2014/main" id="{A8A6C2C6-6EDA-4435-AFCC-2A9BF331B7A7}"/>
               </a:ext>
             </a:extLst>
           </p:cNvPr>
@@ -11227,7 +11298,7 @@
           <p:cNvPr id="16" name="">
             <a:extLst xmlns:a="http://schemas.openxmlformats.org/drawingml/2006/main">
               <a:ext uri="{FF2B5EF4-FFF2-40B4-BE49-F238E27FC236}">
-                <a16:creationId xmlns:a16="http://schemas.microsoft.com/office/drawing/2014/main" id="{146FBC89-3FC5-446D-88D3-4C48526936E0}"/>
+                <a16:creationId xmlns:a16="http://schemas.microsoft.com/office/drawing/2014/main" id="{2E393652-C618-435F-84B0-A3677BA440A1}"/>
               </a:ext>
             </a:extLst>
           </p:cNvPr>
@@ -11289,7 +11360,7 @@
           <p:cNvPr id="17" name="">
             <a:extLst xmlns:a="http://schemas.openxmlformats.org/drawingml/2006/main">
               <a:ext uri="{FF2B5EF4-FFF2-40B4-BE49-F238E27FC236}">
-                <a16:creationId xmlns:a16="http://schemas.microsoft.com/office/drawing/2014/main" id="{C6818857-0A5A-482E-B5C4-E1C0CE787E4D}"/>
+                <a16:creationId xmlns:a16="http://schemas.microsoft.com/office/drawing/2014/main" id="{DD025197-A676-471C-A238-B30D1555F012}"/>
               </a:ext>
             </a:extLst>
           </p:cNvPr>
@@ -11347,7 +11418,7 @@
           <p:cNvPr id="18" name="">
             <a:extLst xmlns:a="http://schemas.openxmlformats.org/drawingml/2006/main">
               <a:ext uri="{FF2B5EF4-FFF2-40B4-BE49-F238E27FC236}">
-                <a16:creationId xmlns:a16="http://schemas.microsoft.com/office/drawing/2014/main" id="{F965EFF2-8506-47A3-A657-B2CC74A86D78}"/>
+                <a16:creationId xmlns:a16="http://schemas.microsoft.com/office/drawing/2014/main" id="{9196152F-0B38-417F-9F02-2D8C6B08AC02}"/>
               </a:ext>
             </a:extLst>
           </p:cNvPr>
@@ -11409,7 +11480,7 @@
           <p:cNvPr id="19" name="">
             <a:extLst xmlns:a="http://schemas.openxmlformats.org/drawingml/2006/main">
               <a:ext uri="{FF2B5EF4-FFF2-40B4-BE49-F238E27FC236}">
-                <a16:creationId xmlns:a16="http://schemas.microsoft.com/office/drawing/2014/main" id="{96232CFD-CE51-4E9D-B431-35717D83FAEE}"/>
+                <a16:creationId xmlns:a16="http://schemas.microsoft.com/office/drawing/2014/main" id="{E534B10B-F879-4A7F-A06B-F14B4CFE7B6C}"/>
               </a:ext>
             </a:extLst>
           </p:cNvPr>
@@ -11465,7 +11536,2081 @@
     </p:spTree>
     <p:extLst>
       <p:ext uri="{BB962C8B-B14F-4D97-AF65-F5344CB8AC3E}">
-        <p14:creationId xmlns:p14="http://schemas.microsoft.com/office/powerpoint/2010/main" val="1285780456"/>
+        <p14:creationId xmlns:p14="http://schemas.microsoft.com/office/powerpoint/2010/main" val="1226686319"/>
+      </p:ext>
+    </p:extLst>
+  </p:cSld>
+</p:sld>
+</file>
+
+<file path=ppt/slides/slide6.xml><?xml version="1.0" encoding="utf-8"?>
+<p:sld xmlns:p="http://schemas.openxmlformats.org/presentationml/2006/main">
+  <p:cSld>
+    <p:bg>
+      <p:bgPr>
+        <a:solidFill xmlns:a="http://schemas.openxmlformats.org/drawingml/2006/main">
+          <a:srgbClr val="F8FBFC"/>
+        </a:solidFill>
+      </p:bgPr>
+    </p:bg>
+    <p:spTree>
+      <p:nvGrpSpPr>
+        <p:cNvPr id="1" name=""/>
+        <p:cNvGrpSpPr/>
+        <p:nvPr/>
+      </p:nvGrpSpPr>
+      <p:grpSpPr>
+        <a:xfrm xmlns:a="http://schemas.openxmlformats.org/drawingml/2006/main"/>
+      </p:grpSpPr>
+      <p:sp>
+        <p:nvSpPr>
+          <p:cNvPr id="20" name="">
+            <a:extLst xmlns:a="http://schemas.openxmlformats.org/drawingml/2006/main">
+              <a:ext uri="{FF2B5EF4-FFF2-40B4-BE49-F238E27FC236}">
+                <a16:creationId xmlns:a16="http://schemas.microsoft.com/office/drawing/2014/main" id="{844F0E27-85F4-43CD-8C30-929AE0074503}"/>
+              </a:ext>
+            </a:extLst>
+          </p:cNvPr>
+          <p:cNvSpPr>
+            <a:spLocks xmlns:a="http://schemas.openxmlformats.org/drawingml/2006/main" noGrp="1"/>
+          </p:cNvSpPr>
+          <p:nvPr/>
+        </p:nvSpPr>
+        <p:spPr>
+          <a:xfrm xmlns:a="http://schemas.openxmlformats.org/drawingml/2006/main">
+            <a:off x="0" y="0"/>
+            <a:ext cx="12192000" cy="152400"/>
+          </a:xfrm>
+          <a:prstGeom xmlns:a="http://schemas.openxmlformats.org/drawingml/2006/main" prst="rect">
+            <a:avLst/>
+          </a:prstGeom>
+          <a:solidFill xmlns:a="http://schemas.openxmlformats.org/drawingml/2006/main">
+            <a:srgbClr val="0F4C5C"/>
+          </a:solidFill>
+          <a:ln xmlns:a="http://schemas.openxmlformats.org/drawingml/2006/main" w="0">
+            <a:noFill/>
+            <a:prstDash val="solid"/>
+          </a:ln>
+        </p:spPr>
+      </p:sp>
+      <p:sp>
+        <p:nvSpPr>
+          <p:cNvPr id="2" name="">
+            <a:extLst xmlns:a="http://schemas.openxmlformats.org/drawingml/2006/main">
+              <a:ext uri="{FF2B5EF4-FFF2-40B4-BE49-F238E27FC236}">
+                <a16:creationId xmlns:a16="http://schemas.microsoft.com/office/drawing/2014/main" id="{B0F4797B-4FD0-468E-863E-D71E13D5F721}"/>
+              </a:ext>
+            </a:extLst>
+          </p:cNvPr>
+          <p:cNvSpPr>
+            <a:spLocks xmlns:a="http://schemas.openxmlformats.org/drawingml/2006/main" noGrp="1"/>
+          </p:cNvSpPr>
+          <p:nvPr/>
+        </p:nvSpPr>
+        <p:spPr>
+          <a:xfrm xmlns:a="http://schemas.openxmlformats.org/drawingml/2006/main">
+            <a:off x="514350" y="361950"/>
+            <a:ext cx="3429000" cy="247650"/>
+          </a:xfrm>
+          <a:prstGeom xmlns:a="http://schemas.openxmlformats.org/drawingml/2006/main" prst="rect">
+            <a:avLst/>
+          </a:prstGeom>
+          <a:noFill xmlns:a="http://schemas.openxmlformats.org/drawingml/2006/main"/>
+          <a:ln xmlns:a="http://schemas.openxmlformats.org/drawingml/2006/main" w="0">
+            <a:noFill/>
+            <a:prstDash val="solid"/>
+          </a:ln>
+        </p:spPr>
+        <p:txBody>
+          <a:bodyPr xmlns:a="http://schemas.openxmlformats.org/drawingml/2006/main" lIns="0" tIns="0" rIns="0" bIns="0">
+            <a:noAutofit/>
+          </a:bodyPr>
+          <a:lstStyle xmlns:a="http://schemas.openxmlformats.org/drawingml/2006/main"/>
+          <a:p xmlns:a="http://schemas.openxmlformats.org/drawingml/2006/main">
+            <a:pPr>
+              <a:defRPr sz="1275" b="1">
+                <a:solidFill>
+                  <a:srgbClr val="0F6F73"/>
+                </a:solidFill>
+                <a:latin typeface="Helvetica Neue"/>
+                <a:ea typeface="Helvetica Neue"/>
+                <a:cs typeface="Helvetica Neue"/>
+              </a:defRPr>
+            </a:pPr>
+            <a:r>
+              <a:rPr sz="1275" b="1">
+                <a:solidFill>
+                  <a:srgbClr val="0F6F73"/>
+                </a:solidFill>
+                <a:latin typeface="Helvetica Neue"/>
+                <a:ea typeface="Helvetica Neue"/>
+                <a:cs typeface="Helvetica Neue"/>
+              </a:rPr>
+              <a:t>Meds Counsulting LLC</a:t>
+            </a:r>
+          </a:p>
+        </p:txBody>
+      </p:sp>
+      <p:sp>
+        <p:nvSpPr>
+          <p:cNvPr id="3" name="">
+            <a:extLst xmlns:a="http://schemas.openxmlformats.org/drawingml/2006/main">
+              <a:ext uri="{FF2B5EF4-FFF2-40B4-BE49-F238E27FC236}">
+                <a16:creationId xmlns:a16="http://schemas.microsoft.com/office/drawing/2014/main" id="{F37653A4-E3CB-4B0A-9253-1A89651C6D06}"/>
+              </a:ext>
+            </a:extLst>
+          </p:cNvPr>
+          <p:cNvSpPr>
+            <a:spLocks xmlns:a="http://schemas.openxmlformats.org/drawingml/2006/main" noGrp="1"/>
+          </p:cNvSpPr>
+          <p:nvPr/>
+        </p:nvSpPr>
+        <p:spPr>
+          <a:xfrm xmlns:a="http://schemas.openxmlformats.org/drawingml/2006/main">
+            <a:off x="514350" y="723900"/>
+            <a:ext cx="8191500" cy="457200"/>
+          </a:xfrm>
+          <a:prstGeom xmlns:a="http://schemas.openxmlformats.org/drawingml/2006/main" prst="rect">
+            <a:avLst/>
+          </a:prstGeom>
+          <a:noFill xmlns:a="http://schemas.openxmlformats.org/drawingml/2006/main"/>
+          <a:ln xmlns:a="http://schemas.openxmlformats.org/drawingml/2006/main" w="0">
+            <a:noFill/>
+            <a:prstDash val="solid"/>
+          </a:ln>
+        </p:spPr>
+        <p:txBody>
+          <a:bodyPr xmlns:a="http://schemas.openxmlformats.org/drawingml/2006/main" lIns="0" tIns="0" rIns="0" bIns="0">
+            <a:noAutofit/>
+          </a:bodyPr>
+          <a:lstStyle xmlns:a="http://schemas.openxmlformats.org/drawingml/2006/main"/>
+          <a:p xmlns:a="http://schemas.openxmlformats.org/drawingml/2006/main">
+            <a:pPr>
+              <a:defRPr sz="2700" b="1">
+                <a:solidFill>
+                  <a:srgbClr val="102A34"/>
+                </a:solidFill>
+                <a:latin typeface="Helvetica Neue"/>
+                <a:ea typeface="Helvetica Neue"/>
+                <a:cs typeface="Helvetica Neue"/>
+              </a:defRPr>
+            </a:pPr>
+            <a:r>
+              <a:rPr sz="2700" b="1">
+                <a:solidFill>
+                  <a:srgbClr val="102A34"/>
+                </a:solidFill>
+                <a:latin typeface="Helvetica Neue"/>
+                <a:ea typeface="Helvetica Neue"/>
+                <a:cs typeface="Helvetica Neue"/>
+              </a:rPr>
+              <a:t>Ethical considerations</a:t>
+            </a:r>
+          </a:p>
+        </p:txBody>
+      </p:sp>
+      <p:sp>
+        <p:nvSpPr>
+          <p:cNvPr id="4" name="">
+            <a:extLst xmlns:a="http://schemas.openxmlformats.org/drawingml/2006/main">
+              <a:ext uri="{FF2B5EF4-FFF2-40B4-BE49-F238E27FC236}">
+                <a16:creationId xmlns:a16="http://schemas.microsoft.com/office/drawing/2014/main" id="{68E369EF-4EF2-46D1-9C58-064671C67C24}"/>
+              </a:ext>
+            </a:extLst>
+          </p:cNvPr>
+          <p:cNvSpPr>
+            <a:spLocks xmlns:a="http://schemas.openxmlformats.org/drawingml/2006/main" noGrp="1"/>
+          </p:cNvSpPr>
+          <p:nvPr/>
+        </p:nvSpPr>
+        <p:spPr>
+          <a:xfrm xmlns:a="http://schemas.openxmlformats.org/drawingml/2006/main">
+            <a:off x="514350" y="1162050"/>
+            <a:ext cx="8096250" cy="209550"/>
+          </a:xfrm>
+          <a:prstGeom xmlns:a="http://schemas.openxmlformats.org/drawingml/2006/main" prst="rect">
+            <a:avLst/>
+          </a:prstGeom>
+          <a:noFill xmlns:a="http://schemas.openxmlformats.org/drawingml/2006/main"/>
+          <a:ln xmlns:a="http://schemas.openxmlformats.org/drawingml/2006/main" w="0">
+            <a:noFill/>
+            <a:prstDash val="solid"/>
+          </a:ln>
+        </p:spPr>
+        <p:txBody>
+          <a:bodyPr xmlns:a="http://schemas.openxmlformats.org/drawingml/2006/main" lIns="0" tIns="0" rIns="0" bIns="0">
+            <a:noAutofit/>
+          </a:bodyPr>
+          <a:lstStyle xmlns:a="http://schemas.openxmlformats.org/drawingml/2006/main"/>
+          <a:p xmlns:a="http://schemas.openxmlformats.org/drawingml/2006/main">
+            <a:pPr>
+              <a:defRPr sz="1088">
+                <a:solidFill>
+                  <a:srgbClr val="50636B"/>
+                </a:solidFill>
+                <a:latin typeface="Helvetica Neue"/>
+                <a:ea typeface="Helvetica Neue"/>
+                <a:cs typeface="Helvetica Neue"/>
+              </a:defRPr>
+            </a:pPr>
+            <a:r>
+              <a:rPr sz="1088">
+                <a:solidFill>
+                  <a:srgbClr val="50636B"/>
+                </a:solidFill>
+                <a:latin typeface="Helvetica Neue"/>
+                <a:ea typeface="Helvetica Neue"/>
+                <a:cs typeface="Helvetica Neue"/>
+              </a:rPr>
+              <a:t>Guardrails for fair, private, transparent, and compliant analytics</a:t>
+            </a:r>
+          </a:p>
+        </p:txBody>
+      </p:sp>
+      <p:sp>
+        <p:nvSpPr>
+          <p:cNvPr id="5" name="">
+            <a:extLst xmlns:a="http://schemas.openxmlformats.org/drawingml/2006/main">
+              <a:ext uri="{FF2B5EF4-FFF2-40B4-BE49-F238E27FC236}">
+                <a16:creationId xmlns:a16="http://schemas.microsoft.com/office/drawing/2014/main" id="{4D29C9FA-932B-4519-BE26-92274E15B77E}"/>
+              </a:ext>
+            </a:extLst>
+          </p:cNvPr>
+          <p:cNvSpPr>
+            <a:spLocks xmlns:a="http://schemas.openxmlformats.org/drawingml/2006/main" noGrp="1"/>
+          </p:cNvSpPr>
+          <p:nvPr/>
+        </p:nvSpPr>
+        <p:spPr>
+          <a:xfrm xmlns:a="http://schemas.openxmlformats.org/drawingml/2006/main">
+            <a:off x="514350" y="1466850"/>
+            <a:ext cx="10287000" cy="28575"/>
+          </a:xfrm>
+          <a:prstGeom xmlns:a="http://schemas.openxmlformats.org/drawingml/2006/main" prst="rect">
+            <a:avLst/>
+          </a:prstGeom>
+          <a:solidFill xmlns:a="http://schemas.openxmlformats.org/drawingml/2006/main">
+            <a:srgbClr val="E9A93A"/>
+          </a:solidFill>
+          <a:ln xmlns:a="http://schemas.openxmlformats.org/drawingml/2006/main" w="0">
+            <a:noFill/>
+            <a:prstDash val="solid"/>
+          </a:ln>
+        </p:spPr>
+      </p:sp>
+      <p:graphicFrame>
+        <p:nvGraphicFramePr>
+          <p:cNvPr id="25" name=""/>
+          <p:cNvGraphicFramePr/>
+          <p:nvPr/>
+        </p:nvGraphicFramePr>
+        <p:xfrm>
+          <a:off xmlns:a="http://schemas.openxmlformats.org/drawingml/2006/main" x="514350" y="1695450"/>
+          <a:ext xmlns:a="http://schemas.openxmlformats.org/drawingml/2006/main" cx="10287000" cy="819150"/>
+        </p:xfrm>
+        <a:graphic xmlns:a="http://schemas.openxmlformats.org/drawingml/2006/main">
+          <a:graphicData uri="http://schemas.openxmlformats.org/drawingml/2006/table">
+            <a:tbl>
+              <a:tblPr/>
+              <a:tblGrid>
+                <a:gridCol w="2571750"/>
+                <a:gridCol w="2571750"/>
+                <a:gridCol w="2571750"/>
+                <a:gridCol w="2571750"/>
+              </a:tblGrid>
+              <a:tr h="409575">
+                <a:tc>
+                  <a:txBody>
+                    <a:bodyPr lIns="66675" tIns="28575" rIns="57150" bIns="28575">
+                      <a:noAutofit/>
+                    </a:bodyPr>
+                    <a:lstStyle/>
+                    <a:p>
+                      <a:pPr algn="ctr"/>
+                      <a:r>
+                        <a:rPr sz="1650" b="1">
+                          <a:solidFill>
+                            <a:srgbClr val="0F4C5C"/>
+                          </a:solidFill>
+                          <a:latin typeface="Helvetica Neue"/>
+                          <a:ea typeface="Helvetica Neue"/>
+                          <a:cs typeface="Helvetica Neue"/>
+                        </a:rPr>
+                        <a:t>Fairness</a:t>
+                      </a:r>
+                    </a:p>
+                  </a:txBody>
+                  <a:tcPr marL="91440" marR="91440" marT="45720" marB="45720" anchor="ctr">
+                    <a:solidFill>
+                      <a:srgbClr val="EEF6F7"/>
+                    </a:solidFill>
+                  </a:tcPr>
+                </a:tc>
+                <a:tc>
+                  <a:txBody>
+                    <a:bodyPr lIns="66675" tIns="28575" rIns="57150" bIns="28575">
+                      <a:noAutofit/>
+                    </a:bodyPr>
+                    <a:lstStyle/>
+                    <a:p>
+                      <a:pPr algn="ctr"/>
+                      <a:r>
+                        <a:rPr sz="1650" b="1">
+                          <a:solidFill>
+                            <a:srgbClr val="0F4C5C"/>
+                          </a:solidFill>
+                          <a:latin typeface="Helvetica Neue"/>
+                          <a:ea typeface="Helvetica Neue"/>
+                          <a:cs typeface="Helvetica Neue"/>
+                        </a:rPr>
+                        <a:t>Privacy</a:t>
+                      </a:r>
+                    </a:p>
+                  </a:txBody>
+                  <a:tcPr marL="91440" marR="91440" marT="45720" marB="45720" anchor="ctr">
+                    <a:solidFill>
+                      <a:srgbClr val="EEF6F7"/>
+                    </a:solidFill>
+                  </a:tcPr>
+                </a:tc>
+                <a:tc>
+                  <a:txBody>
+                    <a:bodyPr lIns="66675" tIns="28575" rIns="57150" bIns="28575">
+                      <a:noAutofit/>
+                    </a:bodyPr>
+                    <a:lstStyle/>
+                    <a:p>
+                      <a:pPr algn="ctr"/>
+                      <a:r>
+                        <a:rPr sz="1650" b="1">
+                          <a:solidFill>
+                            <a:srgbClr val="0F4C5C"/>
+                          </a:solidFill>
+                          <a:latin typeface="Helvetica Neue"/>
+                          <a:ea typeface="Helvetica Neue"/>
+                          <a:cs typeface="Helvetica Neue"/>
+                        </a:rPr>
+                        <a:t>Governance</a:t>
+                      </a:r>
+                    </a:p>
+                  </a:txBody>
+                  <a:tcPr marL="91440" marR="91440" marT="45720" marB="45720" anchor="ctr">
+                    <a:solidFill>
+                      <a:srgbClr val="EEF6F7"/>
+                    </a:solidFill>
+                  </a:tcPr>
+                </a:tc>
+                <a:tc>
+                  <a:txBody>
+                    <a:bodyPr lIns="66675" tIns="28575" rIns="57150" bIns="28575">
+                      <a:noAutofit/>
+                    </a:bodyPr>
+                    <a:lstStyle/>
+                    <a:p>
+                      <a:pPr algn="ctr"/>
+                      <a:r>
+                        <a:rPr sz="1650" b="1">
+                          <a:solidFill>
+                            <a:srgbClr val="0F4C5C"/>
+                          </a:solidFill>
+                          <a:latin typeface="Helvetica Neue"/>
+                          <a:ea typeface="Helvetica Neue"/>
+                          <a:cs typeface="Helvetica Neue"/>
+                        </a:rPr>
+                        <a:t>Compliance</a:t>
+                      </a:r>
+                    </a:p>
+                  </a:txBody>
+                  <a:tcPr marL="91440" marR="91440" marT="45720" marB="45720" anchor="ctr">
+                    <a:solidFill>
+                      <a:srgbClr val="EEF6F7"/>
+                    </a:solidFill>
+                  </a:tcPr>
+                </a:tc>
+              </a:tr>
+              <a:tr h="409575">
+                <a:tc>
+                  <a:txBody>
+                    <a:bodyPr lIns="66675" tIns="28575" rIns="57150" bIns="28575">
+                      <a:noAutofit/>
+                    </a:bodyPr>
+                    <a:lstStyle/>
+                    <a:p>
+                      <a:pPr algn="ctr"/>
+                      <a:r>
+                        <a:rPr sz="705" b="0">
+                          <a:solidFill>
+                            <a:srgbClr val="50636B"/>
+                          </a:solidFill>
+                          <a:latin typeface="Helvetica Neue"/>
+                          <a:ea typeface="Helvetica Neue"/>
+                          <a:cs typeface="Helvetica Neue"/>
+                        </a:rPr>
+                        <a:t>Bias checks before use</a:t>
+                      </a:r>
+                    </a:p>
+                  </a:txBody>
+                  <a:tcPr marL="91440" marR="91440" marT="45720" marB="45720" anchor="ctr">
+                    <a:solidFill>
+                      <a:srgbClr val="F8FBFC"/>
+                    </a:solidFill>
+                  </a:tcPr>
+                </a:tc>
+                <a:tc>
+                  <a:txBody>
+                    <a:bodyPr lIns="66675" tIns="28575" rIns="57150" bIns="28575">
+                      <a:noAutofit/>
+                    </a:bodyPr>
+                    <a:lstStyle/>
+                    <a:p>
+                      <a:pPr algn="ctr"/>
+                      <a:r>
+                        <a:rPr sz="705" b="0">
+                          <a:solidFill>
+                            <a:srgbClr val="50636B"/>
+                          </a:solidFill>
+                          <a:latin typeface="Helvetica Neue"/>
+                          <a:ea typeface="Helvetica Neue"/>
+                          <a:cs typeface="Helvetica Neue"/>
+                        </a:rPr>
+                        <a:t>Minimum necessary data</a:t>
+                      </a:r>
+                    </a:p>
+                  </a:txBody>
+                  <a:tcPr marL="91440" marR="91440" marT="45720" marB="45720" anchor="ctr">
+                    <a:solidFill>
+                      <a:srgbClr val="F8FBFC"/>
+                    </a:solidFill>
+                  </a:tcPr>
+                </a:tc>
+                <a:tc>
+                  <a:txBody>
+                    <a:bodyPr lIns="66675" tIns="28575" rIns="57150" bIns="28575">
+                      <a:noAutofit/>
+                    </a:bodyPr>
+                    <a:lstStyle/>
+                    <a:p>
+                      <a:pPr algn="ctr"/>
+                      <a:r>
+                        <a:rPr sz="705" b="0">
+                          <a:solidFill>
+                            <a:srgbClr val="50636B"/>
+                          </a:solidFill>
+                          <a:latin typeface="Helvetica Neue"/>
+                          <a:ea typeface="Helvetica Neue"/>
+                          <a:cs typeface="Helvetica Neue"/>
+                        </a:rPr>
+                        <a:t>Clear ownership and audit trail</a:t>
+                      </a:r>
+                    </a:p>
+                  </a:txBody>
+                  <a:tcPr marL="91440" marR="91440" marT="45720" marB="45720" anchor="ctr">
+                    <a:solidFill>
+                      <a:srgbClr val="F8FBFC"/>
+                    </a:solidFill>
+                  </a:tcPr>
+                </a:tc>
+                <a:tc>
+                  <a:txBody>
+                    <a:bodyPr lIns="66675" tIns="28575" rIns="57150" bIns="28575">
+                      <a:noAutofit/>
+                    </a:bodyPr>
+                    <a:lstStyle/>
+                    <a:p>
+                      <a:pPr algn="ctr"/>
+                      <a:r>
+                        <a:rPr sz="705" b="0">
+                          <a:solidFill>
+                            <a:srgbClr val="50636B"/>
+                          </a:solidFill>
+                          <a:latin typeface="Helvetica Neue"/>
+                          <a:ea typeface="Helvetica Neue"/>
+                          <a:cs typeface="Helvetica Neue"/>
+                        </a:rPr>
+                        <a:t>HIPAA and responsible AI review</a:t>
+                      </a:r>
+                    </a:p>
+                  </a:txBody>
+                  <a:tcPr marL="91440" marR="91440" marT="45720" marB="45720" anchor="ctr">
+                    <a:solidFill>
+                      <a:srgbClr val="F8FBFC"/>
+                    </a:solidFill>
+                  </a:tcPr>
+                </a:tc>
+              </a:tr>
+            </a:tbl>
+          </a:graphicData>
+        </a:graphic>
+      </p:graphicFrame>
+      <p:sp>
+        <p:nvSpPr>
+          <p:cNvPr id="7" name="">
+            <a:extLst xmlns:a="http://schemas.openxmlformats.org/drawingml/2006/main">
+              <a:ext uri="{FF2B5EF4-FFF2-40B4-BE49-F238E27FC236}">
+                <a16:creationId xmlns:a16="http://schemas.microsoft.com/office/drawing/2014/main" id="{6188FD4F-DF4E-4C67-A29E-BF52CB30A094}"/>
+              </a:ext>
+            </a:extLst>
+          </p:cNvPr>
+          <p:cNvSpPr>
+            <a:spLocks xmlns:a="http://schemas.openxmlformats.org/drawingml/2006/main" noGrp="1"/>
+          </p:cNvSpPr>
+          <p:nvPr/>
+        </p:nvSpPr>
+        <p:spPr>
+          <a:xfrm xmlns:a="http://schemas.openxmlformats.org/drawingml/2006/main">
+            <a:off x="514350" y="2771775"/>
+            <a:ext cx="10287000" cy="14288"/>
+          </a:xfrm>
+          <a:prstGeom xmlns:a="http://schemas.openxmlformats.org/drawingml/2006/main" prst="rect">
+            <a:avLst/>
+          </a:prstGeom>
+          <a:solidFill xmlns:a="http://schemas.openxmlformats.org/drawingml/2006/main">
+            <a:srgbClr val="D1E1E5"/>
+          </a:solidFill>
+          <a:ln xmlns:a="http://schemas.openxmlformats.org/drawingml/2006/main" w="0">
+            <a:noFill/>
+            <a:prstDash val="solid"/>
+          </a:ln>
+        </p:spPr>
+      </p:sp>
+      <p:sp>
+        <p:nvSpPr>
+          <p:cNvPr id="8" name="">
+            <a:extLst xmlns:a="http://schemas.openxmlformats.org/drawingml/2006/main">
+              <a:ext uri="{FF2B5EF4-FFF2-40B4-BE49-F238E27FC236}">
+                <a16:creationId xmlns:a16="http://schemas.microsoft.com/office/drawing/2014/main" id="{E37D7288-4E6C-4888-A188-563D09C309EA}"/>
+              </a:ext>
+            </a:extLst>
+          </p:cNvPr>
+          <p:cNvSpPr>
+            <a:spLocks xmlns:a="http://schemas.openxmlformats.org/drawingml/2006/main" noGrp="1"/>
+          </p:cNvSpPr>
+          <p:nvPr/>
+        </p:nvSpPr>
+        <p:spPr>
+          <a:xfrm xmlns:a="http://schemas.openxmlformats.org/drawingml/2006/main">
+            <a:off x="514350" y="3009900"/>
+            <a:ext cx="3143250" cy="228600"/>
+          </a:xfrm>
+          <a:prstGeom xmlns:a="http://schemas.openxmlformats.org/drawingml/2006/main" prst="rect">
+            <a:avLst/>
+          </a:prstGeom>
+          <a:noFill xmlns:a="http://schemas.openxmlformats.org/drawingml/2006/main"/>
+          <a:ln xmlns:a="http://schemas.openxmlformats.org/drawingml/2006/main" w="0">
+            <a:noFill/>
+            <a:prstDash val="solid"/>
+          </a:ln>
+        </p:spPr>
+        <p:txBody>
+          <a:bodyPr xmlns:a="http://schemas.openxmlformats.org/drawingml/2006/main" lIns="0" tIns="0" rIns="0" bIns="0">
+            <a:noAutofit/>
+          </a:bodyPr>
+          <a:lstStyle xmlns:a="http://schemas.openxmlformats.org/drawingml/2006/main"/>
+          <a:p xmlns:a="http://schemas.openxmlformats.org/drawingml/2006/main">
+            <a:pPr>
+              <a:defRPr sz="1500" b="1">
+                <a:solidFill>
+                  <a:srgbClr val="102A34"/>
+                </a:solidFill>
+                <a:latin typeface="Helvetica Neue"/>
+                <a:ea typeface="Helvetica Neue"/>
+                <a:cs typeface="Helvetica Neue"/>
+              </a:defRPr>
+            </a:pPr>
+            <a:r>
+              <a:rPr sz="1500" b="1">
+                <a:solidFill>
+                  <a:srgbClr val="102A34"/>
+                </a:solidFill>
+                <a:latin typeface="Helvetica Neue"/>
+                <a:ea typeface="Helvetica Neue"/>
+                <a:cs typeface="Helvetica Neue"/>
+              </a:rPr>
+              <a:t>Ethical risk areas</a:t>
+            </a:r>
+          </a:p>
+        </p:txBody>
+      </p:sp>
+      <p:graphicFrame>
+        <p:nvGraphicFramePr>
+          <p:cNvPr id="28" name=""/>
+          <p:cNvGraphicFramePr/>
+          <p:nvPr/>
+        </p:nvGraphicFramePr>
+        <p:xfrm>
+          <a:off xmlns:a="http://schemas.openxmlformats.org/drawingml/2006/main" x="514350" y="3362325"/>
+          <a:ext xmlns:a="http://schemas.openxmlformats.org/drawingml/2006/main" cx="6343650" cy="2000250"/>
+        </p:xfrm>
+        <a:graphic xmlns:a="http://schemas.openxmlformats.org/drawingml/2006/main">
+          <a:graphicData uri="http://schemas.openxmlformats.org/drawingml/2006/table">
+            <a:tbl>
+              <a:tblPr/>
+              <a:tblGrid>
+                <a:gridCol w="1428750"/>
+                <a:gridCol w="2781300"/>
+                <a:gridCol w="2133600"/>
+              </a:tblGrid>
+              <a:tr h="285750">
+                <a:tc>
+                  <a:txBody>
+                    <a:bodyPr lIns="66675" tIns="28575" rIns="57150" bIns="28575">
+                      <a:noAutofit/>
+                    </a:bodyPr>
+                    <a:lstStyle/>
+                    <a:p>
+                      <a:pPr algn="l"/>
+                      <a:r>
+                        <a:rPr sz="630" b="1">
+                          <a:solidFill>
+                            <a:srgbClr val="FFFFFF"/>
+                          </a:solidFill>
+                          <a:latin typeface="Helvetica Neue"/>
+                          <a:ea typeface="Helvetica Neue"/>
+                          <a:cs typeface="Helvetica Neue"/>
+                        </a:rPr>
+                        <a:t>Issue</a:t>
+                      </a:r>
+                    </a:p>
+                  </a:txBody>
+                  <a:tcPr marL="91440" marR="91440" marT="45720" marB="45720" anchor="ctr">
+                    <a:solidFill>
+                      <a:srgbClr val="0F4C5C"/>
+                    </a:solidFill>
+                  </a:tcPr>
+                </a:tc>
+                <a:tc>
+                  <a:txBody>
+                    <a:bodyPr lIns="66675" tIns="28575" rIns="57150" bIns="28575">
+                      <a:noAutofit/>
+                    </a:bodyPr>
+                    <a:lstStyle/>
+                    <a:p>
+                      <a:pPr algn="l"/>
+                      <a:r>
+                        <a:rPr sz="630" b="1">
+                          <a:solidFill>
+                            <a:srgbClr val="FFFFFF"/>
+                          </a:solidFill>
+                          <a:latin typeface="Helvetica Neue"/>
+                          <a:ea typeface="Helvetica Neue"/>
+                          <a:cs typeface="Helvetica Neue"/>
+                        </a:rPr>
+                        <a:t>Concern for NHN</a:t>
+                      </a:r>
+                    </a:p>
+                  </a:txBody>
+                  <a:tcPr marL="91440" marR="91440" marT="45720" marB="45720" anchor="ctr">
+                    <a:solidFill>
+                      <a:srgbClr val="0F4C5C"/>
+                    </a:solidFill>
+                  </a:tcPr>
+                </a:tc>
+                <a:tc>
+                  <a:txBody>
+                    <a:bodyPr lIns="66675" tIns="28575" rIns="57150" bIns="28575">
+                      <a:noAutofit/>
+                    </a:bodyPr>
+                    <a:lstStyle/>
+                    <a:p>
+                      <a:pPr algn="l"/>
+                      <a:r>
+                        <a:rPr sz="630" b="1">
+                          <a:solidFill>
+                            <a:srgbClr val="FFFFFF"/>
+                          </a:solidFill>
+                          <a:latin typeface="Helvetica Neue"/>
+                          <a:ea typeface="Helvetica Neue"/>
+                          <a:cs typeface="Helvetica Neue"/>
+                        </a:rPr>
+                        <a:t>Required control</a:t>
+                      </a:r>
+                    </a:p>
+                  </a:txBody>
+                  <a:tcPr marL="91440" marR="91440" marT="45720" marB="45720" anchor="ctr">
+                    <a:solidFill>
+                      <a:srgbClr val="0F4C5C"/>
+                    </a:solidFill>
+                  </a:tcPr>
+                </a:tc>
+              </a:tr>
+              <a:tr h="285750">
+                <a:tc>
+                  <a:txBody>
+                    <a:bodyPr lIns="66675" tIns="28575" rIns="57150" bIns="28575">
+                      <a:noAutofit/>
+                    </a:bodyPr>
+                    <a:lstStyle/>
+                    <a:p>
+                      <a:pPr algn="l"/>
+                      <a:r>
+                        <a:rPr sz="540" b="1">
+                          <a:solidFill>
+                            <a:srgbClr val="253B44"/>
+                          </a:solidFill>
+                          <a:latin typeface="Helvetica Neue"/>
+                          <a:ea typeface="Helvetica Neue"/>
+                          <a:cs typeface="Helvetica Neue"/>
+                        </a:rPr>
+                        <a:t>Algorithmic bias</a:t>
+                      </a:r>
+                    </a:p>
+                  </a:txBody>
+                  <a:tcPr marL="91440" marR="91440" marT="45720" marB="45720" anchor="ctr">
+                    <a:solidFill>
+                      <a:srgbClr val="EEF6F7"/>
+                    </a:solidFill>
+                  </a:tcPr>
+                </a:tc>
+                <a:tc>
+                  <a:txBody>
+                    <a:bodyPr lIns="66675" tIns="28575" rIns="57150" bIns="28575">
+                      <a:noAutofit/>
+                    </a:bodyPr>
+                    <a:lstStyle/>
+                    <a:p>
+                      <a:pPr algn="l"/>
+                      <a:r>
+                        <a:rPr sz="540" b="0">
+                          <a:solidFill>
+                            <a:srgbClr val="253B44"/>
+                          </a:solidFill>
+                          <a:latin typeface="Helvetica Neue"/>
+                          <a:ea typeface="Helvetica Neue"/>
+                          <a:cs typeface="Helvetica Neue"/>
+                        </a:rPr>
+                        <a:t>Risk scores may under-serve groups if past care access was unequal</a:t>
+                      </a:r>
+                    </a:p>
+                  </a:txBody>
+                  <a:tcPr marL="91440" marR="91440" marT="45720" marB="45720" anchor="ctr">
+                    <a:solidFill>
+                      <a:srgbClr val="EEF6F7"/>
+                    </a:solidFill>
+                  </a:tcPr>
+                </a:tc>
+                <a:tc>
+                  <a:txBody>
+                    <a:bodyPr lIns="66675" tIns="28575" rIns="57150" bIns="28575">
+                      <a:noAutofit/>
+                    </a:bodyPr>
+                    <a:lstStyle/>
+                    <a:p>
+                      <a:pPr algn="l"/>
+                      <a:r>
+                        <a:rPr sz="540" b="0">
+                          <a:solidFill>
+                            <a:srgbClr val="253B44"/>
+                          </a:solidFill>
+                          <a:latin typeface="Helvetica Neue"/>
+                          <a:ea typeface="Helvetica Neue"/>
+                          <a:cs typeface="Helvetica Neue"/>
+                        </a:rPr>
+                        <a:t>Monitor performance by age, diagnosis, discharge type, and insurance where appropriate</a:t>
+                      </a:r>
+                    </a:p>
+                  </a:txBody>
+                  <a:tcPr marL="91440" marR="91440" marT="45720" marB="45720" anchor="ctr">
+                    <a:solidFill>
+                      <a:srgbClr val="EEF6F7"/>
+                    </a:solidFill>
+                  </a:tcPr>
+                </a:tc>
+              </a:tr>
+              <a:tr h="285750">
+                <a:tc>
+                  <a:txBody>
+                    <a:bodyPr lIns="66675" tIns="28575" rIns="57150" bIns="28575">
+                      <a:noAutofit/>
+                    </a:bodyPr>
+                    <a:lstStyle/>
+                    <a:p>
+                      <a:pPr algn="l"/>
+                      <a:r>
+                        <a:rPr sz="540" b="1">
+                          <a:solidFill>
+                            <a:srgbClr val="253B44"/>
+                          </a:solidFill>
+                          <a:latin typeface="Helvetica Neue"/>
+                          <a:ea typeface="Helvetica Neue"/>
+                          <a:cs typeface="Helvetica Neue"/>
+                        </a:rPr>
+                        <a:t>Customer privacy</a:t>
+                      </a:r>
+                    </a:p>
+                  </a:txBody>
+                  <a:tcPr marL="91440" marR="91440" marT="45720" marB="45720" anchor="ctr">
+                    <a:solidFill>
+                      <a:srgbClr val="F8FBFC"/>
+                    </a:solidFill>
+                  </a:tcPr>
+                </a:tc>
+                <a:tc>
+                  <a:txBody>
+                    <a:bodyPr lIns="66675" tIns="28575" rIns="57150" bIns="28575">
+                      <a:noAutofit/>
+                    </a:bodyPr>
+                    <a:lstStyle/>
+                    <a:p>
+                      <a:pPr algn="l"/>
+                      <a:r>
+                        <a:rPr sz="540" b="0">
+                          <a:solidFill>
+                            <a:srgbClr val="253B44"/>
+                          </a:solidFill>
+                          <a:latin typeface="Helvetica Neue"/>
+                          <a:ea typeface="Helvetica Neue"/>
+                          <a:cs typeface="Helvetica Neue"/>
+                        </a:rPr>
+                        <a:t>Patient-level health and financial fields are sensitive</a:t>
+                      </a:r>
+                    </a:p>
+                  </a:txBody>
+                  <a:tcPr marL="91440" marR="91440" marT="45720" marB="45720" anchor="ctr">
+                    <a:solidFill>
+                      <a:srgbClr val="F8FBFC"/>
+                    </a:solidFill>
+                  </a:tcPr>
+                </a:tc>
+                <a:tc>
+                  <a:txBody>
+                    <a:bodyPr lIns="66675" tIns="28575" rIns="57150" bIns="28575">
+                      <a:noAutofit/>
+                    </a:bodyPr>
+                    <a:lstStyle/>
+                    <a:p>
+                      <a:pPr algn="l"/>
+                      <a:r>
+                        <a:rPr sz="540" b="0">
+                          <a:solidFill>
+                            <a:srgbClr val="253B44"/>
+                          </a:solidFill>
+                          <a:latin typeface="Helvetica Neue"/>
+                          <a:ea typeface="Helvetica Neue"/>
+                          <a:cs typeface="Helvetica Neue"/>
+                        </a:rPr>
+                        <a:t>Use minimum necessary data and role-based access</a:t>
+                      </a:r>
+                    </a:p>
+                  </a:txBody>
+                  <a:tcPr marL="91440" marR="91440" marT="45720" marB="45720" anchor="ctr">
+                    <a:solidFill>
+                      <a:srgbClr val="F8FBFC"/>
+                    </a:solidFill>
+                  </a:tcPr>
+                </a:tc>
+              </a:tr>
+              <a:tr h="285750">
+                <a:tc>
+                  <a:txBody>
+                    <a:bodyPr lIns="66675" tIns="28575" rIns="57150" bIns="28575">
+                      <a:noAutofit/>
+                    </a:bodyPr>
+                    <a:lstStyle/>
+                    <a:p>
+                      <a:pPr algn="l"/>
+                      <a:r>
+                        <a:rPr sz="540" b="1">
+                          <a:solidFill>
+                            <a:srgbClr val="253B44"/>
+                          </a:solidFill>
+                          <a:latin typeface="Helvetica Neue"/>
+                          <a:ea typeface="Helvetica Neue"/>
+                          <a:cs typeface="Helvetica Neue"/>
+                        </a:rPr>
+                        <a:t>Data governance</a:t>
+                      </a:r>
+                    </a:p>
+                  </a:txBody>
+                  <a:tcPr marL="91440" marR="91440" marT="45720" marB="45720" anchor="ctr">
+                    <a:solidFill>
+                      <a:srgbClr val="EEF6F7"/>
+                    </a:solidFill>
+                  </a:tcPr>
+                </a:tc>
+                <a:tc>
+                  <a:txBody>
+                    <a:bodyPr lIns="66675" tIns="28575" rIns="57150" bIns="28575">
+                      <a:noAutofit/>
+                    </a:bodyPr>
+                    <a:lstStyle/>
+                    <a:p>
+                      <a:pPr algn="l"/>
+                      <a:r>
+                        <a:rPr sz="540" b="0">
+                          <a:solidFill>
+                            <a:srgbClr val="253B44"/>
+                          </a:solidFill>
+                          <a:latin typeface="Helvetica Neue"/>
+                          <a:ea typeface="Helvetica Neue"/>
+                          <a:cs typeface="Helvetica Neue"/>
+                        </a:rPr>
+                        <a:t>Missing follow-up and financial anomalies can distort decisions</a:t>
+                      </a:r>
+                    </a:p>
+                  </a:txBody>
+                  <a:tcPr marL="91440" marR="91440" marT="45720" marB="45720" anchor="ctr">
+                    <a:solidFill>
+                      <a:srgbClr val="EEF6F7"/>
+                    </a:solidFill>
+                  </a:tcPr>
+                </a:tc>
+                <a:tc>
+                  <a:txBody>
+                    <a:bodyPr lIns="66675" tIns="28575" rIns="57150" bIns="28575">
+                      <a:noAutofit/>
+                    </a:bodyPr>
+                    <a:lstStyle/>
+                    <a:p>
+                      <a:pPr algn="l"/>
+                      <a:r>
+                        <a:rPr sz="540" b="0">
+                          <a:solidFill>
+                            <a:srgbClr val="253B44"/>
+                          </a:solidFill>
+                          <a:latin typeface="Helvetica Neue"/>
+                          <a:ea typeface="Helvetica Neue"/>
+                          <a:cs typeface="Helvetica Neue"/>
+                        </a:rPr>
+                        <a:t>Define owners, validation rules, and change logs</a:t>
+                      </a:r>
+                    </a:p>
+                  </a:txBody>
+                  <a:tcPr marL="91440" marR="91440" marT="45720" marB="45720" anchor="ctr">
+                    <a:solidFill>
+                      <a:srgbClr val="EEF6F7"/>
+                    </a:solidFill>
+                  </a:tcPr>
+                </a:tc>
+              </a:tr>
+              <a:tr h="285750">
+                <a:tc>
+                  <a:txBody>
+                    <a:bodyPr lIns="66675" tIns="28575" rIns="57150" bIns="28575">
+                      <a:noAutofit/>
+                    </a:bodyPr>
+                    <a:lstStyle/>
+                    <a:p>
+                      <a:pPr algn="l"/>
+                      <a:r>
+                        <a:rPr sz="540" b="1">
+                          <a:solidFill>
+                            <a:srgbClr val="253B44"/>
+                          </a:solidFill>
+                          <a:latin typeface="Helvetica Neue"/>
+                          <a:ea typeface="Helvetica Neue"/>
+                          <a:cs typeface="Helvetica Neue"/>
+                        </a:rPr>
+                        <a:t>Transparency</a:t>
+                      </a:r>
+                    </a:p>
+                  </a:txBody>
+                  <a:tcPr marL="91440" marR="91440" marT="45720" marB="45720" anchor="ctr">
+                    <a:solidFill>
+                      <a:srgbClr val="F8FBFC"/>
+                    </a:solidFill>
+                  </a:tcPr>
+                </a:tc>
+                <a:tc>
+                  <a:txBody>
+                    <a:bodyPr lIns="66675" tIns="28575" rIns="57150" bIns="28575">
+                      <a:noAutofit/>
+                    </a:bodyPr>
+                    <a:lstStyle/>
+                    <a:p>
+                      <a:pPr algn="l"/>
+                      <a:r>
+                        <a:rPr sz="540" b="0">
+                          <a:solidFill>
+                            <a:srgbClr val="253B44"/>
+                          </a:solidFill>
+                          <a:latin typeface="Helvetica Neue"/>
+                          <a:ea typeface="Helvetica Neue"/>
+                          <a:cs typeface="Helvetica Neue"/>
+                        </a:rPr>
+                        <a:t>Clinicians need to understand why a patient is high risk</a:t>
+                      </a:r>
+                    </a:p>
+                  </a:txBody>
+                  <a:tcPr marL="91440" marR="91440" marT="45720" marB="45720" anchor="ctr">
+                    <a:solidFill>
+                      <a:srgbClr val="F8FBFC"/>
+                    </a:solidFill>
+                  </a:tcPr>
+                </a:tc>
+                <a:tc>
+                  <a:txBody>
+                    <a:bodyPr lIns="66675" tIns="28575" rIns="57150" bIns="28575">
+                      <a:noAutofit/>
+                    </a:bodyPr>
+                    <a:lstStyle/>
+                    <a:p>
+                      <a:pPr algn="l"/>
+                      <a:r>
+                        <a:rPr sz="540" b="0">
+                          <a:solidFill>
+                            <a:srgbClr val="253B44"/>
+                          </a:solidFill>
+                          <a:latin typeface="Helvetica Neue"/>
+                          <a:ea typeface="Helvetica Neue"/>
+                          <a:cs typeface="Helvetica Neue"/>
+                        </a:rPr>
+                        <a:t>Use explainable model outputs and plain-language score guidance</a:t>
+                      </a:r>
+                    </a:p>
+                  </a:txBody>
+                  <a:tcPr marL="91440" marR="91440" marT="45720" marB="45720" anchor="ctr">
+                    <a:solidFill>
+                      <a:srgbClr val="F8FBFC"/>
+                    </a:solidFill>
+                  </a:tcPr>
+                </a:tc>
+              </a:tr>
+              <a:tr h="285750">
+                <a:tc>
+                  <a:txBody>
+                    <a:bodyPr lIns="66675" tIns="28575" rIns="57150" bIns="28575">
+                      <a:noAutofit/>
+                    </a:bodyPr>
+                    <a:lstStyle/>
+                    <a:p>
+                      <a:pPr algn="l"/>
+                      <a:r>
+                        <a:rPr sz="540" b="1">
+                          <a:solidFill>
+                            <a:srgbClr val="253B44"/>
+                          </a:solidFill>
+                          <a:latin typeface="Helvetica Neue"/>
+                          <a:ea typeface="Helvetica Neue"/>
+                          <a:cs typeface="Helvetica Neue"/>
+                        </a:rPr>
+                        <a:t>Regulatory compliance</a:t>
+                      </a:r>
+                    </a:p>
+                  </a:txBody>
+                  <a:tcPr marL="91440" marR="91440" marT="45720" marB="45720" anchor="ctr">
+                    <a:solidFill>
+                      <a:srgbClr val="EEF6F7"/>
+                    </a:solidFill>
+                  </a:tcPr>
+                </a:tc>
+                <a:tc>
+                  <a:txBody>
+                    <a:bodyPr lIns="66675" tIns="28575" rIns="57150" bIns="28575">
+                      <a:noAutofit/>
+                    </a:bodyPr>
+                    <a:lstStyle/>
+                    <a:p>
+                      <a:pPr algn="l"/>
+                      <a:r>
+                        <a:rPr sz="540" b="0">
+                          <a:solidFill>
+                            <a:srgbClr val="253B44"/>
+                          </a:solidFill>
+                          <a:latin typeface="Helvetica Neue"/>
+                          <a:ea typeface="Helvetica Neue"/>
+                          <a:cs typeface="Helvetica Neue"/>
+                        </a:rPr>
+                        <a:t>Analytics must align with HIPAA and internal policy</a:t>
+                      </a:r>
+                    </a:p>
+                  </a:txBody>
+                  <a:tcPr marL="91440" marR="91440" marT="45720" marB="45720" anchor="ctr">
+                    <a:solidFill>
+                      <a:srgbClr val="EEF6F7"/>
+                    </a:solidFill>
+                  </a:tcPr>
+                </a:tc>
+                <a:tc>
+                  <a:txBody>
+                    <a:bodyPr lIns="66675" tIns="28575" rIns="57150" bIns="28575">
+                      <a:noAutofit/>
+                    </a:bodyPr>
+                    <a:lstStyle/>
+                    <a:p>
+                      <a:pPr algn="l"/>
+                      <a:r>
+                        <a:rPr sz="540" b="0">
+                          <a:solidFill>
+                            <a:srgbClr val="253B44"/>
+                          </a:solidFill>
+                          <a:latin typeface="Helvetica Neue"/>
+                          <a:ea typeface="Helvetica Neue"/>
+                          <a:cs typeface="Helvetica Neue"/>
+                        </a:rPr>
+                        <a:t>Review data use, access, retention, and reporting with compliance leaders</a:t>
+                      </a:r>
+                    </a:p>
+                  </a:txBody>
+                  <a:tcPr marL="91440" marR="91440" marT="45720" marB="45720" anchor="ctr">
+                    <a:solidFill>
+                      <a:srgbClr val="EEF6F7"/>
+                    </a:solidFill>
+                  </a:tcPr>
+                </a:tc>
+              </a:tr>
+              <a:tr h="285750">
+                <a:tc>
+                  <a:txBody>
+                    <a:bodyPr lIns="66675" tIns="28575" rIns="57150" bIns="28575">
+                      <a:noAutofit/>
+                    </a:bodyPr>
+                    <a:lstStyle/>
+                    <a:p>
+                      <a:pPr algn="l"/>
+                      <a:r>
+                        <a:rPr sz="540" b="1">
+                          <a:solidFill>
+                            <a:srgbClr val="253B44"/>
+                          </a:solidFill>
+                          <a:latin typeface="Helvetica Neue"/>
+                          <a:ea typeface="Helvetica Neue"/>
+                          <a:cs typeface="Helvetica Neue"/>
+                        </a:rPr>
+                        <a:t>Responsible AI</a:t>
+                      </a:r>
+                    </a:p>
+                  </a:txBody>
+                  <a:tcPr marL="91440" marR="91440" marT="45720" marB="45720" anchor="ctr">
+                    <a:solidFill>
+                      <a:srgbClr val="F8FBFC"/>
+                    </a:solidFill>
+                  </a:tcPr>
+                </a:tc>
+                <a:tc>
+                  <a:txBody>
+                    <a:bodyPr lIns="66675" tIns="28575" rIns="57150" bIns="28575">
+                      <a:noAutofit/>
+                    </a:bodyPr>
+                    <a:lstStyle/>
+                    <a:p>
+                      <a:pPr algn="l"/>
+                      <a:r>
+                        <a:rPr sz="540" b="0">
+                          <a:solidFill>
+                            <a:srgbClr val="253B44"/>
+                          </a:solidFill>
+                          <a:latin typeface="Helvetica Neue"/>
+                          <a:ea typeface="Helvetica Neue"/>
+                          <a:cs typeface="Helvetica Neue"/>
+                        </a:rPr>
+                        <a:t>Predictions should support judgment, not replace it</a:t>
+                      </a:r>
+                    </a:p>
+                  </a:txBody>
+                  <a:tcPr marL="91440" marR="91440" marT="45720" marB="45720" anchor="ctr">
+                    <a:solidFill>
+                      <a:srgbClr val="F8FBFC"/>
+                    </a:solidFill>
+                  </a:tcPr>
+                </a:tc>
+                <a:tc>
+                  <a:txBody>
+                    <a:bodyPr lIns="66675" tIns="28575" rIns="57150" bIns="28575">
+                      <a:noAutofit/>
+                    </a:bodyPr>
+                    <a:lstStyle/>
+                    <a:p>
+                      <a:pPr algn="l"/>
+                      <a:r>
+                        <a:rPr sz="540" b="0">
+                          <a:solidFill>
+                            <a:srgbClr val="253B44"/>
+                          </a:solidFill>
+                          <a:latin typeface="Helvetica Neue"/>
+                          <a:ea typeface="Helvetica Neue"/>
+                          <a:cs typeface="Helvetica Neue"/>
+                        </a:rPr>
+                        <a:t>Keep human review before care decisions and budget commitments</a:t>
+                      </a:r>
+                    </a:p>
+                  </a:txBody>
+                  <a:tcPr marL="91440" marR="91440" marT="45720" marB="45720" anchor="ctr">
+                    <a:solidFill>
+                      <a:srgbClr val="F8FBFC"/>
+                    </a:solidFill>
+                  </a:tcPr>
+                </a:tc>
+              </a:tr>
+            </a:tbl>
+          </a:graphicData>
+        </a:graphic>
+      </p:graphicFrame>
+      <p:sp>
+        <p:nvSpPr>
+          <p:cNvPr id="10" name="">
+            <a:extLst xmlns:a="http://schemas.openxmlformats.org/drawingml/2006/main">
+              <a:ext uri="{FF2B5EF4-FFF2-40B4-BE49-F238E27FC236}">
+                <a16:creationId xmlns:a16="http://schemas.microsoft.com/office/drawing/2014/main" id="{C11A673D-D365-42BD-B8D8-5190700DC70F}"/>
+              </a:ext>
+            </a:extLst>
+          </p:cNvPr>
+          <p:cNvSpPr>
+            <a:spLocks xmlns:a="http://schemas.openxmlformats.org/drawingml/2006/main" noGrp="1"/>
+          </p:cNvSpPr>
+          <p:nvPr/>
+        </p:nvSpPr>
+        <p:spPr>
+          <a:xfrm xmlns:a="http://schemas.openxmlformats.org/drawingml/2006/main">
+            <a:off x="7277100" y="3009900"/>
+            <a:ext cx="2857500" cy="228600"/>
+          </a:xfrm>
+          <a:prstGeom xmlns:a="http://schemas.openxmlformats.org/drawingml/2006/main" prst="rect">
+            <a:avLst/>
+          </a:prstGeom>
+          <a:noFill xmlns:a="http://schemas.openxmlformats.org/drawingml/2006/main"/>
+          <a:ln xmlns:a="http://schemas.openxmlformats.org/drawingml/2006/main" w="0">
+            <a:noFill/>
+            <a:prstDash val="solid"/>
+          </a:ln>
+        </p:spPr>
+        <p:txBody>
+          <a:bodyPr xmlns:a="http://schemas.openxmlformats.org/drawingml/2006/main" lIns="0" tIns="0" rIns="0" bIns="0">
+            <a:noAutofit/>
+          </a:bodyPr>
+          <a:lstStyle xmlns:a="http://schemas.openxmlformats.org/drawingml/2006/main"/>
+          <a:p xmlns:a="http://schemas.openxmlformats.org/drawingml/2006/main">
+            <a:pPr>
+              <a:defRPr sz="1500" b="1">
+                <a:solidFill>
+                  <a:srgbClr val="102A34"/>
+                </a:solidFill>
+                <a:latin typeface="Helvetica Neue"/>
+                <a:ea typeface="Helvetica Neue"/>
+                <a:cs typeface="Helvetica Neue"/>
+              </a:defRPr>
+            </a:pPr>
+            <a:r>
+              <a:rPr sz="1500" b="1">
+                <a:solidFill>
+                  <a:srgbClr val="102A34"/>
+                </a:solidFill>
+                <a:latin typeface="Helvetica Neue"/>
+                <a:ea typeface="Helvetica Neue"/>
+                <a:cs typeface="Helvetica Neue"/>
+              </a:rPr>
+              <a:t>Operating principles</a:t>
+            </a:r>
+          </a:p>
+        </p:txBody>
+      </p:sp>
+      <p:graphicFrame>
+        <p:nvGraphicFramePr>
+          <p:cNvPr id="30" name=""/>
+          <p:cNvGraphicFramePr/>
+          <p:nvPr/>
+        </p:nvGraphicFramePr>
+        <p:xfrm>
+          <a:off xmlns:a="http://schemas.openxmlformats.org/drawingml/2006/main" x="7277100" y="3362325"/>
+          <a:ext xmlns:a="http://schemas.openxmlformats.org/drawingml/2006/main" cx="3524250" cy="1381125"/>
+        </p:xfrm>
+        <a:graphic xmlns:a="http://schemas.openxmlformats.org/drawingml/2006/main">
+          <a:graphicData uri="http://schemas.openxmlformats.org/drawingml/2006/table">
+            <a:tbl>
+              <a:tblPr/>
+              <a:tblGrid>
+                <a:gridCol w="1219200"/>
+                <a:gridCol w="2305050"/>
+              </a:tblGrid>
+              <a:tr h="276225">
+                <a:tc>
+                  <a:txBody>
+                    <a:bodyPr lIns="66675" tIns="28575" rIns="57150" bIns="28575">
+                      <a:noAutofit/>
+                    </a:bodyPr>
+                    <a:lstStyle/>
+                    <a:p>
+                      <a:pPr algn="l"/>
+                      <a:r>
+                        <a:rPr sz="660" b="1">
+                          <a:solidFill>
+                            <a:srgbClr val="FFFFFF"/>
+                          </a:solidFill>
+                          <a:latin typeface="Helvetica Neue"/>
+                          <a:ea typeface="Helvetica Neue"/>
+                          <a:cs typeface="Helvetica Neue"/>
+                        </a:rPr>
+                        <a:t>Principle</a:t>
+                      </a:r>
+                    </a:p>
+                  </a:txBody>
+                  <a:tcPr marL="91440" marR="91440" marT="45720" marB="45720" anchor="ctr">
+                    <a:solidFill>
+                      <a:srgbClr val="0F4C5C"/>
+                    </a:solidFill>
+                  </a:tcPr>
+                </a:tc>
+                <a:tc>
+                  <a:txBody>
+                    <a:bodyPr lIns="66675" tIns="28575" rIns="57150" bIns="28575">
+                      <a:noAutofit/>
+                    </a:bodyPr>
+                    <a:lstStyle/>
+                    <a:p>
+                      <a:pPr algn="l"/>
+                      <a:r>
+                        <a:rPr sz="660" b="1">
+                          <a:solidFill>
+                            <a:srgbClr val="FFFFFF"/>
+                          </a:solidFill>
+                          <a:latin typeface="Helvetica Neue"/>
+                          <a:ea typeface="Helvetica Neue"/>
+                          <a:cs typeface="Helvetica Neue"/>
+                        </a:rPr>
+                        <a:t>How to apply it</a:t>
+                      </a:r>
+                    </a:p>
+                  </a:txBody>
+                  <a:tcPr marL="91440" marR="91440" marT="45720" marB="45720" anchor="ctr">
+                    <a:solidFill>
+                      <a:srgbClr val="0F4C5C"/>
+                    </a:solidFill>
+                  </a:tcPr>
+                </a:tc>
+              </a:tr>
+              <a:tr h="276225">
+                <a:tc>
+                  <a:txBody>
+                    <a:bodyPr lIns="66675" tIns="28575" rIns="57150" bIns="28575">
+                      <a:noAutofit/>
+                    </a:bodyPr>
+                    <a:lstStyle/>
+                    <a:p>
+                      <a:pPr algn="l"/>
+                      <a:r>
+                        <a:rPr sz="615" b="1">
+                          <a:solidFill>
+                            <a:srgbClr val="253B44"/>
+                          </a:solidFill>
+                          <a:latin typeface="Helvetica Neue"/>
+                          <a:ea typeface="Helvetica Neue"/>
+                          <a:cs typeface="Helvetica Neue"/>
+                        </a:rPr>
+                        <a:t>Fair</a:t>
+                      </a:r>
+                    </a:p>
+                  </a:txBody>
+                  <a:tcPr marL="91440" marR="91440" marT="45720" marB="45720" anchor="ctr">
+                    <a:solidFill>
+                      <a:srgbClr val="EEF6F7"/>
+                    </a:solidFill>
+                  </a:tcPr>
+                </a:tc>
+                <a:tc>
+                  <a:txBody>
+                    <a:bodyPr lIns="66675" tIns="28575" rIns="57150" bIns="28575">
+                      <a:noAutofit/>
+                    </a:bodyPr>
+                    <a:lstStyle/>
+                    <a:p>
+                      <a:pPr algn="l"/>
+                      <a:r>
+                        <a:rPr sz="615" b="0">
+                          <a:solidFill>
+                            <a:srgbClr val="253B44"/>
+                          </a:solidFill>
+                          <a:latin typeface="Helvetica Neue"/>
+                          <a:ea typeface="Helvetica Neue"/>
+                          <a:cs typeface="Helvetica Neue"/>
+                        </a:rPr>
+                        <a:t>Test whether model errors differ across patient groups</a:t>
+                      </a:r>
+                    </a:p>
+                  </a:txBody>
+                  <a:tcPr marL="91440" marR="91440" marT="45720" marB="45720" anchor="ctr">
+                    <a:solidFill>
+                      <a:srgbClr val="EEF6F7"/>
+                    </a:solidFill>
+                  </a:tcPr>
+                </a:tc>
+              </a:tr>
+              <a:tr h="276225">
+                <a:tc>
+                  <a:txBody>
+                    <a:bodyPr lIns="66675" tIns="28575" rIns="57150" bIns="28575">
+                      <a:noAutofit/>
+                    </a:bodyPr>
+                    <a:lstStyle/>
+                    <a:p>
+                      <a:pPr algn="l"/>
+                      <a:r>
+                        <a:rPr sz="615" b="1">
+                          <a:solidFill>
+                            <a:srgbClr val="253B44"/>
+                          </a:solidFill>
+                          <a:latin typeface="Helvetica Neue"/>
+                          <a:ea typeface="Helvetica Neue"/>
+                          <a:cs typeface="Helvetica Neue"/>
+                        </a:rPr>
+                        <a:t>Private</a:t>
+                      </a:r>
+                    </a:p>
+                  </a:txBody>
+                  <a:tcPr marL="91440" marR="91440" marT="45720" marB="45720" anchor="ctr">
+                    <a:solidFill>
+                      <a:srgbClr val="F8FBFC"/>
+                    </a:solidFill>
+                  </a:tcPr>
+                </a:tc>
+                <a:tc>
+                  <a:txBody>
+                    <a:bodyPr lIns="66675" tIns="28575" rIns="57150" bIns="28575">
+                      <a:noAutofit/>
+                    </a:bodyPr>
+                    <a:lstStyle/>
+                    <a:p>
+                      <a:pPr algn="l"/>
+                      <a:r>
+                        <a:rPr sz="615" b="0">
+                          <a:solidFill>
+                            <a:srgbClr val="253B44"/>
+                          </a:solidFill>
+                          <a:latin typeface="Helvetica Neue"/>
+                          <a:ea typeface="Helvetica Neue"/>
+                          <a:cs typeface="Helvetica Neue"/>
+                        </a:rPr>
+                        <a:t>Limit data access to teams with a clear care or reporting need</a:t>
+                      </a:r>
+                    </a:p>
+                  </a:txBody>
+                  <a:tcPr marL="91440" marR="91440" marT="45720" marB="45720" anchor="ctr">
+                    <a:solidFill>
+                      <a:srgbClr val="F8FBFC"/>
+                    </a:solidFill>
+                  </a:tcPr>
+                </a:tc>
+              </a:tr>
+              <a:tr h="276225">
+                <a:tc>
+                  <a:txBody>
+                    <a:bodyPr lIns="66675" tIns="28575" rIns="57150" bIns="28575">
+                      <a:noAutofit/>
+                    </a:bodyPr>
+                    <a:lstStyle/>
+                    <a:p>
+                      <a:pPr algn="l"/>
+                      <a:r>
+                        <a:rPr sz="615" b="1">
+                          <a:solidFill>
+                            <a:srgbClr val="253B44"/>
+                          </a:solidFill>
+                          <a:latin typeface="Helvetica Neue"/>
+                          <a:ea typeface="Helvetica Neue"/>
+                          <a:cs typeface="Helvetica Neue"/>
+                        </a:rPr>
+                        <a:t>Explainable</a:t>
+                      </a:r>
+                    </a:p>
+                  </a:txBody>
+                  <a:tcPr marL="91440" marR="91440" marT="45720" marB="45720" anchor="ctr">
+                    <a:solidFill>
+                      <a:srgbClr val="EEF6F7"/>
+                    </a:solidFill>
+                  </a:tcPr>
+                </a:tc>
+                <a:tc>
+                  <a:txBody>
+                    <a:bodyPr lIns="66675" tIns="28575" rIns="57150" bIns="28575">
+                      <a:noAutofit/>
+                    </a:bodyPr>
+                    <a:lstStyle/>
+                    <a:p>
+                      <a:pPr algn="l"/>
+                      <a:r>
+                        <a:rPr sz="615" b="0">
+                          <a:solidFill>
+                            <a:srgbClr val="253B44"/>
+                          </a:solidFill>
+                          <a:latin typeface="Helvetica Neue"/>
+                          <a:ea typeface="Helvetica Neue"/>
+                          <a:cs typeface="Helvetica Neue"/>
+                        </a:rPr>
+                        <a:t>Show the key factors behind each high-risk flag</a:t>
+                      </a:r>
+                    </a:p>
+                  </a:txBody>
+                  <a:tcPr marL="91440" marR="91440" marT="45720" marB="45720" anchor="ctr">
+                    <a:solidFill>
+                      <a:srgbClr val="EEF6F7"/>
+                    </a:solidFill>
+                  </a:tcPr>
+                </a:tc>
+              </a:tr>
+              <a:tr h="276225">
+                <a:tc>
+                  <a:txBody>
+                    <a:bodyPr lIns="66675" tIns="28575" rIns="57150" bIns="28575">
+                      <a:noAutofit/>
+                    </a:bodyPr>
+                    <a:lstStyle/>
+                    <a:p>
+                      <a:pPr algn="l"/>
+                      <a:r>
+                        <a:rPr sz="615" b="1">
+                          <a:solidFill>
+                            <a:srgbClr val="253B44"/>
+                          </a:solidFill>
+                          <a:latin typeface="Helvetica Neue"/>
+                          <a:ea typeface="Helvetica Neue"/>
+                          <a:cs typeface="Helvetica Neue"/>
+                        </a:rPr>
+                        <a:t>Accountable</a:t>
+                      </a:r>
+                    </a:p>
+                  </a:txBody>
+                  <a:tcPr marL="91440" marR="91440" marT="45720" marB="45720" anchor="ctr">
+                    <a:solidFill>
+                      <a:srgbClr val="F8FBFC"/>
+                    </a:solidFill>
+                  </a:tcPr>
+                </a:tc>
+                <a:tc>
+                  <a:txBody>
+                    <a:bodyPr lIns="66675" tIns="28575" rIns="57150" bIns="28575">
+                      <a:noAutofit/>
+                    </a:bodyPr>
+                    <a:lstStyle/>
+                    <a:p>
+                      <a:pPr algn="l"/>
+                      <a:r>
+                        <a:rPr sz="615" b="0">
+                          <a:solidFill>
+                            <a:srgbClr val="253B44"/>
+                          </a:solidFill>
+                          <a:latin typeface="Helvetica Neue"/>
+                          <a:ea typeface="Helvetica Neue"/>
+                          <a:cs typeface="Helvetica Neue"/>
+                        </a:rPr>
+                        <a:t>Assign owners for model refresh, dashboard definitions, and issue escalation</a:t>
+                      </a:r>
+                    </a:p>
+                  </a:txBody>
+                  <a:tcPr marL="91440" marR="91440" marT="45720" marB="45720" anchor="ctr">
+                    <a:solidFill>
+                      <a:srgbClr val="F8FBFC"/>
+                    </a:solidFill>
+                  </a:tcPr>
+                </a:tc>
+              </a:tr>
+            </a:tbl>
+          </a:graphicData>
+        </a:graphic>
+      </p:graphicFrame>
+      <p:sp>
+        <p:nvSpPr>
+          <p:cNvPr id="12" name="">
+            <a:extLst xmlns:a="http://schemas.openxmlformats.org/drawingml/2006/main">
+              <a:ext uri="{FF2B5EF4-FFF2-40B4-BE49-F238E27FC236}">
+                <a16:creationId xmlns:a16="http://schemas.microsoft.com/office/drawing/2014/main" id="{A84A2948-1019-4550-A7EE-76BC385DC662}"/>
+              </a:ext>
+            </a:extLst>
+          </p:cNvPr>
+          <p:cNvSpPr>
+            <a:spLocks xmlns:a="http://schemas.openxmlformats.org/drawingml/2006/main" noGrp="1"/>
+          </p:cNvSpPr>
+          <p:nvPr/>
+        </p:nvSpPr>
+        <p:spPr>
+          <a:xfrm xmlns:a="http://schemas.openxmlformats.org/drawingml/2006/main">
+            <a:off x="7277100" y="4991100"/>
+            <a:ext cx="2476500" cy="228600"/>
+          </a:xfrm>
+          <a:prstGeom xmlns:a="http://schemas.openxmlformats.org/drawingml/2006/main" prst="rect">
+            <a:avLst/>
+          </a:prstGeom>
+          <a:noFill xmlns:a="http://schemas.openxmlformats.org/drawingml/2006/main"/>
+          <a:ln xmlns:a="http://schemas.openxmlformats.org/drawingml/2006/main" w="0">
+            <a:noFill/>
+            <a:prstDash val="solid"/>
+          </a:ln>
+        </p:spPr>
+        <p:txBody>
+          <a:bodyPr xmlns:a="http://schemas.openxmlformats.org/drawingml/2006/main" lIns="0" tIns="0" rIns="0" bIns="0">
+            <a:noAutofit/>
+          </a:bodyPr>
+          <a:lstStyle xmlns:a="http://schemas.openxmlformats.org/drawingml/2006/main"/>
+          <a:p xmlns:a="http://schemas.openxmlformats.org/drawingml/2006/main">
+            <a:pPr>
+              <a:defRPr sz="1500" b="1">
+                <a:solidFill>
+                  <a:srgbClr val="102A34"/>
+                </a:solidFill>
+                <a:latin typeface="Helvetica Neue"/>
+                <a:ea typeface="Helvetica Neue"/>
+                <a:cs typeface="Helvetica Neue"/>
+              </a:defRPr>
+            </a:pPr>
+            <a:r>
+              <a:rPr sz="1500" b="1">
+                <a:solidFill>
+                  <a:srgbClr val="102A34"/>
+                </a:solidFill>
+                <a:latin typeface="Helvetica Neue"/>
+                <a:ea typeface="Helvetica Neue"/>
+                <a:cs typeface="Helvetica Neue"/>
+              </a:rPr>
+              <a:t>Governance workflow</a:t>
+            </a:r>
+          </a:p>
+        </p:txBody>
+      </p:sp>
+      <p:sp>
+        <p:nvSpPr>
+          <p:cNvPr id="13" name="">
+            <a:extLst xmlns:a="http://schemas.openxmlformats.org/drawingml/2006/main">
+              <a:ext uri="{FF2B5EF4-FFF2-40B4-BE49-F238E27FC236}">
+                <a16:creationId xmlns:a16="http://schemas.microsoft.com/office/drawing/2014/main" id="{5CE00989-C321-4F5E-BDEF-4EDE6CB88D7E}"/>
+              </a:ext>
+            </a:extLst>
+          </p:cNvPr>
+          <p:cNvSpPr>
+            <a:spLocks xmlns:a="http://schemas.openxmlformats.org/drawingml/2006/main" noGrp="1"/>
+          </p:cNvSpPr>
+          <p:nvPr/>
+        </p:nvSpPr>
+        <p:spPr>
+          <a:xfrm xmlns:a="http://schemas.openxmlformats.org/drawingml/2006/main">
+            <a:off x="7353300" y="5314950"/>
+            <a:ext cx="3333750" cy="819150"/>
+          </a:xfrm>
+          <a:prstGeom xmlns:a="http://schemas.openxmlformats.org/drawingml/2006/main" prst="rect">
+            <a:avLst/>
+          </a:prstGeom>
+          <a:noFill xmlns:a="http://schemas.openxmlformats.org/drawingml/2006/main"/>
+          <a:ln xmlns:a="http://schemas.openxmlformats.org/drawingml/2006/main" w="0">
+            <a:noFill/>
+            <a:prstDash val="solid"/>
+          </a:ln>
+        </p:spPr>
+        <p:txBody>
+          <a:bodyPr xmlns:a="http://schemas.openxmlformats.org/drawingml/2006/main" lIns="0" tIns="0" rIns="0" bIns="0">
+            <a:noAutofit/>
+          </a:bodyPr>
+          <a:lstStyle xmlns:a="http://schemas.openxmlformats.org/drawingml/2006/main"/>
+          <a:p xmlns:a="http://schemas.openxmlformats.org/drawingml/2006/main">
+            <a:pPr marL="139700" indent="-63500">
+              <a:lnSpc>
+                <a:spcPct val="103000"/>
+              </a:lnSpc>
+              <a:spcAft>
+                <a:spcPts val="300"/>
+              </a:spcAft>
+              <a:buNone/>
+              <a:defRPr sz="765">
+                <a:solidFill>
+                  <a:srgbClr val="253B44"/>
+                </a:solidFill>
+                <a:latin typeface="Helvetica Neue"/>
+                <a:ea typeface="Helvetica Neue"/>
+                <a:cs typeface="Helvetica Neue"/>
+              </a:defRPr>
+            </a:pPr>
+            <a:r>
+              <a:rPr sz="765">
+                <a:solidFill>
+                  <a:srgbClr val="253B44"/>
+                </a:solidFill>
+                <a:latin typeface="Helvetica Neue"/>
+                <a:ea typeface="Helvetica Neue"/>
+                <a:cs typeface="Helvetica Neue"/>
+              </a:rPr>
+              <a:t>Validate data quality before model refresh or ROI reporting</a:t>
+            </a:r>
+          </a:p>
+          <a:p xmlns:a="http://schemas.openxmlformats.org/drawingml/2006/main">
+            <a:pPr marL="139700" indent="-63500">
+              <a:lnSpc>
+                <a:spcPct val="103000"/>
+              </a:lnSpc>
+              <a:spcAft>
+                <a:spcPts val="300"/>
+              </a:spcAft>
+              <a:buNone/>
+              <a:defRPr sz="765">
+                <a:solidFill>
+                  <a:srgbClr val="253B44"/>
+                </a:solidFill>
+                <a:latin typeface="Helvetica Neue"/>
+                <a:ea typeface="Helvetica Neue"/>
+                <a:cs typeface="Helvetica Neue"/>
+              </a:defRPr>
+            </a:pPr>
+            <a:r>
+              <a:rPr sz="765">
+                <a:solidFill>
+                  <a:srgbClr val="253B44"/>
+                </a:solidFill>
+                <a:latin typeface="Helvetica Neue"/>
+                <a:ea typeface="Helvetica Neue"/>
+                <a:cs typeface="Helvetica Neue"/>
+              </a:rPr>
+              <a:t>Document model purpose, limitations, and approved user groups</a:t>
+            </a:r>
+          </a:p>
+          <a:p xmlns:a="http://schemas.openxmlformats.org/drawingml/2006/main">
+            <a:pPr marL="139700" indent="-63500">
+              <a:lnSpc>
+                <a:spcPct val="103000"/>
+              </a:lnSpc>
+              <a:spcAft>
+                <a:spcPts val="300"/>
+              </a:spcAft>
+              <a:buNone/>
+              <a:defRPr sz="765">
+                <a:solidFill>
+                  <a:srgbClr val="253B44"/>
+                </a:solidFill>
+                <a:latin typeface="Helvetica Neue"/>
+                <a:ea typeface="Helvetica Neue"/>
+                <a:cs typeface="Helvetica Neue"/>
+              </a:defRPr>
+            </a:pPr>
+            <a:r>
+              <a:rPr sz="765">
+                <a:solidFill>
+                  <a:srgbClr val="253B44"/>
+                </a:solidFill>
+                <a:latin typeface="Helvetica Neue"/>
+                <a:ea typeface="Helvetica Neue"/>
+                <a:cs typeface="Helvetica Neue"/>
+              </a:rPr>
+              <a:t>Escalate fairness, privacy, or compliance concerns before scaling</a:t>
+            </a:r>
+          </a:p>
+        </p:txBody>
+      </p:sp>
+      <p:sp>
+        <p:nvSpPr>
+          <p:cNvPr id="14" name="">
+            <a:extLst xmlns:a="http://schemas.openxmlformats.org/drawingml/2006/main">
+              <a:ext uri="{FF2B5EF4-FFF2-40B4-BE49-F238E27FC236}">
+                <a16:creationId xmlns:a16="http://schemas.microsoft.com/office/drawing/2014/main" id="{E091F774-3BA4-4FFD-A0CC-D2EAB5C15BAB}"/>
+              </a:ext>
+            </a:extLst>
+          </p:cNvPr>
+          <p:cNvSpPr>
+            <a:spLocks xmlns:a="http://schemas.openxmlformats.org/drawingml/2006/main" noGrp="1"/>
+          </p:cNvSpPr>
+          <p:nvPr/>
+        </p:nvSpPr>
+        <p:spPr>
+          <a:xfrm xmlns:a="http://schemas.openxmlformats.org/drawingml/2006/main">
+            <a:off x="514350" y="5591175"/>
+            <a:ext cx="6343650" cy="14288"/>
+          </a:xfrm>
+          <a:prstGeom xmlns:a="http://schemas.openxmlformats.org/drawingml/2006/main" prst="rect">
+            <a:avLst/>
+          </a:prstGeom>
+          <a:solidFill xmlns:a="http://schemas.openxmlformats.org/drawingml/2006/main">
+            <a:srgbClr val="D1E1E5"/>
+          </a:solidFill>
+          <a:ln xmlns:a="http://schemas.openxmlformats.org/drawingml/2006/main" w="0">
+            <a:noFill/>
+            <a:prstDash val="solid"/>
+          </a:ln>
+        </p:spPr>
+      </p:sp>
+      <p:sp>
+        <p:nvSpPr>
+          <p:cNvPr id="15" name="">
+            <a:extLst xmlns:a="http://schemas.openxmlformats.org/drawingml/2006/main">
+              <a:ext uri="{FF2B5EF4-FFF2-40B4-BE49-F238E27FC236}">
+                <a16:creationId xmlns:a16="http://schemas.microsoft.com/office/drawing/2014/main" id="{92CC6F0F-7E8B-439E-8A1D-AE3C8718A054}"/>
+              </a:ext>
+            </a:extLst>
+          </p:cNvPr>
+          <p:cNvSpPr>
+            <a:spLocks xmlns:a="http://schemas.openxmlformats.org/drawingml/2006/main" noGrp="1"/>
+          </p:cNvSpPr>
+          <p:nvPr/>
+        </p:nvSpPr>
+        <p:spPr>
+          <a:xfrm xmlns:a="http://schemas.openxmlformats.org/drawingml/2006/main">
+            <a:off x="514350" y="5810250"/>
+            <a:ext cx="1714500" cy="209550"/>
+          </a:xfrm>
+          <a:prstGeom xmlns:a="http://schemas.openxmlformats.org/drawingml/2006/main" prst="rect">
+            <a:avLst/>
+          </a:prstGeom>
+          <a:noFill xmlns:a="http://schemas.openxmlformats.org/drawingml/2006/main"/>
+          <a:ln xmlns:a="http://schemas.openxmlformats.org/drawingml/2006/main" w="0">
+            <a:noFill/>
+            <a:prstDash val="solid"/>
+          </a:ln>
+        </p:spPr>
+        <p:txBody>
+          <a:bodyPr xmlns:a="http://schemas.openxmlformats.org/drawingml/2006/main" lIns="0" tIns="0" rIns="0" bIns="0">
+            <a:noAutofit/>
+          </a:bodyPr>
+          <a:lstStyle xmlns:a="http://schemas.openxmlformats.org/drawingml/2006/main"/>
+          <a:p xmlns:a="http://schemas.openxmlformats.org/drawingml/2006/main">
+            <a:pPr>
+              <a:defRPr sz="1200" b="1">
+                <a:solidFill>
+                  <a:srgbClr val="102A34"/>
+                </a:solidFill>
+                <a:latin typeface="Helvetica Neue"/>
+                <a:ea typeface="Helvetica Neue"/>
+                <a:cs typeface="Helvetica Neue"/>
+              </a:defRPr>
+            </a:pPr>
+            <a:r>
+              <a:rPr sz="1200" b="1">
+                <a:solidFill>
+                  <a:srgbClr val="102A34"/>
+                </a:solidFill>
+                <a:latin typeface="Helvetica Neue"/>
+                <a:ea typeface="Helvetica Neue"/>
+                <a:cs typeface="Helvetica Neue"/>
+              </a:rPr>
+              <a:t>Decision standard</a:t>
+            </a:r>
+          </a:p>
+        </p:txBody>
+      </p:sp>
+      <p:sp>
+        <p:nvSpPr>
+          <p:cNvPr id="16" name="">
+            <a:extLst xmlns:a="http://schemas.openxmlformats.org/drawingml/2006/main">
+              <a:ext uri="{FF2B5EF4-FFF2-40B4-BE49-F238E27FC236}">
+                <a16:creationId xmlns:a16="http://schemas.microsoft.com/office/drawing/2014/main" id="{E29797B1-1C64-408E-9B9F-31A039EC0A79}"/>
+              </a:ext>
+            </a:extLst>
+          </p:cNvPr>
+          <p:cNvSpPr>
+            <a:spLocks xmlns:a="http://schemas.openxmlformats.org/drawingml/2006/main" noGrp="1"/>
+          </p:cNvSpPr>
+          <p:nvPr/>
+        </p:nvSpPr>
+        <p:spPr>
+          <a:xfrm xmlns:a="http://schemas.openxmlformats.org/drawingml/2006/main">
+            <a:off x="2228850" y="5829300"/>
+            <a:ext cx="4629150" cy="419100"/>
+          </a:xfrm>
+          <a:prstGeom xmlns:a="http://schemas.openxmlformats.org/drawingml/2006/main" prst="rect">
+            <a:avLst/>
+          </a:prstGeom>
+          <a:noFill xmlns:a="http://schemas.openxmlformats.org/drawingml/2006/main"/>
+          <a:ln xmlns:a="http://schemas.openxmlformats.org/drawingml/2006/main" w="0">
+            <a:noFill/>
+            <a:prstDash val="solid"/>
+          </a:ln>
+        </p:spPr>
+        <p:txBody>
+          <a:bodyPr xmlns:a="http://schemas.openxmlformats.org/drawingml/2006/main" lIns="0" tIns="0" rIns="0" bIns="0">
+            <a:noAutofit/>
+          </a:bodyPr>
+          <a:lstStyle xmlns:a="http://schemas.openxmlformats.org/drawingml/2006/main"/>
+          <a:p xmlns:a="http://schemas.openxmlformats.org/drawingml/2006/main">
+            <a:pPr>
+              <a:lnSpc>
+                <a:spcPct val="105000"/>
+              </a:lnSpc>
+              <a:buNone/>
+              <a:defRPr sz="810">
+                <a:solidFill>
+                  <a:srgbClr val="253B44"/>
+                </a:solidFill>
+                <a:latin typeface="Helvetica Neue"/>
+                <a:ea typeface="Helvetica Neue"/>
+                <a:cs typeface="Helvetica Neue"/>
+              </a:defRPr>
+            </a:pPr>
+            <a:r>
+              <a:rPr sz="810">
+                <a:solidFill>
+                  <a:srgbClr val="253B44"/>
+                </a:solidFill>
+                <a:latin typeface="Helvetica Neue"/>
+                <a:ea typeface="Helvetica Neue"/>
+                <a:cs typeface="Helvetica Neue"/>
+              </a:rPr>
+              <a:t>Use the model as a decision-support tool only when fairness checks, privacy controls, data governance, transparency, and compliance review are in place.</a:t>
+            </a:r>
+          </a:p>
+        </p:txBody>
+      </p:sp>
+      <p:sp>
+        <p:nvSpPr>
+          <p:cNvPr id="17" name="">
+            <a:extLst xmlns:a="http://schemas.openxmlformats.org/drawingml/2006/main">
+              <a:ext uri="{FF2B5EF4-FFF2-40B4-BE49-F238E27FC236}">
+                <a16:creationId xmlns:a16="http://schemas.microsoft.com/office/drawing/2014/main" id="{1790F17D-0E5A-450B-848D-10926AF28833}"/>
+              </a:ext>
+            </a:extLst>
+          </p:cNvPr>
+          <p:cNvSpPr>
+            <a:spLocks xmlns:a="http://schemas.openxmlformats.org/drawingml/2006/main" noGrp="1"/>
+          </p:cNvSpPr>
+          <p:nvPr/>
+        </p:nvSpPr>
+        <p:spPr>
+          <a:xfrm xmlns:a="http://schemas.openxmlformats.org/drawingml/2006/main">
+            <a:off x="7277100" y="6219825"/>
+            <a:ext cx="1428750" cy="190500"/>
+          </a:xfrm>
+          <a:prstGeom xmlns:a="http://schemas.openxmlformats.org/drawingml/2006/main" prst="rect">
+            <a:avLst/>
+          </a:prstGeom>
+          <a:noFill xmlns:a="http://schemas.openxmlformats.org/drawingml/2006/main"/>
+          <a:ln xmlns:a="http://schemas.openxmlformats.org/drawingml/2006/main" w="0">
+            <a:noFill/>
+            <a:prstDash val="solid"/>
+          </a:ln>
+        </p:spPr>
+        <p:txBody>
+          <a:bodyPr xmlns:a="http://schemas.openxmlformats.org/drawingml/2006/main" lIns="0" tIns="0" rIns="0" bIns="0">
+            <a:noAutofit/>
+          </a:bodyPr>
+          <a:lstStyle xmlns:a="http://schemas.openxmlformats.org/drawingml/2006/main"/>
+          <a:p xmlns:a="http://schemas.openxmlformats.org/drawingml/2006/main">
+            <a:pPr>
+              <a:defRPr sz="1088" b="1">
+                <a:solidFill>
+                  <a:srgbClr val="102A34"/>
+                </a:solidFill>
+                <a:latin typeface="Helvetica Neue"/>
+                <a:ea typeface="Helvetica Neue"/>
+                <a:cs typeface="Helvetica Neue"/>
+              </a:defRPr>
+            </a:pPr>
+            <a:r>
+              <a:rPr sz="1088" b="1">
+                <a:solidFill>
+                  <a:srgbClr val="102A34"/>
+                </a:solidFill>
+                <a:latin typeface="Helvetica Neue"/>
+                <a:ea typeface="Helvetica Neue"/>
+                <a:cs typeface="Helvetica Neue"/>
+              </a:rPr>
+              <a:t>Practical implication</a:t>
+            </a:r>
+          </a:p>
+        </p:txBody>
+      </p:sp>
+      <p:sp>
+        <p:nvSpPr>
+          <p:cNvPr id="18" name="">
+            <a:extLst xmlns:a="http://schemas.openxmlformats.org/drawingml/2006/main">
+              <a:ext uri="{FF2B5EF4-FFF2-40B4-BE49-F238E27FC236}">
+                <a16:creationId xmlns:a16="http://schemas.microsoft.com/office/drawing/2014/main" id="{55B52CE2-2E76-4884-A828-8071E48751E8}"/>
+              </a:ext>
+            </a:extLst>
+          </p:cNvPr>
+          <p:cNvSpPr>
+            <a:spLocks xmlns:a="http://schemas.openxmlformats.org/drawingml/2006/main" noGrp="1"/>
+          </p:cNvSpPr>
+          <p:nvPr/>
+        </p:nvSpPr>
+        <p:spPr>
+          <a:xfrm xmlns:a="http://schemas.openxmlformats.org/drawingml/2006/main">
+            <a:off x="8705850" y="6238875"/>
+            <a:ext cx="2095500" cy="266700"/>
+          </a:xfrm>
+          <a:prstGeom xmlns:a="http://schemas.openxmlformats.org/drawingml/2006/main" prst="rect">
+            <a:avLst/>
+          </a:prstGeom>
+          <a:noFill xmlns:a="http://schemas.openxmlformats.org/drawingml/2006/main"/>
+          <a:ln xmlns:a="http://schemas.openxmlformats.org/drawingml/2006/main" w="0">
+            <a:noFill/>
+            <a:prstDash val="solid"/>
+          </a:ln>
+        </p:spPr>
+        <p:txBody>
+          <a:bodyPr xmlns:a="http://schemas.openxmlformats.org/drawingml/2006/main" lIns="0" tIns="0" rIns="0" bIns="0">
+            <a:noAutofit/>
+          </a:bodyPr>
+          <a:lstStyle xmlns:a="http://schemas.openxmlformats.org/drawingml/2006/main"/>
+          <a:p xmlns:a="http://schemas.openxmlformats.org/drawingml/2006/main">
+            <a:pPr>
+              <a:lnSpc>
+                <a:spcPct val="104000"/>
+              </a:lnSpc>
+              <a:buNone/>
+              <a:defRPr sz="780">
+                <a:solidFill>
+                  <a:srgbClr val="253B44"/>
+                </a:solidFill>
+                <a:latin typeface="Helvetica Neue"/>
+                <a:ea typeface="Helvetica Neue"/>
+                <a:cs typeface="Helvetica Neue"/>
+              </a:defRPr>
+            </a:pPr>
+            <a:r>
+              <a:rPr sz="780">
+                <a:solidFill>
+                  <a:srgbClr val="253B44"/>
+                </a:solidFill>
+                <a:latin typeface="Helvetica Neue"/>
+                <a:ea typeface="Helvetica Neue"/>
+                <a:cs typeface="Helvetica Neue"/>
+              </a:rPr>
+              <a:t>Care teams keep final judgment over patient outreach and discharge decisions.</a:t>
+            </a:r>
+          </a:p>
+        </p:txBody>
+      </p:sp>
+      <p:sp>
+        <p:nvSpPr>
+          <p:cNvPr id="19" name="">
+            <a:extLst xmlns:a="http://schemas.openxmlformats.org/drawingml/2006/main">
+              <a:ext uri="{FF2B5EF4-FFF2-40B4-BE49-F238E27FC236}">
+                <a16:creationId xmlns:a16="http://schemas.microsoft.com/office/drawing/2014/main" id="{3C098D69-96D2-4C8B-BD00-0DE30A3C3113}"/>
+              </a:ext>
+            </a:extLst>
+          </p:cNvPr>
+          <p:cNvSpPr>
+            <a:spLocks xmlns:a="http://schemas.openxmlformats.org/drawingml/2006/main" noGrp="1"/>
+          </p:cNvSpPr>
+          <p:nvPr/>
+        </p:nvSpPr>
+        <p:spPr>
+          <a:xfrm xmlns:a="http://schemas.openxmlformats.org/drawingml/2006/main">
+            <a:off x="514350" y="6572250"/>
+            <a:ext cx="8191500" cy="171450"/>
+          </a:xfrm>
+          <a:prstGeom xmlns:a="http://schemas.openxmlformats.org/drawingml/2006/main" prst="rect">
+            <a:avLst/>
+          </a:prstGeom>
+          <a:noFill xmlns:a="http://schemas.openxmlformats.org/drawingml/2006/main"/>
+          <a:ln xmlns:a="http://schemas.openxmlformats.org/drawingml/2006/main" w="0">
+            <a:noFill/>
+            <a:prstDash val="solid"/>
+          </a:ln>
+        </p:spPr>
+        <p:txBody>
+          <a:bodyPr xmlns:a="http://schemas.openxmlformats.org/drawingml/2006/main" lIns="0" tIns="0" rIns="0" bIns="0">
+            <a:noAutofit/>
+          </a:bodyPr>
+          <a:lstStyle xmlns:a="http://schemas.openxmlformats.org/drawingml/2006/main"/>
+          <a:p xmlns:a="http://schemas.openxmlformats.org/drawingml/2006/main">
+            <a:pPr>
+              <a:defRPr sz="750">
+                <a:solidFill>
+                  <a:srgbClr val="667A82"/>
+                </a:solidFill>
+                <a:latin typeface="Helvetica Neue"/>
+                <a:ea typeface="Helvetica Neue"/>
+                <a:cs typeface="Helvetica Neue"/>
+              </a:defRPr>
+            </a:pPr>
+            <a:r>
+              <a:rPr sz="750">
+                <a:solidFill>
+                  <a:srgbClr val="667A82"/>
+                </a:solidFill>
+                <a:latin typeface="Helvetica Neue"/>
+                <a:ea typeface="Helvetica Neue"/>
+                <a:cs typeface="Helvetica Neue"/>
+              </a:rPr>
+              <a:t>Source: project requirements, NHN data quality findings, risk model workflow, and healthcare compliance context</a:t>
+            </a:r>
+          </a:p>
+        </p:txBody>
+      </p:sp>
+    </p:spTree>
+    <p:extLst>
+      <p:ext uri="{BB962C8B-B14F-4D97-AF65-F5344CB8AC3E}">
+        <p14:creationId xmlns:p14="http://schemas.microsoft.com/office/powerpoint/2010/main" val="1844573749"/>
       </p:ext>
     </p:extLst>
   </p:cSld>
